--- a/lessons/lesson-14/slides.pptx
+++ b/lessons/lesson-14/slides.pptx
@@ -2,29 +2,29 @@
 <file path=ppt/presentation.xml><?xml version="1.0" encoding="utf-8"?>
 <p:presentation xmlns:p="http://schemas.openxmlformats.org/presentationml/2006/main">
   <p:sldMasterIdLst>
-    <p:sldMasterId xmlns:r="http://schemas.openxmlformats.org/officeDocument/2006/relationships" id="2147483648" r:id="R8f482719ca654acc"/>
+    <p:sldMasterId xmlns:r="http://schemas.openxmlformats.org/officeDocument/2006/relationships" id="2147483648" r:id="R0f82fa453a624a89"/>
   </p:sldMasterIdLst>
   <p:notesMasterIdLst>
-    <p:notesMasterId xmlns:r="http://schemas.openxmlformats.org/officeDocument/2006/relationships" r:id="Re5f66fe039ea433d"/>
+    <p:notesMasterId xmlns:r="http://schemas.openxmlformats.org/officeDocument/2006/relationships" r:id="R64b9ba371e5c452c"/>
   </p:notesMasterIdLst>
   <p:sldIdLst>
-    <p:sldId xmlns:r="http://schemas.openxmlformats.org/officeDocument/2006/relationships" id="256" r:id="Rfc22ba5046484210"/>
-    <p:sldId xmlns:r="http://schemas.openxmlformats.org/officeDocument/2006/relationships" id="257" r:id="Rb8d16bdd6ac443d8"/>
-    <p:sldId xmlns:r="http://schemas.openxmlformats.org/officeDocument/2006/relationships" id="258" r:id="R14d7813a18b243ba"/>
-    <p:sldId xmlns:r="http://schemas.openxmlformats.org/officeDocument/2006/relationships" id="259" r:id="R401ca0d44c88454f"/>
-    <p:sldId xmlns:r="http://schemas.openxmlformats.org/officeDocument/2006/relationships" id="260" r:id="R05202a87cacb4239"/>
-    <p:sldId xmlns:r="http://schemas.openxmlformats.org/officeDocument/2006/relationships" id="261" r:id="R2dd7165c57bc47d2"/>
-    <p:sldId xmlns:r="http://schemas.openxmlformats.org/officeDocument/2006/relationships" id="262" r:id="R2ee59febbb2a4af6"/>
-    <p:sldId xmlns:r="http://schemas.openxmlformats.org/officeDocument/2006/relationships" id="263" r:id="Rcdd7e2a40cf34501"/>
-    <p:sldId xmlns:r="http://schemas.openxmlformats.org/officeDocument/2006/relationships" id="264" r:id="Rfde7358336f940a2"/>
-    <p:sldId xmlns:r="http://schemas.openxmlformats.org/officeDocument/2006/relationships" id="265" r:id="R52a3ff3ef0964049"/>
-    <p:sldId xmlns:r="http://schemas.openxmlformats.org/officeDocument/2006/relationships" id="266" r:id="R9d0556ac8aa146dc"/>
-    <p:sldId xmlns:r="http://schemas.openxmlformats.org/officeDocument/2006/relationships" id="267" r:id="Rbd3cacbb54a34d9c"/>
-    <p:sldId xmlns:r="http://schemas.openxmlformats.org/officeDocument/2006/relationships" id="268" r:id="R6650a2780b20485c"/>
-    <p:sldId xmlns:r="http://schemas.openxmlformats.org/officeDocument/2006/relationships" id="269" r:id="R02c99c861894472d"/>
-    <p:sldId xmlns:r="http://schemas.openxmlformats.org/officeDocument/2006/relationships" id="270" r:id="R247cac6d70cb44eb"/>
-    <p:sldId xmlns:r="http://schemas.openxmlformats.org/officeDocument/2006/relationships" id="271" r:id="Rfa05ad48d1c34ceb"/>
-    <p:sldId xmlns:r="http://schemas.openxmlformats.org/officeDocument/2006/relationships" id="272" r:id="Ra7fe8a104cb4463c"/>
+    <p:sldId xmlns:r="http://schemas.openxmlformats.org/officeDocument/2006/relationships" id="256" r:id="R63d54e2449604f3b"/>
+    <p:sldId xmlns:r="http://schemas.openxmlformats.org/officeDocument/2006/relationships" id="257" r:id="R366f39be52284ef2"/>
+    <p:sldId xmlns:r="http://schemas.openxmlformats.org/officeDocument/2006/relationships" id="258" r:id="Ra33f0861728b4574"/>
+    <p:sldId xmlns:r="http://schemas.openxmlformats.org/officeDocument/2006/relationships" id="259" r:id="R7db466700c2f47cc"/>
+    <p:sldId xmlns:r="http://schemas.openxmlformats.org/officeDocument/2006/relationships" id="260" r:id="R762f698c50db48a4"/>
+    <p:sldId xmlns:r="http://schemas.openxmlformats.org/officeDocument/2006/relationships" id="261" r:id="R16d44845944c47d1"/>
+    <p:sldId xmlns:r="http://schemas.openxmlformats.org/officeDocument/2006/relationships" id="262" r:id="Rbbbcbcfadf4d4516"/>
+    <p:sldId xmlns:r="http://schemas.openxmlformats.org/officeDocument/2006/relationships" id="263" r:id="Reaa8e12019414ace"/>
+    <p:sldId xmlns:r="http://schemas.openxmlformats.org/officeDocument/2006/relationships" id="264" r:id="Ra0302bb1714e41fc"/>
+    <p:sldId xmlns:r="http://schemas.openxmlformats.org/officeDocument/2006/relationships" id="265" r:id="R10bddd7754be4afc"/>
+    <p:sldId xmlns:r="http://schemas.openxmlformats.org/officeDocument/2006/relationships" id="266" r:id="R1cc2190b22e546d5"/>
+    <p:sldId xmlns:r="http://schemas.openxmlformats.org/officeDocument/2006/relationships" id="267" r:id="R1f9e1d9afb664af0"/>
+    <p:sldId xmlns:r="http://schemas.openxmlformats.org/officeDocument/2006/relationships" id="268" r:id="R33a9bd12cd3e4d89"/>
+    <p:sldId xmlns:r="http://schemas.openxmlformats.org/officeDocument/2006/relationships" id="269" r:id="Rb001c1ffee844a06"/>
+    <p:sldId xmlns:r="http://schemas.openxmlformats.org/officeDocument/2006/relationships" id="270" r:id="Rd3dc214994964098"/>
+    <p:sldId xmlns:r="http://schemas.openxmlformats.org/officeDocument/2006/relationships" id="271" r:id="R18c018addf6b4b83"/>
+    <p:sldId xmlns:r="http://schemas.openxmlformats.org/officeDocument/2006/relationships" id="272" r:id="R664899dd02834e37"/>
   </p:sldIdLst>
   <p:sldSz cx="12192000" cy="6858000"/>
   <p:notesSz cx="6858000" cy="9144000"/>
@@ -504,7 +504,7 @@
           <a:lstStyle xmlns:a="http://schemas.openxmlformats.org/drawingml/2006/main"/>
           <a:p xmlns:a="http://schemas.openxmlformats.org/drawingml/2006/main">
             <a:r>
-              <a:t>对照表格标出自己的结果、讨论与方法段分别缺哪一份上游材料。</a:t>
+              <a:t>本页是课程虚构教学工件，exp-007 非真实运行 ID。它作为可批注的报告→论文对象，要求学生逐句核对结果、根因与边界。</a:t>
             </a:r>
           </a:p>
           <a:p xmlns:a="http://schemas.openxmlformats.org/drawingml/2006/main">
@@ -519,12 +519,17 @@
           </a:p>
           <a:p xmlns:a="http://schemas.openxmlformats.org/drawingml/2006/main">
             <a:r>
+              <a:t>- Teaching artifact; fictional report-to-paper trace.</a:t>
+            </a:r>
+          </a:p>
+          <a:p xmlns:a="http://schemas.openxmlformats.org/drawingml/2006/main">
+            <a:r>
               <a:t>- /Users/bright/Projects/courses/graduate/lessons/lesson-14/handout.md</a:t>
             </a:r>
           </a:p>
           <a:p xmlns:a="http://schemas.openxmlformats.org/drawingml/2006/main">
             <a:r>
-              <a:t>- /Users/bright/Projects/courses/graduate/lessons/lesson-13/handout.md</a:t>
+              <a:t>- /Users/bright/Projects/courses/graduate/lessons/lesson-13/evaluation-report-template.md</a:t>
             </a:r>
           </a:p>
           <a:p xmlns:a="http://schemas.openxmlformats.org/drawingml/2006/main">
@@ -999,7 +1004,7 @@
           <a:lstStyle xmlns:a="http://schemas.openxmlformats.org/drawingml/2006/main"/>
           <a:p xmlns:a="http://schemas.openxmlformats.org/drawingml/2006/main">
             <a:r>
-              <a:t>每人 3–5 分钟：作者 45 秒说明贡献、追踪表与披露段，同伴按八项检查。重点检查失败保留、AI 文本审计、披露与 stable 状态。</a:t>
+              <a:t>每人 3–5 分钟：作者 45 秒说明贡献、追踪表与披露段，同伴按条件 6–10 逐项检查。重点检查 stable 状态、失败记录、伦理与 AI 使用披露、工件状态一致性，以及第 16 课展示、复现与复盘待办。</a:t>
             </a:r>
           </a:p>
           <a:p xmlns:a="http://schemas.openxmlformats.org/drawingml/2006/main">
@@ -1974,7 +1979,7 @@
           <a:lstStyle xmlns:a="http://schemas.openxmlformats.org/drawingml/2006/main"/>
           <a:p xmlns:a="http://schemas.openxmlformats.org/drawingml/2006/main">
             <a:r>
-              <a:t>让学生检查自己的论文是否只展示成功结果。失败实验和冲突证据不得选择性删除；同时不能事后改评价口径来“修复”结果。</a:t>
+              <a:t>右侧 2 篇图表论文与 C2 是课程虚构教学案例，非真实实验。失败和冲突证据不得选择性删除，也不能事后改评价口径。</a:t>
             </a:r>
           </a:p>
           <a:p xmlns:a="http://schemas.openxmlformats.org/drawingml/2006/main">
@@ -1985,6 +1990,11 @@
           <a:p xmlns:a="http://schemas.openxmlformats.org/drawingml/2006/main">
             <a:r>
               <a:t>[Sources]</a:t>
+            </a:r>
+          </a:p>
+          <a:p xmlns:a="http://schemas.openxmlformats.org/drawingml/2006/main">
+            <a:r>
+              <a:t>- Teaching artifact; fictional case and counts.</a:t>
             </a:r>
           </a:p>
           <a:p xmlns:a="http://schemas.openxmlformats.org/drawingml/2006/main">
@@ -2055,7 +2065,7 @@
           <p:nvPr/>
         </p:nvPicPr>
         <p:blipFill>
-          <a:blip xmlns:r="http://schemas.openxmlformats.org/officeDocument/2006/relationships" xmlns:a="http://schemas.openxmlformats.org/drawingml/2006/main" r:embed="Rd07ac5bcaee349c0">
+          <a:blip xmlns:r="http://schemas.openxmlformats.org/officeDocument/2006/relationships" xmlns:a="http://schemas.openxmlformats.org/drawingml/2006/main" r:embed="R02960334c7a2406b">
             <a:duotone>
               <a:prstClr val="black"/>
               <a:schemeClr val="accent1">
@@ -2233,7 +2243,7 @@
           <p:nvPr/>
         </p:nvPicPr>
         <p:blipFill rotWithShape="1">
-          <a:blip xmlns:r="http://schemas.openxmlformats.org/officeDocument/2006/relationships" xmlns:a="http://schemas.openxmlformats.org/drawingml/2006/main" r:embed="Rbf32b603cd5c4cda"/>
+          <a:blip xmlns:r="http://schemas.openxmlformats.org/officeDocument/2006/relationships" xmlns:a="http://schemas.openxmlformats.org/drawingml/2006/main" r:embed="R9510453525cd4304"/>
           <a:srcRect xmlns:a="http://schemas.openxmlformats.org/drawingml/2006/main" l="74359" t="0" r="1346" b="0"/>
           <a:stretch xmlns:a="http://schemas.openxmlformats.org/drawingml/2006/main"/>
         </p:blipFill>
@@ -2256,7 +2266,7 @@
           <p:nvPr/>
         </p:nvPicPr>
         <p:blipFill rotWithShape="1">
-          <a:blip xmlns:r="http://schemas.openxmlformats.org/officeDocument/2006/relationships" xmlns:a="http://schemas.openxmlformats.org/drawingml/2006/main" r:embed="Ra462d5e633494927">
+          <a:blip xmlns:r="http://schemas.openxmlformats.org/officeDocument/2006/relationships" xmlns:a="http://schemas.openxmlformats.org/drawingml/2006/main" r:embed="R83b50e9a88e94dec">
             <a:alphaModFix amt="35000"/>
           </a:blip>
           <a:srcRect xmlns:a="http://schemas.openxmlformats.org/drawingml/2006/main" l="0" t="9831" r="0" b="36385"/>
@@ -2518,7 +2528,7 @@
           <p:nvPr/>
         </p:nvPicPr>
         <p:blipFill>
-          <a:blip xmlns:r="http://schemas.openxmlformats.org/officeDocument/2006/relationships" xmlns:a="http://schemas.openxmlformats.org/drawingml/2006/main" r:embed="Raf975a522009409f"/>
+          <a:blip xmlns:r="http://schemas.openxmlformats.org/officeDocument/2006/relationships" xmlns:a="http://schemas.openxmlformats.org/drawingml/2006/main" r:embed="Rf71ec09a42754114"/>
           <a:srcRect xmlns:a="http://schemas.openxmlformats.org/drawingml/2006/main" l="0" t="0" r="54251" b="0"/>
           <a:stretch xmlns:a="http://schemas.openxmlformats.org/drawingml/2006/main"/>
         </p:blipFill>
@@ -2775,7 +2785,7 @@
           <p:nvPr/>
         </p:nvPicPr>
         <p:blipFill rotWithShape="1">
-          <a:blip xmlns:r="http://schemas.openxmlformats.org/officeDocument/2006/relationships" xmlns:a="http://schemas.openxmlformats.org/drawingml/2006/main" r:embed="Rb04d2f921d8a41ba"/>
+          <a:blip xmlns:r="http://schemas.openxmlformats.org/officeDocument/2006/relationships" xmlns:a="http://schemas.openxmlformats.org/drawingml/2006/main" r:embed="Red01de86be6e410d"/>
           <a:srcRect xmlns:a="http://schemas.openxmlformats.org/drawingml/2006/main" l="0" t="0" r="1346" b="0"/>
           <a:stretch xmlns:a="http://schemas.openxmlformats.org/drawingml/2006/main"/>
         </p:blipFill>
@@ -2958,7 +2968,7 @@
           <p:nvPr/>
         </p:nvPicPr>
         <p:blipFill>
-          <a:blip xmlns:r="http://schemas.openxmlformats.org/officeDocument/2006/relationships" xmlns:a="http://schemas.openxmlformats.org/drawingml/2006/main" r:embed="R3f36d884d1ab42d6"/>
+          <a:blip xmlns:r="http://schemas.openxmlformats.org/officeDocument/2006/relationships" xmlns:a="http://schemas.openxmlformats.org/drawingml/2006/main" r:embed="R3b566e8e02664877"/>
           <a:stretch xmlns:a="http://schemas.openxmlformats.org/drawingml/2006/main">
             <a:fillRect l="0" t="0" r="0" b="0"/>
           </a:stretch>
@@ -3054,7 +3064,7 @@
           <p:nvPr/>
         </p:nvPicPr>
         <p:blipFill>
-          <a:blip xmlns:r="http://schemas.openxmlformats.org/officeDocument/2006/relationships" xmlns:a="http://schemas.openxmlformats.org/drawingml/2006/main" r:embed="R9560b00ffa6f48ff">
+          <a:blip xmlns:r="http://schemas.openxmlformats.org/officeDocument/2006/relationships" xmlns:a="http://schemas.openxmlformats.org/drawingml/2006/main" r:embed="R5714e19190844b4c">
             <a:duotone>
               <a:prstClr val="black"/>
               <a:schemeClr val="accent1">
@@ -3221,7 +3231,7 @@
           <p:nvPr/>
         </p:nvPicPr>
         <p:blipFill rotWithShape="1">
-          <a:blip xmlns:r="http://schemas.openxmlformats.org/officeDocument/2006/relationships" xmlns:a="http://schemas.openxmlformats.org/drawingml/2006/main" r:embed="R44c62d8e6daf4907">
+          <a:blip xmlns:r="http://schemas.openxmlformats.org/officeDocument/2006/relationships" xmlns:a="http://schemas.openxmlformats.org/drawingml/2006/main" r:embed="R6663f493539947ee">
             <a:alphaModFix amt="20000"/>
             <a:duotone>
               <a:schemeClr val="accent4">
@@ -3319,10 +3329,10 @@
   </p:cSld>
   <p:clrMap bg1="lt1" tx1="dk1" bg2="lt2" tx2="dk2" accent1="accent1" accent2="accent2" accent3="accent3" accent4="accent4" accent5="accent5" accent6="accent6" hlink="hlink" folHlink="folHlink"/>
   <p:sldLayoutIdLst>
-    <p:sldLayoutId xmlns:r="http://schemas.openxmlformats.org/officeDocument/2006/relationships" id="2147483649" r:id="R3e1252fe34104697"/>
-    <p:sldLayoutId xmlns:r="http://schemas.openxmlformats.org/officeDocument/2006/relationships" id="2147483650" r:id="R66fcbd84989f4022"/>
-    <p:sldLayoutId xmlns:r="http://schemas.openxmlformats.org/officeDocument/2006/relationships" id="2147483651" r:id="Rc214fb8c963b49bd"/>
-    <p:sldLayoutId xmlns:r="http://schemas.openxmlformats.org/officeDocument/2006/relationships" id="2147483652" r:id="Rdbb7c1b41c414d4c"/>
+    <p:sldLayoutId xmlns:r="http://schemas.openxmlformats.org/officeDocument/2006/relationships" id="2147483649" r:id="Rb4202be255ba4710"/>
+    <p:sldLayoutId xmlns:r="http://schemas.openxmlformats.org/officeDocument/2006/relationships" id="2147483650" r:id="R79b5103520d44eb6"/>
+    <p:sldLayoutId xmlns:r="http://schemas.openxmlformats.org/officeDocument/2006/relationships" id="2147483651" r:id="R6b57e0d3b9474d5f"/>
+    <p:sldLayoutId xmlns:r="http://schemas.openxmlformats.org/officeDocument/2006/relationships" id="2147483652" r:id="Rbf5447c6dfbf43c6"/>
   </p:sldLayoutIdLst>
   <p:hf hdr="0" ftr="0" dt="0"/>
   <p:txStyles>
@@ -4147,28 +4157,85 @@
       </p:sp>
       <p:sp>
         <p:nvSpPr>
-          <p:cNvPr id="6" name="map-h0">
-            <a:extLst xmlns:a="http://schemas.openxmlformats.org/drawingml/2006/main">
-              <a:ext uri="{FF2B5EF4-FFF2-40B4-BE49-F238E27FC236}">
-                <a16:creationId xmlns:a16="http://schemas.microsoft.com/office/drawing/2014/main" id="{A444C870-045B-4753-B18F-EB5E8ABDDCB6}"/>
-              </a:ext>
-            </a:extLst>
-          </p:cNvPr>
-          <p:cNvSpPr>
-            <a:spLocks xmlns:a="http://schemas.openxmlformats.org/drawingml/2006/main" noGrp="1"/>
-          </p:cNvSpPr>
-          <p:nvPr/>
-        </p:nvSpPr>
-        <p:spPr>
-          <a:xfrm xmlns:a="http://schemas.openxmlformats.org/drawingml/2006/main">
-            <a:off x="523875" y="1104900"/>
-            <a:ext cx="2476500" cy="400050"/>
+          <p:cNvPr id="6" name="p10-teaching-label">
+            <a:extLst xmlns:a="http://schemas.openxmlformats.org/drawingml/2006/main">
+              <a:ext uri="{FF2B5EF4-FFF2-40B4-BE49-F238E27FC236}">
+                <a16:creationId xmlns:a16="http://schemas.microsoft.com/office/drawing/2014/main" id="{C3C5E143-709C-4E64-9D68-FBB872FEDA34}"/>
+              </a:ext>
+            </a:extLst>
+          </p:cNvPr>
+          <p:cNvSpPr>
+            <a:spLocks xmlns:a="http://schemas.openxmlformats.org/drawingml/2006/main" noGrp="1"/>
+          </p:cNvSpPr>
+          <p:nvPr/>
+        </p:nvSpPr>
+        <p:spPr>
+          <a:xfrm xmlns:a="http://schemas.openxmlformats.org/drawingml/2006/main">
+            <a:off x="7524750" y="800100"/>
+            <a:ext cx="3943350" cy="419100"/>
+          </a:xfrm>
+          <a:prstGeom xmlns:a="http://schemas.openxmlformats.org/drawingml/2006/main" prst="roundRect">
+            <a:avLst>
+              <a:gd name="adj" fmla="val 18182"/>
+            </a:avLst>
+          </a:prstGeom>
+          <a:solidFill xmlns:a="http://schemas.openxmlformats.org/drawingml/2006/main">
+            <a:srgbClr val="F8E9EA"/>
+          </a:solidFill>
+          <a:ln xmlns:a="http://schemas.openxmlformats.org/drawingml/2006/main" w="0">
+            <a:noFill/>
+            <a:prstDash val="solid"/>
+          </a:ln>
+        </p:spPr>
+        <p:txBody>
+          <a:bodyPr xmlns:a="http://schemas.openxmlformats.org/drawingml/2006/main" lIns="76200" tIns="38100" rIns="76200" bIns="38100" anchor="ctr"/>
+          <a:lstStyle xmlns:a="http://schemas.openxmlformats.org/drawingml/2006/main"/>
+          <a:p xmlns:a="http://schemas.openxmlformats.org/drawingml/2006/main">
+            <a:pPr algn="ctr">
+              <a:defRPr sz="1800" b="1">
+                <a:solidFill>
+                  <a:srgbClr val="C8161E"/>
+                </a:solidFill>
+              </a:defRPr>
+            </a:pPr>
+            <a:r>
+              <a:rPr sz="1800" b="1">
+                <a:solidFill>
+                  <a:srgbClr val="C8161E"/>
+                </a:solidFill>
+                <a:latin typeface="Microsoft YaHei"/>
+                <a:ea typeface="Microsoft YaHei"/>
+                <a:cs typeface="Microsoft YaHei"/>
+              </a:rPr>
+              <a:t>虚构教学示例｜非真实实验</a:t>
+            </a:r>
+          </a:p>
+        </p:txBody>
+      </p:sp>
+      <p:sp>
+        <p:nvSpPr>
+          <p:cNvPr id="7" name="src-h">
+            <a:extLst xmlns:a="http://schemas.openxmlformats.org/drawingml/2006/main">
+              <a:ext uri="{FF2B5EF4-FFF2-40B4-BE49-F238E27FC236}">
+                <a16:creationId xmlns:a16="http://schemas.microsoft.com/office/drawing/2014/main" id="{C8FBD596-53E8-4FF7-BD79-23DAC1F01E84}"/>
+              </a:ext>
+            </a:extLst>
+          </p:cNvPr>
+          <p:cNvSpPr>
+            <a:spLocks xmlns:a="http://schemas.openxmlformats.org/drawingml/2006/main" noGrp="1"/>
+          </p:cNvSpPr>
+          <p:nvPr/>
+        </p:nvSpPr>
+        <p:spPr>
+          <a:xfrm xmlns:a="http://schemas.openxmlformats.org/drawingml/2006/main">
+            <a:off x="590550" y="1295400"/>
+            <a:ext cx="4857750" cy="514350"/>
           </a:xfrm>
           <a:prstGeom xmlns:a="http://schemas.openxmlformats.org/drawingml/2006/main" prst="rect">
             <a:avLst/>
           </a:prstGeom>
           <a:solidFill xmlns:a="http://schemas.openxmlformats.org/drawingml/2006/main">
-            <a:srgbClr val="C8161E"/>
+            <a:srgbClr val="18354E"/>
           </a:solidFill>
           <a:ln xmlns:a="http://schemas.openxmlformats.org/drawingml/2006/main" w="0">
             <a:noFill/>
@@ -4180,14 +4247,14 @@
           <a:lstStyle xmlns:a="http://schemas.openxmlformats.org/drawingml/2006/main"/>
           <a:p xmlns:a="http://schemas.openxmlformats.org/drawingml/2006/main">
             <a:pPr algn="ctr">
-              <a:defRPr sz="1350" b="1">
+              <a:defRPr sz="1800" b="1">
                 <a:solidFill>
                   <a:srgbClr val="FFFFFF"/>
                 </a:solidFill>
               </a:defRPr>
             </a:pPr>
             <a:r>
-              <a:rPr sz="1350" b="1">
+              <a:rPr sz="1800" b="1">
                 <a:solidFill>
                   <a:srgbClr val="FFFFFF"/>
                 </a:solidFill>
@@ -4195,142 +4262,34 @@
                 <a:ea typeface="Microsoft YaHei"/>
                 <a:cs typeface="Microsoft YaHei"/>
               </a:rPr>
-              <a:t>验证门材料</a:t>
-            </a:r>
-          </a:p>
-        </p:txBody>
-      </p:sp>
-      <p:sp>
-        <p:nvSpPr>
-          <p:cNvPr id="7" name="map-h1">
-            <a:extLst xmlns:a="http://schemas.openxmlformats.org/drawingml/2006/main">
-              <a:ext uri="{FF2B5EF4-FFF2-40B4-BE49-F238E27FC236}">
-                <a16:creationId xmlns:a16="http://schemas.microsoft.com/office/drawing/2014/main" id="{E91A96A3-D186-4424-9278-9F715EB0335E}"/>
-              </a:ext>
-            </a:extLst>
-          </p:cNvPr>
-          <p:cNvSpPr>
-            <a:spLocks xmlns:a="http://schemas.openxmlformats.org/drawingml/2006/main" noGrp="1"/>
-          </p:cNvSpPr>
-          <p:nvPr/>
-        </p:nvSpPr>
-        <p:spPr>
-          <a:xfrm xmlns:a="http://schemas.openxmlformats.org/drawingml/2006/main">
-            <a:off x="3000375" y="1104900"/>
-            <a:ext cx="2381250" cy="400050"/>
-          </a:xfrm>
-          <a:prstGeom xmlns:a="http://schemas.openxmlformats.org/drawingml/2006/main" prst="rect">
-            <a:avLst/>
-          </a:prstGeom>
-          <a:solidFill xmlns:a="http://schemas.openxmlformats.org/drawingml/2006/main">
-            <a:srgbClr val="18354E"/>
-          </a:solidFill>
-          <a:ln xmlns:a="http://schemas.openxmlformats.org/drawingml/2006/main" w="0">
-            <a:noFill/>
-            <a:prstDash val="solid"/>
-          </a:ln>
-        </p:spPr>
-        <p:txBody>
-          <a:bodyPr xmlns:a="http://schemas.openxmlformats.org/drawingml/2006/main" lIns="76200" tIns="38100" rIns="76200" bIns="38100" anchor="ctr"/>
-          <a:lstStyle xmlns:a="http://schemas.openxmlformats.org/drawingml/2006/main"/>
-          <a:p xmlns:a="http://schemas.openxmlformats.org/drawingml/2006/main">
-            <a:pPr algn="ctr">
-              <a:defRPr sz="1350" b="1">
-                <a:solidFill>
-                  <a:srgbClr val="FFFFFF"/>
-                </a:solidFill>
-              </a:defRPr>
-            </a:pPr>
-            <a:r>
-              <a:rPr sz="1350" b="1">
-                <a:solidFill>
-                  <a:srgbClr val="FFFFFF"/>
-                </a:solidFill>
-                <a:latin typeface="Microsoft YaHei"/>
-                <a:ea typeface="Microsoft YaHei"/>
-                <a:cs typeface="Microsoft YaHei"/>
-              </a:rPr>
-              <a:t>论文位置</a:t>
-            </a:r>
-          </a:p>
-        </p:txBody>
-      </p:sp>
-      <p:sp>
-        <p:nvSpPr>
-          <p:cNvPr id="8" name="map-h2">
-            <a:extLst xmlns:a="http://schemas.openxmlformats.org/drawingml/2006/main">
-              <a:ext uri="{FF2B5EF4-FFF2-40B4-BE49-F238E27FC236}">
-                <a16:creationId xmlns:a16="http://schemas.microsoft.com/office/drawing/2014/main" id="{08360877-9AA3-40D2-809D-31BF3816149A}"/>
-              </a:ext>
-            </a:extLst>
-          </p:cNvPr>
-          <p:cNvSpPr>
-            <a:spLocks xmlns:a="http://schemas.openxmlformats.org/drawingml/2006/main" noGrp="1"/>
-          </p:cNvSpPr>
-          <p:nvPr/>
-        </p:nvSpPr>
-        <p:spPr>
-          <a:xfrm xmlns:a="http://schemas.openxmlformats.org/drawingml/2006/main">
-            <a:off x="5381625" y="1104900"/>
-            <a:ext cx="6286500" cy="400050"/>
-          </a:xfrm>
-          <a:prstGeom xmlns:a="http://schemas.openxmlformats.org/drawingml/2006/main" prst="rect">
-            <a:avLst/>
-          </a:prstGeom>
-          <a:solidFill xmlns:a="http://schemas.openxmlformats.org/drawingml/2006/main">
-            <a:srgbClr val="18354E"/>
-          </a:solidFill>
-          <a:ln xmlns:a="http://schemas.openxmlformats.org/drawingml/2006/main" w="0">
-            <a:noFill/>
-            <a:prstDash val="solid"/>
-          </a:ln>
-        </p:spPr>
-        <p:txBody>
-          <a:bodyPr xmlns:a="http://schemas.openxmlformats.org/drawingml/2006/main" lIns="76200" tIns="38100" rIns="76200" bIns="38100" anchor="ctr"/>
-          <a:lstStyle xmlns:a="http://schemas.openxmlformats.org/drawingml/2006/main"/>
-          <a:p xmlns:a="http://schemas.openxmlformats.org/drawingml/2006/main">
-            <a:pPr algn="ctr">
-              <a:defRPr sz="1350" b="1">
-                <a:solidFill>
-                  <a:srgbClr val="FFFFFF"/>
-                </a:solidFill>
-              </a:defRPr>
-            </a:pPr>
-            <a:r>
-              <a:rPr sz="1350" b="1">
-                <a:solidFill>
-                  <a:srgbClr val="FFFFFF"/>
-                </a:solidFill>
-                <a:latin typeface="Microsoft YaHei"/>
-                <a:ea typeface="Microsoft YaHei"/>
-                <a:cs typeface="Microsoft YaHei"/>
-              </a:rPr>
-              <a:t>回写动作</a:t>
-            </a:r>
-          </a:p>
-        </p:txBody>
-      </p:sp>
-      <p:sp>
-        <p:nvSpPr>
-          <p:cNvPr id="9" name="map-r0c0">
-            <a:extLst xmlns:a="http://schemas.openxmlformats.org/drawingml/2006/main">
-              <a:ext uri="{FF2B5EF4-FFF2-40B4-BE49-F238E27FC236}">
-                <a16:creationId xmlns:a16="http://schemas.microsoft.com/office/drawing/2014/main" id="{17F06A70-7B59-40FD-A6F1-7BDFFA51B798}"/>
-              </a:ext>
-            </a:extLst>
-          </p:cNvPr>
-          <p:cNvSpPr>
-            <a:spLocks xmlns:a="http://schemas.openxmlformats.org/drawingml/2006/main" noGrp="1"/>
-          </p:cNvSpPr>
-          <p:nvPr/>
-        </p:nvSpPr>
-        <p:spPr>
-          <a:xfrm xmlns:a="http://schemas.openxmlformats.org/drawingml/2006/main">
-            <a:off x="523875" y="1504950"/>
-            <a:ext cx="2476500" cy="666750"/>
-          </a:xfrm>
-          <a:prstGeom xmlns:a="http://schemas.openxmlformats.org/drawingml/2006/main" prst="rect">
-            <a:avLst/>
+              <a:t>evaluation-report.md｜上游记录</a:t>
+            </a:r>
+          </a:p>
+        </p:txBody>
+      </p:sp>
+      <p:sp>
+        <p:nvSpPr>
+          <p:cNvPr id="8" name="src">
+            <a:extLst xmlns:a="http://schemas.openxmlformats.org/drawingml/2006/main">
+              <a:ext uri="{FF2B5EF4-FFF2-40B4-BE49-F238E27FC236}">
+                <a16:creationId xmlns:a16="http://schemas.microsoft.com/office/drawing/2014/main" id="{C2387A29-5F2A-455E-A25B-4C6EB54FF995}"/>
+              </a:ext>
+            </a:extLst>
+          </p:cNvPr>
+          <p:cNvSpPr>
+            <a:spLocks xmlns:a="http://schemas.openxmlformats.org/drawingml/2006/main" noGrp="1"/>
+          </p:cNvSpPr>
+          <p:nvPr/>
+        </p:nvSpPr>
+        <p:spPr>
+          <a:xfrm xmlns:a="http://schemas.openxmlformats.org/drawingml/2006/main">
+            <a:off x="590550" y="1809750"/>
+            <a:ext cx="4857750" cy="2095500"/>
+          </a:xfrm>
+          <a:prstGeom xmlns:a="http://schemas.openxmlformats.org/drawingml/2006/main" prst="roundRect">
+            <a:avLst>
+              <a:gd name="adj" fmla="val 3636"/>
+            </a:avLst>
           </a:prstGeom>
           <a:solidFill xmlns:a="http://schemas.openxmlformats.org/drawingml/2006/main">
             <a:srgbClr val="F3F6F7"/>
@@ -4348,17 +4307,17 @@
           <a:p xmlns:a="http://schemas.openxmlformats.org/drawingml/2006/main">
             <a:pPr algn="l">
               <a:lnSpc>
-                <a:spcPct val="108000"/>
+                <a:spcPct val="128000"/>
               </a:lnSpc>
               <a:buNone/>
-              <a:defRPr sz="1425" b="1">
+              <a:defRPr sz="1800" b="1">
                 <a:solidFill>
                   <a:srgbClr val="263746"/>
                 </a:solidFill>
               </a:defRPr>
             </a:pPr>
             <a:r>
-              <a:rPr sz="1425" b="1">
+              <a:rPr sz="1800" b="1">
                 <a:solidFill>
                   <a:srgbClr val="263746"/>
                 </a:solidFill>
@@ -4366,39 +4325,197 @@
                 <a:ea typeface="Microsoft YaHei"/>
                 <a:cs typeface="Microsoft YaHei"/>
               </a:rPr>
-              <a:t>结果分析</a:t>
-            </a:r>
-          </a:p>
-        </p:txBody>
-      </p:sp>
-      <p:sp>
-        <p:nvSpPr>
-          <p:cNvPr id="10" name="map-r0c1">
-            <a:extLst xmlns:a="http://schemas.openxmlformats.org/drawingml/2006/main">
-              <a:ext uri="{FF2B5EF4-FFF2-40B4-BE49-F238E27FC236}">
-                <a16:creationId xmlns:a16="http://schemas.microsoft.com/office/drawing/2014/main" id="{D9323FBD-D1E9-4418-8275-CFB8407763A1}"/>
-              </a:ext>
-            </a:extLst>
-          </p:cNvPr>
-          <p:cNvSpPr>
-            <a:spLocks xmlns:a="http://schemas.openxmlformats.org/drawingml/2006/main" noGrp="1"/>
-          </p:cNvSpPr>
-          <p:nvPr/>
-        </p:nvSpPr>
-        <p:spPr>
-          <a:xfrm xmlns:a="http://schemas.openxmlformats.org/drawingml/2006/main">
-            <a:off x="3000375" y="1504950"/>
-            <a:ext cx="2381250" cy="666750"/>
+              <a:t>exp-007：图表子集遗漏率上升</a:t>
+            </a:r>
+          </a:p>
+          <a:p xmlns:a="http://schemas.openxmlformats.org/drawingml/2006/main">
+            <a:pPr algn="l">
+              <a:lnSpc>
+                <a:spcPct val="128000"/>
+              </a:lnSpc>
+              <a:buNone/>
+              <a:defRPr sz="1800" b="1">
+                <a:solidFill>
+                  <a:srgbClr val="263746"/>
+                </a:solidFill>
+              </a:defRPr>
+            </a:pPr>
+            <a:r>
+              <a:rPr sz="1800" b="1">
+                <a:solidFill>
+                  <a:srgbClr val="263746"/>
+                </a:solidFill>
+                <a:latin typeface="Microsoft YaHei"/>
+                <a:ea typeface="Microsoft YaHei"/>
+                <a:cs typeface="Microsoft YaHei"/>
+              </a:rPr>
+              <a:t>根因：任务契约未覆盖图表为主论文</a:t>
+            </a:r>
+          </a:p>
+          <a:p xmlns:a="http://schemas.openxmlformats.org/drawingml/2006/main">
+            <a:pPr algn="l">
+              <a:lnSpc>
+                <a:spcPct val="128000"/>
+              </a:lnSpc>
+              <a:buNone/>
+              <a:defRPr sz="1800" b="1">
+                <a:solidFill>
+                  <a:srgbClr val="263746"/>
+                </a:solidFill>
+              </a:defRPr>
+            </a:pPr>
+            <a:r>
+              <a:rPr sz="1800" b="1">
+                <a:solidFill>
+                  <a:srgbClr val="263746"/>
+                </a:solidFill>
+                <a:latin typeface="Microsoft YaHei"/>
+                <a:ea typeface="Microsoft YaHei"/>
+                <a:cs typeface="Microsoft YaHei"/>
+              </a:rPr>
+              <a:t>状态：负向结果，保留</a:t>
+            </a:r>
+          </a:p>
+        </p:txBody>
+      </p:sp>
+      <p:sp>
+        <p:nvSpPr>
+          <p:cNvPr id="9" name="arrow">
+            <a:extLst xmlns:a="http://schemas.openxmlformats.org/drawingml/2006/main">
+              <a:ext uri="{FF2B5EF4-FFF2-40B4-BE49-F238E27FC236}">
+                <a16:creationId xmlns:a16="http://schemas.microsoft.com/office/drawing/2014/main" id="{1FF47E5B-2C3A-4460-AC22-D1A411193CD8}"/>
+              </a:ext>
+            </a:extLst>
+          </p:cNvPr>
+          <p:cNvSpPr>
+            <a:spLocks xmlns:a="http://schemas.openxmlformats.org/drawingml/2006/main" noGrp="1"/>
+          </p:cNvSpPr>
+          <p:nvPr/>
+        </p:nvSpPr>
+        <p:spPr>
+          <a:xfrm xmlns:a="http://schemas.openxmlformats.org/drawingml/2006/main">
+            <a:off x="5619750" y="2476500"/>
+            <a:ext cx="800100" cy="685800"/>
           </a:xfrm>
           <a:prstGeom xmlns:a="http://schemas.openxmlformats.org/drawingml/2006/main" prst="rect">
             <a:avLst/>
           </a:prstGeom>
-          <a:solidFill xmlns:a="http://schemas.openxmlformats.org/drawingml/2006/main">
-            <a:srgbClr val="F3F6F7"/>
-          </a:solidFill>
-          <a:ln xmlns:a="http://schemas.openxmlformats.org/drawingml/2006/main" w="9525">
+          <a:noFill xmlns:a="http://schemas.openxmlformats.org/drawingml/2006/main"/>
+          <a:ln xmlns:a="http://schemas.openxmlformats.org/drawingml/2006/main" w="0">
+            <a:noFill/>
+            <a:prstDash val="solid"/>
+          </a:ln>
+        </p:spPr>
+        <p:txBody>
+          <a:bodyPr xmlns:a="http://schemas.openxmlformats.org/drawingml/2006/main" lIns="76200" tIns="38100" rIns="76200" bIns="38100" anchor="ctr"/>
+          <a:lstStyle xmlns:a="http://schemas.openxmlformats.org/drawingml/2006/main"/>
+          <a:p xmlns:a="http://schemas.openxmlformats.org/drawingml/2006/main">
+            <a:pPr algn="ctr">
+              <a:defRPr sz="3150" b="1">
+                <a:solidFill>
+                  <a:srgbClr val="C8161E"/>
+                </a:solidFill>
+              </a:defRPr>
+            </a:pPr>
+            <a:r>
+              <a:rPr sz="3150" b="1">
+                <a:solidFill>
+                  <a:srgbClr val="C8161E"/>
+                </a:solidFill>
+                <a:latin typeface="Microsoft YaHei"/>
+                <a:ea typeface="Microsoft YaHei"/>
+                <a:cs typeface="Microsoft YaHei"/>
+              </a:rPr>
+              <a:t>→</a:t>
+            </a:r>
+          </a:p>
+        </p:txBody>
+      </p:sp>
+      <p:sp>
+        <p:nvSpPr>
+          <p:cNvPr id="10" name="paper-h">
+            <a:extLst xmlns:a="http://schemas.openxmlformats.org/drawingml/2006/main">
+              <a:ext uri="{FF2B5EF4-FFF2-40B4-BE49-F238E27FC236}">
+                <a16:creationId xmlns:a16="http://schemas.microsoft.com/office/drawing/2014/main" id="{3B1E96E6-60DE-4580-8BE7-E39B8F3CB1F8}"/>
+              </a:ext>
+            </a:extLst>
+          </p:cNvPr>
+          <p:cNvSpPr>
+            <a:spLocks xmlns:a="http://schemas.openxmlformats.org/drawingml/2006/main" noGrp="1"/>
+          </p:cNvSpPr>
+          <p:nvPr/>
+        </p:nvSpPr>
+        <p:spPr>
+          <a:xfrm xmlns:a="http://schemas.openxmlformats.org/drawingml/2006/main">
+            <a:off x="6610350" y="1295400"/>
+            <a:ext cx="4991100" cy="514350"/>
+          </a:xfrm>
+          <a:prstGeom xmlns:a="http://schemas.openxmlformats.org/drawingml/2006/main" prst="rect">
+            <a:avLst/>
+          </a:prstGeom>
+          <a:solidFill xmlns:a="http://schemas.openxmlformats.org/drawingml/2006/main">
+            <a:srgbClr val="C8161E"/>
+          </a:solidFill>
+          <a:ln xmlns:a="http://schemas.openxmlformats.org/drawingml/2006/main" w="0">
+            <a:noFill/>
+            <a:prstDash val="solid"/>
+          </a:ln>
+        </p:spPr>
+        <p:txBody>
+          <a:bodyPr xmlns:a="http://schemas.openxmlformats.org/drawingml/2006/main" lIns="76200" tIns="38100" rIns="76200" bIns="38100" anchor="ctr"/>
+          <a:lstStyle xmlns:a="http://schemas.openxmlformats.org/drawingml/2006/main"/>
+          <a:p xmlns:a="http://schemas.openxmlformats.org/drawingml/2006/main">
+            <a:pPr algn="ctr">
+              <a:defRPr sz="1800" b="1">
+                <a:solidFill>
+                  <a:srgbClr val="FFFFFF"/>
+                </a:solidFill>
+              </a:defRPr>
+            </a:pPr>
+            <a:r>
+              <a:rPr sz="1800" b="1">
+                <a:solidFill>
+                  <a:srgbClr val="FFFFFF"/>
+                </a:solidFill>
+                <a:latin typeface="Microsoft YaHei"/>
+                <a:ea typeface="Microsoft YaHei"/>
+                <a:cs typeface="Microsoft YaHei"/>
+              </a:rPr>
+              <a:t>论文讨论段｜批注对象</a:t>
+            </a:r>
+          </a:p>
+        </p:txBody>
+      </p:sp>
+      <p:sp>
+        <p:nvSpPr>
+          <p:cNvPr id="11" name="paper">
+            <a:extLst xmlns:a="http://schemas.openxmlformats.org/drawingml/2006/main">
+              <a:ext uri="{FF2B5EF4-FFF2-40B4-BE49-F238E27FC236}">
+                <a16:creationId xmlns:a16="http://schemas.microsoft.com/office/drawing/2014/main" id="{B63EE616-5654-4A76-BA44-E850516A707F}"/>
+              </a:ext>
+            </a:extLst>
+          </p:cNvPr>
+          <p:cNvSpPr>
+            <a:spLocks xmlns:a="http://schemas.openxmlformats.org/drawingml/2006/main" noGrp="1"/>
+          </p:cNvSpPr>
+          <p:nvPr/>
+        </p:nvSpPr>
+        <p:spPr>
+          <a:xfrm xmlns:a="http://schemas.openxmlformats.org/drawingml/2006/main">
+            <a:off x="6610350" y="1809750"/>
+            <a:ext cx="4991100" cy="2095500"/>
+          </a:xfrm>
+          <a:prstGeom xmlns:a="http://schemas.openxmlformats.org/drawingml/2006/main" prst="roundRect">
+            <a:avLst>
+              <a:gd name="adj" fmla="val 3636"/>
+            </a:avLst>
+          </a:prstGeom>
+          <a:solidFill xmlns:a="http://schemas.openxmlformats.org/drawingml/2006/main">
+            <a:srgbClr val="F8E9EA"/>
+          </a:solidFill>
+          <a:ln xmlns:a="http://schemas.openxmlformats.org/drawingml/2006/main" w="19050">
             <a:solidFill>
-              <a:srgbClr val="D6DDE2"/>
+              <a:srgbClr val="C8161E"/>
             </a:solidFill>
             <a:prstDash val="solid"/>
           </a:ln>
@@ -4407,19 +4524,19 @@
           <a:bodyPr xmlns:a="http://schemas.openxmlformats.org/drawingml/2006/main" lIns="76200" tIns="38100" rIns="76200" bIns="38100" anchor="ctr"/>
           <a:lstStyle xmlns:a="http://schemas.openxmlformats.org/drawingml/2006/main"/>
           <a:p xmlns:a="http://schemas.openxmlformats.org/drawingml/2006/main">
-            <a:pPr algn="ctr">
+            <a:pPr algn="l">
               <a:lnSpc>
-                <a:spcPct val="108000"/>
+                <a:spcPct val="128000"/>
               </a:lnSpc>
               <a:buNone/>
-              <a:defRPr sz="1425" b="0">
+              <a:defRPr sz="1800" b="1">
                 <a:solidFill>
                   <a:srgbClr val="263746"/>
                 </a:solidFill>
               </a:defRPr>
             </a:pPr>
             <a:r>
-              <a:rPr sz="1425" b="0">
+              <a:rPr sz="1800" b="1">
                 <a:solidFill>
                   <a:srgbClr val="263746"/>
                 </a:solidFill>
@@ -4427,60 +4544,23 @@
                 <a:ea typeface="Microsoft YaHei"/>
                 <a:cs typeface="Microsoft YaHei"/>
               </a:rPr>
-              <a:t>结果段</a:t>
-            </a:r>
-          </a:p>
-        </p:txBody>
-      </p:sp>
-      <p:sp>
-        <p:nvSpPr>
-          <p:cNvPr id="11" name="map-r0c2">
-            <a:extLst xmlns:a="http://schemas.openxmlformats.org/drawingml/2006/main">
-              <a:ext uri="{FF2B5EF4-FFF2-40B4-BE49-F238E27FC236}">
-                <a16:creationId xmlns:a16="http://schemas.microsoft.com/office/drawing/2014/main" id="{8CBA4CB7-1D00-45F9-BF26-9CD4856B8B15}"/>
-              </a:ext>
-            </a:extLst>
-          </p:cNvPr>
-          <p:cNvSpPr>
-            <a:spLocks xmlns:a="http://schemas.openxmlformats.org/drawingml/2006/main" noGrp="1"/>
-          </p:cNvSpPr>
-          <p:nvPr/>
-        </p:nvSpPr>
-        <p:spPr>
-          <a:xfrm xmlns:a="http://schemas.openxmlformats.org/drawingml/2006/main">
-            <a:off x="5381625" y="1504950"/>
-            <a:ext cx="6286500" cy="666750"/>
-          </a:xfrm>
-          <a:prstGeom xmlns:a="http://schemas.openxmlformats.org/drawingml/2006/main" prst="rect">
-            <a:avLst/>
-          </a:prstGeom>
-          <a:solidFill xmlns:a="http://schemas.openxmlformats.org/drawingml/2006/main">
-            <a:srgbClr val="F3F6F7"/>
-          </a:solidFill>
-          <a:ln xmlns:a="http://schemas.openxmlformats.org/drawingml/2006/main" w="9525">
-            <a:solidFill>
-              <a:srgbClr val="D6DDE2"/>
-            </a:solidFill>
-            <a:prstDash val="solid"/>
-          </a:ln>
-        </p:spPr>
-        <p:txBody>
-          <a:bodyPr xmlns:a="http://schemas.openxmlformats.org/drawingml/2006/main" lIns="76200" tIns="38100" rIns="76200" bIns="38100" anchor="ctr"/>
-          <a:lstStyle xmlns:a="http://schemas.openxmlformats.org/drawingml/2006/main"/>
+              <a:t>[结果] 图表子集未改善。</a:t>
+            </a:r>
+          </a:p>
           <a:p xmlns:a="http://schemas.openxmlformats.org/drawingml/2006/main">
             <a:pPr algn="l">
               <a:lnSpc>
-                <a:spcPct val="108000"/>
+                <a:spcPct val="128000"/>
               </a:lnSpc>
               <a:buNone/>
-              <a:defRPr sz="1425" b="0">
+              <a:defRPr sz="1800" b="1">
                 <a:solidFill>
                   <a:srgbClr val="263746"/>
                 </a:solidFill>
               </a:defRPr>
             </a:pPr>
             <a:r>
-              <a:rPr sz="1425" b="0">
+              <a:rPr sz="1800" b="1">
                 <a:solidFill>
                   <a:srgbClr val="263746"/>
                 </a:solidFill>
@@ -4488,60 +4568,23 @@
                 <a:ea typeface="Microsoft YaHei"/>
                 <a:cs typeface="Microsoft YaHei"/>
               </a:rPr>
-              <a:t>写成支持/反驳/未知的叙事</a:t>
-            </a:r>
-          </a:p>
-        </p:txBody>
-      </p:sp>
-      <p:sp>
-        <p:nvSpPr>
-          <p:cNvPr id="12" name="map-r1c0">
-            <a:extLst xmlns:a="http://schemas.openxmlformats.org/drawingml/2006/main">
-              <a:ext uri="{FF2B5EF4-FFF2-40B4-BE49-F238E27FC236}">
-                <a16:creationId xmlns:a16="http://schemas.microsoft.com/office/drawing/2014/main" id="{F6469806-4FEA-460C-A5A4-14DA87F00179}"/>
-              </a:ext>
-            </a:extLst>
-          </p:cNvPr>
-          <p:cNvSpPr>
-            <a:spLocks xmlns:a="http://schemas.openxmlformats.org/drawingml/2006/main" noGrp="1"/>
-          </p:cNvSpPr>
-          <p:nvPr/>
-        </p:nvSpPr>
-        <p:spPr>
-          <a:xfrm xmlns:a="http://schemas.openxmlformats.org/drawingml/2006/main">
-            <a:off x="523875" y="2171700"/>
-            <a:ext cx="2476500" cy="666750"/>
-          </a:xfrm>
-          <a:prstGeom xmlns:a="http://schemas.openxmlformats.org/drawingml/2006/main" prst="rect">
-            <a:avLst/>
-          </a:prstGeom>
-          <a:solidFill xmlns:a="http://schemas.openxmlformats.org/drawingml/2006/main">
-            <a:srgbClr val="FFFFFF"/>
-          </a:solidFill>
-          <a:ln xmlns:a="http://schemas.openxmlformats.org/drawingml/2006/main" w="9525">
-            <a:solidFill>
-              <a:srgbClr val="D6DDE2"/>
-            </a:solidFill>
-            <a:prstDash val="solid"/>
-          </a:ln>
-        </p:spPr>
-        <p:txBody>
-          <a:bodyPr xmlns:a="http://schemas.openxmlformats.org/drawingml/2006/main" lIns="76200" tIns="38100" rIns="76200" bIns="38100" anchor="ctr"/>
-          <a:lstStyle xmlns:a="http://schemas.openxmlformats.org/drawingml/2006/main"/>
+              <a:t>[根因] 当前契约只覆盖文本论证。</a:t>
+            </a:r>
+          </a:p>
           <a:p xmlns:a="http://schemas.openxmlformats.org/drawingml/2006/main">
             <a:pPr algn="l">
               <a:lnSpc>
-                <a:spcPct val="108000"/>
+                <a:spcPct val="128000"/>
               </a:lnSpc>
               <a:buNone/>
-              <a:defRPr sz="1425" b="1">
+              <a:defRPr sz="1800" b="1">
                 <a:solidFill>
                   <a:srgbClr val="263746"/>
                 </a:solidFill>
               </a:defRPr>
             </a:pPr>
             <a:r>
-              <a:rPr sz="1425" b="1">
+              <a:rPr sz="1800" b="1">
                 <a:solidFill>
                   <a:srgbClr val="263746"/>
                 </a:solidFill>
@@ -4549,704 +4592,33 @@
                 <a:ea typeface="Microsoft YaHei"/>
                 <a:cs typeface="Microsoft YaHei"/>
               </a:rPr>
-              <a:t>失败审计</a:t>
-            </a:r>
-          </a:p>
-        </p:txBody>
-      </p:sp>
-      <p:sp>
-        <p:nvSpPr>
-          <p:cNvPr id="13" name="map-r1c1">
-            <a:extLst xmlns:a="http://schemas.openxmlformats.org/drawingml/2006/main">
-              <a:ext uri="{FF2B5EF4-FFF2-40B4-BE49-F238E27FC236}">
-                <a16:creationId xmlns:a16="http://schemas.microsoft.com/office/drawing/2014/main" id="{6967FE55-7163-4724-83D1-DF17397A336C}"/>
-              </a:ext>
-            </a:extLst>
-          </p:cNvPr>
-          <p:cNvSpPr>
-            <a:spLocks xmlns:a="http://schemas.openxmlformats.org/drawingml/2006/main" noGrp="1"/>
-          </p:cNvSpPr>
-          <p:nvPr/>
-        </p:nvSpPr>
-        <p:spPr>
-          <a:xfrm xmlns:a="http://schemas.openxmlformats.org/drawingml/2006/main">
-            <a:off x="3000375" y="2171700"/>
-            <a:ext cx="2381250" cy="666750"/>
-          </a:xfrm>
-          <a:prstGeom xmlns:a="http://schemas.openxmlformats.org/drawingml/2006/main" prst="rect">
-            <a:avLst/>
-          </a:prstGeom>
-          <a:solidFill xmlns:a="http://schemas.openxmlformats.org/drawingml/2006/main">
-            <a:srgbClr val="FFFFFF"/>
-          </a:solidFill>
-          <a:ln xmlns:a="http://schemas.openxmlformats.org/drawingml/2006/main" w="9525">
-            <a:solidFill>
-              <a:srgbClr val="D6DDE2"/>
-            </a:solidFill>
-            <a:prstDash val="solid"/>
-          </a:ln>
-        </p:spPr>
-        <p:txBody>
-          <a:bodyPr xmlns:a="http://schemas.openxmlformats.org/drawingml/2006/main" lIns="76200" tIns="38100" rIns="76200" bIns="38100" anchor="ctr"/>
-          <a:lstStyle xmlns:a="http://schemas.openxmlformats.org/drawingml/2006/main"/>
-          <a:p xmlns:a="http://schemas.openxmlformats.org/drawingml/2006/main">
-            <a:pPr algn="ctr">
-              <a:lnSpc>
-                <a:spcPct val="108000"/>
-              </a:lnSpc>
-              <a:buNone/>
-              <a:defRPr sz="1425" b="0">
-                <a:solidFill>
-                  <a:srgbClr val="263746"/>
-                </a:solidFill>
-              </a:defRPr>
-            </a:pPr>
-            <a:r>
-              <a:rPr sz="1425" b="0">
-                <a:solidFill>
-                  <a:srgbClr val="263746"/>
-                </a:solidFill>
-                <a:latin typeface="Microsoft YaHei"/>
-                <a:ea typeface="Microsoft YaHei"/>
-                <a:cs typeface="Microsoft YaHei"/>
-              </a:rPr>
-              <a:t>讨论·局限</a:t>
-            </a:r>
-          </a:p>
-        </p:txBody>
-      </p:sp>
-      <p:sp>
-        <p:nvSpPr>
-          <p:cNvPr id="14" name="map-r1c2">
-            <a:extLst xmlns:a="http://schemas.openxmlformats.org/drawingml/2006/main">
-              <a:ext uri="{FF2B5EF4-FFF2-40B4-BE49-F238E27FC236}">
-                <a16:creationId xmlns:a16="http://schemas.microsoft.com/office/drawing/2014/main" id="{41AC0060-2648-4738-8FD1-BD761993411B}"/>
-              </a:ext>
-            </a:extLst>
-          </p:cNvPr>
-          <p:cNvSpPr>
-            <a:spLocks xmlns:a="http://schemas.openxmlformats.org/drawingml/2006/main" noGrp="1"/>
-          </p:cNvSpPr>
-          <p:nvPr/>
-        </p:nvSpPr>
-        <p:spPr>
-          <a:xfrm xmlns:a="http://schemas.openxmlformats.org/drawingml/2006/main">
-            <a:off x="5381625" y="2171700"/>
-            <a:ext cx="6286500" cy="666750"/>
-          </a:xfrm>
-          <a:prstGeom xmlns:a="http://schemas.openxmlformats.org/drawingml/2006/main" prst="rect">
-            <a:avLst/>
-          </a:prstGeom>
-          <a:solidFill xmlns:a="http://schemas.openxmlformats.org/drawingml/2006/main">
-            <a:srgbClr val="FFFFFF"/>
-          </a:solidFill>
-          <a:ln xmlns:a="http://schemas.openxmlformats.org/drawingml/2006/main" w="9525">
-            <a:solidFill>
-              <a:srgbClr val="D6DDE2"/>
-            </a:solidFill>
-            <a:prstDash val="solid"/>
-          </a:ln>
-        </p:spPr>
-        <p:txBody>
-          <a:bodyPr xmlns:a="http://schemas.openxmlformats.org/drawingml/2006/main" lIns="76200" tIns="38100" rIns="76200" bIns="38100" anchor="ctr"/>
-          <a:lstStyle xmlns:a="http://schemas.openxmlformats.org/drawingml/2006/main"/>
-          <a:p xmlns:a="http://schemas.openxmlformats.org/drawingml/2006/main">
-            <a:pPr algn="l">
-              <a:lnSpc>
-                <a:spcPct val="108000"/>
-              </a:lnSpc>
-              <a:buNone/>
-              <a:defRPr sz="1425" b="0">
-                <a:solidFill>
-                  <a:srgbClr val="263746"/>
-                </a:solidFill>
-              </a:defRPr>
-            </a:pPr>
-            <a:r>
-              <a:rPr sz="1425" b="0">
-                <a:solidFill>
-                  <a:srgbClr val="263746"/>
-                </a:solidFill>
-                <a:latin typeface="Microsoft YaHei"/>
-                <a:ea typeface="Microsoft YaHei"/>
-                <a:cs typeface="Microsoft YaHei"/>
-              </a:rPr>
-              <a:t>把根因写成边界说明</a:t>
-            </a:r>
-          </a:p>
-        </p:txBody>
-      </p:sp>
-      <p:sp>
-        <p:nvSpPr>
-          <p:cNvPr id="15" name="map-r2c0">
-            <a:extLst xmlns:a="http://schemas.openxmlformats.org/drawingml/2006/main">
-              <a:ext uri="{FF2B5EF4-FFF2-40B4-BE49-F238E27FC236}">
-                <a16:creationId xmlns:a16="http://schemas.microsoft.com/office/drawing/2014/main" id="{84968EDF-D3EE-4B1E-B737-70901FC94668}"/>
-              </a:ext>
-            </a:extLst>
-          </p:cNvPr>
-          <p:cNvSpPr>
-            <a:spLocks xmlns:a="http://schemas.openxmlformats.org/drawingml/2006/main" noGrp="1"/>
-          </p:cNvSpPr>
-          <p:nvPr/>
-        </p:nvSpPr>
-        <p:spPr>
-          <a:xfrm xmlns:a="http://schemas.openxmlformats.org/drawingml/2006/main">
-            <a:off x="523875" y="2838450"/>
-            <a:ext cx="2476500" cy="666750"/>
-          </a:xfrm>
-          <a:prstGeom xmlns:a="http://schemas.openxmlformats.org/drawingml/2006/main" prst="rect">
-            <a:avLst/>
-          </a:prstGeom>
-          <a:solidFill xmlns:a="http://schemas.openxmlformats.org/drawingml/2006/main">
-            <a:srgbClr val="F3F6F7"/>
-          </a:solidFill>
-          <a:ln xmlns:a="http://schemas.openxmlformats.org/drawingml/2006/main" w="9525">
-            <a:solidFill>
-              <a:srgbClr val="D6DDE2"/>
-            </a:solidFill>
-            <a:prstDash val="solid"/>
-          </a:ln>
-        </p:spPr>
-        <p:txBody>
-          <a:bodyPr xmlns:a="http://schemas.openxmlformats.org/drawingml/2006/main" lIns="76200" tIns="38100" rIns="76200" bIns="38100" anchor="ctr"/>
-          <a:lstStyle xmlns:a="http://schemas.openxmlformats.org/drawingml/2006/main"/>
-          <a:p xmlns:a="http://schemas.openxmlformats.org/drawingml/2006/main">
-            <a:pPr algn="l">
-              <a:lnSpc>
-                <a:spcPct val="108000"/>
-              </a:lnSpc>
-              <a:buNone/>
-              <a:defRPr sz="1425" b="1">
-                <a:solidFill>
-                  <a:srgbClr val="263746"/>
-                </a:solidFill>
-              </a:defRPr>
-            </a:pPr>
-            <a:r>
-              <a:rPr sz="1425" b="1">
-                <a:solidFill>
-                  <a:srgbClr val="263746"/>
-                </a:solidFill>
-                <a:latin typeface="Microsoft YaHei"/>
-                <a:ea typeface="Microsoft YaHei"/>
-                <a:cs typeface="Microsoft YaHei"/>
-              </a:rPr>
-              <a:t>证据充分性</a:t>
-            </a:r>
-          </a:p>
-        </p:txBody>
-      </p:sp>
-      <p:sp>
-        <p:nvSpPr>
-          <p:cNvPr id="16" name="map-r2c1">
-            <a:extLst xmlns:a="http://schemas.openxmlformats.org/drawingml/2006/main">
-              <a:ext uri="{FF2B5EF4-FFF2-40B4-BE49-F238E27FC236}">
-                <a16:creationId xmlns:a16="http://schemas.microsoft.com/office/drawing/2014/main" id="{BB4E0D0D-0D18-434A-BD52-05A53F9D2677}"/>
-              </a:ext>
-            </a:extLst>
-          </p:cNvPr>
-          <p:cNvSpPr>
-            <a:spLocks xmlns:a="http://schemas.openxmlformats.org/drawingml/2006/main" noGrp="1"/>
-          </p:cNvSpPr>
-          <p:nvPr/>
-        </p:nvSpPr>
-        <p:spPr>
-          <a:xfrm xmlns:a="http://schemas.openxmlformats.org/drawingml/2006/main">
-            <a:off x="3000375" y="2838450"/>
-            <a:ext cx="2381250" cy="666750"/>
-          </a:xfrm>
-          <a:prstGeom xmlns:a="http://schemas.openxmlformats.org/drawingml/2006/main" prst="rect">
-            <a:avLst/>
-          </a:prstGeom>
-          <a:solidFill xmlns:a="http://schemas.openxmlformats.org/drawingml/2006/main">
-            <a:srgbClr val="F3F6F7"/>
-          </a:solidFill>
-          <a:ln xmlns:a="http://schemas.openxmlformats.org/drawingml/2006/main" w="9525">
-            <a:solidFill>
-              <a:srgbClr val="D6DDE2"/>
-            </a:solidFill>
-            <a:prstDash val="solid"/>
-          </a:ln>
-        </p:spPr>
-        <p:txBody>
-          <a:bodyPr xmlns:a="http://schemas.openxmlformats.org/drawingml/2006/main" lIns="76200" tIns="38100" rIns="76200" bIns="38100" anchor="ctr"/>
-          <a:lstStyle xmlns:a="http://schemas.openxmlformats.org/drawingml/2006/main"/>
-          <a:p xmlns:a="http://schemas.openxmlformats.org/drawingml/2006/main">
-            <a:pPr algn="ctr">
-              <a:lnSpc>
-                <a:spcPct val="108000"/>
-              </a:lnSpc>
-              <a:buNone/>
-              <a:defRPr sz="1425" b="0">
-                <a:solidFill>
-                  <a:srgbClr val="263746"/>
-                </a:solidFill>
-              </a:defRPr>
-            </a:pPr>
-            <a:r>
-              <a:rPr sz="1425" b="0">
-                <a:solidFill>
-                  <a:srgbClr val="263746"/>
-                </a:solidFill>
-                <a:latin typeface="Microsoft YaHei"/>
-                <a:ea typeface="Microsoft YaHei"/>
-                <a:cs typeface="Microsoft YaHei"/>
-              </a:rPr>
-              <a:t>讨论·证据强度</a:t>
-            </a:r>
-          </a:p>
-        </p:txBody>
-      </p:sp>
-      <p:sp>
-        <p:nvSpPr>
-          <p:cNvPr id="17" name="map-r2c2">
-            <a:extLst xmlns:a="http://schemas.openxmlformats.org/drawingml/2006/main">
-              <a:ext uri="{FF2B5EF4-FFF2-40B4-BE49-F238E27FC236}">
-                <a16:creationId xmlns:a16="http://schemas.microsoft.com/office/drawing/2014/main" id="{BA3650B6-7B2B-469A-859A-70A2826273D0}"/>
-              </a:ext>
-            </a:extLst>
-          </p:cNvPr>
-          <p:cNvSpPr>
-            <a:spLocks xmlns:a="http://schemas.openxmlformats.org/drawingml/2006/main" noGrp="1"/>
-          </p:cNvSpPr>
-          <p:nvPr/>
-        </p:nvSpPr>
-        <p:spPr>
-          <a:xfrm xmlns:a="http://schemas.openxmlformats.org/drawingml/2006/main">
-            <a:off x="5381625" y="2838450"/>
-            <a:ext cx="6286500" cy="666750"/>
-          </a:xfrm>
-          <a:prstGeom xmlns:a="http://schemas.openxmlformats.org/drawingml/2006/main" prst="rect">
-            <a:avLst/>
-          </a:prstGeom>
-          <a:solidFill xmlns:a="http://schemas.openxmlformats.org/drawingml/2006/main">
-            <a:srgbClr val="F3F6F7"/>
-          </a:solidFill>
-          <a:ln xmlns:a="http://schemas.openxmlformats.org/drawingml/2006/main" w="9525">
-            <a:solidFill>
-              <a:srgbClr val="D6DDE2"/>
-            </a:solidFill>
-            <a:prstDash val="solid"/>
-          </a:ln>
-        </p:spPr>
-        <p:txBody>
-          <a:bodyPr xmlns:a="http://schemas.openxmlformats.org/drawingml/2006/main" lIns="76200" tIns="38100" rIns="76200" bIns="38100" anchor="ctr"/>
-          <a:lstStyle xmlns:a="http://schemas.openxmlformats.org/drawingml/2006/main"/>
-          <a:p xmlns:a="http://schemas.openxmlformats.org/drawingml/2006/main">
-            <a:pPr algn="l">
-              <a:lnSpc>
-                <a:spcPct val="108000"/>
-              </a:lnSpc>
-              <a:buNone/>
-              <a:defRPr sz="1425" b="0">
-                <a:solidFill>
-                  <a:srgbClr val="263746"/>
-                </a:solidFill>
-              </a:defRPr>
-            </a:pPr>
-            <a:r>
-              <a:rPr sz="1425" b="0">
-                <a:solidFill>
-                  <a:srgbClr val="263746"/>
-                </a:solidFill>
-                <a:latin typeface="Microsoft YaHei"/>
-                <a:ea typeface="Microsoft YaHei"/>
-                <a:cs typeface="Microsoft YaHei"/>
-              </a:rPr>
-              <a:t>写清缺失、冲突与待验证</a:t>
-            </a:r>
-          </a:p>
-        </p:txBody>
-      </p:sp>
-      <p:sp>
-        <p:nvSpPr>
-          <p:cNvPr id="18" name="map-r3c0">
-            <a:extLst xmlns:a="http://schemas.openxmlformats.org/drawingml/2006/main">
-              <a:ext uri="{FF2B5EF4-FFF2-40B4-BE49-F238E27FC236}">
-                <a16:creationId xmlns:a16="http://schemas.microsoft.com/office/drawing/2014/main" id="{B2A6E561-9322-410F-928A-484C3E7D2EF2}"/>
-              </a:ext>
-            </a:extLst>
-          </p:cNvPr>
-          <p:cNvSpPr>
-            <a:spLocks xmlns:a="http://schemas.openxmlformats.org/drawingml/2006/main" noGrp="1"/>
-          </p:cNvSpPr>
-          <p:nvPr/>
-        </p:nvSpPr>
-        <p:spPr>
-          <a:xfrm xmlns:a="http://schemas.openxmlformats.org/drawingml/2006/main">
-            <a:off x="523875" y="3505200"/>
-            <a:ext cx="2476500" cy="666750"/>
-          </a:xfrm>
-          <a:prstGeom xmlns:a="http://schemas.openxmlformats.org/drawingml/2006/main" prst="rect">
-            <a:avLst/>
-          </a:prstGeom>
-          <a:solidFill xmlns:a="http://schemas.openxmlformats.org/drawingml/2006/main">
-            <a:srgbClr val="FFFFFF"/>
-          </a:solidFill>
-          <a:ln xmlns:a="http://schemas.openxmlformats.org/drawingml/2006/main" w="9525">
-            <a:solidFill>
-              <a:srgbClr val="D6DDE2"/>
-            </a:solidFill>
-            <a:prstDash val="solid"/>
-          </a:ln>
-        </p:spPr>
-        <p:txBody>
-          <a:bodyPr xmlns:a="http://schemas.openxmlformats.org/drawingml/2006/main" lIns="76200" tIns="38100" rIns="76200" bIns="38100" anchor="ctr"/>
-          <a:lstStyle xmlns:a="http://schemas.openxmlformats.org/drawingml/2006/main"/>
-          <a:p xmlns:a="http://schemas.openxmlformats.org/drawingml/2006/main">
-            <a:pPr algn="l">
-              <a:lnSpc>
-                <a:spcPct val="108000"/>
-              </a:lnSpc>
-              <a:buNone/>
-              <a:defRPr sz="1425" b="1">
-                <a:solidFill>
-                  <a:srgbClr val="263746"/>
-                </a:solidFill>
-              </a:defRPr>
-            </a:pPr>
-            <a:r>
-              <a:rPr sz="1425" b="1">
-                <a:solidFill>
-                  <a:srgbClr val="263746"/>
-                </a:solidFill>
-                <a:latin typeface="Microsoft YaHei"/>
-                <a:ea typeface="Microsoft YaHei"/>
-                <a:cs typeface="Microsoft YaHei"/>
-              </a:rPr>
-              <a:t>有效性威胁</a:t>
-            </a:r>
-          </a:p>
-        </p:txBody>
-      </p:sp>
-      <p:sp>
-        <p:nvSpPr>
-          <p:cNvPr id="19" name="map-r3c1">
-            <a:extLst xmlns:a="http://schemas.openxmlformats.org/drawingml/2006/main">
-              <a:ext uri="{FF2B5EF4-FFF2-40B4-BE49-F238E27FC236}">
-                <a16:creationId xmlns:a16="http://schemas.microsoft.com/office/drawing/2014/main" id="{44FDA3A3-38E9-4E9D-A4A6-C80B0CDBDDD9}"/>
-              </a:ext>
-            </a:extLst>
-          </p:cNvPr>
-          <p:cNvSpPr>
-            <a:spLocks xmlns:a="http://schemas.openxmlformats.org/drawingml/2006/main" noGrp="1"/>
-          </p:cNvSpPr>
-          <p:nvPr/>
-        </p:nvSpPr>
-        <p:spPr>
-          <a:xfrm xmlns:a="http://schemas.openxmlformats.org/drawingml/2006/main">
-            <a:off x="3000375" y="3505200"/>
-            <a:ext cx="2381250" cy="666750"/>
-          </a:xfrm>
-          <a:prstGeom xmlns:a="http://schemas.openxmlformats.org/drawingml/2006/main" prst="rect">
-            <a:avLst/>
-          </a:prstGeom>
-          <a:solidFill xmlns:a="http://schemas.openxmlformats.org/drawingml/2006/main">
-            <a:srgbClr val="FFFFFF"/>
-          </a:solidFill>
-          <a:ln xmlns:a="http://schemas.openxmlformats.org/drawingml/2006/main" w="9525">
-            <a:solidFill>
-              <a:srgbClr val="D6DDE2"/>
-            </a:solidFill>
-            <a:prstDash val="solid"/>
-          </a:ln>
-        </p:spPr>
-        <p:txBody>
-          <a:bodyPr xmlns:a="http://schemas.openxmlformats.org/drawingml/2006/main" lIns="76200" tIns="38100" rIns="76200" bIns="38100" anchor="ctr"/>
-          <a:lstStyle xmlns:a="http://schemas.openxmlformats.org/drawingml/2006/main"/>
-          <a:p xmlns:a="http://schemas.openxmlformats.org/drawingml/2006/main">
-            <a:pPr algn="ctr">
-              <a:lnSpc>
-                <a:spcPct val="108000"/>
-              </a:lnSpc>
-              <a:buNone/>
-              <a:defRPr sz="1425" b="0">
-                <a:solidFill>
-                  <a:srgbClr val="263746"/>
-                </a:solidFill>
-              </a:defRPr>
-            </a:pPr>
-            <a:r>
-              <a:rPr sz="1425" b="0">
-                <a:solidFill>
-                  <a:srgbClr val="263746"/>
-                </a:solidFill>
-                <a:latin typeface="Microsoft YaHei"/>
-                <a:ea typeface="Microsoft YaHei"/>
-                <a:cs typeface="Microsoft YaHei"/>
-              </a:rPr>
-              <a:t>讨论·有效性</a:t>
-            </a:r>
-          </a:p>
-        </p:txBody>
-      </p:sp>
-      <p:sp>
-        <p:nvSpPr>
-          <p:cNvPr id="20" name="map-r3c2">
-            <a:extLst xmlns:a="http://schemas.openxmlformats.org/drawingml/2006/main">
-              <a:ext uri="{FF2B5EF4-FFF2-40B4-BE49-F238E27FC236}">
-                <a16:creationId xmlns:a16="http://schemas.microsoft.com/office/drawing/2014/main" id="{2BFC01EE-DC2F-498E-8772-33DC541BA285}"/>
-              </a:ext>
-            </a:extLst>
-          </p:cNvPr>
-          <p:cNvSpPr>
-            <a:spLocks xmlns:a="http://schemas.openxmlformats.org/drawingml/2006/main" noGrp="1"/>
-          </p:cNvSpPr>
-          <p:nvPr/>
-        </p:nvSpPr>
-        <p:spPr>
-          <a:xfrm xmlns:a="http://schemas.openxmlformats.org/drawingml/2006/main">
-            <a:off x="5381625" y="3505200"/>
-            <a:ext cx="6286500" cy="666750"/>
-          </a:xfrm>
-          <a:prstGeom xmlns:a="http://schemas.openxmlformats.org/drawingml/2006/main" prst="rect">
-            <a:avLst/>
-          </a:prstGeom>
-          <a:solidFill xmlns:a="http://schemas.openxmlformats.org/drawingml/2006/main">
-            <a:srgbClr val="FFFFFF"/>
-          </a:solidFill>
-          <a:ln xmlns:a="http://schemas.openxmlformats.org/drawingml/2006/main" w="9525">
-            <a:solidFill>
-              <a:srgbClr val="D6DDE2"/>
-            </a:solidFill>
-            <a:prstDash val="solid"/>
-          </a:ln>
-        </p:spPr>
-        <p:txBody>
-          <a:bodyPr xmlns:a="http://schemas.openxmlformats.org/drawingml/2006/main" lIns="76200" tIns="38100" rIns="76200" bIns="38100" anchor="ctr"/>
-          <a:lstStyle xmlns:a="http://schemas.openxmlformats.org/drawingml/2006/main"/>
-          <a:p xmlns:a="http://schemas.openxmlformats.org/drawingml/2006/main">
-            <a:pPr algn="l">
-              <a:lnSpc>
-                <a:spcPct val="108000"/>
-              </a:lnSpc>
-              <a:buNone/>
-              <a:defRPr sz="1425" b="0">
-                <a:solidFill>
-                  <a:srgbClr val="263746"/>
-                </a:solidFill>
-              </a:defRPr>
-            </a:pPr>
-            <a:r>
-              <a:rPr sz="1425" b="0">
-                <a:solidFill>
-                  <a:srgbClr val="263746"/>
-                </a:solidFill>
-                <a:latin typeface="Microsoft YaHei"/>
-                <a:ea typeface="Microsoft YaHei"/>
-                <a:cs typeface="Microsoft YaHei"/>
-              </a:rPr>
-              <a:t>四类或等价威胁写具体</a:t>
-            </a:r>
-          </a:p>
-        </p:txBody>
-      </p:sp>
-      <p:sp>
-        <p:nvSpPr>
-          <p:cNvPr id="21" name="map-r4c0">
-            <a:extLst xmlns:a="http://schemas.openxmlformats.org/drawingml/2006/main">
-              <a:ext uri="{FF2B5EF4-FFF2-40B4-BE49-F238E27FC236}">
-                <a16:creationId xmlns:a16="http://schemas.microsoft.com/office/drawing/2014/main" id="{72C87465-E01C-410F-8612-C11376F4E9D5}"/>
-              </a:ext>
-            </a:extLst>
-          </p:cNvPr>
-          <p:cNvSpPr>
-            <a:spLocks xmlns:a="http://schemas.openxmlformats.org/drawingml/2006/main" noGrp="1"/>
-          </p:cNvSpPr>
-          <p:nvPr/>
-        </p:nvSpPr>
-        <p:spPr>
-          <a:xfrm xmlns:a="http://schemas.openxmlformats.org/drawingml/2006/main">
-            <a:off x="523875" y="4171950"/>
-            <a:ext cx="2476500" cy="666750"/>
-          </a:xfrm>
-          <a:prstGeom xmlns:a="http://schemas.openxmlformats.org/drawingml/2006/main" prst="rect">
-            <a:avLst/>
-          </a:prstGeom>
-          <a:solidFill xmlns:a="http://schemas.openxmlformats.org/drawingml/2006/main">
-            <a:srgbClr val="F3F6F7"/>
-          </a:solidFill>
-          <a:ln xmlns:a="http://schemas.openxmlformats.org/drawingml/2006/main" w="9525">
-            <a:solidFill>
-              <a:srgbClr val="D6DDE2"/>
-            </a:solidFill>
-            <a:prstDash val="solid"/>
-          </a:ln>
-        </p:spPr>
-        <p:txBody>
-          <a:bodyPr xmlns:a="http://schemas.openxmlformats.org/drawingml/2006/main" lIns="76200" tIns="38100" rIns="76200" bIns="38100" anchor="ctr"/>
-          <a:lstStyle xmlns:a="http://schemas.openxmlformats.org/drawingml/2006/main"/>
-          <a:p xmlns:a="http://schemas.openxmlformats.org/drawingml/2006/main">
-            <a:pPr algn="l">
-              <a:lnSpc>
-                <a:spcPct val="108000"/>
-              </a:lnSpc>
-              <a:buNone/>
-              <a:defRPr sz="1425" b="1">
-                <a:solidFill>
-                  <a:srgbClr val="263746"/>
-                </a:solidFill>
-              </a:defRPr>
-            </a:pPr>
-            <a:r>
-              <a:rPr sz="1425" b="1">
-                <a:solidFill>
-                  <a:srgbClr val="263746"/>
-                </a:solidFill>
-                <a:latin typeface="Microsoft YaHei"/>
-                <a:ea typeface="Microsoft YaHei"/>
-                <a:cs typeface="Microsoft YaHei"/>
-              </a:rPr>
-              <a:t>人工审核</a:t>
-            </a:r>
-          </a:p>
-        </p:txBody>
-      </p:sp>
-      <p:sp>
-        <p:nvSpPr>
-          <p:cNvPr id="22" name="map-r4c1">
-            <a:extLst xmlns:a="http://schemas.openxmlformats.org/drawingml/2006/main">
-              <a:ext uri="{FF2B5EF4-FFF2-40B4-BE49-F238E27FC236}">
-                <a16:creationId xmlns:a16="http://schemas.microsoft.com/office/drawing/2014/main" id="{71420FC3-B767-4C6F-82EB-DB75BBA34082}"/>
-              </a:ext>
-            </a:extLst>
-          </p:cNvPr>
-          <p:cNvSpPr>
-            <a:spLocks xmlns:a="http://schemas.openxmlformats.org/drawingml/2006/main" noGrp="1"/>
-          </p:cNvSpPr>
-          <p:nvPr/>
-        </p:nvSpPr>
-        <p:spPr>
-          <a:xfrm xmlns:a="http://schemas.openxmlformats.org/drawingml/2006/main">
-            <a:off x="3000375" y="4171950"/>
-            <a:ext cx="2381250" cy="666750"/>
-          </a:xfrm>
-          <a:prstGeom xmlns:a="http://schemas.openxmlformats.org/drawingml/2006/main" prst="rect">
-            <a:avLst/>
-          </a:prstGeom>
-          <a:solidFill xmlns:a="http://schemas.openxmlformats.org/drawingml/2006/main">
-            <a:srgbClr val="F3F6F7"/>
-          </a:solidFill>
-          <a:ln xmlns:a="http://schemas.openxmlformats.org/drawingml/2006/main" w="9525">
-            <a:solidFill>
-              <a:srgbClr val="D6DDE2"/>
-            </a:solidFill>
-            <a:prstDash val="solid"/>
-          </a:ln>
-        </p:spPr>
-        <p:txBody>
-          <a:bodyPr xmlns:a="http://schemas.openxmlformats.org/drawingml/2006/main" lIns="76200" tIns="38100" rIns="76200" bIns="38100" anchor="ctr"/>
-          <a:lstStyle xmlns:a="http://schemas.openxmlformats.org/drawingml/2006/main"/>
-          <a:p xmlns:a="http://schemas.openxmlformats.org/drawingml/2006/main">
-            <a:pPr algn="ctr">
-              <a:lnSpc>
-                <a:spcPct val="108000"/>
-              </a:lnSpc>
-              <a:buNone/>
-              <a:defRPr sz="1425" b="0">
-                <a:solidFill>
-                  <a:srgbClr val="263746"/>
-                </a:solidFill>
-              </a:defRPr>
-            </a:pPr>
-            <a:r>
-              <a:rPr sz="1425" b="0">
-                <a:solidFill>
-                  <a:srgbClr val="263746"/>
-                </a:solidFill>
-                <a:latin typeface="Microsoft YaHei"/>
-                <a:ea typeface="Microsoft YaHei"/>
-                <a:cs typeface="Microsoft YaHei"/>
-              </a:rPr>
-              <a:t>方法·工作流</a:t>
-            </a:r>
-          </a:p>
-        </p:txBody>
-      </p:sp>
-      <p:sp>
-        <p:nvSpPr>
-          <p:cNvPr id="23" name="map-r4c2">
-            <a:extLst xmlns:a="http://schemas.openxmlformats.org/drawingml/2006/main">
-              <a:ext uri="{FF2B5EF4-FFF2-40B4-BE49-F238E27FC236}">
-                <a16:creationId xmlns:a16="http://schemas.microsoft.com/office/drawing/2014/main" id="{E177EA99-B3B9-4327-B262-9068D93183E0}"/>
-              </a:ext>
-            </a:extLst>
-          </p:cNvPr>
-          <p:cNvSpPr>
-            <a:spLocks xmlns:a="http://schemas.openxmlformats.org/drawingml/2006/main" noGrp="1"/>
-          </p:cNvSpPr>
-          <p:nvPr/>
-        </p:nvSpPr>
-        <p:spPr>
-          <a:xfrm xmlns:a="http://schemas.openxmlformats.org/drawingml/2006/main">
-            <a:off x="5381625" y="4171950"/>
-            <a:ext cx="6286500" cy="666750"/>
-          </a:xfrm>
-          <a:prstGeom xmlns:a="http://schemas.openxmlformats.org/drawingml/2006/main" prst="rect">
-            <a:avLst/>
-          </a:prstGeom>
-          <a:solidFill xmlns:a="http://schemas.openxmlformats.org/drawingml/2006/main">
-            <a:srgbClr val="F3F6F7"/>
-          </a:solidFill>
-          <a:ln xmlns:a="http://schemas.openxmlformats.org/drawingml/2006/main" w="9525">
-            <a:solidFill>
-              <a:srgbClr val="D6DDE2"/>
-            </a:solidFill>
-            <a:prstDash val="solid"/>
-          </a:ln>
-        </p:spPr>
-        <p:txBody>
-          <a:bodyPr xmlns:a="http://schemas.openxmlformats.org/drawingml/2006/main" lIns="76200" tIns="38100" rIns="76200" bIns="38100" anchor="ctr"/>
-          <a:lstStyle xmlns:a="http://schemas.openxmlformats.org/drawingml/2006/main"/>
-          <a:p xmlns:a="http://schemas.openxmlformats.org/drawingml/2006/main">
-            <a:pPr algn="l">
-              <a:lnSpc>
-                <a:spcPct val="108000"/>
-              </a:lnSpc>
-              <a:buNone/>
-              <a:defRPr sz="1425" b="0">
-                <a:solidFill>
-                  <a:srgbClr val="263746"/>
-                </a:solidFill>
-              </a:defRPr>
-            </a:pPr>
-            <a:r>
-              <a:rPr sz="1425" b="0">
-                <a:solidFill>
-                  <a:srgbClr val="263746"/>
-                </a:solidFill>
-                <a:latin typeface="Microsoft YaHei"/>
-                <a:ea typeface="Microsoft YaHei"/>
-                <a:cs typeface="Microsoft YaHei"/>
-              </a:rPr>
-              <a:t>写明审核点、权限与失败恢复</a:t>
-            </a:r>
-          </a:p>
-        </p:txBody>
-      </p:sp>
-      <p:sp>
-        <p:nvSpPr>
-          <p:cNvPr id="24" name="bottom">
-            <a:extLst xmlns:a="http://schemas.openxmlformats.org/drawingml/2006/main">
-              <a:ext uri="{FF2B5EF4-FFF2-40B4-BE49-F238E27FC236}">
-                <a16:creationId xmlns:a16="http://schemas.microsoft.com/office/drawing/2014/main" id="{BB29CA35-2521-44A9-B287-7670EC4EA0BA}"/>
-              </a:ext>
-            </a:extLst>
-          </p:cNvPr>
-          <p:cNvSpPr>
-            <a:spLocks xmlns:a="http://schemas.openxmlformats.org/drawingml/2006/main" noGrp="1"/>
-          </p:cNvSpPr>
-          <p:nvPr/>
-        </p:nvSpPr>
-        <p:spPr>
-          <a:xfrm xmlns:a="http://schemas.openxmlformats.org/drawingml/2006/main">
-            <a:off x="1962150" y="4972050"/>
-            <a:ext cx="8267700" cy="514350"/>
+              <a:t>[边界] 因此不外推到图表为主论文。</a:t>
+            </a:r>
+          </a:p>
+        </p:txBody>
+      </p:sp>
+      <p:sp>
+        <p:nvSpPr>
+          <p:cNvPr id="12" name="bottom">
+            <a:extLst xmlns:a="http://schemas.openxmlformats.org/drawingml/2006/main">
+              <a:ext uri="{FF2B5EF4-FFF2-40B4-BE49-F238E27FC236}">
+                <a16:creationId xmlns:a16="http://schemas.microsoft.com/office/drawing/2014/main" id="{35CFA939-884E-4910-A7FE-8D5A94C2EC0E}"/>
+              </a:ext>
+            </a:extLst>
+          </p:cNvPr>
+          <p:cNvSpPr>
+            <a:spLocks xmlns:a="http://schemas.openxmlformats.org/drawingml/2006/main" noGrp="1"/>
+          </p:cNvSpPr>
+          <p:nvPr/>
+        </p:nvSpPr>
+        <p:spPr>
+          <a:xfrm xmlns:a="http://schemas.openxmlformats.org/drawingml/2006/main">
+            <a:off x="1390650" y="4552950"/>
+            <a:ext cx="9410700" cy="742950"/>
           </a:xfrm>
           <a:prstGeom xmlns:a="http://schemas.openxmlformats.org/drawingml/2006/main" prst="roundRect">
             <a:avLst>
-              <a:gd name="adj" fmla="val 14815"/>
+              <a:gd name="adj" fmla="val 10256"/>
             </a:avLst>
           </a:prstGeom>
           <a:solidFill xmlns:a="http://schemas.openxmlformats.org/drawingml/2006/main">
@@ -5277,7 +4649,7 @@
                 <a:ea typeface="Microsoft YaHei"/>
                 <a:cs typeface="Microsoft YaHei"/>
               </a:rPr>
-              <a:t>论文面向同行：表格是索引，论证才是正文。</a:t>
+              <a:t>批注检查｜结果→根因→边界，三步都能回到上游工件。</a:t>
             </a:r>
           </a:p>
         </p:txBody>
@@ -5381,7 +4753,7 @@
           <p:cNvPr id="6" name="f-0">
             <a:extLst xmlns:a="http://schemas.openxmlformats.org/drawingml/2006/main">
               <a:ext uri="{FF2B5EF4-FFF2-40B4-BE49-F238E27FC236}">
-                <a16:creationId xmlns:a16="http://schemas.microsoft.com/office/drawing/2014/main" id="{8B346CBE-FB2F-45C5-BE8B-D075AA77DE62}"/>
+                <a16:creationId xmlns:a16="http://schemas.microsoft.com/office/drawing/2014/main" id="{F7DE62F4-B44B-4A99-912D-4657D9ED493D}"/>
               </a:ext>
             </a:extLst>
           </p:cNvPr>
@@ -5438,7 +4810,7 @@
           <p:cNvPr id="7" name="fh-0">
             <a:extLst xmlns:a="http://schemas.openxmlformats.org/drawingml/2006/main">
               <a:ext uri="{FF2B5EF4-FFF2-40B4-BE49-F238E27FC236}">
-                <a16:creationId xmlns:a16="http://schemas.microsoft.com/office/drawing/2014/main" id="{DABECB6D-D729-42B8-A88F-62523491B5AC}"/>
+                <a16:creationId xmlns:a16="http://schemas.microsoft.com/office/drawing/2014/main" id="{E6EDA6D4-0F16-461A-A767-5DB142B8EB4B}"/>
               </a:ext>
             </a:extLst>
           </p:cNvPr>
@@ -5493,7 +4865,7 @@
           <p:cNvPr id="8" name="fd-0">
             <a:extLst xmlns:a="http://schemas.openxmlformats.org/drawingml/2006/main">
               <a:ext uri="{FF2B5EF4-FFF2-40B4-BE49-F238E27FC236}">
-                <a16:creationId xmlns:a16="http://schemas.microsoft.com/office/drawing/2014/main" id="{C1C4E0D4-423A-4BED-917F-D0581CFEF15A}"/>
+                <a16:creationId xmlns:a16="http://schemas.microsoft.com/office/drawing/2014/main" id="{A6940C15-FF25-48FF-B74B-56CE75234CBE}"/>
               </a:ext>
             </a:extLst>
           </p:cNvPr>
@@ -5552,7 +4924,7 @@
           <p:cNvPr id="9" name="f-1">
             <a:extLst xmlns:a="http://schemas.openxmlformats.org/drawingml/2006/main">
               <a:ext uri="{FF2B5EF4-FFF2-40B4-BE49-F238E27FC236}">
-                <a16:creationId xmlns:a16="http://schemas.microsoft.com/office/drawing/2014/main" id="{41B873D8-CA19-4C19-9952-0B589B9F68B7}"/>
+                <a16:creationId xmlns:a16="http://schemas.microsoft.com/office/drawing/2014/main" id="{2E75D888-306A-4050-9B38-5535D9F88BDF}"/>
               </a:ext>
             </a:extLst>
           </p:cNvPr>
@@ -5609,7 +4981,7 @@
           <p:cNvPr id="10" name="fh-1">
             <a:extLst xmlns:a="http://schemas.openxmlformats.org/drawingml/2006/main">
               <a:ext uri="{FF2B5EF4-FFF2-40B4-BE49-F238E27FC236}">
-                <a16:creationId xmlns:a16="http://schemas.microsoft.com/office/drawing/2014/main" id="{6BF1204E-9D14-487C-8349-954D02B99B04}"/>
+                <a16:creationId xmlns:a16="http://schemas.microsoft.com/office/drawing/2014/main" id="{D4A24445-836E-427E-B773-63EA4EAFBC89}"/>
               </a:ext>
             </a:extLst>
           </p:cNvPr>
@@ -5664,7 +5036,7 @@
           <p:cNvPr id="11" name="fd-1">
             <a:extLst xmlns:a="http://schemas.openxmlformats.org/drawingml/2006/main">
               <a:ext uri="{FF2B5EF4-FFF2-40B4-BE49-F238E27FC236}">
-                <a16:creationId xmlns:a16="http://schemas.microsoft.com/office/drawing/2014/main" id="{677DF2F1-2D57-47C0-8B65-3FDB5E13C558}"/>
+                <a16:creationId xmlns:a16="http://schemas.microsoft.com/office/drawing/2014/main" id="{4A7CC5C7-63BD-4D56-9E0B-E0CEEE1C34AF}"/>
               </a:ext>
             </a:extLst>
           </p:cNvPr>
@@ -5723,7 +5095,7 @@
           <p:cNvPr id="12" name="f-2">
             <a:extLst xmlns:a="http://schemas.openxmlformats.org/drawingml/2006/main">
               <a:ext uri="{FF2B5EF4-FFF2-40B4-BE49-F238E27FC236}">
-                <a16:creationId xmlns:a16="http://schemas.microsoft.com/office/drawing/2014/main" id="{563A1C82-7D53-42C6-B713-6F689ECEBA4F}"/>
+                <a16:creationId xmlns:a16="http://schemas.microsoft.com/office/drawing/2014/main" id="{BE0E20D7-6855-46EF-890D-791A87CE8649}"/>
               </a:ext>
             </a:extLst>
           </p:cNvPr>
@@ -5780,7 +5152,7 @@
           <p:cNvPr id="13" name="fh-2">
             <a:extLst xmlns:a="http://schemas.openxmlformats.org/drawingml/2006/main">
               <a:ext uri="{FF2B5EF4-FFF2-40B4-BE49-F238E27FC236}">
-                <a16:creationId xmlns:a16="http://schemas.microsoft.com/office/drawing/2014/main" id="{EA3F106E-7B50-4F59-9429-D65439B5A2E1}"/>
+                <a16:creationId xmlns:a16="http://schemas.microsoft.com/office/drawing/2014/main" id="{380B0DE7-0FCD-4A2C-AAB5-4B58749AAB9D}"/>
               </a:ext>
             </a:extLst>
           </p:cNvPr>
@@ -5835,7 +5207,7 @@
           <p:cNvPr id="14" name="fd-2">
             <a:extLst xmlns:a="http://schemas.openxmlformats.org/drawingml/2006/main">
               <a:ext uri="{FF2B5EF4-FFF2-40B4-BE49-F238E27FC236}">
-                <a16:creationId xmlns:a16="http://schemas.microsoft.com/office/drawing/2014/main" id="{E4E1F264-37BF-401D-8DC0-ABFD674A900E}"/>
+                <a16:creationId xmlns:a16="http://schemas.microsoft.com/office/drawing/2014/main" id="{3654C8A9-6526-4271-94F5-E4696E5B1436}"/>
               </a:ext>
             </a:extLst>
           </p:cNvPr>
@@ -5894,7 +5266,7 @@
           <p:cNvPr id="15" name="f-3">
             <a:extLst xmlns:a="http://schemas.openxmlformats.org/drawingml/2006/main">
               <a:ext uri="{FF2B5EF4-FFF2-40B4-BE49-F238E27FC236}">
-                <a16:creationId xmlns:a16="http://schemas.microsoft.com/office/drawing/2014/main" id="{2E58C477-0C70-47D2-A875-BBF9DC6452B8}"/>
+                <a16:creationId xmlns:a16="http://schemas.microsoft.com/office/drawing/2014/main" id="{4D0B53F0-52B4-42AD-BF82-B3E04B37955C}"/>
               </a:ext>
             </a:extLst>
           </p:cNvPr>
@@ -5951,7 +5323,7 @@
           <p:cNvPr id="16" name="fh-3">
             <a:extLst xmlns:a="http://schemas.openxmlformats.org/drawingml/2006/main">
               <a:ext uri="{FF2B5EF4-FFF2-40B4-BE49-F238E27FC236}">
-                <a16:creationId xmlns:a16="http://schemas.microsoft.com/office/drawing/2014/main" id="{4458271D-531D-47DE-B106-15A96CF7679C}"/>
+                <a16:creationId xmlns:a16="http://schemas.microsoft.com/office/drawing/2014/main" id="{932ECAF8-1416-4BAF-A20E-E8109DEC9A69}"/>
               </a:ext>
             </a:extLst>
           </p:cNvPr>
@@ -6006,7 +5378,7 @@
           <p:cNvPr id="17" name="fd-3">
             <a:extLst xmlns:a="http://schemas.openxmlformats.org/drawingml/2006/main">
               <a:ext uri="{FF2B5EF4-FFF2-40B4-BE49-F238E27FC236}">
-                <a16:creationId xmlns:a16="http://schemas.microsoft.com/office/drawing/2014/main" id="{ECD34514-C0D5-4062-8896-0827991FDEFE}"/>
+                <a16:creationId xmlns:a16="http://schemas.microsoft.com/office/drawing/2014/main" id="{873784A6-CD98-4B5B-9779-535C72464F9A}"/>
               </a:ext>
             </a:extLst>
           </p:cNvPr>
@@ -6065,7 +5437,7 @@
           <p:cNvPr id="18" name="f-4">
             <a:extLst xmlns:a="http://schemas.openxmlformats.org/drawingml/2006/main">
               <a:ext uri="{FF2B5EF4-FFF2-40B4-BE49-F238E27FC236}">
-                <a16:creationId xmlns:a16="http://schemas.microsoft.com/office/drawing/2014/main" id="{DF34A674-7683-43F2-A575-3604513149D4}"/>
+                <a16:creationId xmlns:a16="http://schemas.microsoft.com/office/drawing/2014/main" id="{6714C281-0080-4A42-9F97-CD8E584DD2BA}"/>
               </a:ext>
             </a:extLst>
           </p:cNvPr>
@@ -6122,7 +5494,7 @@
           <p:cNvPr id="19" name="fh-4">
             <a:extLst xmlns:a="http://schemas.openxmlformats.org/drawingml/2006/main">
               <a:ext uri="{FF2B5EF4-FFF2-40B4-BE49-F238E27FC236}">
-                <a16:creationId xmlns:a16="http://schemas.microsoft.com/office/drawing/2014/main" id="{4F0C3B76-B08F-47EA-A303-C3D2E85F8D68}"/>
+                <a16:creationId xmlns:a16="http://schemas.microsoft.com/office/drawing/2014/main" id="{0B816DE2-568F-4DD9-A9C0-6A85FFBE5E5A}"/>
               </a:ext>
             </a:extLst>
           </p:cNvPr>
@@ -6177,7 +5549,7 @@
           <p:cNvPr id="20" name="fd-4">
             <a:extLst xmlns:a="http://schemas.openxmlformats.org/drawingml/2006/main">
               <a:ext uri="{FF2B5EF4-FFF2-40B4-BE49-F238E27FC236}">
-                <a16:creationId xmlns:a16="http://schemas.microsoft.com/office/drawing/2014/main" id="{05C08A6C-144E-42AC-AB75-B38D103FA78E}"/>
+                <a16:creationId xmlns:a16="http://schemas.microsoft.com/office/drawing/2014/main" id="{3F88FBB6-7F82-441F-897E-6A23D570AA51}"/>
               </a:ext>
             </a:extLst>
           </p:cNvPr>
@@ -6236,7 +5608,7 @@
           <p:cNvPr id="21" name="f-5">
             <a:extLst xmlns:a="http://schemas.openxmlformats.org/drawingml/2006/main">
               <a:ext uri="{FF2B5EF4-FFF2-40B4-BE49-F238E27FC236}">
-                <a16:creationId xmlns:a16="http://schemas.microsoft.com/office/drawing/2014/main" id="{8A20B669-57BB-44BC-98B4-363D13CD48B7}"/>
+                <a16:creationId xmlns:a16="http://schemas.microsoft.com/office/drawing/2014/main" id="{39820AED-00A1-494B-A619-DD379AC4FA10}"/>
               </a:ext>
             </a:extLst>
           </p:cNvPr>
@@ -6293,7 +5665,7 @@
           <p:cNvPr id="22" name="fh-5">
             <a:extLst xmlns:a="http://schemas.openxmlformats.org/drawingml/2006/main">
               <a:ext uri="{FF2B5EF4-FFF2-40B4-BE49-F238E27FC236}">
-                <a16:creationId xmlns:a16="http://schemas.microsoft.com/office/drawing/2014/main" id="{B610E5A3-0E89-47AB-B537-D0D00EE19C16}"/>
+                <a16:creationId xmlns:a16="http://schemas.microsoft.com/office/drawing/2014/main" id="{C992ECDE-D39B-4188-8343-0208DD2C8873}"/>
               </a:ext>
             </a:extLst>
           </p:cNvPr>
@@ -6348,7 +5720,7 @@
           <p:cNvPr id="23" name="fd-5">
             <a:extLst xmlns:a="http://schemas.openxmlformats.org/drawingml/2006/main">
               <a:ext uri="{FF2B5EF4-FFF2-40B4-BE49-F238E27FC236}">
-                <a16:creationId xmlns:a16="http://schemas.microsoft.com/office/drawing/2014/main" id="{C1134194-8D50-4419-9008-A950922BF365}"/>
+                <a16:creationId xmlns:a16="http://schemas.microsoft.com/office/drawing/2014/main" id="{78FFAE82-21FF-43FA-9321-0DD53EEE9934}"/>
               </a:ext>
             </a:extLst>
           </p:cNvPr>
@@ -6407,7 +5779,7 @@
           <p:cNvPr id="24" name="f-6">
             <a:extLst xmlns:a="http://schemas.openxmlformats.org/drawingml/2006/main">
               <a:ext uri="{FF2B5EF4-FFF2-40B4-BE49-F238E27FC236}">
-                <a16:creationId xmlns:a16="http://schemas.microsoft.com/office/drawing/2014/main" id="{F8B3725B-EE5A-496B-8424-AFDE012DCD41}"/>
+                <a16:creationId xmlns:a16="http://schemas.microsoft.com/office/drawing/2014/main" id="{ECEC817F-D540-4889-8A05-A2F3F5159CAA}"/>
               </a:ext>
             </a:extLst>
           </p:cNvPr>
@@ -6464,7 +5836,7 @@
           <p:cNvPr id="25" name="fh-6">
             <a:extLst xmlns:a="http://schemas.openxmlformats.org/drawingml/2006/main">
               <a:ext uri="{FF2B5EF4-FFF2-40B4-BE49-F238E27FC236}">
-                <a16:creationId xmlns:a16="http://schemas.microsoft.com/office/drawing/2014/main" id="{ED1B0B69-A6B8-4C09-9258-5BFFC435D3C9}"/>
+                <a16:creationId xmlns:a16="http://schemas.microsoft.com/office/drawing/2014/main" id="{7B81692A-5C78-46C3-8834-FDE6130F5892}"/>
               </a:ext>
             </a:extLst>
           </p:cNvPr>
@@ -6519,7 +5891,7 @@
           <p:cNvPr id="26" name="fd-6">
             <a:extLst xmlns:a="http://schemas.openxmlformats.org/drawingml/2006/main">
               <a:ext uri="{FF2B5EF4-FFF2-40B4-BE49-F238E27FC236}">
-                <a16:creationId xmlns:a16="http://schemas.microsoft.com/office/drawing/2014/main" id="{8075A027-CA2D-42B0-ACDC-04DB2CE5B0F4}"/>
+                <a16:creationId xmlns:a16="http://schemas.microsoft.com/office/drawing/2014/main" id="{83B91813-1F61-412D-A8EF-4CF738405BF6}"/>
               </a:ext>
             </a:extLst>
           </p:cNvPr>
@@ -6578,7 +5950,7 @@
           <p:cNvPr id="27" name="bottom">
             <a:extLst xmlns:a="http://schemas.openxmlformats.org/drawingml/2006/main">
               <a:ext uri="{FF2B5EF4-FFF2-40B4-BE49-F238E27FC236}">
-                <a16:creationId xmlns:a16="http://schemas.microsoft.com/office/drawing/2014/main" id="{797CA9E1-D117-427F-9B12-A04E826B5701}"/>
+                <a16:creationId xmlns:a16="http://schemas.microsoft.com/office/drawing/2014/main" id="{68AA8308-2E00-4888-B21D-C063F4841028}"/>
               </a:ext>
             </a:extLst>
           </p:cNvPr>
@@ -6725,7 +6097,7 @@
           <p:cNvPr id="6" name="h-0">
             <a:extLst xmlns:a="http://schemas.openxmlformats.org/drawingml/2006/main">
               <a:ext uri="{FF2B5EF4-FFF2-40B4-BE49-F238E27FC236}">
-                <a16:creationId xmlns:a16="http://schemas.microsoft.com/office/drawing/2014/main" id="{9D12C0DC-86B0-4BBD-8611-738C7F4B12EA}"/>
+                <a16:creationId xmlns:a16="http://schemas.microsoft.com/office/drawing/2014/main" id="{A7CB17EA-20C8-4274-9DD9-A6411CE392CF}"/>
               </a:ext>
             </a:extLst>
           </p:cNvPr>
@@ -6780,7 +6152,7 @@
           <p:cNvPr id="7" name="n-0-0">
             <a:extLst xmlns:a="http://schemas.openxmlformats.org/drawingml/2006/main">
               <a:ext uri="{FF2B5EF4-FFF2-40B4-BE49-F238E27FC236}">
-                <a16:creationId xmlns:a16="http://schemas.microsoft.com/office/drawing/2014/main" id="{DF5B2ED7-0457-419E-85BA-E3EC3D90DC65}"/>
+                <a16:creationId xmlns:a16="http://schemas.microsoft.com/office/drawing/2014/main" id="{0083ADF6-3EE3-49A6-B569-9EA53FDEA786}"/>
               </a:ext>
             </a:extLst>
           </p:cNvPr>
@@ -6837,7 +6209,7 @@
           <p:cNvPr id="8" name="t-0-0">
             <a:extLst xmlns:a="http://schemas.openxmlformats.org/drawingml/2006/main">
               <a:ext uri="{FF2B5EF4-FFF2-40B4-BE49-F238E27FC236}">
-                <a16:creationId xmlns:a16="http://schemas.microsoft.com/office/drawing/2014/main" id="{E60C3CAE-A4C6-415D-854C-21CE608C8027}"/>
+                <a16:creationId xmlns:a16="http://schemas.microsoft.com/office/drawing/2014/main" id="{F66B4E6D-204C-47E2-ABF1-1209BE20D6FA}"/>
               </a:ext>
             </a:extLst>
           </p:cNvPr>
@@ -6896,7 +6268,7 @@
           <p:cNvPr id="9" name="n-0-1">
             <a:extLst xmlns:a="http://schemas.openxmlformats.org/drawingml/2006/main">
               <a:ext uri="{FF2B5EF4-FFF2-40B4-BE49-F238E27FC236}">
-                <a16:creationId xmlns:a16="http://schemas.microsoft.com/office/drawing/2014/main" id="{7715A146-1901-40B2-B858-94AF4B7EFBA2}"/>
+                <a16:creationId xmlns:a16="http://schemas.microsoft.com/office/drawing/2014/main" id="{B6058B7B-1C4E-4765-8BEE-06BA28CCF9D2}"/>
               </a:ext>
             </a:extLst>
           </p:cNvPr>
@@ -6953,7 +6325,7 @@
           <p:cNvPr id="10" name="t-0-1">
             <a:extLst xmlns:a="http://schemas.openxmlformats.org/drawingml/2006/main">
               <a:ext uri="{FF2B5EF4-FFF2-40B4-BE49-F238E27FC236}">
-                <a16:creationId xmlns:a16="http://schemas.microsoft.com/office/drawing/2014/main" id="{4CEA8E1F-42F9-497D-B473-6F12CDE887CE}"/>
+                <a16:creationId xmlns:a16="http://schemas.microsoft.com/office/drawing/2014/main" id="{4819C438-167C-49DF-8878-24EA10F3D53D}"/>
               </a:ext>
             </a:extLst>
           </p:cNvPr>
@@ -7012,7 +6384,7 @@
           <p:cNvPr id="11" name="n-0-2">
             <a:extLst xmlns:a="http://schemas.openxmlformats.org/drawingml/2006/main">
               <a:ext uri="{FF2B5EF4-FFF2-40B4-BE49-F238E27FC236}">
-                <a16:creationId xmlns:a16="http://schemas.microsoft.com/office/drawing/2014/main" id="{592EF8AF-499A-4BCE-A236-CB018D2213D6}"/>
+                <a16:creationId xmlns:a16="http://schemas.microsoft.com/office/drawing/2014/main" id="{9AE230FB-135B-43FB-9BB3-BF88B3F12F35}"/>
               </a:ext>
             </a:extLst>
           </p:cNvPr>
@@ -7069,7 +6441,7 @@
           <p:cNvPr id="12" name="t-0-2">
             <a:extLst xmlns:a="http://schemas.openxmlformats.org/drawingml/2006/main">
               <a:ext uri="{FF2B5EF4-FFF2-40B4-BE49-F238E27FC236}">
-                <a16:creationId xmlns:a16="http://schemas.microsoft.com/office/drawing/2014/main" id="{4CCABFCD-C2E1-49BF-BFB8-0E408F6328C5}"/>
+                <a16:creationId xmlns:a16="http://schemas.microsoft.com/office/drawing/2014/main" id="{51B68B58-6C4D-46AC-8982-0A74F46CDAB0}"/>
               </a:ext>
             </a:extLst>
           </p:cNvPr>
@@ -7128,7 +6500,7 @@
           <p:cNvPr id="13" name="n-0-3">
             <a:extLst xmlns:a="http://schemas.openxmlformats.org/drawingml/2006/main">
               <a:ext uri="{FF2B5EF4-FFF2-40B4-BE49-F238E27FC236}">
-                <a16:creationId xmlns:a16="http://schemas.microsoft.com/office/drawing/2014/main" id="{1FFB9359-8669-42BA-AE3D-C748ECBA5AC5}"/>
+                <a16:creationId xmlns:a16="http://schemas.microsoft.com/office/drawing/2014/main" id="{D10CD667-C249-43D3-AE12-1BECD5A77F00}"/>
               </a:ext>
             </a:extLst>
           </p:cNvPr>
@@ -7185,7 +6557,7 @@
           <p:cNvPr id="14" name="t-0-3">
             <a:extLst xmlns:a="http://schemas.openxmlformats.org/drawingml/2006/main">
               <a:ext uri="{FF2B5EF4-FFF2-40B4-BE49-F238E27FC236}">
-                <a16:creationId xmlns:a16="http://schemas.microsoft.com/office/drawing/2014/main" id="{24E6F76E-6E28-463A-AA71-7D20E9E069F7}"/>
+                <a16:creationId xmlns:a16="http://schemas.microsoft.com/office/drawing/2014/main" id="{9FD3A819-ADAF-4894-A1CE-9CED605487D2}"/>
               </a:ext>
             </a:extLst>
           </p:cNvPr>
@@ -7244,7 +6616,7 @@
           <p:cNvPr id="15" name="h-1">
             <a:extLst xmlns:a="http://schemas.openxmlformats.org/drawingml/2006/main">
               <a:ext uri="{FF2B5EF4-FFF2-40B4-BE49-F238E27FC236}">
-                <a16:creationId xmlns:a16="http://schemas.microsoft.com/office/drawing/2014/main" id="{85F6A0FE-F45B-4DEE-A59B-8DDE1A31AEE8}"/>
+                <a16:creationId xmlns:a16="http://schemas.microsoft.com/office/drawing/2014/main" id="{940927F3-9A19-4A52-929C-78C4CEF4A3E3}"/>
               </a:ext>
             </a:extLst>
           </p:cNvPr>
@@ -7299,7 +6671,7 @@
           <p:cNvPr id="16" name="n-1-0">
             <a:extLst xmlns:a="http://schemas.openxmlformats.org/drawingml/2006/main">
               <a:ext uri="{FF2B5EF4-FFF2-40B4-BE49-F238E27FC236}">
-                <a16:creationId xmlns:a16="http://schemas.microsoft.com/office/drawing/2014/main" id="{663D9074-FF56-481C-B884-D8CBB70CC3FE}"/>
+                <a16:creationId xmlns:a16="http://schemas.microsoft.com/office/drawing/2014/main" id="{8DE09D29-1EC5-48B9-A39F-D07DED49B009}"/>
               </a:ext>
             </a:extLst>
           </p:cNvPr>
@@ -7356,7 +6728,7 @@
           <p:cNvPr id="17" name="t-1-0">
             <a:extLst xmlns:a="http://schemas.openxmlformats.org/drawingml/2006/main">
               <a:ext uri="{FF2B5EF4-FFF2-40B4-BE49-F238E27FC236}">
-                <a16:creationId xmlns:a16="http://schemas.microsoft.com/office/drawing/2014/main" id="{FA99A515-7013-4B7E-A1C6-BAAFF80082CD}"/>
+                <a16:creationId xmlns:a16="http://schemas.microsoft.com/office/drawing/2014/main" id="{0FB9BDCF-2874-4012-9E50-56984F68C87C}"/>
               </a:ext>
             </a:extLst>
           </p:cNvPr>
@@ -7415,7 +6787,7 @@
           <p:cNvPr id="18" name="n-1-1">
             <a:extLst xmlns:a="http://schemas.openxmlformats.org/drawingml/2006/main">
               <a:ext uri="{FF2B5EF4-FFF2-40B4-BE49-F238E27FC236}">
-                <a16:creationId xmlns:a16="http://schemas.microsoft.com/office/drawing/2014/main" id="{CA6467C9-D868-472B-9AED-0121FEE174DF}"/>
+                <a16:creationId xmlns:a16="http://schemas.microsoft.com/office/drawing/2014/main" id="{7A257CEA-2B3C-4B54-9DA5-6D9F90D90DBB}"/>
               </a:ext>
             </a:extLst>
           </p:cNvPr>
@@ -7472,7 +6844,7 @@
           <p:cNvPr id="19" name="t-1-1">
             <a:extLst xmlns:a="http://schemas.openxmlformats.org/drawingml/2006/main">
               <a:ext uri="{FF2B5EF4-FFF2-40B4-BE49-F238E27FC236}">
-                <a16:creationId xmlns:a16="http://schemas.microsoft.com/office/drawing/2014/main" id="{7AE251A9-BC15-4BDF-8011-3A51C5E45342}"/>
+                <a16:creationId xmlns:a16="http://schemas.microsoft.com/office/drawing/2014/main" id="{100E33B5-9284-4E0A-8C5E-E234F3673B15}"/>
               </a:ext>
             </a:extLst>
           </p:cNvPr>
@@ -7531,7 +6903,7 @@
           <p:cNvPr id="20" name="n-1-2">
             <a:extLst xmlns:a="http://schemas.openxmlformats.org/drawingml/2006/main">
               <a:ext uri="{FF2B5EF4-FFF2-40B4-BE49-F238E27FC236}">
-                <a16:creationId xmlns:a16="http://schemas.microsoft.com/office/drawing/2014/main" id="{D913A8A7-0B8E-4249-9AEE-05078022DB67}"/>
+                <a16:creationId xmlns:a16="http://schemas.microsoft.com/office/drawing/2014/main" id="{D1521D5A-2F1A-45EB-A8C8-87BC91992366}"/>
               </a:ext>
             </a:extLst>
           </p:cNvPr>
@@ -7588,7 +6960,7 @@
           <p:cNvPr id="21" name="t-1-2">
             <a:extLst xmlns:a="http://schemas.openxmlformats.org/drawingml/2006/main">
               <a:ext uri="{FF2B5EF4-FFF2-40B4-BE49-F238E27FC236}">
-                <a16:creationId xmlns:a16="http://schemas.microsoft.com/office/drawing/2014/main" id="{D2921CCD-9657-4DC4-B317-490377B2AF57}"/>
+                <a16:creationId xmlns:a16="http://schemas.microsoft.com/office/drawing/2014/main" id="{AB26031E-E810-4BF4-89D8-4622F74C7720}"/>
               </a:ext>
             </a:extLst>
           </p:cNvPr>
@@ -7647,7 +7019,7 @@
           <p:cNvPr id="22" name="n-1-3">
             <a:extLst xmlns:a="http://schemas.openxmlformats.org/drawingml/2006/main">
               <a:ext uri="{FF2B5EF4-FFF2-40B4-BE49-F238E27FC236}">
-                <a16:creationId xmlns:a16="http://schemas.microsoft.com/office/drawing/2014/main" id="{4FABAC39-8516-4F7A-8521-41CF8B9C6F90}"/>
+                <a16:creationId xmlns:a16="http://schemas.microsoft.com/office/drawing/2014/main" id="{8D145B8E-81AB-4405-92A9-11543D8B550C}"/>
               </a:ext>
             </a:extLst>
           </p:cNvPr>
@@ -7704,7 +7076,7 @@
           <p:cNvPr id="23" name="t-1-3">
             <a:extLst xmlns:a="http://schemas.openxmlformats.org/drawingml/2006/main">
               <a:ext uri="{FF2B5EF4-FFF2-40B4-BE49-F238E27FC236}">
-                <a16:creationId xmlns:a16="http://schemas.microsoft.com/office/drawing/2014/main" id="{F05F12B3-F750-4548-8A92-3B2782EB21DA}"/>
+                <a16:creationId xmlns:a16="http://schemas.microsoft.com/office/drawing/2014/main" id="{2B5DCCFD-8B4C-44A6-90B3-A5EB8B5D78FE}"/>
               </a:ext>
             </a:extLst>
           </p:cNvPr>
@@ -7763,7 +7135,7 @@
           <p:cNvPr id="24" name="h-2">
             <a:extLst xmlns:a="http://schemas.openxmlformats.org/drawingml/2006/main">
               <a:ext uri="{FF2B5EF4-FFF2-40B4-BE49-F238E27FC236}">
-                <a16:creationId xmlns:a16="http://schemas.microsoft.com/office/drawing/2014/main" id="{FF808012-2AEF-410E-8FE2-6A1A752B5B49}"/>
+                <a16:creationId xmlns:a16="http://schemas.microsoft.com/office/drawing/2014/main" id="{71565A1C-B2E2-4811-91B0-92CD3ACA7362}"/>
               </a:ext>
             </a:extLst>
           </p:cNvPr>
@@ -7818,7 +7190,7 @@
           <p:cNvPr id="25" name="n-2-0">
             <a:extLst xmlns:a="http://schemas.openxmlformats.org/drawingml/2006/main">
               <a:ext uri="{FF2B5EF4-FFF2-40B4-BE49-F238E27FC236}">
-                <a16:creationId xmlns:a16="http://schemas.microsoft.com/office/drawing/2014/main" id="{9B72B4FA-79D5-45B3-97D9-56F0F80FF42B}"/>
+                <a16:creationId xmlns:a16="http://schemas.microsoft.com/office/drawing/2014/main" id="{DBD655B9-E9B0-4049-8CE7-1D1164C0670D}"/>
               </a:ext>
             </a:extLst>
           </p:cNvPr>
@@ -7875,7 +7247,7 @@
           <p:cNvPr id="26" name="t-2-0">
             <a:extLst xmlns:a="http://schemas.openxmlformats.org/drawingml/2006/main">
               <a:ext uri="{FF2B5EF4-FFF2-40B4-BE49-F238E27FC236}">
-                <a16:creationId xmlns:a16="http://schemas.microsoft.com/office/drawing/2014/main" id="{3E459262-589F-4082-B92F-CEFD87B3DF3E}"/>
+                <a16:creationId xmlns:a16="http://schemas.microsoft.com/office/drawing/2014/main" id="{166B311F-9036-4CBF-B1FE-3999AB700508}"/>
               </a:ext>
             </a:extLst>
           </p:cNvPr>
@@ -7934,7 +7306,7 @@
           <p:cNvPr id="27" name="n-2-1">
             <a:extLst xmlns:a="http://schemas.openxmlformats.org/drawingml/2006/main">
               <a:ext uri="{FF2B5EF4-FFF2-40B4-BE49-F238E27FC236}">
-                <a16:creationId xmlns:a16="http://schemas.microsoft.com/office/drawing/2014/main" id="{86C7AE31-EC42-4302-848A-3E5915AA8B19}"/>
+                <a16:creationId xmlns:a16="http://schemas.microsoft.com/office/drawing/2014/main" id="{A1063B20-A4D2-4C74-88A7-954DBB1ADB06}"/>
               </a:ext>
             </a:extLst>
           </p:cNvPr>
@@ -7991,7 +7363,7 @@
           <p:cNvPr id="28" name="t-2-1">
             <a:extLst xmlns:a="http://schemas.openxmlformats.org/drawingml/2006/main">
               <a:ext uri="{FF2B5EF4-FFF2-40B4-BE49-F238E27FC236}">
-                <a16:creationId xmlns:a16="http://schemas.microsoft.com/office/drawing/2014/main" id="{075FB767-7E0E-4B1A-ADDA-9FCF5CCBE428}"/>
+                <a16:creationId xmlns:a16="http://schemas.microsoft.com/office/drawing/2014/main" id="{31772859-4E7B-43BA-8A8F-EB6EDA9F5DC5}"/>
               </a:ext>
             </a:extLst>
           </p:cNvPr>
@@ -8050,7 +7422,7 @@
           <p:cNvPr id="29" name="n-2-2">
             <a:extLst xmlns:a="http://schemas.openxmlformats.org/drawingml/2006/main">
               <a:ext uri="{FF2B5EF4-FFF2-40B4-BE49-F238E27FC236}">
-                <a16:creationId xmlns:a16="http://schemas.microsoft.com/office/drawing/2014/main" id="{FFCEF859-882B-4C0D-8936-1D9473C3F6C3}"/>
+                <a16:creationId xmlns:a16="http://schemas.microsoft.com/office/drawing/2014/main" id="{AD4EDD7A-3097-4DB1-81C7-195F97F277FD}"/>
               </a:ext>
             </a:extLst>
           </p:cNvPr>
@@ -8107,7 +7479,7 @@
           <p:cNvPr id="30" name="t-2-2">
             <a:extLst xmlns:a="http://schemas.openxmlformats.org/drawingml/2006/main">
               <a:ext uri="{FF2B5EF4-FFF2-40B4-BE49-F238E27FC236}">
-                <a16:creationId xmlns:a16="http://schemas.microsoft.com/office/drawing/2014/main" id="{F9D2742D-335E-460E-AC29-084A900B57DE}"/>
+                <a16:creationId xmlns:a16="http://schemas.microsoft.com/office/drawing/2014/main" id="{DF25B0D0-9B97-48E1-A0EC-18A8D1D2879B}"/>
               </a:ext>
             </a:extLst>
           </p:cNvPr>
@@ -8166,7 +7538,7 @@
           <p:cNvPr id="31" name="n-2-3">
             <a:extLst xmlns:a="http://schemas.openxmlformats.org/drawingml/2006/main">
               <a:ext uri="{FF2B5EF4-FFF2-40B4-BE49-F238E27FC236}">
-                <a16:creationId xmlns:a16="http://schemas.microsoft.com/office/drawing/2014/main" id="{B0483942-80A3-4275-AD4A-0CDDB8CFE0ED}"/>
+                <a16:creationId xmlns:a16="http://schemas.microsoft.com/office/drawing/2014/main" id="{1302ACF0-3618-4DDF-8ED9-D94F23D2B131}"/>
               </a:ext>
             </a:extLst>
           </p:cNvPr>
@@ -8223,7 +7595,7 @@
           <p:cNvPr id="32" name="t-2-3">
             <a:extLst xmlns:a="http://schemas.openxmlformats.org/drawingml/2006/main">
               <a:ext uri="{FF2B5EF4-FFF2-40B4-BE49-F238E27FC236}">
-                <a16:creationId xmlns:a16="http://schemas.microsoft.com/office/drawing/2014/main" id="{08FFD6FB-1D54-4A4F-9921-18F9579C5072}"/>
+                <a16:creationId xmlns:a16="http://schemas.microsoft.com/office/drawing/2014/main" id="{403E309D-74DA-4E5F-B18E-B67FCA153499}"/>
               </a:ext>
             </a:extLst>
           </p:cNvPr>
@@ -8282,7 +7654,7 @@
           <p:cNvPr id="33" name="bottom">
             <a:extLst xmlns:a="http://schemas.openxmlformats.org/drawingml/2006/main">
               <a:ext uri="{FF2B5EF4-FFF2-40B4-BE49-F238E27FC236}">
-                <a16:creationId xmlns:a16="http://schemas.microsoft.com/office/drawing/2014/main" id="{2C6A41B9-1103-4A14-A5FD-F6F7D11D2351}"/>
+                <a16:creationId xmlns:a16="http://schemas.microsoft.com/office/drawing/2014/main" id="{8230E622-DFEF-4C22-834F-7C95C35C93E2}"/>
               </a:ext>
             </a:extLst>
           </p:cNvPr>
@@ -8429,76 +7801,19 @@
           <p:cNvPr id="6" name="teaching-label">
             <a:extLst xmlns:a="http://schemas.openxmlformats.org/drawingml/2006/main">
               <a:ext uri="{FF2B5EF4-FFF2-40B4-BE49-F238E27FC236}">
-                <a16:creationId xmlns:a16="http://schemas.microsoft.com/office/drawing/2014/main" id="{DBA5AA7E-F16C-45C6-B444-61C839EA66BB}"/>
-              </a:ext>
-            </a:extLst>
-          </p:cNvPr>
-          <p:cNvSpPr>
-            <a:spLocks xmlns:a="http://schemas.openxmlformats.org/drawingml/2006/main" noGrp="1"/>
-          </p:cNvSpPr>
-          <p:nvPr/>
-        </p:nvSpPr>
-        <p:spPr>
-          <a:xfrm xmlns:a="http://schemas.openxmlformats.org/drawingml/2006/main">
-            <a:off x="8334375" y="838200"/>
-            <a:ext cx="3105150" cy="323850"/>
-          </a:xfrm>
-          <a:prstGeom xmlns:a="http://schemas.openxmlformats.org/drawingml/2006/main" prst="roundRect">
-            <a:avLst>
-              <a:gd name="adj" fmla="val 23529"/>
-            </a:avLst>
-          </a:prstGeom>
-          <a:solidFill xmlns:a="http://schemas.openxmlformats.org/drawingml/2006/main">
-            <a:srgbClr val="F8E9EA"/>
-          </a:solidFill>
-          <a:ln xmlns:a="http://schemas.openxmlformats.org/drawingml/2006/main" w="0">
-            <a:noFill/>
-            <a:prstDash val="solid"/>
-          </a:ln>
-        </p:spPr>
-        <p:txBody>
-          <a:bodyPr xmlns:a="http://schemas.openxmlformats.org/drawingml/2006/main" lIns="76200" tIns="38100" rIns="76200" bIns="38100" anchor="ctr"/>
-          <a:lstStyle xmlns:a="http://schemas.openxmlformats.org/drawingml/2006/main"/>
-          <a:p xmlns:a="http://schemas.openxmlformats.org/drawingml/2006/main">
-            <a:pPr algn="ctr">
-              <a:defRPr sz="1350" b="1">
-                <a:solidFill>
-                  <a:srgbClr val="C8161E"/>
-                </a:solidFill>
-              </a:defRPr>
-            </a:pPr>
-            <a:r>
-              <a:rPr sz="1350" b="1">
-                <a:solidFill>
-                  <a:srgbClr val="C8161E"/>
-                </a:solidFill>
-                <a:latin typeface="Microsoft YaHei"/>
-                <a:ea typeface="Microsoft YaHei"/>
-                <a:cs typeface="Microsoft YaHei"/>
-              </a:rPr>
-              <a:t>虚构教学示例 · 仅演示追踪动作</a:t>
-            </a:r>
-          </a:p>
-        </p:txBody>
-      </p:sp>
-      <p:sp>
-        <p:nvSpPr>
-          <p:cNvPr id="7" name="num-0">
-            <a:extLst xmlns:a="http://schemas.openxmlformats.org/drawingml/2006/main">
-              <a:ext uri="{FF2B5EF4-FFF2-40B4-BE49-F238E27FC236}">
-                <a16:creationId xmlns:a16="http://schemas.microsoft.com/office/drawing/2014/main" id="{D4A0FF64-1017-4362-AB1F-4CE27BA1E0DA}"/>
-              </a:ext>
-            </a:extLst>
-          </p:cNvPr>
-          <p:cNvSpPr>
-            <a:spLocks xmlns:a="http://schemas.openxmlformats.org/drawingml/2006/main" noGrp="1"/>
-          </p:cNvSpPr>
-          <p:nvPr/>
-        </p:nvSpPr>
-        <p:spPr>
-          <a:xfrm xmlns:a="http://schemas.openxmlformats.org/drawingml/2006/main">
-            <a:off x="476250" y="1428750"/>
-            <a:ext cx="419100" cy="419100"/>
+                <a16:creationId xmlns:a16="http://schemas.microsoft.com/office/drawing/2014/main" id="{7A96FD03-E8A9-4468-A5C9-CBB16CEA26A2}"/>
+              </a:ext>
+            </a:extLst>
+          </p:cNvPr>
+          <p:cNvSpPr>
+            <a:spLocks xmlns:a="http://schemas.openxmlformats.org/drawingml/2006/main" noGrp="1"/>
+          </p:cNvSpPr>
+          <p:nvPr/>
+        </p:nvSpPr>
+        <p:spPr>
+          <a:xfrm xmlns:a="http://schemas.openxmlformats.org/drawingml/2006/main">
+            <a:off x="7524750" y="800100"/>
+            <a:ext cx="3943350" cy="419100"/>
           </a:xfrm>
           <a:prstGeom xmlns:a="http://schemas.openxmlformats.org/drawingml/2006/main" prst="roundRect">
             <a:avLst>
@@ -8506,6 +7821,63 @@
             </a:avLst>
           </a:prstGeom>
           <a:solidFill xmlns:a="http://schemas.openxmlformats.org/drawingml/2006/main">
+            <a:srgbClr val="F8E9EA"/>
+          </a:solidFill>
+          <a:ln xmlns:a="http://schemas.openxmlformats.org/drawingml/2006/main" w="0">
+            <a:noFill/>
+            <a:prstDash val="solid"/>
+          </a:ln>
+        </p:spPr>
+        <p:txBody>
+          <a:bodyPr xmlns:a="http://schemas.openxmlformats.org/drawingml/2006/main" lIns="76200" tIns="38100" rIns="76200" bIns="38100" anchor="ctr"/>
+          <a:lstStyle xmlns:a="http://schemas.openxmlformats.org/drawingml/2006/main"/>
+          <a:p xmlns:a="http://schemas.openxmlformats.org/drawingml/2006/main">
+            <a:pPr algn="ctr">
+              <a:defRPr sz="1800" b="1">
+                <a:solidFill>
+                  <a:srgbClr val="C8161E"/>
+                </a:solidFill>
+              </a:defRPr>
+            </a:pPr>
+            <a:r>
+              <a:rPr sz="1800" b="1">
+                <a:solidFill>
+                  <a:srgbClr val="C8161E"/>
+                </a:solidFill>
+                <a:latin typeface="Microsoft YaHei"/>
+                <a:ea typeface="Microsoft YaHei"/>
+                <a:cs typeface="Microsoft YaHei"/>
+              </a:rPr>
+              <a:t>虚构教学示例｜非真实实验</a:t>
+            </a:r>
+          </a:p>
+        </p:txBody>
+      </p:sp>
+      <p:sp>
+        <p:nvSpPr>
+          <p:cNvPr id="7" name="num-0">
+            <a:extLst xmlns:a="http://schemas.openxmlformats.org/drawingml/2006/main">
+              <a:ext uri="{FF2B5EF4-FFF2-40B4-BE49-F238E27FC236}">
+                <a16:creationId xmlns:a16="http://schemas.microsoft.com/office/drawing/2014/main" id="{CEC627C1-CBD2-4270-A8B3-9AB389B38A21}"/>
+              </a:ext>
+            </a:extLst>
+          </p:cNvPr>
+          <p:cNvSpPr>
+            <a:spLocks xmlns:a="http://schemas.openxmlformats.org/drawingml/2006/main" noGrp="1"/>
+          </p:cNvSpPr>
+          <p:nvPr/>
+        </p:nvSpPr>
+        <p:spPr>
+          <a:xfrm xmlns:a="http://schemas.openxmlformats.org/drawingml/2006/main">
+            <a:off x="476250" y="1428750"/>
+            <a:ext cx="419100" cy="419100"/>
+          </a:xfrm>
+          <a:prstGeom xmlns:a="http://schemas.openxmlformats.org/drawingml/2006/main" prst="roundRect">
+            <a:avLst>
+              <a:gd name="adj" fmla="val 18182"/>
+            </a:avLst>
+          </a:prstGeom>
+          <a:solidFill xmlns:a="http://schemas.openxmlformats.org/drawingml/2006/main">
             <a:srgbClr val="18354E"/>
           </a:solidFill>
           <a:ln xmlns:a="http://schemas.openxmlformats.org/drawingml/2006/main" w="0">
@@ -8543,7 +7915,7 @@
           <p:cNvPr id="8" name="h-0">
             <a:extLst xmlns:a="http://schemas.openxmlformats.org/drawingml/2006/main">
               <a:ext uri="{FF2B5EF4-FFF2-40B4-BE49-F238E27FC236}">
-                <a16:creationId xmlns:a16="http://schemas.microsoft.com/office/drawing/2014/main" id="{1E15F1C5-B71D-4E33-A79A-8EDC5B0709A3}"/>
+                <a16:creationId xmlns:a16="http://schemas.microsoft.com/office/drawing/2014/main" id="{7573F6DF-D682-4E48-8565-DA4C44C37646}"/>
               </a:ext>
             </a:extLst>
           </p:cNvPr>
@@ -8598,7 +7970,7 @@
           <p:cNvPr id="9" name="d-0">
             <a:extLst xmlns:a="http://schemas.openxmlformats.org/drawingml/2006/main">
               <a:ext uri="{FF2B5EF4-FFF2-40B4-BE49-F238E27FC236}">
-                <a16:creationId xmlns:a16="http://schemas.microsoft.com/office/drawing/2014/main" id="{F4E4D14E-6BED-4D98-BFC4-1AF7F3E2ECDF}"/>
+                <a16:creationId xmlns:a16="http://schemas.microsoft.com/office/drawing/2014/main" id="{0F03AD06-E89E-4F18-A8E6-89CEAF2691EB}"/>
               </a:ext>
             </a:extLst>
           </p:cNvPr>
@@ -8661,7 +8033,7 @@
           <p:cNvPr id="10" name="line-0">
             <a:extLst xmlns:a="http://schemas.openxmlformats.org/drawingml/2006/main">
               <a:ext uri="{FF2B5EF4-FFF2-40B4-BE49-F238E27FC236}">
-                <a16:creationId xmlns:a16="http://schemas.microsoft.com/office/drawing/2014/main" id="{F795A3AD-C73C-4B83-B5DE-8095028E473C}"/>
+                <a16:creationId xmlns:a16="http://schemas.microsoft.com/office/drawing/2014/main" id="{82D02B40-B6DC-4A6B-9A08-6053221958D8}"/>
               </a:ext>
             </a:extLst>
           </p:cNvPr>
@@ -8692,7 +8064,7 @@
           <p:cNvPr id="11" name="num-1">
             <a:extLst xmlns:a="http://schemas.openxmlformats.org/drawingml/2006/main">
               <a:ext uri="{FF2B5EF4-FFF2-40B4-BE49-F238E27FC236}">
-                <a16:creationId xmlns:a16="http://schemas.microsoft.com/office/drawing/2014/main" id="{631BBC81-7A47-4632-AEE9-8C4F616674D1}"/>
+                <a16:creationId xmlns:a16="http://schemas.microsoft.com/office/drawing/2014/main" id="{4DB16336-D112-47C0-B9E1-418E026B2738}"/>
               </a:ext>
             </a:extLst>
           </p:cNvPr>
@@ -8749,7 +8121,7 @@
           <p:cNvPr id="12" name="h-1">
             <a:extLst xmlns:a="http://schemas.openxmlformats.org/drawingml/2006/main">
               <a:ext uri="{FF2B5EF4-FFF2-40B4-BE49-F238E27FC236}">
-                <a16:creationId xmlns:a16="http://schemas.microsoft.com/office/drawing/2014/main" id="{3B9FEB81-3B26-4652-8DF6-16C2B421583D}"/>
+                <a16:creationId xmlns:a16="http://schemas.microsoft.com/office/drawing/2014/main" id="{D7F84C07-A46F-4521-BE64-5DA4C20A1FEE}"/>
               </a:ext>
             </a:extLst>
           </p:cNvPr>
@@ -8804,7 +8176,7 @@
           <p:cNvPr id="13" name="d-1">
             <a:extLst xmlns:a="http://schemas.openxmlformats.org/drawingml/2006/main">
               <a:ext uri="{FF2B5EF4-FFF2-40B4-BE49-F238E27FC236}">
-                <a16:creationId xmlns:a16="http://schemas.microsoft.com/office/drawing/2014/main" id="{78532EA8-84A0-452B-AD53-86B0F1D068A1}"/>
+                <a16:creationId xmlns:a16="http://schemas.microsoft.com/office/drawing/2014/main" id="{4F69E3E2-11AD-4616-A2E2-CC02221747FB}"/>
               </a:ext>
             </a:extLst>
           </p:cNvPr>
@@ -8867,7 +8239,7 @@
           <p:cNvPr id="14" name="line-1">
             <a:extLst xmlns:a="http://schemas.openxmlformats.org/drawingml/2006/main">
               <a:ext uri="{FF2B5EF4-FFF2-40B4-BE49-F238E27FC236}">
-                <a16:creationId xmlns:a16="http://schemas.microsoft.com/office/drawing/2014/main" id="{5454A612-4B54-4361-9827-921B2FC1BB24}"/>
+                <a16:creationId xmlns:a16="http://schemas.microsoft.com/office/drawing/2014/main" id="{1ED8D620-930F-4B59-9E92-66BB9A4F82C8}"/>
               </a:ext>
             </a:extLst>
           </p:cNvPr>
@@ -8898,7 +8270,7 @@
           <p:cNvPr id="15" name="num-2">
             <a:extLst xmlns:a="http://schemas.openxmlformats.org/drawingml/2006/main">
               <a:ext uri="{FF2B5EF4-FFF2-40B4-BE49-F238E27FC236}">
-                <a16:creationId xmlns:a16="http://schemas.microsoft.com/office/drawing/2014/main" id="{42E13C28-2268-4E8B-A0FA-071B76910C3B}"/>
+                <a16:creationId xmlns:a16="http://schemas.microsoft.com/office/drawing/2014/main" id="{A42E6239-F952-4525-9440-01B23992BB87}"/>
               </a:ext>
             </a:extLst>
           </p:cNvPr>
@@ -8955,7 +8327,7 @@
           <p:cNvPr id="16" name="h-2">
             <a:extLst xmlns:a="http://schemas.openxmlformats.org/drawingml/2006/main">
               <a:ext uri="{FF2B5EF4-FFF2-40B4-BE49-F238E27FC236}">
-                <a16:creationId xmlns:a16="http://schemas.microsoft.com/office/drawing/2014/main" id="{DFD44363-EF4E-4035-8EBE-050C70962756}"/>
+                <a16:creationId xmlns:a16="http://schemas.microsoft.com/office/drawing/2014/main" id="{2A10092B-FEAE-4667-A228-AE2EB2EECCE1}"/>
               </a:ext>
             </a:extLst>
           </p:cNvPr>
@@ -9010,7 +8382,7 @@
           <p:cNvPr id="17" name="d-2">
             <a:extLst xmlns:a="http://schemas.openxmlformats.org/drawingml/2006/main">
               <a:ext uri="{FF2B5EF4-FFF2-40B4-BE49-F238E27FC236}">
-                <a16:creationId xmlns:a16="http://schemas.microsoft.com/office/drawing/2014/main" id="{0644F47D-45F4-46FC-AAA5-B9FED25469D5}"/>
+                <a16:creationId xmlns:a16="http://schemas.microsoft.com/office/drawing/2014/main" id="{5028F7BD-D4A7-4DCC-8CE3-A093B2A05A30}"/>
               </a:ext>
             </a:extLst>
           </p:cNvPr>
@@ -9073,7 +8445,7 @@
           <p:cNvPr id="18" name="line-2">
             <a:extLst xmlns:a="http://schemas.openxmlformats.org/drawingml/2006/main">
               <a:ext uri="{FF2B5EF4-FFF2-40B4-BE49-F238E27FC236}">
-                <a16:creationId xmlns:a16="http://schemas.microsoft.com/office/drawing/2014/main" id="{5DF19C53-8296-4390-91B7-947A4083D883}"/>
+                <a16:creationId xmlns:a16="http://schemas.microsoft.com/office/drawing/2014/main" id="{04D2D2B1-612F-4BC4-8A9D-E8D0CCBA8CD2}"/>
               </a:ext>
             </a:extLst>
           </p:cNvPr>
@@ -9104,7 +8476,7 @@
           <p:cNvPr id="19" name="num-3">
             <a:extLst xmlns:a="http://schemas.openxmlformats.org/drawingml/2006/main">
               <a:ext uri="{FF2B5EF4-FFF2-40B4-BE49-F238E27FC236}">
-                <a16:creationId xmlns:a16="http://schemas.microsoft.com/office/drawing/2014/main" id="{2303DC26-29B0-4C72-88E8-3C5B52762B18}"/>
+                <a16:creationId xmlns:a16="http://schemas.microsoft.com/office/drawing/2014/main" id="{7CA9646F-D3AC-4913-B7A6-55ADA18E6B3A}"/>
               </a:ext>
             </a:extLst>
           </p:cNvPr>
@@ -9161,7 +8533,7 @@
           <p:cNvPr id="20" name="h-3">
             <a:extLst xmlns:a="http://schemas.openxmlformats.org/drawingml/2006/main">
               <a:ext uri="{FF2B5EF4-FFF2-40B4-BE49-F238E27FC236}">
-                <a16:creationId xmlns:a16="http://schemas.microsoft.com/office/drawing/2014/main" id="{9FCC2448-F808-4465-BC97-46C41C247431}"/>
+                <a16:creationId xmlns:a16="http://schemas.microsoft.com/office/drawing/2014/main" id="{1C581680-6DBB-4D79-860D-A5EA666BD08C}"/>
               </a:ext>
             </a:extLst>
           </p:cNvPr>
@@ -9216,7 +8588,7 @@
           <p:cNvPr id="21" name="d-3">
             <a:extLst xmlns:a="http://schemas.openxmlformats.org/drawingml/2006/main">
               <a:ext uri="{FF2B5EF4-FFF2-40B4-BE49-F238E27FC236}">
-                <a16:creationId xmlns:a16="http://schemas.microsoft.com/office/drawing/2014/main" id="{3E05842F-D2E7-4DBB-89DB-AC8648B8E265}"/>
+                <a16:creationId xmlns:a16="http://schemas.microsoft.com/office/drawing/2014/main" id="{FAC2E468-CF11-423D-A207-18A30B010BE4}"/>
               </a:ext>
             </a:extLst>
           </p:cNvPr>
@@ -9303,7 +8675,7 @@
           <p:cNvPr id="22" name="num-4">
             <a:extLst xmlns:a="http://schemas.openxmlformats.org/drawingml/2006/main">
               <a:ext uri="{FF2B5EF4-FFF2-40B4-BE49-F238E27FC236}">
-                <a16:creationId xmlns:a16="http://schemas.microsoft.com/office/drawing/2014/main" id="{764B68C4-3078-4230-965F-2916CA254465}"/>
+                <a16:creationId xmlns:a16="http://schemas.microsoft.com/office/drawing/2014/main" id="{3D66538B-9BA4-4B24-8B38-03DB4EC01A0B}"/>
               </a:ext>
             </a:extLst>
           </p:cNvPr>
@@ -9360,7 +8732,7 @@
           <p:cNvPr id="23" name="h-4">
             <a:extLst xmlns:a="http://schemas.openxmlformats.org/drawingml/2006/main">
               <a:ext uri="{FF2B5EF4-FFF2-40B4-BE49-F238E27FC236}">
-                <a16:creationId xmlns:a16="http://schemas.microsoft.com/office/drawing/2014/main" id="{D2B2B555-CD20-4250-A3A4-14973C1A5C2F}"/>
+                <a16:creationId xmlns:a16="http://schemas.microsoft.com/office/drawing/2014/main" id="{78F0F995-E754-4DCB-8FED-968FEE23EBFE}"/>
               </a:ext>
             </a:extLst>
           </p:cNvPr>
@@ -9415,7 +8787,7 @@
           <p:cNvPr id="24" name="d-4">
             <a:extLst xmlns:a="http://schemas.openxmlformats.org/drawingml/2006/main">
               <a:ext uri="{FF2B5EF4-FFF2-40B4-BE49-F238E27FC236}">
-                <a16:creationId xmlns:a16="http://schemas.microsoft.com/office/drawing/2014/main" id="{409B4CD0-2AB6-4D5A-9AC1-E82E66B0166A}"/>
+                <a16:creationId xmlns:a16="http://schemas.microsoft.com/office/drawing/2014/main" id="{BCDE5537-49AD-4092-B508-1B0B27E1D314}"/>
               </a:ext>
             </a:extLst>
           </p:cNvPr>
@@ -9478,7 +8850,7 @@
           <p:cNvPr id="25" name="line-4">
             <a:extLst xmlns:a="http://schemas.openxmlformats.org/drawingml/2006/main">
               <a:ext uri="{FF2B5EF4-FFF2-40B4-BE49-F238E27FC236}">
-                <a16:creationId xmlns:a16="http://schemas.microsoft.com/office/drawing/2014/main" id="{C9E19BD9-4C7C-4B18-BCDE-F0CA9E679B79}"/>
+                <a16:creationId xmlns:a16="http://schemas.microsoft.com/office/drawing/2014/main" id="{D2ABAE10-488D-427D-B445-082E84206561}"/>
               </a:ext>
             </a:extLst>
           </p:cNvPr>
@@ -9509,7 +8881,7 @@
           <p:cNvPr id="26" name="num-5">
             <a:extLst xmlns:a="http://schemas.openxmlformats.org/drawingml/2006/main">
               <a:ext uri="{FF2B5EF4-FFF2-40B4-BE49-F238E27FC236}">
-                <a16:creationId xmlns:a16="http://schemas.microsoft.com/office/drawing/2014/main" id="{E196C082-6793-4122-B229-3D37298F999C}"/>
+                <a16:creationId xmlns:a16="http://schemas.microsoft.com/office/drawing/2014/main" id="{4D89965D-86CB-441B-8587-4D59DB746A42}"/>
               </a:ext>
             </a:extLst>
           </p:cNvPr>
@@ -9566,7 +8938,7 @@
           <p:cNvPr id="27" name="h-5">
             <a:extLst xmlns:a="http://schemas.openxmlformats.org/drawingml/2006/main">
               <a:ext uri="{FF2B5EF4-FFF2-40B4-BE49-F238E27FC236}">
-                <a16:creationId xmlns:a16="http://schemas.microsoft.com/office/drawing/2014/main" id="{2CB845D2-B54D-46DB-A2D7-86E46E8A30BC}"/>
+                <a16:creationId xmlns:a16="http://schemas.microsoft.com/office/drawing/2014/main" id="{4B2CE903-4675-4861-9231-DB84F7248721}"/>
               </a:ext>
             </a:extLst>
           </p:cNvPr>
@@ -9621,7 +8993,7 @@
           <p:cNvPr id="28" name="d-5">
             <a:extLst xmlns:a="http://schemas.openxmlformats.org/drawingml/2006/main">
               <a:ext uri="{FF2B5EF4-FFF2-40B4-BE49-F238E27FC236}">
-                <a16:creationId xmlns:a16="http://schemas.microsoft.com/office/drawing/2014/main" id="{CF9EF745-EF34-4C50-8820-52DD5871C303}"/>
+                <a16:creationId xmlns:a16="http://schemas.microsoft.com/office/drawing/2014/main" id="{B7B7A0D8-E9DE-4CC4-A7A4-42061B39EC5A}"/>
               </a:ext>
             </a:extLst>
           </p:cNvPr>
@@ -9684,7 +9056,7 @@
           <p:cNvPr id="29" name="line-5">
             <a:extLst xmlns:a="http://schemas.openxmlformats.org/drawingml/2006/main">
               <a:ext uri="{FF2B5EF4-FFF2-40B4-BE49-F238E27FC236}">
-                <a16:creationId xmlns:a16="http://schemas.microsoft.com/office/drawing/2014/main" id="{D2854168-160C-4E60-8396-BE672A574D4B}"/>
+                <a16:creationId xmlns:a16="http://schemas.microsoft.com/office/drawing/2014/main" id="{5C6EF02F-1E4F-4305-9B19-48E80B2EDF7D}"/>
               </a:ext>
             </a:extLst>
           </p:cNvPr>
@@ -9715,7 +9087,7 @@
           <p:cNvPr id="30" name="num-6">
             <a:extLst xmlns:a="http://schemas.openxmlformats.org/drawingml/2006/main">
               <a:ext uri="{FF2B5EF4-FFF2-40B4-BE49-F238E27FC236}">
-                <a16:creationId xmlns:a16="http://schemas.microsoft.com/office/drawing/2014/main" id="{DFE49A07-D876-4B78-B76C-7BA204C4ED4E}"/>
+                <a16:creationId xmlns:a16="http://schemas.microsoft.com/office/drawing/2014/main" id="{CE9A0465-9038-4ADF-9612-EB613A4C9854}"/>
               </a:ext>
             </a:extLst>
           </p:cNvPr>
@@ -9772,7 +9144,7 @@
           <p:cNvPr id="31" name="h-6">
             <a:extLst xmlns:a="http://schemas.openxmlformats.org/drawingml/2006/main">
               <a:ext uri="{FF2B5EF4-FFF2-40B4-BE49-F238E27FC236}">
-                <a16:creationId xmlns:a16="http://schemas.microsoft.com/office/drawing/2014/main" id="{2AECF2B5-9662-401B-A063-E85B26F3AA25}"/>
+                <a16:creationId xmlns:a16="http://schemas.microsoft.com/office/drawing/2014/main" id="{70F9AF3E-F3FD-4CBB-B53C-97BA16FA1262}"/>
               </a:ext>
             </a:extLst>
           </p:cNvPr>
@@ -9827,7 +9199,7 @@
           <p:cNvPr id="32" name="d-6">
             <a:extLst xmlns:a="http://schemas.openxmlformats.org/drawingml/2006/main">
               <a:ext uri="{FF2B5EF4-FFF2-40B4-BE49-F238E27FC236}">
-                <a16:creationId xmlns:a16="http://schemas.microsoft.com/office/drawing/2014/main" id="{3C79CE0C-BFD3-4FA8-A5B1-B3FAB5777130}"/>
+                <a16:creationId xmlns:a16="http://schemas.microsoft.com/office/drawing/2014/main" id="{90FD5AF4-5278-452D-B79B-433998D1F566}"/>
               </a:ext>
             </a:extLst>
           </p:cNvPr>
@@ -9890,7 +9262,7 @@
           <p:cNvPr id="33" name="bottom">
             <a:extLst xmlns:a="http://schemas.openxmlformats.org/drawingml/2006/main">
               <a:ext uri="{FF2B5EF4-FFF2-40B4-BE49-F238E27FC236}">
-                <a16:creationId xmlns:a16="http://schemas.microsoft.com/office/drawing/2014/main" id="{F81CB4CA-D088-4666-BDCF-B7F72DB6E9CD}"/>
+                <a16:creationId xmlns:a16="http://schemas.microsoft.com/office/drawing/2014/main" id="{1BB59CF9-15C6-43BE-B872-BB2B6E3A914D}"/>
               </a:ext>
             </a:extLst>
           </p:cNvPr>
@@ -9998,7 +9370,7 @@
                 <a:ea typeface="Microsoft YaHei"/>
                 <a:cs typeface="Microsoft YaHei"/>
               </a:rPr>
-              <a:t>实践停留页：论证门条件预演清单</a:t>
+              <a:t>实践停留页：论证门条件 1–5</a:t>
             </a:r>
             <a:endParaRPr/>
           </a:p>
@@ -10037,23 +9409,23 @@
           <p:cNvPr id="6" name="time">
             <a:extLst xmlns:a="http://schemas.openxmlformats.org/drawingml/2006/main">
               <a:ext uri="{FF2B5EF4-FFF2-40B4-BE49-F238E27FC236}">
-                <a16:creationId xmlns:a16="http://schemas.microsoft.com/office/drawing/2014/main" id="{B8EB19A5-06D8-4C81-8230-8911490E2634}"/>
-              </a:ext>
-            </a:extLst>
-          </p:cNvPr>
-          <p:cNvSpPr>
-            <a:spLocks xmlns:a="http://schemas.openxmlformats.org/drawingml/2006/main" noGrp="1"/>
-          </p:cNvSpPr>
-          <p:nvPr/>
-        </p:nvSpPr>
-        <p:spPr>
-          <a:xfrm xmlns:a="http://schemas.openxmlformats.org/drawingml/2006/main">
-            <a:off x="666750" y="952500"/>
-            <a:ext cx="2857500" cy="419100"/>
+                <a16:creationId xmlns:a16="http://schemas.microsoft.com/office/drawing/2014/main" id="{D82BEE8B-DDCF-406B-A3DE-ACBC6BF93D7C}"/>
+              </a:ext>
+            </a:extLst>
+          </p:cNvPr>
+          <p:cNvSpPr>
+            <a:spLocks xmlns:a="http://schemas.openxmlformats.org/drawingml/2006/main" noGrp="1"/>
+          </p:cNvSpPr>
+          <p:nvPr/>
+        </p:nvSpPr>
+        <p:spPr>
+          <a:xfrm xmlns:a="http://schemas.openxmlformats.org/drawingml/2006/main">
+            <a:off x="666750" y="914400"/>
+            <a:ext cx="3314700" cy="476250"/>
           </a:xfrm>
           <a:prstGeom xmlns:a="http://schemas.openxmlformats.org/drawingml/2006/main" prst="roundRect">
             <a:avLst>
-              <a:gd name="adj" fmla="val 18182"/>
+              <a:gd name="adj" fmla="val 16000"/>
             </a:avLst>
           </a:prstGeom>
           <a:solidFill xmlns:a="http://schemas.openxmlformats.org/drawingml/2006/main">
@@ -10069,14 +9441,14 @@
           <a:lstStyle xmlns:a="http://schemas.openxmlformats.org/drawingml/2006/main"/>
           <a:p xmlns:a="http://schemas.openxmlformats.org/drawingml/2006/main">
             <a:pPr algn="ctr">
-              <a:defRPr sz="1425" b="1">
+              <a:defRPr sz="1800" b="1">
                 <a:solidFill>
                   <a:srgbClr val="FFFFFF"/>
                 </a:solidFill>
               </a:defRPr>
             </a:pPr>
             <a:r>
-              <a:rPr sz="1425" b="1">
+              <a:rPr sz="1800" b="1">
                 <a:solidFill>
                   <a:srgbClr val="FFFFFF"/>
                 </a:solidFill>
@@ -10094,19 +9466,19 @@
           <p:cNvPr id="7" name="instruction">
             <a:extLst xmlns:a="http://schemas.openxmlformats.org/drawingml/2006/main">
               <a:ext uri="{FF2B5EF4-FFF2-40B4-BE49-F238E27FC236}">
-                <a16:creationId xmlns:a16="http://schemas.microsoft.com/office/drawing/2014/main" id="{00E0941C-B7C6-4F5E-8A26-9F3675200CBA}"/>
-              </a:ext>
-            </a:extLst>
-          </p:cNvPr>
-          <p:cNvSpPr>
-            <a:spLocks xmlns:a="http://schemas.openxmlformats.org/drawingml/2006/main" noGrp="1"/>
-          </p:cNvSpPr>
-          <p:nvPr/>
-        </p:nvSpPr>
-        <p:spPr>
-          <a:xfrm xmlns:a="http://schemas.openxmlformats.org/drawingml/2006/main">
-            <a:off x="3714750" y="952500"/>
-            <a:ext cx="7810500" cy="419100"/>
+                <a16:creationId xmlns:a16="http://schemas.microsoft.com/office/drawing/2014/main" id="{B817ABFC-A14F-43B2-BC12-186339405794}"/>
+              </a:ext>
+            </a:extLst>
+          </p:cNvPr>
+          <p:cNvSpPr>
+            <a:spLocks xmlns:a="http://schemas.openxmlformats.org/drawingml/2006/main" noGrp="1"/>
+          </p:cNvSpPr>
+          <p:nvPr/>
+        </p:nvSpPr>
+        <p:spPr>
+          <a:xfrm xmlns:a="http://schemas.openxmlformats.org/drawingml/2006/main">
+            <a:off x="4210050" y="914400"/>
+            <a:ext cx="7334250" cy="476250"/>
           </a:xfrm>
           <a:prstGeom xmlns:a="http://schemas.openxmlformats.org/drawingml/2006/main" prst="rect">
             <a:avLst/>
@@ -10122,14 +9494,14 @@
           <a:lstStyle xmlns:a="http://schemas.openxmlformats.org/drawingml/2006/main"/>
           <a:p xmlns:a="http://schemas.openxmlformats.org/drawingml/2006/main">
             <a:pPr algn="r">
-              <a:defRPr sz="1575" b="1">
+              <a:defRPr sz="1800" b="1">
                 <a:solidFill>
                   <a:srgbClr val="18354E"/>
                 </a:solidFill>
               </a:defRPr>
             </a:pPr>
             <a:r>
-              <a:rPr sz="1575" b="1">
+              <a:rPr sz="1800" b="1">
                 <a:solidFill>
                   <a:srgbClr val="18354E"/>
                 </a:solidFill>
@@ -10137,7 +9509,7 @@
                 <a:ea typeface="Microsoft YaHei"/>
                 <a:cs typeface="Microsoft YaHei"/>
               </a:rPr>
-              <a:t>逐项标注：已满足 / 待补全 / 留给哪一课</a:t>
+              <a:t>逐项：已满足 / 待补全 / 留给哪一课</a:t>
             </a:r>
           </a:p>
         </p:txBody>
@@ -10147,23 +9519,23 @@
           <p:cNvPr id="8" name="n-0">
             <a:extLst xmlns:a="http://schemas.openxmlformats.org/drawingml/2006/main">
               <a:ext uri="{FF2B5EF4-FFF2-40B4-BE49-F238E27FC236}">
-                <a16:creationId xmlns:a16="http://schemas.microsoft.com/office/drawing/2014/main" id="{017CE235-71BC-4791-9D63-994E927E165A}"/>
-              </a:ext>
-            </a:extLst>
-          </p:cNvPr>
-          <p:cNvSpPr>
-            <a:spLocks xmlns:a="http://schemas.openxmlformats.org/drawingml/2006/main" noGrp="1"/>
-          </p:cNvSpPr>
-          <p:nvPr/>
-        </p:nvSpPr>
-        <p:spPr>
-          <a:xfrm xmlns:a="http://schemas.openxmlformats.org/drawingml/2006/main">
-            <a:off x="552450" y="1562100"/>
-            <a:ext cx="419100" cy="419100"/>
+                <a16:creationId xmlns:a16="http://schemas.microsoft.com/office/drawing/2014/main" id="{2CC1BBEB-31E7-48AD-91EA-D4CC23C55EFB}"/>
+              </a:ext>
+            </a:extLst>
+          </p:cNvPr>
+          <p:cNvSpPr>
+            <a:spLocks xmlns:a="http://schemas.openxmlformats.org/drawingml/2006/main" noGrp="1"/>
+          </p:cNvSpPr>
+          <p:nvPr/>
+        </p:nvSpPr>
+        <p:spPr>
+          <a:xfrm xmlns:a="http://schemas.openxmlformats.org/drawingml/2006/main">
+            <a:off x="685800" y="1657350"/>
+            <a:ext cx="514350" cy="514350"/>
           </a:xfrm>
           <a:prstGeom xmlns:a="http://schemas.openxmlformats.org/drawingml/2006/main" prst="roundRect">
             <a:avLst>
-              <a:gd name="adj" fmla="val 18182"/>
+              <a:gd name="adj" fmla="val 14815"/>
             </a:avLst>
           </a:prstGeom>
           <a:solidFill xmlns:a="http://schemas.openxmlformats.org/drawingml/2006/main">
@@ -10179,14 +9551,14 @@
           <a:lstStyle xmlns:a="http://schemas.openxmlformats.org/drawingml/2006/main"/>
           <a:p xmlns:a="http://schemas.openxmlformats.org/drawingml/2006/main">
             <a:pPr algn="ctr">
-              <a:defRPr sz="1350" b="1">
+              <a:defRPr sz="1800" b="1">
                 <a:solidFill>
                   <a:srgbClr val="FFFFFF"/>
                 </a:solidFill>
               </a:defRPr>
             </a:pPr>
             <a:r>
-              <a:rPr sz="1350" b="1">
+              <a:rPr sz="1800" b="1">
                 <a:solidFill>
                   <a:srgbClr val="FFFFFF"/>
                 </a:solidFill>
@@ -10204,23 +9576,23 @@
           <p:cNvPr id="9" name="c-0">
             <a:extLst xmlns:a="http://schemas.openxmlformats.org/drawingml/2006/main">
               <a:ext uri="{FF2B5EF4-FFF2-40B4-BE49-F238E27FC236}">
-                <a16:creationId xmlns:a16="http://schemas.microsoft.com/office/drawing/2014/main" id="{558AD2D5-AE6F-4659-BC5B-C44CA0A6C8AC}"/>
-              </a:ext>
-            </a:extLst>
-          </p:cNvPr>
-          <p:cNvSpPr>
-            <a:spLocks xmlns:a="http://schemas.openxmlformats.org/drawingml/2006/main" noGrp="1"/>
-          </p:cNvSpPr>
-          <p:nvPr/>
-        </p:nvSpPr>
-        <p:spPr>
-          <a:xfrm xmlns:a="http://schemas.openxmlformats.org/drawingml/2006/main">
-            <a:off x="1085850" y="1485900"/>
-            <a:ext cx="5067300" cy="571500"/>
+                <a16:creationId xmlns:a16="http://schemas.microsoft.com/office/drawing/2014/main" id="{1C5182C5-638D-4640-A09F-0B9734675A68}"/>
+              </a:ext>
+            </a:extLst>
+          </p:cNvPr>
+          <p:cNvSpPr>
+            <a:spLocks xmlns:a="http://schemas.openxmlformats.org/drawingml/2006/main" noGrp="1"/>
+          </p:cNvSpPr>
+          <p:nvPr/>
+        </p:nvSpPr>
+        <p:spPr>
+          <a:xfrm xmlns:a="http://schemas.openxmlformats.org/drawingml/2006/main">
+            <a:off x="1371600" y="1600200"/>
+            <a:ext cx="9982200" cy="590550"/>
           </a:xfrm>
           <a:prstGeom xmlns:a="http://schemas.openxmlformats.org/drawingml/2006/main" prst="roundRect">
             <a:avLst>
-              <a:gd name="adj" fmla="val 13333"/>
+              <a:gd name="adj" fmla="val 12903"/>
             </a:avLst>
           </a:prstGeom>
           <a:solidFill xmlns:a="http://schemas.openxmlformats.org/drawingml/2006/main">
@@ -10238,18 +9610,14 @@
           <a:lstStyle xmlns:a="http://schemas.openxmlformats.org/drawingml/2006/main"/>
           <a:p xmlns:a="http://schemas.openxmlformats.org/drawingml/2006/main">
             <a:pPr algn="l">
-              <a:lnSpc>
-                <a:spcPct val="115000"/>
-              </a:lnSpc>
-              <a:buNone/>
-              <a:defRPr sz="1350" b="1">
+              <a:defRPr sz="1800" b="1">
                 <a:solidFill>
                   <a:srgbClr val="263746"/>
                 </a:solidFill>
               </a:defRPr>
             </a:pPr>
             <a:r>
-              <a:rPr sz="1350" b="1">
+              <a:rPr sz="1800" b="1">
                 <a:solidFill>
                   <a:srgbClr val="263746"/>
                 </a:solidFill>
@@ -10257,7 +9625,7 @@
                 <a:ea typeface="Microsoft YaHei"/>
                 <a:cs typeface="Microsoft YaHei"/>
               </a:rPr>
-              <a:t>论文式短文含问题/方法/验证/结果/局限</a:t>
+              <a:t>短文完整｜问题—局限</a:t>
             </a:r>
           </a:p>
         </p:txBody>
@@ -10267,23 +9635,23 @@
           <p:cNvPr id="10" name="n-1">
             <a:extLst xmlns:a="http://schemas.openxmlformats.org/drawingml/2006/main">
               <a:ext uri="{FF2B5EF4-FFF2-40B4-BE49-F238E27FC236}">
-                <a16:creationId xmlns:a16="http://schemas.microsoft.com/office/drawing/2014/main" id="{F0410FF3-1C8F-4017-AB8C-349882776A3B}"/>
-              </a:ext>
-            </a:extLst>
-          </p:cNvPr>
-          <p:cNvSpPr>
-            <a:spLocks xmlns:a="http://schemas.openxmlformats.org/drawingml/2006/main" noGrp="1"/>
-          </p:cNvSpPr>
-          <p:nvPr/>
-        </p:nvSpPr>
-        <p:spPr>
-          <a:xfrm xmlns:a="http://schemas.openxmlformats.org/drawingml/2006/main">
-            <a:off x="552450" y="2247900"/>
-            <a:ext cx="419100" cy="419100"/>
+                <a16:creationId xmlns:a16="http://schemas.microsoft.com/office/drawing/2014/main" id="{F175C46C-27EE-4EE8-8E15-3B0A6BD43758}"/>
+              </a:ext>
+            </a:extLst>
+          </p:cNvPr>
+          <p:cNvSpPr>
+            <a:spLocks xmlns:a="http://schemas.openxmlformats.org/drawingml/2006/main" noGrp="1"/>
+          </p:cNvSpPr>
+          <p:nvPr/>
+        </p:nvSpPr>
+        <p:spPr>
+          <a:xfrm xmlns:a="http://schemas.openxmlformats.org/drawingml/2006/main">
+            <a:off x="685800" y="2324100"/>
+            <a:ext cx="514350" cy="514350"/>
           </a:xfrm>
           <a:prstGeom xmlns:a="http://schemas.openxmlformats.org/drawingml/2006/main" prst="roundRect">
             <a:avLst>
-              <a:gd name="adj" fmla="val 18182"/>
+              <a:gd name="adj" fmla="val 14815"/>
             </a:avLst>
           </a:prstGeom>
           <a:solidFill xmlns:a="http://schemas.openxmlformats.org/drawingml/2006/main">
@@ -10299,14 +9667,14 @@
           <a:lstStyle xmlns:a="http://schemas.openxmlformats.org/drawingml/2006/main"/>
           <a:p xmlns:a="http://schemas.openxmlformats.org/drawingml/2006/main">
             <a:pPr algn="ctr">
-              <a:defRPr sz="1350" b="1">
+              <a:defRPr sz="1800" b="1">
                 <a:solidFill>
                   <a:srgbClr val="FFFFFF"/>
                 </a:solidFill>
               </a:defRPr>
             </a:pPr>
             <a:r>
-              <a:rPr sz="1350" b="1">
+              <a:rPr sz="1800" b="1">
                 <a:solidFill>
                   <a:srgbClr val="FFFFFF"/>
                 </a:solidFill>
@@ -10324,23 +9692,23 @@
           <p:cNvPr id="11" name="c-1">
             <a:extLst xmlns:a="http://schemas.openxmlformats.org/drawingml/2006/main">
               <a:ext uri="{FF2B5EF4-FFF2-40B4-BE49-F238E27FC236}">
-                <a16:creationId xmlns:a16="http://schemas.microsoft.com/office/drawing/2014/main" id="{4DC71FCF-D087-49D9-822D-0D29823774B5}"/>
-              </a:ext>
-            </a:extLst>
-          </p:cNvPr>
-          <p:cNvSpPr>
-            <a:spLocks xmlns:a="http://schemas.openxmlformats.org/drawingml/2006/main" noGrp="1"/>
-          </p:cNvSpPr>
-          <p:nvPr/>
-        </p:nvSpPr>
-        <p:spPr>
-          <a:xfrm xmlns:a="http://schemas.openxmlformats.org/drawingml/2006/main">
-            <a:off x="1085850" y="2171700"/>
-            <a:ext cx="5067300" cy="571500"/>
+                <a16:creationId xmlns:a16="http://schemas.microsoft.com/office/drawing/2014/main" id="{D30C4693-DD75-47AE-99AE-4F721097EDFE}"/>
+              </a:ext>
+            </a:extLst>
+          </p:cNvPr>
+          <p:cNvSpPr>
+            <a:spLocks xmlns:a="http://schemas.openxmlformats.org/drawingml/2006/main" noGrp="1"/>
+          </p:cNvSpPr>
+          <p:nvPr/>
+        </p:nvSpPr>
+        <p:spPr>
+          <a:xfrm xmlns:a="http://schemas.openxmlformats.org/drawingml/2006/main">
+            <a:off x="1371600" y="2266950"/>
+            <a:ext cx="9982200" cy="590550"/>
           </a:xfrm>
           <a:prstGeom xmlns:a="http://schemas.openxmlformats.org/drawingml/2006/main" prst="roundRect">
             <a:avLst>
-              <a:gd name="adj" fmla="val 13333"/>
+              <a:gd name="adj" fmla="val 12903"/>
             </a:avLst>
           </a:prstGeom>
           <a:solidFill xmlns:a="http://schemas.openxmlformats.org/drawingml/2006/main">
@@ -10358,18 +9726,14 @@
           <a:lstStyle xmlns:a="http://schemas.openxmlformats.org/drawingml/2006/main"/>
           <a:p xmlns:a="http://schemas.openxmlformats.org/drawingml/2006/main">
             <a:pPr algn="l">
-              <a:lnSpc>
-                <a:spcPct val="115000"/>
-              </a:lnSpc>
-              <a:buNone/>
-              <a:defRPr sz="1350" b="1">
+              <a:defRPr sz="1800" b="1">
                 <a:solidFill>
                   <a:srgbClr val="263746"/>
                 </a:solidFill>
               </a:defRPr>
             </a:pPr>
             <a:r>
-              <a:rPr sz="1350" b="1">
+              <a:rPr sz="1800" b="1">
                 <a:solidFill>
                   <a:srgbClr val="263746"/>
                 </a:solidFill>
@@ -10377,7 +9741,7 @@
                 <a:ea typeface="Microsoft YaHei"/>
                 <a:cs typeface="Microsoft YaHei"/>
               </a:rPr>
-              <a:t>表/图可追溯到证据项、实验 ID 或运行记录</a:t>
+              <a:t>表图可追溯｜证据 / 实验 ID</a:t>
             </a:r>
           </a:p>
         </p:txBody>
@@ -10387,23 +9751,23 @@
           <p:cNvPr id="12" name="n-2">
             <a:extLst xmlns:a="http://schemas.openxmlformats.org/drawingml/2006/main">
               <a:ext uri="{FF2B5EF4-FFF2-40B4-BE49-F238E27FC236}">
-                <a16:creationId xmlns:a16="http://schemas.microsoft.com/office/drawing/2014/main" id="{504208B0-E92E-409A-B145-E98D22BB4308}"/>
-              </a:ext>
-            </a:extLst>
-          </p:cNvPr>
-          <p:cNvSpPr>
-            <a:spLocks xmlns:a="http://schemas.openxmlformats.org/drawingml/2006/main" noGrp="1"/>
-          </p:cNvSpPr>
-          <p:nvPr/>
-        </p:nvSpPr>
-        <p:spPr>
-          <a:xfrm xmlns:a="http://schemas.openxmlformats.org/drawingml/2006/main">
-            <a:off x="552450" y="2933700"/>
-            <a:ext cx="419100" cy="419100"/>
+                <a16:creationId xmlns:a16="http://schemas.microsoft.com/office/drawing/2014/main" id="{1EB542BA-AFDF-46DA-8169-6646001F956F}"/>
+              </a:ext>
+            </a:extLst>
+          </p:cNvPr>
+          <p:cNvSpPr>
+            <a:spLocks xmlns:a="http://schemas.openxmlformats.org/drawingml/2006/main" noGrp="1"/>
+          </p:cNvSpPr>
+          <p:nvPr/>
+        </p:nvSpPr>
+        <p:spPr>
+          <a:xfrm xmlns:a="http://schemas.openxmlformats.org/drawingml/2006/main">
+            <a:off x="685800" y="2990850"/>
+            <a:ext cx="514350" cy="514350"/>
           </a:xfrm>
           <a:prstGeom xmlns:a="http://schemas.openxmlformats.org/drawingml/2006/main" prst="roundRect">
             <a:avLst>
-              <a:gd name="adj" fmla="val 18182"/>
+              <a:gd name="adj" fmla="val 14815"/>
             </a:avLst>
           </a:prstGeom>
           <a:solidFill xmlns:a="http://schemas.openxmlformats.org/drawingml/2006/main">
@@ -10419,14 +9783,14 @@
           <a:lstStyle xmlns:a="http://schemas.openxmlformats.org/drawingml/2006/main"/>
           <a:p xmlns:a="http://schemas.openxmlformats.org/drawingml/2006/main">
             <a:pPr algn="ctr">
-              <a:defRPr sz="1350" b="1">
+              <a:defRPr sz="1800" b="1">
                 <a:solidFill>
                   <a:srgbClr val="FFFFFF"/>
                 </a:solidFill>
               </a:defRPr>
             </a:pPr>
             <a:r>
-              <a:rPr sz="1350" b="1">
+              <a:rPr sz="1800" b="1">
                 <a:solidFill>
                   <a:srgbClr val="FFFFFF"/>
                 </a:solidFill>
@@ -10444,23 +9808,23 @@
           <p:cNvPr id="13" name="c-2">
             <a:extLst xmlns:a="http://schemas.openxmlformats.org/drawingml/2006/main">
               <a:ext uri="{FF2B5EF4-FFF2-40B4-BE49-F238E27FC236}">
-                <a16:creationId xmlns:a16="http://schemas.microsoft.com/office/drawing/2014/main" id="{E20618A2-7C0A-4050-9474-31A432E6B32F}"/>
-              </a:ext>
-            </a:extLst>
-          </p:cNvPr>
-          <p:cNvSpPr>
-            <a:spLocks xmlns:a="http://schemas.openxmlformats.org/drawingml/2006/main" noGrp="1"/>
-          </p:cNvSpPr>
-          <p:nvPr/>
-        </p:nvSpPr>
-        <p:spPr>
-          <a:xfrm xmlns:a="http://schemas.openxmlformats.org/drawingml/2006/main">
-            <a:off x="1085850" y="2857500"/>
-            <a:ext cx="5067300" cy="571500"/>
+                <a16:creationId xmlns:a16="http://schemas.microsoft.com/office/drawing/2014/main" id="{12CE630D-A620-4D23-8F98-48B8B2B50153}"/>
+              </a:ext>
+            </a:extLst>
+          </p:cNvPr>
+          <p:cNvSpPr>
+            <a:spLocks xmlns:a="http://schemas.openxmlformats.org/drawingml/2006/main" noGrp="1"/>
+          </p:cNvSpPr>
+          <p:nvPr/>
+        </p:nvSpPr>
+        <p:spPr>
+          <a:xfrm xmlns:a="http://schemas.openxmlformats.org/drawingml/2006/main">
+            <a:off x="1371600" y="2933700"/>
+            <a:ext cx="9982200" cy="590550"/>
           </a:xfrm>
           <a:prstGeom xmlns:a="http://schemas.openxmlformats.org/drawingml/2006/main" prst="roundRect">
             <a:avLst>
-              <a:gd name="adj" fmla="val 13333"/>
+              <a:gd name="adj" fmla="val 12903"/>
             </a:avLst>
           </a:prstGeom>
           <a:solidFill xmlns:a="http://schemas.openxmlformats.org/drawingml/2006/main">
@@ -10478,18 +9842,14 @@
           <a:lstStyle xmlns:a="http://schemas.openxmlformats.org/drawingml/2006/main"/>
           <a:p xmlns:a="http://schemas.openxmlformats.org/drawingml/2006/main">
             <a:pPr algn="l">
-              <a:lnSpc>
-                <a:spcPct val="115000"/>
-              </a:lnSpc>
-              <a:buNone/>
-              <a:defRPr sz="1350" b="1">
+              <a:defRPr sz="1800" b="1">
                 <a:solidFill>
                   <a:srgbClr val="263746"/>
                 </a:solidFill>
               </a:defRPr>
             </a:pPr>
             <a:r>
-              <a:rPr sz="1350" b="1">
+              <a:rPr sz="1800" b="1">
                 <a:solidFill>
                   <a:srgbClr val="263746"/>
                 </a:solidFill>
@@ -10497,7 +9857,7 @@
                 <a:ea typeface="Microsoft YaHei"/>
                 <a:cs typeface="Microsoft YaHei"/>
               </a:rPr>
-              <a:t>讨论具体有效性威胁或等价分析</a:t>
+              <a:t>讨论具体有效性威胁</a:t>
             </a:r>
           </a:p>
         </p:txBody>
@@ -10507,23 +9867,23 @@
           <p:cNvPr id="14" name="n-3">
             <a:extLst xmlns:a="http://schemas.openxmlformats.org/drawingml/2006/main">
               <a:ext uri="{FF2B5EF4-FFF2-40B4-BE49-F238E27FC236}">
-                <a16:creationId xmlns:a16="http://schemas.microsoft.com/office/drawing/2014/main" id="{CEE765B0-7F5A-404C-A387-12C7496F7030}"/>
-              </a:ext>
-            </a:extLst>
-          </p:cNvPr>
-          <p:cNvSpPr>
-            <a:spLocks xmlns:a="http://schemas.openxmlformats.org/drawingml/2006/main" noGrp="1"/>
-          </p:cNvSpPr>
-          <p:nvPr/>
-        </p:nvSpPr>
-        <p:spPr>
-          <a:xfrm xmlns:a="http://schemas.openxmlformats.org/drawingml/2006/main">
-            <a:off x="552450" y="3619500"/>
-            <a:ext cx="419100" cy="419100"/>
+                <a16:creationId xmlns:a16="http://schemas.microsoft.com/office/drawing/2014/main" id="{EF8352ED-5455-4C58-A738-9A411FA9A414}"/>
+              </a:ext>
+            </a:extLst>
+          </p:cNvPr>
+          <p:cNvSpPr>
+            <a:spLocks xmlns:a="http://schemas.openxmlformats.org/drawingml/2006/main" noGrp="1"/>
+          </p:cNvSpPr>
+          <p:nvPr/>
+        </p:nvSpPr>
+        <p:spPr>
+          <a:xfrm xmlns:a="http://schemas.openxmlformats.org/drawingml/2006/main">
+            <a:off x="685800" y="3657600"/>
+            <a:ext cx="514350" cy="514350"/>
           </a:xfrm>
           <a:prstGeom xmlns:a="http://schemas.openxmlformats.org/drawingml/2006/main" prst="roundRect">
             <a:avLst>
-              <a:gd name="adj" fmla="val 18182"/>
+              <a:gd name="adj" fmla="val 14815"/>
             </a:avLst>
           </a:prstGeom>
           <a:solidFill xmlns:a="http://schemas.openxmlformats.org/drawingml/2006/main">
@@ -10539,14 +9899,14 @@
           <a:lstStyle xmlns:a="http://schemas.openxmlformats.org/drawingml/2006/main"/>
           <a:p xmlns:a="http://schemas.openxmlformats.org/drawingml/2006/main">
             <a:pPr algn="ctr">
-              <a:defRPr sz="1350" b="1">
+              <a:defRPr sz="1800" b="1">
                 <a:solidFill>
                   <a:srgbClr val="FFFFFF"/>
                 </a:solidFill>
               </a:defRPr>
             </a:pPr>
             <a:r>
-              <a:rPr sz="1350" b="1">
+              <a:rPr sz="1800" b="1">
                 <a:solidFill>
                   <a:srgbClr val="FFFFFF"/>
                 </a:solidFill>
@@ -10564,23 +9924,23 @@
           <p:cNvPr id="15" name="c-3">
             <a:extLst xmlns:a="http://schemas.openxmlformats.org/drawingml/2006/main">
               <a:ext uri="{FF2B5EF4-FFF2-40B4-BE49-F238E27FC236}">
-                <a16:creationId xmlns:a16="http://schemas.microsoft.com/office/drawing/2014/main" id="{300F244D-E6E6-4459-9E31-B5E88AD95568}"/>
-              </a:ext>
-            </a:extLst>
-          </p:cNvPr>
-          <p:cNvSpPr>
-            <a:spLocks xmlns:a="http://schemas.openxmlformats.org/drawingml/2006/main" noGrp="1"/>
-          </p:cNvSpPr>
-          <p:nvPr/>
-        </p:nvSpPr>
-        <p:spPr>
-          <a:xfrm xmlns:a="http://schemas.openxmlformats.org/drawingml/2006/main">
-            <a:off x="1085850" y="3543300"/>
-            <a:ext cx="5067300" cy="571500"/>
+                <a16:creationId xmlns:a16="http://schemas.microsoft.com/office/drawing/2014/main" id="{80CFE36E-61A5-4895-97F5-63E4C69DEEFB}"/>
+              </a:ext>
+            </a:extLst>
+          </p:cNvPr>
+          <p:cNvSpPr>
+            <a:spLocks xmlns:a="http://schemas.openxmlformats.org/drawingml/2006/main" noGrp="1"/>
+          </p:cNvSpPr>
+          <p:nvPr/>
+        </p:nvSpPr>
+        <p:spPr>
+          <a:xfrm xmlns:a="http://schemas.openxmlformats.org/drawingml/2006/main">
+            <a:off x="1371600" y="3600450"/>
+            <a:ext cx="9982200" cy="590550"/>
           </a:xfrm>
           <a:prstGeom xmlns:a="http://schemas.openxmlformats.org/drawingml/2006/main" prst="roundRect">
             <a:avLst>
-              <a:gd name="adj" fmla="val 13333"/>
+              <a:gd name="adj" fmla="val 12903"/>
             </a:avLst>
           </a:prstGeom>
           <a:solidFill xmlns:a="http://schemas.openxmlformats.org/drawingml/2006/main">
@@ -10598,18 +9958,14 @@
           <a:lstStyle xmlns:a="http://schemas.openxmlformats.org/drawingml/2006/main"/>
           <a:p xmlns:a="http://schemas.openxmlformats.org/drawingml/2006/main">
             <a:pPr algn="l">
-              <a:lnSpc>
-                <a:spcPct val="115000"/>
-              </a:lnSpc>
-              <a:buNone/>
-              <a:defRPr sz="1350" b="1">
+              <a:defRPr sz="1800" b="1">
                 <a:solidFill>
                   <a:srgbClr val="263746"/>
                 </a:solidFill>
               </a:defRPr>
             </a:pPr>
             <a:r>
-              <a:rPr sz="1350" b="1">
+              <a:rPr sz="1800" b="1">
                 <a:solidFill>
                   <a:srgbClr val="263746"/>
                 </a:solidFill>
@@ -10617,7 +9973,7 @@
                 <a:ea typeface="Microsoft YaHei"/>
                 <a:cs typeface="Microsoft YaHei"/>
               </a:rPr>
-              <a:t>第 15 课评审意见有采纳/拒绝/理由</a:t>
+              <a:t>第 15 课评审处理记录</a:t>
             </a:r>
           </a:p>
         </p:txBody>
@@ -10627,23 +9983,23 @@
           <p:cNvPr id="16" name="n-4">
             <a:extLst xmlns:a="http://schemas.openxmlformats.org/drawingml/2006/main">
               <a:ext uri="{FF2B5EF4-FFF2-40B4-BE49-F238E27FC236}">
-                <a16:creationId xmlns:a16="http://schemas.microsoft.com/office/drawing/2014/main" id="{1EFB384E-E78C-4D1A-ADDA-3C74E908D812}"/>
-              </a:ext>
-            </a:extLst>
-          </p:cNvPr>
-          <p:cNvSpPr>
-            <a:spLocks xmlns:a="http://schemas.openxmlformats.org/drawingml/2006/main" noGrp="1"/>
-          </p:cNvSpPr>
-          <p:nvPr/>
-        </p:nvSpPr>
-        <p:spPr>
-          <a:xfrm xmlns:a="http://schemas.openxmlformats.org/drawingml/2006/main">
-            <a:off x="552450" y="4305300"/>
-            <a:ext cx="419100" cy="419100"/>
+                <a16:creationId xmlns:a16="http://schemas.microsoft.com/office/drawing/2014/main" id="{EC7C44C3-7A12-423E-8B57-5A00BF83973C}"/>
+              </a:ext>
+            </a:extLst>
+          </p:cNvPr>
+          <p:cNvSpPr>
+            <a:spLocks xmlns:a="http://schemas.openxmlformats.org/drawingml/2006/main" noGrp="1"/>
+          </p:cNvSpPr>
+          <p:nvPr/>
+        </p:nvSpPr>
+        <p:spPr>
+          <a:xfrm xmlns:a="http://schemas.openxmlformats.org/drawingml/2006/main">
+            <a:off x="685800" y="4324350"/>
+            <a:ext cx="514350" cy="514350"/>
           </a:xfrm>
           <a:prstGeom xmlns:a="http://schemas.openxmlformats.org/drawingml/2006/main" prst="roundRect">
             <a:avLst>
-              <a:gd name="adj" fmla="val 18182"/>
+              <a:gd name="adj" fmla="val 14815"/>
             </a:avLst>
           </a:prstGeom>
           <a:solidFill xmlns:a="http://schemas.openxmlformats.org/drawingml/2006/main">
@@ -10659,14 +10015,14 @@
           <a:lstStyle xmlns:a="http://schemas.openxmlformats.org/drawingml/2006/main"/>
           <a:p xmlns:a="http://schemas.openxmlformats.org/drawingml/2006/main">
             <a:pPr algn="ctr">
-              <a:defRPr sz="1350" b="1">
+              <a:defRPr sz="1800" b="1">
                 <a:solidFill>
                   <a:srgbClr val="FFFFFF"/>
                 </a:solidFill>
               </a:defRPr>
             </a:pPr>
             <a:r>
-              <a:rPr sz="1350" b="1">
+              <a:rPr sz="1800" b="1">
                 <a:solidFill>
                   <a:srgbClr val="FFFFFF"/>
                 </a:solidFill>
@@ -10684,23 +10040,23 @@
           <p:cNvPr id="17" name="c-4">
             <a:extLst xmlns:a="http://schemas.openxmlformats.org/drawingml/2006/main">
               <a:ext uri="{FF2B5EF4-FFF2-40B4-BE49-F238E27FC236}">
-                <a16:creationId xmlns:a16="http://schemas.microsoft.com/office/drawing/2014/main" id="{CCF0E6D7-EAEB-4666-95C8-851DBF73A528}"/>
-              </a:ext>
-            </a:extLst>
-          </p:cNvPr>
-          <p:cNvSpPr>
-            <a:spLocks xmlns:a="http://schemas.openxmlformats.org/drawingml/2006/main" noGrp="1"/>
-          </p:cNvSpPr>
-          <p:nvPr/>
-        </p:nvSpPr>
-        <p:spPr>
-          <a:xfrm xmlns:a="http://schemas.openxmlformats.org/drawingml/2006/main">
-            <a:off x="1085850" y="4229100"/>
-            <a:ext cx="5067300" cy="571500"/>
+                <a16:creationId xmlns:a16="http://schemas.microsoft.com/office/drawing/2014/main" id="{F83F27EF-7D1D-405A-BD9C-A956704B2E39}"/>
+              </a:ext>
+            </a:extLst>
+          </p:cNvPr>
+          <p:cNvSpPr>
+            <a:spLocks xmlns:a="http://schemas.openxmlformats.org/drawingml/2006/main" noGrp="1"/>
+          </p:cNvSpPr>
+          <p:nvPr/>
+        </p:nvSpPr>
+        <p:spPr>
+          <a:xfrm xmlns:a="http://schemas.openxmlformats.org/drawingml/2006/main">
+            <a:off x="1371600" y="4267200"/>
+            <a:ext cx="9982200" cy="590550"/>
           </a:xfrm>
           <a:prstGeom xmlns:a="http://schemas.openxmlformats.org/drawingml/2006/main" prst="roundRect">
             <a:avLst>
-              <a:gd name="adj" fmla="val 13333"/>
+              <a:gd name="adj" fmla="val 12903"/>
             </a:avLst>
           </a:prstGeom>
           <a:solidFill xmlns:a="http://schemas.openxmlformats.org/drawingml/2006/main">
@@ -10718,18 +10074,14 @@
           <a:lstStyle xmlns:a="http://schemas.openxmlformats.org/drawingml/2006/main"/>
           <a:p xmlns:a="http://schemas.openxmlformats.org/drawingml/2006/main">
             <a:pPr algn="l">
-              <a:lnSpc>
-                <a:spcPct val="115000"/>
-              </a:lnSpc>
-              <a:buNone/>
-              <a:defRPr sz="1350" b="1">
+              <a:defRPr sz="1800" b="1">
                 <a:solidFill>
                   <a:srgbClr val="263746"/>
                 </a:solidFill>
               </a:defRPr>
             </a:pPr>
             <a:r>
-              <a:rPr sz="1350" b="1">
+              <a:rPr sz="1800" b="1">
                 <a:solidFill>
                   <a:srgbClr val="263746"/>
                 </a:solidFill>
@@ -10737,37 +10089,37 @@
                 <a:ea typeface="Microsoft YaHei"/>
                 <a:cs typeface="Microsoft YaHei"/>
               </a:rPr>
-              <a:t>关键结论绑定直接证据 + 上游判断</a:t>
-            </a:r>
-          </a:p>
-        </p:txBody>
-      </p:sp>
-      <p:sp>
-        <p:nvSpPr>
-          <p:cNvPr id="18" name="n-5">
-            <a:extLst xmlns:a="http://schemas.openxmlformats.org/drawingml/2006/main">
-              <a:ext uri="{FF2B5EF4-FFF2-40B4-BE49-F238E27FC236}">
-                <a16:creationId xmlns:a16="http://schemas.microsoft.com/office/drawing/2014/main" id="{DD049F96-7E15-4CDB-9AE7-85B6280B6F35}"/>
-              </a:ext>
-            </a:extLst>
-          </p:cNvPr>
-          <p:cNvSpPr>
-            <a:spLocks xmlns:a="http://schemas.openxmlformats.org/drawingml/2006/main" noGrp="1"/>
-          </p:cNvSpPr>
-          <p:nvPr/>
-        </p:nvSpPr>
-        <p:spPr>
-          <a:xfrm xmlns:a="http://schemas.openxmlformats.org/drawingml/2006/main">
-            <a:off x="6362700" y="1562100"/>
-            <a:ext cx="419100" cy="419100"/>
+              <a:t>关键结论｜直接证据 + 上游判断</a:t>
+            </a:r>
+          </a:p>
+        </p:txBody>
+      </p:sp>
+      <p:sp>
+        <p:nvSpPr>
+          <p:cNvPr id="18" name="handoff">
+            <a:extLst xmlns:a="http://schemas.openxmlformats.org/drawingml/2006/main">
+              <a:ext uri="{FF2B5EF4-FFF2-40B4-BE49-F238E27FC236}">
+                <a16:creationId xmlns:a16="http://schemas.microsoft.com/office/drawing/2014/main" id="{CA9C0376-C59E-4F6E-8C48-2FCC95A0EDAF}"/>
+              </a:ext>
+            </a:extLst>
+          </p:cNvPr>
+          <p:cNvSpPr>
+            <a:spLocks xmlns:a="http://schemas.openxmlformats.org/drawingml/2006/main" noGrp="1"/>
+          </p:cNvSpPr>
+          <p:nvPr/>
+        </p:nvSpPr>
+        <p:spPr>
+          <a:xfrm xmlns:a="http://schemas.openxmlformats.org/drawingml/2006/main">
+            <a:off x="990600" y="5067300"/>
+            <a:ext cx="10210800" cy="514350"/>
           </a:xfrm>
           <a:prstGeom xmlns:a="http://schemas.openxmlformats.org/drawingml/2006/main" prst="roundRect">
             <a:avLst>
-              <a:gd name="adj" fmla="val 18182"/>
+              <a:gd name="adj" fmla="val 14815"/>
             </a:avLst>
           </a:prstGeom>
           <a:solidFill xmlns:a="http://schemas.openxmlformats.org/drawingml/2006/main">
-            <a:srgbClr val="18354E"/>
+            <a:srgbClr val="F8E9EA"/>
           </a:solidFill>
           <a:ln xmlns:a="http://schemas.openxmlformats.org/drawingml/2006/main" w="0">
             <a:noFill/>
@@ -10779,614 +10131,14 @@
           <a:lstStyle xmlns:a="http://schemas.openxmlformats.org/drawingml/2006/main"/>
           <a:p xmlns:a="http://schemas.openxmlformats.org/drawingml/2006/main">
             <a:pPr algn="ctr">
-              <a:defRPr sz="1350" b="1">
-                <a:solidFill>
-                  <a:srgbClr val="FFFFFF"/>
-                </a:solidFill>
-              </a:defRPr>
-            </a:pPr>
-            <a:r>
-              <a:rPr sz="1350" b="1">
-                <a:solidFill>
-                  <a:srgbClr val="FFFFFF"/>
-                </a:solidFill>
-                <a:latin typeface="Arial"/>
-                <a:ea typeface="Arial"/>
-                <a:cs typeface="Arial"/>
-              </a:rPr>
-              <a:t>6</a:t>
-            </a:r>
-          </a:p>
-        </p:txBody>
-      </p:sp>
-      <p:sp>
-        <p:nvSpPr>
-          <p:cNvPr id="19" name="c-5">
-            <a:extLst xmlns:a="http://schemas.openxmlformats.org/drawingml/2006/main">
-              <a:ext uri="{FF2B5EF4-FFF2-40B4-BE49-F238E27FC236}">
-                <a16:creationId xmlns:a16="http://schemas.microsoft.com/office/drawing/2014/main" id="{300605FC-8368-4247-89DB-5D716A01BFFF}"/>
-              </a:ext>
-            </a:extLst>
-          </p:cNvPr>
-          <p:cNvSpPr>
-            <a:spLocks xmlns:a="http://schemas.openxmlformats.org/drawingml/2006/main" noGrp="1"/>
-          </p:cNvSpPr>
-          <p:nvPr/>
-        </p:nvSpPr>
-        <p:spPr>
-          <a:xfrm xmlns:a="http://schemas.openxmlformats.org/drawingml/2006/main">
-            <a:off x="6896100" y="1485900"/>
-            <a:ext cx="5067300" cy="571500"/>
-          </a:xfrm>
-          <a:prstGeom xmlns:a="http://schemas.openxmlformats.org/drawingml/2006/main" prst="roundRect">
-            <a:avLst>
-              <a:gd name="adj" fmla="val 13333"/>
-            </a:avLst>
-          </a:prstGeom>
-          <a:solidFill xmlns:a="http://schemas.openxmlformats.org/drawingml/2006/main">
-            <a:srgbClr val="F3F6F7"/>
-          </a:solidFill>
-          <a:ln xmlns:a="http://schemas.openxmlformats.org/drawingml/2006/main" w="9525">
-            <a:solidFill>
-              <a:srgbClr val="D6DDE2"/>
-            </a:solidFill>
-            <a:prstDash val="solid"/>
-          </a:ln>
-        </p:spPr>
-        <p:txBody>
-          <a:bodyPr xmlns:a="http://schemas.openxmlformats.org/drawingml/2006/main" lIns="76200" tIns="38100" rIns="76200" bIns="38100" anchor="ctr"/>
-          <a:lstStyle xmlns:a="http://schemas.openxmlformats.org/drawingml/2006/main"/>
-          <a:p xmlns:a="http://schemas.openxmlformats.org/drawingml/2006/main">
-            <a:pPr algn="l">
-              <a:lnSpc>
-                <a:spcPct val="115000"/>
-              </a:lnSpc>
-              <a:buNone/>
-              <a:defRPr sz="1350" b="1">
-                <a:solidFill>
-                  <a:srgbClr val="263746"/>
-                </a:solidFill>
-              </a:defRPr>
-            </a:pPr>
-            <a:r>
-              <a:rPr sz="1350" b="1">
-                <a:solidFill>
-                  <a:srgbClr val="263746"/>
-                </a:solidFill>
-                <a:latin typeface="Microsoft YaHei"/>
-                <a:ea typeface="Microsoft YaHei"/>
-                <a:cs typeface="Microsoft YaHei"/>
-              </a:rPr>
-              <a:t>stable 原则上有两项独立证据，否则降级</a:t>
-            </a:r>
-          </a:p>
-        </p:txBody>
-      </p:sp>
-      <p:sp>
-        <p:nvSpPr>
-          <p:cNvPr id="20" name="n-6">
-            <a:extLst xmlns:a="http://schemas.openxmlformats.org/drawingml/2006/main">
-              <a:ext uri="{FF2B5EF4-FFF2-40B4-BE49-F238E27FC236}">
-                <a16:creationId xmlns:a16="http://schemas.microsoft.com/office/drawing/2014/main" id="{FE4EC399-1199-4AA7-9076-AA58F7FD7D12}"/>
-              </a:ext>
-            </a:extLst>
-          </p:cNvPr>
-          <p:cNvSpPr>
-            <a:spLocks xmlns:a="http://schemas.openxmlformats.org/drawingml/2006/main" noGrp="1"/>
-          </p:cNvSpPr>
-          <p:nvPr/>
-        </p:nvSpPr>
-        <p:spPr>
-          <a:xfrm xmlns:a="http://schemas.openxmlformats.org/drawingml/2006/main">
-            <a:off x="6362700" y="2247900"/>
-            <a:ext cx="419100" cy="419100"/>
-          </a:xfrm>
-          <a:prstGeom xmlns:a="http://schemas.openxmlformats.org/drawingml/2006/main" prst="roundRect">
-            <a:avLst>
-              <a:gd name="adj" fmla="val 18182"/>
-            </a:avLst>
-          </a:prstGeom>
-          <a:solidFill xmlns:a="http://schemas.openxmlformats.org/drawingml/2006/main">
-            <a:srgbClr val="18354E"/>
-          </a:solidFill>
-          <a:ln xmlns:a="http://schemas.openxmlformats.org/drawingml/2006/main" w="0">
-            <a:noFill/>
-            <a:prstDash val="solid"/>
-          </a:ln>
-        </p:spPr>
-        <p:txBody>
-          <a:bodyPr xmlns:a="http://schemas.openxmlformats.org/drawingml/2006/main" lIns="76200" tIns="38100" rIns="76200" bIns="38100" anchor="ctr"/>
-          <a:lstStyle xmlns:a="http://schemas.openxmlformats.org/drawingml/2006/main"/>
-          <a:p xmlns:a="http://schemas.openxmlformats.org/drawingml/2006/main">
-            <a:pPr algn="ctr">
-              <a:defRPr sz="1350" b="1">
-                <a:solidFill>
-                  <a:srgbClr val="FFFFFF"/>
-                </a:solidFill>
-              </a:defRPr>
-            </a:pPr>
-            <a:r>
-              <a:rPr sz="1350" b="1">
-                <a:solidFill>
-                  <a:srgbClr val="FFFFFF"/>
-                </a:solidFill>
-                <a:latin typeface="Arial"/>
-                <a:ea typeface="Arial"/>
-                <a:cs typeface="Arial"/>
-              </a:rPr>
-              <a:t>7</a:t>
-            </a:r>
-          </a:p>
-        </p:txBody>
-      </p:sp>
-      <p:sp>
-        <p:nvSpPr>
-          <p:cNvPr id="21" name="c-6">
-            <a:extLst xmlns:a="http://schemas.openxmlformats.org/drawingml/2006/main">
-              <a:ext uri="{FF2B5EF4-FFF2-40B4-BE49-F238E27FC236}">
-                <a16:creationId xmlns:a16="http://schemas.microsoft.com/office/drawing/2014/main" id="{82285257-837A-40A6-B448-1EB8AA094B22}"/>
-              </a:ext>
-            </a:extLst>
-          </p:cNvPr>
-          <p:cNvSpPr>
-            <a:spLocks xmlns:a="http://schemas.openxmlformats.org/drawingml/2006/main" noGrp="1"/>
-          </p:cNvSpPr>
-          <p:nvPr/>
-        </p:nvSpPr>
-        <p:spPr>
-          <a:xfrm xmlns:a="http://schemas.openxmlformats.org/drawingml/2006/main">
-            <a:off x="6896100" y="2171700"/>
-            <a:ext cx="5067300" cy="571500"/>
-          </a:xfrm>
-          <a:prstGeom xmlns:a="http://schemas.openxmlformats.org/drawingml/2006/main" prst="roundRect">
-            <a:avLst>
-              <a:gd name="adj" fmla="val 13333"/>
-            </a:avLst>
-          </a:prstGeom>
-          <a:solidFill xmlns:a="http://schemas.openxmlformats.org/drawingml/2006/main">
-            <a:srgbClr val="FFFFFF"/>
-          </a:solidFill>
-          <a:ln xmlns:a="http://schemas.openxmlformats.org/drawingml/2006/main" w="9525">
-            <a:solidFill>
-              <a:srgbClr val="D6DDE2"/>
-            </a:solidFill>
-            <a:prstDash val="solid"/>
-          </a:ln>
-        </p:spPr>
-        <p:txBody>
-          <a:bodyPr xmlns:a="http://schemas.openxmlformats.org/drawingml/2006/main" lIns="76200" tIns="38100" rIns="76200" bIns="38100" anchor="ctr"/>
-          <a:lstStyle xmlns:a="http://schemas.openxmlformats.org/drawingml/2006/main"/>
-          <a:p xmlns:a="http://schemas.openxmlformats.org/drawingml/2006/main">
-            <a:pPr algn="l">
-              <a:lnSpc>
-                <a:spcPct val="115000"/>
-              </a:lnSpc>
-              <a:buNone/>
-              <a:defRPr sz="1350" b="1">
-                <a:solidFill>
-                  <a:srgbClr val="263746"/>
-                </a:solidFill>
-              </a:defRPr>
-            </a:pPr>
-            <a:r>
-              <a:rPr sz="1350" b="1">
-                <a:solidFill>
-                  <a:srgbClr val="263746"/>
-                </a:solidFill>
-                <a:latin typeface="Microsoft YaHei"/>
-                <a:ea typeface="Microsoft YaHei"/>
-                <a:cs typeface="Microsoft YaHei"/>
-              </a:rPr>
-              <a:t>Workflow 有运行/权限/评价/失败记录</a:t>
-            </a:r>
-          </a:p>
-        </p:txBody>
-      </p:sp>
-      <p:sp>
-        <p:nvSpPr>
-          <p:cNvPr id="22" name="n-7">
-            <a:extLst xmlns:a="http://schemas.openxmlformats.org/drawingml/2006/main">
-              <a:ext uri="{FF2B5EF4-FFF2-40B4-BE49-F238E27FC236}">
-                <a16:creationId xmlns:a16="http://schemas.microsoft.com/office/drawing/2014/main" id="{8D343A26-3100-40E3-9A15-EAD3CF45BBBB}"/>
-              </a:ext>
-            </a:extLst>
-          </p:cNvPr>
-          <p:cNvSpPr>
-            <a:spLocks xmlns:a="http://schemas.openxmlformats.org/drawingml/2006/main" noGrp="1"/>
-          </p:cNvSpPr>
-          <p:nvPr/>
-        </p:nvSpPr>
-        <p:spPr>
-          <a:xfrm xmlns:a="http://schemas.openxmlformats.org/drawingml/2006/main">
-            <a:off x="6362700" y="2933700"/>
-            <a:ext cx="419100" cy="419100"/>
-          </a:xfrm>
-          <a:prstGeom xmlns:a="http://schemas.openxmlformats.org/drawingml/2006/main" prst="roundRect">
-            <a:avLst>
-              <a:gd name="adj" fmla="val 18182"/>
-            </a:avLst>
-          </a:prstGeom>
-          <a:solidFill xmlns:a="http://schemas.openxmlformats.org/drawingml/2006/main">
-            <a:srgbClr val="18354E"/>
-          </a:solidFill>
-          <a:ln xmlns:a="http://schemas.openxmlformats.org/drawingml/2006/main" w="0">
-            <a:noFill/>
-            <a:prstDash val="solid"/>
-          </a:ln>
-        </p:spPr>
-        <p:txBody>
-          <a:bodyPr xmlns:a="http://schemas.openxmlformats.org/drawingml/2006/main" lIns="76200" tIns="38100" rIns="76200" bIns="38100" anchor="ctr"/>
-          <a:lstStyle xmlns:a="http://schemas.openxmlformats.org/drawingml/2006/main"/>
-          <a:p xmlns:a="http://schemas.openxmlformats.org/drawingml/2006/main">
-            <a:pPr algn="ctr">
-              <a:defRPr sz="1350" b="1">
-                <a:solidFill>
-                  <a:srgbClr val="FFFFFF"/>
-                </a:solidFill>
-              </a:defRPr>
-            </a:pPr>
-            <a:r>
-              <a:rPr sz="1350" b="1">
-                <a:solidFill>
-                  <a:srgbClr val="FFFFFF"/>
-                </a:solidFill>
-                <a:latin typeface="Arial"/>
-                <a:ea typeface="Arial"/>
-                <a:cs typeface="Arial"/>
-              </a:rPr>
-              <a:t>8</a:t>
-            </a:r>
-          </a:p>
-        </p:txBody>
-      </p:sp>
-      <p:sp>
-        <p:nvSpPr>
-          <p:cNvPr id="23" name="c-7">
-            <a:extLst xmlns:a="http://schemas.openxmlformats.org/drawingml/2006/main">
-              <a:ext uri="{FF2B5EF4-FFF2-40B4-BE49-F238E27FC236}">
-                <a16:creationId xmlns:a16="http://schemas.microsoft.com/office/drawing/2014/main" id="{5DE96E01-B7D7-4A7B-9B7D-4996FB426D35}"/>
-              </a:ext>
-            </a:extLst>
-          </p:cNvPr>
-          <p:cNvSpPr>
-            <a:spLocks xmlns:a="http://schemas.openxmlformats.org/drawingml/2006/main" noGrp="1"/>
-          </p:cNvSpPr>
-          <p:nvPr/>
-        </p:nvSpPr>
-        <p:spPr>
-          <a:xfrm xmlns:a="http://schemas.openxmlformats.org/drawingml/2006/main">
-            <a:off x="6896100" y="2857500"/>
-            <a:ext cx="5067300" cy="571500"/>
-          </a:xfrm>
-          <a:prstGeom xmlns:a="http://schemas.openxmlformats.org/drawingml/2006/main" prst="roundRect">
-            <a:avLst>
-              <a:gd name="adj" fmla="val 13333"/>
-            </a:avLst>
-          </a:prstGeom>
-          <a:solidFill xmlns:a="http://schemas.openxmlformats.org/drawingml/2006/main">
-            <a:srgbClr val="F3F6F7"/>
-          </a:solidFill>
-          <a:ln xmlns:a="http://schemas.openxmlformats.org/drawingml/2006/main" w="9525">
-            <a:solidFill>
-              <a:srgbClr val="D6DDE2"/>
-            </a:solidFill>
-            <a:prstDash val="solid"/>
-          </a:ln>
-        </p:spPr>
-        <p:txBody>
-          <a:bodyPr xmlns:a="http://schemas.openxmlformats.org/drawingml/2006/main" lIns="76200" tIns="38100" rIns="76200" bIns="38100" anchor="ctr"/>
-          <a:lstStyle xmlns:a="http://schemas.openxmlformats.org/drawingml/2006/main"/>
-          <a:p xmlns:a="http://schemas.openxmlformats.org/drawingml/2006/main">
-            <a:pPr algn="l">
-              <a:lnSpc>
-                <a:spcPct val="115000"/>
-              </a:lnSpc>
-              <a:buNone/>
-              <a:defRPr sz="1350" b="1">
-                <a:solidFill>
-                  <a:srgbClr val="263746"/>
-                </a:solidFill>
-              </a:defRPr>
-            </a:pPr>
-            <a:r>
-              <a:rPr sz="1350" b="1">
-                <a:solidFill>
-                  <a:srgbClr val="263746"/>
-                </a:solidFill>
-                <a:latin typeface="Microsoft YaHei"/>
-                <a:ea typeface="Microsoft YaHei"/>
-                <a:cs typeface="Microsoft YaHei"/>
-              </a:rPr>
-              <a:t>伦理/许可/贡献/AI 披露完整</a:t>
-            </a:r>
-          </a:p>
-        </p:txBody>
-      </p:sp>
-      <p:sp>
-        <p:nvSpPr>
-          <p:cNvPr id="24" name="n-8">
-            <a:extLst xmlns:a="http://schemas.openxmlformats.org/drawingml/2006/main">
-              <a:ext uri="{FF2B5EF4-FFF2-40B4-BE49-F238E27FC236}">
-                <a16:creationId xmlns:a16="http://schemas.microsoft.com/office/drawing/2014/main" id="{FBC4623E-1F56-4F24-8052-9ED02D6B76E0}"/>
-              </a:ext>
-            </a:extLst>
-          </p:cNvPr>
-          <p:cNvSpPr>
-            <a:spLocks xmlns:a="http://schemas.openxmlformats.org/drawingml/2006/main" noGrp="1"/>
-          </p:cNvSpPr>
-          <p:nvPr/>
-        </p:nvSpPr>
-        <p:spPr>
-          <a:xfrm xmlns:a="http://schemas.openxmlformats.org/drawingml/2006/main">
-            <a:off x="6362700" y="3619500"/>
-            <a:ext cx="419100" cy="419100"/>
-          </a:xfrm>
-          <a:prstGeom xmlns:a="http://schemas.openxmlformats.org/drawingml/2006/main" prst="roundRect">
-            <a:avLst>
-              <a:gd name="adj" fmla="val 18182"/>
-            </a:avLst>
-          </a:prstGeom>
-          <a:solidFill xmlns:a="http://schemas.openxmlformats.org/drawingml/2006/main">
-            <a:srgbClr val="18354E"/>
-          </a:solidFill>
-          <a:ln xmlns:a="http://schemas.openxmlformats.org/drawingml/2006/main" w="0">
-            <a:noFill/>
-            <a:prstDash val="solid"/>
-          </a:ln>
-        </p:spPr>
-        <p:txBody>
-          <a:bodyPr xmlns:a="http://schemas.openxmlformats.org/drawingml/2006/main" lIns="76200" tIns="38100" rIns="76200" bIns="38100" anchor="ctr"/>
-          <a:lstStyle xmlns:a="http://schemas.openxmlformats.org/drawingml/2006/main"/>
-          <a:p xmlns:a="http://schemas.openxmlformats.org/drawingml/2006/main">
-            <a:pPr algn="ctr">
-              <a:defRPr sz="1350" b="1">
-                <a:solidFill>
-                  <a:srgbClr val="FFFFFF"/>
-                </a:solidFill>
-              </a:defRPr>
-            </a:pPr>
-            <a:r>
-              <a:rPr sz="1350" b="1">
-                <a:solidFill>
-                  <a:srgbClr val="FFFFFF"/>
-                </a:solidFill>
-                <a:latin typeface="Arial"/>
-                <a:ea typeface="Arial"/>
-                <a:cs typeface="Arial"/>
-              </a:rPr>
-              <a:t>9</a:t>
-            </a:r>
-          </a:p>
-        </p:txBody>
-      </p:sp>
-      <p:sp>
-        <p:nvSpPr>
-          <p:cNvPr id="25" name="c-8">
-            <a:extLst xmlns:a="http://schemas.openxmlformats.org/drawingml/2006/main">
-              <a:ext uri="{FF2B5EF4-FFF2-40B4-BE49-F238E27FC236}">
-                <a16:creationId xmlns:a16="http://schemas.microsoft.com/office/drawing/2014/main" id="{2D7DF585-F743-4F87-8558-60FE0F246610}"/>
-              </a:ext>
-            </a:extLst>
-          </p:cNvPr>
-          <p:cNvSpPr>
-            <a:spLocks xmlns:a="http://schemas.openxmlformats.org/drawingml/2006/main" noGrp="1"/>
-          </p:cNvSpPr>
-          <p:nvPr/>
-        </p:nvSpPr>
-        <p:spPr>
-          <a:xfrm xmlns:a="http://schemas.openxmlformats.org/drawingml/2006/main">
-            <a:off x="6896100" y="3543300"/>
-            <a:ext cx="5067300" cy="571500"/>
-          </a:xfrm>
-          <a:prstGeom xmlns:a="http://schemas.openxmlformats.org/drawingml/2006/main" prst="roundRect">
-            <a:avLst>
-              <a:gd name="adj" fmla="val 13333"/>
-            </a:avLst>
-          </a:prstGeom>
-          <a:solidFill xmlns:a="http://schemas.openxmlformats.org/drawingml/2006/main">
-            <a:srgbClr val="FFFFFF"/>
-          </a:solidFill>
-          <a:ln xmlns:a="http://schemas.openxmlformats.org/drawingml/2006/main" w="9525">
-            <a:solidFill>
-              <a:srgbClr val="D6DDE2"/>
-            </a:solidFill>
-            <a:prstDash val="solid"/>
-          </a:ln>
-        </p:spPr>
-        <p:txBody>
-          <a:bodyPr xmlns:a="http://schemas.openxmlformats.org/drawingml/2006/main" lIns="76200" tIns="38100" rIns="76200" bIns="38100" anchor="ctr"/>
-          <a:lstStyle xmlns:a="http://schemas.openxmlformats.org/drawingml/2006/main"/>
-          <a:p xmlns:a="http://schemas.openxmlformats.org/drawingml/2006/main">
-            <a:pPr algn="l">
-              <a:lnSpc>
-                <a:spcPct val="115000"/>
-              </a:lnSpc>
-              <a:buNone/>
-              <a:defRPr sz="1350" b="1">
-                <a:solidFill>
-                  <a:srgbClr val="263746"/>
-                </a:solidFill>
-              </a:defRPr>
-            </a:pPr>
-            <a:r>
-              <a:rPr sz="1350" b="1">
-                <a:solidFill>
-                  <a:srgbClr val="263746"/>
-                </a:solidFill>
-                <a:latin typeface="Microsoft YaHei"/>
-                <a:ea typeface="Microsoft YaHei"/>
-                <a:cs typeface="Microsoft YaHei"/>
-              </a:rPr>
-              <a:t>工件状态与实际门检查一致</a:t>
-            </a:r>
-          </a:p>
-        </p:txBody>
-      </p:sp>
-      <p:sp>
-        <p:nvSpPr>
-          <p:cNvPr id="26" name="n-9">
-            <a:extLst xmlns:a="http://schemas.openxmlformats.org/drawingml/2006/main">
-              <a:ext uri="{FF2B5EF4-FFF2-40B4-BE49-F238E27FC236}">
-                <a16:creationId xmlns:a16="http://schemas.microsoft.com/office/drawing/2014/main" id="{594FEFB7-141B-42AD-9AD4-4712DC7713F5}"/>
-              </a:ext>
-            </a:extLst>
-          </p:cNvPr>
-          <p:cNvSpPr>
-            <a:spLocks xmlns:a="http://schemas.openxmlformats.org/drawingml/2006/main" noGrp="1"/>
-          </p:cNvSpPr>
-          <p:nvPr/>
-        </p:nvSpPr>
-        <p:spPr>
-          <a:xfrm xmlns:a="http://schemas.openxmlformats.org/drawingml/2006/main">
-            <a:off x="6362700" y="4305300"/>
-            <a:ext cx="419100" cy="419100"/>
-          </a:xfrm>
-          <a:prstGeom xmlns:a="http://schemas.openxmlformats.org/drawingml/2006/main" prst="roundRect">
-            <a:avLst>
-              <a:gd name="adj" fmla="val 18182"/>
-            </a:avLst>
-          </a:prstGeom>
-          <a:solidFill xmlns:a="http://schemas.openxmlformats.org/drawingml/2006/main">
-            <a:srgbClr val="A86C12"/>
-          </a:solidFill>
-          <a:ln xmlns:a="http://schemas.openxmlformats.org/drawingml/2006/main" w="0">
-            <a:noFill/>
-            <a:prstDash val="solid"/>
-          </a:ln>
-        </p:spPr>
-        <p:txBody>
-          <a:bodyPr xmlns:a="http://schemas.openxmlformats.org/drawingml/2006/main" lIns="76200" tIns="38100" rIns="76200" bIns="38100" anchor="ctr"/>
-          <a:lstStyle xmlns:a="http://schemas.openxmlformats.org/drawingml/2006/main"/>
-          <a:p xmlns:a="http://schemas.openxmlformats.org/drawingml/2006/main">
-            <a:pPr algn="ctr">
-              <a:defRPr sz="1350" b="1">
-                <a:solidFill>
-                  <a:srgbClr val="FFFFFF"/>
-                </a:solidFill>
-              </a:defRPr>
-            </a:pPr>
-            <a:r>
-              <a:rPr sz="1350" b="1">
-                <a:solidFill>
-                  <a:srgbClr val="FFFFFF"/>
-                </a:solidFill>
-                <a:latin typeface="Arial"/>
-                <a:ea typeface="Arial"/>
-                <a:cs typeface="Arial"/>
-              </a:rPr>
-              <a:t>10</a:t>
-            </a:r>
-          </a:p>
-        </p:txBody>
-      </p:sp>
-      <p:sp>
-        <p:nvSpPr>
-          <p:cNvPr id="27" name="c-9">
-            <a:extLst xmlns:a="http://schemas.openxmlformats.org/drawingml/2006/main">
-              <a:ext uri="{FF2B5EF4-FFF2-40B4-BE49-F238E27FC236}">
-                <a16:creationId xmlns:a16="http://schemas.microsoft.com/office/drawing/2014/main" id="{5D3E0A7E-E0D1-4F12-BF8D-D94A1D7ADE81}"/>
-              </a:ext>
-            </a:extLst>
-          </p:cNvPr>
-          <p:cNvSpPr>
-            <a:spLocks xmlns:a="http://schemas.openxmlformats.org/drawingml/2006/main" noGrp="1"/>
-          </p:cNvSpPr>
-          <p:nvPr/>
-        </p:nvSpPr>
-        <p:spPr>
-          <a:xfrm xmlns:a="http://schemas.openxmlformats.org/drawingml/2006/main">
-            <a:off x="6896100" y="4229100"/>
-            <a:ext cx="5067300" cy="571500"/>
-          </a:xfrm>
-          <a:prstGeom xmlns:a="http://schemas.openxmlformats.org/drawingml/2006/main" prst="roundRect">
-            <a:avLst>
-              <a:gd name="adj" fmla="val 13333"/>
-            </a:avLst>
-          </a:prstGeom>
-          <a:solidFill xmlns:a="http://schemas.openxmlformats.org/drawingml/2006/main">
-            <a:srgbClr val="FAF0DD"/>
-          </a:solidFill>
-          <a:ln xmlns:a="http://schemas.openxmlformats.org/drawingml/2006/main" w="9525">
-            <a:solidFill>
-              <a:srgbClr val="D6DDE2"/>
-            </a:solidFill>
-            <a:prstDash val="solid"/>
-          </a:ln>
-        </p:spPr>
-        <p:txBody>
-          <a:bodyPr xmlns:a="http://schemas.openxmlformats.org/drawingml/2006/main" lIns="76200" tIns="38100" rIns="76200" bIns="38100" anchor="ctr"/>
-          <a:lstStyle xmlns:a="http://schemas.openxmlformats.org/drawingml/2006/main"/>
-          <a:p xmlns:a="http://schemas.openxmlformats.org/drawingml/2006/main">
-            <a:pPr algn="l">
-              <a:lnSpc>
-                <a:spcPct val="115000"/>
-              </a:lnSpc>
-              <a:buNone/>
-              <a:defRPr sz="1350" b="1">
-                <a:solidFill>
-                  <a:srgbClr val="263746"/>
-                </a:solidFill>
-              </a:defRPr>
-            </a:pPr>
-            <a:r>
-              <a:rPr sz="1350" b="1">
-                <a:solidFill>
-                  <a:srgbClr val="263746"/>
-                </a:solidFill>
-                <a:latin typeface="Microsoft YaHei"/>
-                <a:ea typeface="Microsoft YaHei"/>
-                <a:cs typeface="Microsoft YaHei"/>
-              </a:rPr>
-              <a:t>个人展示/复现抽查/课程复盘完成</a:t>
-            </a:r>
-          </a:p>
-        </p:txBody>
-      </p:sp>
-      <p:sp>
-        <p:nvSpPr>
-          <p:cNvPr id="28" name="handoff">
-            <a:extLst xmlns:a="http://schemas.openxmlformats.org/drawingml/2006/main">
-              <a:ext uri="{FF2B5EF4-FFF2-40B4-BE49-F238E27FC236}">
-                <a16:creationId xmlns:a16="http://schemas.microsoft.com/office/drawing/2014/main" id="{FA049E6F-77E3-4B91-BEFB-675D32FDE9E0}"/>
-              </a:ext>
-            </a:extLst>
-          </p:cNvPr>
-          <p:cNvSpPr>
-            <a:spLocks xmlns:a="http://schemas.openxmlformats.org/drawingml/2006/main" noGrp="1"/>
-          </p:cNvSpPr>
-          <p:nvPr/>
-        </p:nvSpPr>
-        <p:spPr>
-          <a:xfrm xmlns:a="http://schemas.openxmlformats.org/drawingml/2006/main">
-            <a:off x="990600" y="5105400"/>
-            <a:ext cx="10210800" cy="438150"/>
-          </a:xfrm>
-          <a:prstGeom xmlns:a="http://schemas.openxmlformats.org/drawingml/2006/main" prst="roundRect">
-            <a:avLst>
-              <a:gd name="adj" fmla="val 17391"/>
-            </a:avLst>
-          </a:prstGeom>
-          <a:solidFill xmlns:a="http://schemas.openxmlformats.org/drawingml/2006/main">
-            <a:srgbClr val="F8E9EA"/>
-          </a:solidFill>
-          <a:ln xmlns:a="http://schemas.openxmlformats.org/drawingml/2006/main" w="0">
-            <a:noFill/>
-            <a:prstDash val="solid"/>
-          </a:ln>
-        </p:spPr>
-        <p:txBody>
-          <a:bodyPr xmlns:a="http://schemas.openxmlformats.org/drawingml/2006/main" lIns="76200" tIns="38100" rIns="76200" bIns="38100" anchor="ctr"/>
-          <a:lstStyle xmlns:a="http://schemas.openxmlformats.org/drawingml/2006/main"/>
-          <a:p xmlns:a="http://schemas.openxmlformats.org/drawingml/2006/main">
-            <a:pPr algn="ctr">
-              <a:defRPr sz="1500" b="1">
+              <a:defRPr sz="1800" b="1">
                 <a:solidFill>
                   <a:srgbClr val="C8161E"/>
                 </a:solidFill>
               </a:defRPr>
             </a:pPr>
             <a:r>
-              <a:rPr sz="1500" b="1">
+              <a:rPr sz="1800" b="1">
                 <a:solidFill>
                   <a:srgbClr val="C8161E"/>
                 </a:solidFill>
@@ -11394,7 +10146,7 @@
                 <a:ea typeface="Microsoft YaHei"/>
                 <a:cs typeface="Microsoft YaHei"/>
               </a:rPr>
-              <a:t>第 4 项留给第 15 课｜第 10 项留给第 16 课｜其余本课补全或明确缺口</a:t>
+              <a:t>条件 4 留给第 15 课｜本页先找缺口，不要假装全部通过</a:t>
             </a:r>
           </a:p>
         </p:txBody>
@@ -11459,7 +10211,7 @@
                 <a:ea typeface="Microsoft YaHei"/>
                 <a:cs typeface="Microsoft YaHei"/>
               </a:rPr>
-              <a:t>同伴组互查论文式短文初版</a:t>
+              <a:t>论证门条件 6–10 与同伴互查</a:t>
             </a:r>
             <a:endParaRPr/>
           </a:p>
@@ -11498,23 +10250,23 @@
           <p:cNvPr id="6" name="n-0">
             <a:extLst xmlns:a="http://schemas.openxmlformats.org/drawingml/2006/main">
               <a:ext uri="{FF2B5EF4-FFF2-40B4-BE49-F238E27FC236}">
-                <a16:creationId xmlns:a16="http://schemas.microsoft.com/office/drawing/2014/main" id="{AC42FBB0-54C6-4F53-B858-A069CCC2A994}"/>
-              </a:ext>
-            </a:extLst>
-          </p:cNvPr>
-          <p:cNvSpPr>
-            <a:spLocks xmlns:a="http://schemas.openxmlformats.org/drawingml/2006/main" noGrp="1"/>
-          </p:cNvSpPr>
-          <p:nvPr/>
-        </p:nvSpPr>
-        <p:spPr>
-          <a:xfrm xmlns:a="http://schemas.openxmlformats.org/drawingml/2006/main">
-            <a:off x="590550" y="1143000"/>
-            <a:ext cx="419100" cy="419100"/>
+                <a16:creationId xmlns:a16="http://schemas.microsoft.com/office/drawing/2014/main" id="{E0D824C7-87C1-4E9F-9C41-934C98F18936}"/>
+              </a:ext>
+            </a:extLst>
+          </p:cNvPr>
+          <p:cNvSpPr>
+            <a:spLocks xmlns:a="http://schemas.openxmlformats.org/drawingml/2006/main" noGrp="1"/>
+          </p:cNvSpPr>
+          <p:nvPr/>
+        </p:nvSpPr>
+        <p:spPr>
+          <a:xfrm xmlns:a="http://schemas.openxmlformats.org/drawingml/2006/main">
+            <a:off x="666750" y="1047750"/>
+            <a:ext cx="533400" cy="514350"/>
           </a:xfrm>
           <a:prstGeom xmlns:a="http://schemas.openxmlformats.org/drawingml/2006/main" prst="roundRect">
             <a:avLst>
-              <a:gd name="adj" fmla="val 18182"/>
+              <a:gd name="adj" fmla="val 14815"/>
             </a:avLst>
           </a:prstGeom>
           <a:solidFill xmlns:a="http://schemas.openxmlformats.org/drawingml/2006/main">
@@ -11530,14 +10282,14 @@
           <a:lstStyle xmlns:a="http://schemas.openxmlformats.org/drawingml/2006/main"/>
           <a:p xmlns:a="http://schemas.openxmlformats.org/drawingml/2006/main">
             <a:pPr algn="ctr">
-              <a:defRPr sz="1350" b="1">
+              <a:defRPr sz="1800" b="1">
                 <a:solidFill>
                   <a:srgbClr val="FFFFFF"/>
                 </a:solidFill>
               </a:defRPr>
             </a:pPr>
             <a:r>
-              <a:rPr sz="1350" b="1">
+              <a:rPr sz="1800" b="1">
                 <a:solidFill>
                   <a:srgbClr val="FFFFFF"/>
                 </a:solidFill>
@@ -11545,7 +10297,7 @@
                 <a:ea typeface="Arial"/>
                 <a:cs typeface="Arial"/>
               </a:rPr>
-              <a:t>1</a:t>
+              <a:t>6</a:t>
             </a:r>
           </a:p>
         </p:txBody>
@@ -11555,23 +10307,23 @@
           <p:cNvPr id="7" name="q-0">
             <a:extLst xmlns:a="http://schemas.openxmlformats.org/drawingml/2006/main">
               <a:ext uri="{FF2B5EF4-FFF2-40B4-BE49-F238E27FC236}">
-                <a16:creationId xmlns:a16="http://schemas.microsoft.com/office/drawing/2014/main" id="{B913974F-8817-4BB0-B708-3FD0DFE712CD}"/>
-              </a:ext>
-            </a:extLst>
-          </p:cNvPr>
-          <p:cNvSpPr>
-            <a:spLocks xmlns:a="http://schemas.openxmlformats.org/drawingml/2006/main" noGrp="1"/>
-          </p:cNvSpPr>
-          <p:nvPr/>
-        </p:nvSpPr>
-        <p:spPr>
-          <a:xfrm xmlns:a="http://schemas.openxmlformats.org/drawingml/2006/main">
-            <a:off x="1143000" y="1066800"/>
-            <a:ext cx="4762500" cy="571500"/>
+                <a16:creationId xmlns:a16="http://schemas.microsoft.com/office/drawing/2014/main" id="{D14454E4-AD0B-4726-A91B-EFD0B17957CC}"/>
+              </a:ext>
+            </a:extLst>
+          </p:cNvPr>
+          <p:cNvSpPr>
+            <a:spLocks xmlns:a="http://schemas.openxmlformats.org/drawingml/2006/main" noGrp="1"/>
+          </p:cNvSpPr>
+          <p:nvPr/>
+        </p:nvSpPr>
+        <p:spPr>
+          <a:xfrm xmlns:a="http://schemas.openxmlformats.org/drawingml/2006/main">
+            <a:off x="1371600" y="990600"/>
+            <a:ext cx="9982200" cy="590550"/>
           </a:xfrm>
           <a:prstGeom xmlns:a="http://schemas.openxmlformats.org/drawingml/2006/main" prst="roundRect">
             <a:avLst>
-              <a:gd name="adj" fmla="val 13333"/>
+              <a:gd name="adj" fmla="val 12903"/>
             </a:avLst>
           </a:prstGeom>
           <a:solidFill xmlns:a="http://schemas.openxmlformats.org/drawingml/2006/main">
@@ -11589,14 +10341,14 @@
           <a:lstStyle xmlns:a="http://schemas.openxmlformats.org/drawingml/2006/main"/>
           <a:p xmlns:a="http://schemas.openxmlformats.org/drawingml/2006/main">
             <a:pPr algn="l">
-              <a:defRPr sz="1425" b="1">
+              <a:defRPr sz="1800" b="1">
                 <a:solidFill>
                   <a:srgbClr val="263746"/>
                 </a:solidFill>
               </a:defRPr>
             </a:pPr>
             <a:r>
-              <a:rPr sz="1425" b="1">
+              <a:rPr sz="1800" b="1">
                 <a:solidFill>
                   <a:srgbClr val="263746"/>
                 </a:solidFill>
@@ -11604,7 +10356,7 @@
                 <a:ea typeface="Microsoft YaHei"/>
                 <a:cs typeface="Microsoft YaHei"/>
               </a:rPr>
-              <a:t>贡献是否绑定证据与状态？</a:t>
+              <a:t>stable 独立证据，否则降级</a:t>
             </a:r>
           </a:p>
         </p:txBody>
@@ -11614,23 +10366,23 @@
           <p:cNvPr id="8" name="n-1">
             <a:extLst xmlns:a="http://schemas.openxmlformats.org/drawingml/2006/main">
               <a:ext uri="{FF2B5EF4-FFF2-40B4-BE49-F238E27FC236}">
-                <a16:creationId xmlns:a16="http://schemas.microsoft.com/office/drawing/2014/main" id="{81F90B1F-D962-4522-860C-736DD713EEAD}"/>
-              </a:ext>
-            </a:extLst>
-          </p:cNvPr>
-          <p:cNvSpPr>
-            <a:spLocks xmlns:a="http://schemas.openxmlformats.org/drawingml/2006/main" noGrp="1"/>
-          </p:cNvSpPr>
-          <p:nvPr/>
-        </p:nvSpPr>
-        <p:spPr>
-          <a:xfrm xmlns:a="http://schemas.openxmlformats.org/drawingml/2006/main">
-            <a:off x="590550" y="1924050"/>
-            <a:ext cx="419100" cy="419100"/>
+                <a16:creationId xmlns:a16="http://schemas.microsoft.com/office/drawing/2014/main" id="{54817E84-408C-449B-BE30-077815802588}"/>
+              </a:ext>
+            </a:extLst>
+          </p:cNvPr>
+          <p:cNvSpPr>
+            <a:spLocks xmlns:a="http://schemas.openxmlformats.org/drawingml/2006/main" noGrp="1"/>
+          </p:cNvSpPr>
+          <p:nvPr/>
+        </p:nvSpPr>
+        <p:spPr>
+          <a:xfrm xmlns:a="http://schemas.openxmlformats.org/drawingml/2006/main">
+            <a:off x="666750" y="1676400"/>
+            <a:ext cx="533400" cy="514350"/>
           </a:xfrm>
           <a:prstGeom xmlns:a="http://schemas.openxmlformats.org/drawingml/2006/main" prst="roundRect">
             <a:avLst>
-              <a:gd name="adj" fmla="val 18182"/>
+              <a:gd name="adj" fmla="val 14815"/>
             </a:avLst>
           </a:prstGeom>
           <a:solidFill xmlns:a="http://schemas.openxmlformats.org/drawingml/2006/main">
@@ -11646,14 +10398,14 @@
           <a:lstStyle xmlns:a="http://schemas.openxmlformats.org/drawingml/2006/main"/>
           <a:p xmlns:a="http://schemas.openxmlformats.org/drawingml/2006/main">
             <a:pPr algn="ctr">
-              <a:defRPr sz="1350" b="1">
+              <a:defRPr sz="1800" b="1">
                 <a:solidFill>
                   <a:srgbClr val="FFFFFF"/>
                 </a:solidFill>
               </a:defRPr>
             </a:pPr>
             <a:r>
-              <a:rPr sz="1350" b="1">
+              <a:rPr sz="1800" b="1">
                 <a:solidFill>
                   <a:srgbClr val="FFFFFF"/>
                 </a:solidFill>
@@ -11661,7 +10413,7 @@
                 <a:ea typeface="Arial"/>
                 <a:cs typeface="Arial"/>
               </a:rPr>
-              <a:t>2</a:t>
+              <a:t>7</a:t>
             </a:r>
           </a:p>
         </p:txBody>
@@ -11671,27 +10423,27 @@
           <p:cNvPr id="9" name="q-1">
             <a:extLst xmlns:a="http://schemas.openxmlformats.org/drawingml/2006/main">
               <a:ext uri="{FF2B5EF4-FFF2-40B4-BE49-F238E27FC236}">
-                <a16:creationId xmlns:a16="http://schemas.microsoft.com/office/drawing/2014/main" id="{AB1230CC-9EB0-4A74-93BD-D5C62E62D06A}"/>
-              </a:ext>
-            </a:extLst>
-          </p:cNvPr>
-          <p:cNvSpPr>
-            <a:spLocks xmlns:a="http://schemas.openxmlformats.org/drawingml/2006/main" noGrp="1"/>
-          </p:cNvSpPr>
-          <p:nvPr/>
-        </p:nvSpPr>
-        <p:spPr>
-          <a:xfrm xmlns:a="http://schemas.openxmlformats.org/drawingml/2006/main">
-            <a:off x="1143000" y="1847850"/>
-            <a:ext cx="4762500" cy="571500"/>
+                <a16:creationId xmlns:a16="http://schemas.microsoft.com/office/drawing/2014/main" id="{F61F389F-DFBE-4045-9266-E18697EC99D5}"/>
+              </a:ext>
+            </a:extLst>
+          </p:cNvPr>
+          <p:cNvSpPr>
+            <a:spLocks xmlns:a="http://schemas.openxmlformats.org/drawingml/2006/main" noGrp="1"/>
+          </p:cNvSpPr>
+          <p:nvPr/>
+        </p:nvSpPr>
+        <p:spPr>
+          <a:xfrm xmlns:a="http://schemas.openxmlformats.org/drawingml/2006/main">
+            <a:off x="1371600" y="1619250"/>
+            <a:ext cx="9982200" cy="590550"/>
           </a:xfrm>
           <a:prstGeom xmlns:a="http://schemas.openxmlformats.org/drawingml/2006/main" prst="roundRect">
             <a:avLst>
-              <a:gd name="adj" fmla="val 13333"/>
+              <a:gd name="adj" fmla="val 12903"/>
             </a:avLst>
           </a:prstGeom>
           <a:solidFill xmlns:a="http://schemas.openxmlformats.org/drawingml/2006/main">
-            <a:srgbClr val="F3F6F7"/>
+            <a:srgbClr val="FFFFFF"/>
           </a:solidFill>
           <a:ln xmlns:a="http://schemas.openxmlformats.org/drawingml/2006/main" w="9525">
             <a:solidFill>
@@ -11705,14 +10457,14 @@
           <a:lstStyle xmlns:a="http://schemas.openxmlformats.org/drawingml/2006/main"/>
           <a:p xmlns:a="http://schemas.openxmlformats.org/drawingml/2006/main">
             <a:pPr algn="l">
-              <a:defRPr sz="1425" b="1">
+              <a:defRPr sz="1800" b="1">
                 <a:solidFill>
                   <a:srgbClr val="263746"/>
                 </a:solidFill>
               </a:defRPr>
             </a:pPr>
             <a:r>
-              <a:rPr sz="1425" b="1">
+              <a:rPr sz="1800" b="1">
                 <a:solidFill>
                   <a:srgbClr val="263746"/>
                 </a:solidFill>
@@ -11720,7 +10472,7 @@
                 <a:ea typeface="Microsoft YaHei"/>
                 <a:cs typeface="Microsoft YaHei"/>
               </a:rPr>
-              <a:t>追踪表三字段齐全？</a:t>
+              <a:t>Workflow 运行 / 权限 / 评价 / 失败</a:t>
             </a:r>
           </a:p>
         </p:txBody>
@@ -11730,27 +10482,27 @@
           <p:cNvPr id="10" name="n-2">
             <a:extLst xmlns:a="http://schemas.openxmlformats.org/drawingml/2006/main">
               <a:ext uri="{FF2B5EF4-FFF2-40B4-BE49-F238E27FC236}">
-                <a16:creationId xmlns:a16="http://schemas.microsoft.com/office/drawing/2014/main" id="{C4124597-A98B-4F20-BFFB-70367AE7EDB3}"/>
-              </a:ext>
-            </a:extLst>
-          </p:cNvPr>
-          <p:cNvSpPr>
-            <a:spLocks xmlns:a="http://schemas.openxmlformats.org/drawingml/2006/main" noGrp="1"/>
-          </p:cNvSpPr>
-          <p:nvPr/>
-        </p:nvSpPr>
-        <p:spPr>
-          <a:xfrm xmlns:a="http://schemas.openxmlformats.org/drawingml/2006/main">
-            <a:off x="590550" y="2705100"/>
-            <a:ext cx="419100" cy="419100"/>
+                <a16:creationId xmlns:a16="http://schemas.microsoft.com/office/drawing/2014/main" id="{CA99A24A-D47E-45CD-975F-793C9C4DE0FD}"/>
+              </a:ext>
+            </a:extLst>
+          </p:cNvPr>
+          <p:cNvSpPr>
+            <a:spLocks xmlns:a="http://schemas.openxmlformats.org/drawingml/2006/main" noGrp="1"/>
+          </p:cNvSpPr>
+          <p:nvPr/>
+        </p:nvSpPr>
+        <p:spPr>
+          <a:xfrm xmlns:a="http://schemas.openxmlformats.org/drawingml/2006/main">
+            <a:off x="666750" y="2305050"/>
+            <a:ext cx="533400" cy="514350"/>
           </a:xfrm>
           <a:prstGeom xmlns:a="http://schemas.openxmlformats.org/drawingml/2006/main" prst="roundRect">
             <a:avLst>
-              <a:gd name="adj" fmla="val 18182"/>
+              <a:gd name="adj" fmla="val 14815"/>
             </a:avLst>
           </a:prstGeom>
           <a:solidFill xmlns:a="http://schemas.openxmlformats.org/drawingml/2006/main">
-            <a:srgbClr val="C8161E"/>
+            <a:srgbClr val="18354E"/>
           </a:solidFill>
           <a:ln xmlns:a="http://schemas.openxmlformats.org/drawingml/2006/main" w="0">
             <a:noFill/>
@@ -11762,14 +10514,14 @@
           <a:lstStyle xmlns:a="http://schemas.openxmlformats.org/drawingml/2006/main"/>
           <a:p xmlns:a="http://schemas.openxmlformats.org/drawingml/2006/main">
             <a:pPr algn="ctr">
-              <a:defRPr sz="1350" b="1">
+              <a:defRPr sz="1800" b="1">
                 <a:solidFill>
                   <a:srgbClr val="FFFFFF"/>
                 </a:solidFill>
               </a:defRPr>
             </a:pPr>
             <a:r>
-              <a:rPr sz="1350" b="1">
+              <a:rPr sz="1800" b="1">
                 <a:solidFill>
                   <a:srgbClr val="FFFFFF"/>
                 </a:solidFill>
@@ -11777,7 +10529,7 @@
                 <a:ea typeface="Arial"/>
                 <a:cs typeface="Arial"/>
               </a:rPr>
-              <a:t>3</a:t>
+              <a:t>8</a:t>
             </a:r>
           </a:p>
         </p:txBody>
@@ -11787,27 +10539,27 @@
           <p:cNvPr id="11" name="q-2">
             <a:extLst xmlns:a="http://schemas.openxmlformats.org/drawingml/2006/main">
               <a:ext uri="{FF2B5EF4-FFF2-40B4-BE49-F238E27FC236}">
-                <a16:creationId xmlns:a16="http://schemas.microsoft.com/office/drawing/2014/main" id="{10017A97-2FD6-42C4-8DFC-04B624671197}"/>
-              </a:ext>
-            </a:extLst>
-          </p:cNvPr>
-          <p:cNvSpPr>
-            <a:spLocks xmlns:a="http://schemas.openxmlformats.org/drawingml/2006/main" noGrp="1"/>
-          </p:cNvSpPr>
-          <p:nvPr/>
-        </p:nvSpPr>
-        <p:spPr>
-          <a:xfrm xmlns:a="http://schemas.openxmlformats.org/drawingml/2006/main">
-            <a:off x="1143000" y="2628900"/>
-            <a:ext cx="4762500" cy="571500"/>
+                <a16:creationId xmlns:a16="http://schemas.microsoft.com/office/drawing/2014/main" id="{0E62E102-9DEE-4F45-8CED-08D71DDEEB4D}"/>
+              </a:ext>
+            </a:extLst>
+          </p:cNvPr>
+          <p:cNvSpPr>
+            <a:spLocks xmlns:a="http://schemas.openxmlformats.org/drawingml/2006/main" noGrp="1"/>
+          </p:cNvSpPr>
+          <p:nvPr/>
+        </p:nvSpPr>
+        <p:spPr>
+          <a:xfrm xmlns:a="http://schemas.openxmlformats.org/drawingml/2006/main">
+            <a:off x="1371600" y="2247900"/>
+            <a:ext cx="9982200" cy="590550"/>
           </a:xfrm>
           <a:prstGeom xmlns:a="http://schemas.openxmlformats.org/drawingml/2006/main" prst="roundRect">
             <a:avLst>
-              <a:gd name="adj" fmla="val 13333"/>
+              <a:gd name="adj" fmla="val 12903"/>
             </a:avLst>
           </a:prstGeom>
           <a:solidFill xmlns:a="http://schemas.openxmlformats.org/drawingml/2006/main">
-            <a:srgbClr val="F8E9EA"/>
+            <a:srgbClr val="F3F6F7"/>
           </a:solidFill>
           <a:ln xmlns:a="http://schemas.openxmlformats.org/drawingml/2006/main" w="9525">
             <a:solidFill>
@@ -11821,14 +10573,14 @@
           <a:lstStyle xmlns:a="http://schemas.openxmlformats.org/drawingml/2006/main"/>
           <a:p xmlns:a="http://schemas.openxmlformats.org/drawingml/2006/main">
             <a:pPr algn="l">
-              <a:defRPr sz="1425" b="1">
+              <a:defRPr sz="1800" b="1">
                 <a:solidFill>
                   <a:srgbClr val="263746"/>
                 </a:solidFill>
               </a:defRPr>
             </a:pPr>
             <a:r>
-              <a:rPr sz="1425" b="1">
+              <a:rPr sz="1800" b="1">
                 <a:solidFill>
                   <a:srgbClr val="263746"/>
                 </a:solidFill>
@@ -11836,7 +10588,7 @@
                 <a:ea typeface="Microsoft YaHei"/>
                 <a:cs typeface="Microsoft YaHei"/>
               </a:rPr>
-              <a:t>负向结果是否写回论文？</a:t>
+              <a:t>伦理 / 许可 / 贡献 / AI 披露</a:t>
             </a:r>
           </a:p>
         </p:txBody>
@@ -11846,27 +10598,27 @@
           <p:cNvPr id="12" name="n-3">
             <a:extLst xmlns:a="http://schemas.openxmlformats.org/drawingml/2006/main">
               <a:ext uri="{FF2B5EF4-FFF2-40B4-BE49-F238E27FC236}">
-                <a16:creationId xmlns:a16="http://schemas.microsoft.com/office/drawing/2014/main" id="{3C6C8BCB-C3B0-4F88-83F7-A84ACCF7F42C}"/>
-              </a:ext>
-            </a:extLst>
-          </p:cNvPr>
-          <p:cNvSpPr>
-            <a:spLocks xmlns:a="http://schemas.openxmlformats.org/drawingml/2006/main" noGrp="1"/>
-          </p:cNvSpPr>
-          <p:nvPr/>
-        </p:nvSpPr>
-        <p:spPr>
-          <a:xfrm xmlns:a="http://schemas.openxmlformats.org/drawingml/2006/main">
-            <a:off x="590550" y="3486150"/>
-            <a:ext cx="419100" cy="419100"/>
+                <a16:creationId xmlns:a16="http://schemas.microsoft.com/office/drawing/2014/main" id="{86291D39-8CA1-46DC-AD13-CF67B5B92BC7}"/>
+              </a:ext>
+            </a:extLst>
+          </p:cNvPr>
+          <p:cNvSpPr>
+            <a:spLocks xmlns:a="http://schemas.openxmlformats.org/drawingml/2006/main" noGrp="1"/>
+          </p:cNvSpPr>
+          <p:nvPr/>
+        </p:nvSpPr>
+        <p:spPr>
+          <a:xfrm xmlns:a="http://schemas.openxmlformats.org/drawingml/2006/main">
+            <a:off x="666750" y="2933700"/>
+            <a:ext cx="533400" cy="514350"/>
           </a:xfrm>
           <a:prstGeom xmlns:a="http://schemas.openxmlformats.org/drawingml/2006/main" prst="roundRect">
             <a:avLst>
-              <a:gd name="adj" fmla="val 18182"/>
+              <a:gd name="adj" fmla="val 14815"/>
             </a:avLst>
           </a:prstGeom>
           <a:solidFill xmlns:a="http://schemas.openxmlformats.org/drawingml/2006/main">
-            <a:srgbClr val="C8161E"/>
+            <a:srgbClr val="18354E"/>
           </a:solidFill>
           <a:ln xmlns:a="http://schemas.openxmlformats.org/drawingml/2006/main" w="0">
             <a:noFill/>
@@ -11878,14 +10630,14 @@
           <a:lstStyle xmlns:a="http://schemas.openxmlformats.org/drawingml/2006/main"/>
           <a:p xmlns:a="http://schemas.openxmlformats.org/drawingml/2006/main">
             <a:pPr algn="ctr">
-              <a:defRPr sz="1350" b="1">
+              <a:defRPr sz="1800" b="1">
                 <a:solidFill>
                   <a:srgbClr val="FFFFFF"/>
                 </a:solidFill>
               </a:defRPr>
             </a:pPr>
             <a:r>
-              <a:rPr sz="1350" b="1">
+              <a:rPr sz="1800" b="1">
                 <a:solidFill>
                   <a:srgbClr val="FFFFFF"/>
                 </a:solidFill>
@@ -11893,7 +10645,7 @@
                 <a:ea typeface="Arial"/>
                 <a:cs typeface="Arial"/>
               </a:rPr>
-              <a:t>4</a:t>
+              <a:t>9</a:t>
             </a:r>
           </a:p>
         </p:txBody>
@@ -11903,27 +10655,27 @@
           <p:cNvPr id="13" name="q-3">
             <a:extLst xmlns:a="http://schemas.openxmlformats.org/drawingml/2006/main">
               <a:ext uri="{FF2B5EF4-FFF2-40B4-BE49-F238E27FC236}">
-                <a16:creationId xmlns:a16="http://schemas.microsoft.com/office/drawing/2014/main" id="{448B30B6-08E7-48A1-86BD-F9974763E9EC}"/>
-              </a:ext>
-            </a:extLst>
-          </p:cNvPr>
-          <p:cNvSpPr>
-            <a:spLocks xmlns:a="http://schemas.openxmlformats.org/drawingml/2006/main" noGrp="1"/>
-          </p:cNvSpPr>
-          <p:nvPr/>
-        </p:nvSpPr>
-        <p:spPr>
-          <a:xfrm xmlns:a="http://schemas.openxmlformats.org/drawingml/2006/main">
-            <a:off x="1143000" y="3409950"/>
-            <a:ext cx="4762500" cy="571500"/>
+                <a16:creationId xmlns:a16="http://schemas.microsoft.com/office/drawing/2014/main" id="{20CAA3C3-586A-4589-BDF2-74C00C765A87}"/>
+              </a:ext>
+            </a:extLst>
+          </p:cNvPr>
+          <p:cNvSpPr>
+            <a:spLocks xmlns:a="http://schemas.openxmlformats.org/drawingml/2006/main" noGrp="1"/>
+          </p:cNvSpPr>
+          <p:nvPr/>
+        </p:nvSpPr>
+        <p:spPr>
+          <a:xfrm xmlns:a="http://schemas.openxmlformats.org/drawingml/2006/main">
+            <a:off x="1371600" y="2876550"/>
+            <a:ext cx="9982200" cy="590550"/>
           </a:xfrm>
           <a:prstGeom xmlns:a="http://schemas.openxmlformats.org/drawingml/2006/main" prst="roundRect">
             <a:avLst>
-              <a:gd name="adj" fmla="val 13333"/>
+              <a:gd name="adj" fmla="val 12903"/>
             </a:avLst>
           </a:prstGeom>
           <a:solidFill xmlns:a="http://schemas.openxmlformats.org/drawingml/2006/main">
-            <a:srgbClr val="F8E9EA"/>
+            <a:srgbClr val="FFFFFF"/>
           </a:solidFill>
           <a:ln xmlns:a="http://schemas.openxmlformats.org/drawingml/2006/main" w="9525">
             <a:solidFill>
@@ -11937,14 +10689,14 @@
           <a:lstStyle xmlns:a="http://schemas.openxmlformats.org/drawingml/2006/main"/>
           <a:p xmlns:a="http://schemas.openxmlformats.org/drawingml/2006/main">
             <a:pPr algn="l">
-              <a:defRPr sz="1425" b="1">
+              <a:defRPr sz="1800" b="1">
                 <a:solidFill>
                   <a:srgbClr val="263746"/>
                 </a:solidFill>
               </a:defRPr>
             </a:pPr>
             <a:r>
-              <a:rPr sz="1425" b="1">
+              <a:rPr sz="1800" b="1">
                 <a:solidFill>
                   <a:srgbClr val="263746"/>
                 </a:solidFill>
@@ -11952,7 +10704,7 @@
                 <a:ea typeface="Microsoft YaHei"/>
                 <a:cs typeface="Microsoft YaHei"/>
               </a:rPr>
-              <a:t>AI 文本是否出现过度概括？</a:t>
+              <a:t>工件状态与门检查一致</a:t>
             </a:r>
           </a:p>
         </p:txBody>
@@ -11962,27 +10714,27 @@
           <p:cNvPr id="14" name="n-4">
             <a:extLst xmlns:a="http://schemas.openxmlformats.org/drawingml/2006/main">
               <a:ext uri="{FF2B5EF4-FFF2-40B4-BE49-F238E27FC236}">
-                <a16:creationId xmlns:a16="http://schemas.microsoft.com/office/drawing/2014/main" id="{2844F54F-01E1-4F37-BAD7-16437C528643}"/>
-              </a:ext>
-            </a:extLst>
-          </p:cNvPr>
-          <p:cNvSpPr>
-            <a:spLocks xmlns:a="http://schemas.openxmlformats.org/drawingml/2006/main" noGrp="1"/>
-          </p:cNvSpPr>
-          <p:nvPr/>
-        </p:nvSpPr>
-        <p:spPr>
-          <a:xfrm xmlns:a="http://schemas.openxmlformats.org/drawingml/2006/main">
-            <a:off x="6305550" y="1143000"/>
-            <a:ext cx="419100" cy="419100"/>
+                <a16:creationId xmlns:a16="http://schemas.microsoft.com/office/drawing/2014/main" id="{0D987F22-FB80-42AE-A91B-5B250BEA9C83}"/>
+              </a:ext>
+            </a:extLst>
+          </p:cNvPr>
+          <p:cNvSpPr>
+            <a:spLocks xmlns:a="http://schemas.openxmlformats.org/drawingml/2006/main" noGrp="1"/>
+          </p:cNvSpPr>
+          <p:nvPr/>
+        </p:nvSpPr>
+        <p:spPr>
+          <a:xfrm xmlns:a="http://schemas.openxmlformats.org/drawingml/2006/main">
+            <a:off x="666750" y="3562350"/>
+            <a:ext cx="533400" cy="514350"/>
           </a:xfrm>
           <a:prstGeom xmlns:a="http://schemas.openxmlformats.org/drawingml/2006/main" prst="roundRect">
             <a:avLst>
-              <a:gd name="adj" fmla="val 18182"/>
+              <a:gd name="adj" fmla="val 14815"/>
             </a:avLst>
           </a:prstGeom>
           <a:solidFill xmlns:a="http://schemas.openxmlformats.org/drawingml/2006/main">
-            <a:srgbClr val="C8161E"/>
+            <a:srgbClr val="A86C12"/>
           </a:solidFill>
           <a:ln xmlns:a="http://schemas.openxmlformats.org/drawingml/2006/main" w="0">
             <a:noFill/>
@@ -11994,14 +10746,14 @@
           <a:lstStyle xmlns:a="http://schemas.openxmlformats.org/drawingml/2006/main"/>
           <a:p xmlns:a="http://schemas.openxmlformats.org/drawingml/2006/main">
             <a:pPr algn="ctr">
-              <a:defRPr sz="1350" b="1">
+              <a:defRPr sz="1800" b="1">
                 <a:solidFill>
                   <a:srgbClr val="FFFFFF"/>
                 </a:solidFill>
               </a:defRPr>
             </a:pPr>
             <a:r>
-              <a:rPr sz="1350" b="1">
+              <a:rPr sz="1800" b="1">
                 <a:solidFill>
                   <a:srgbClr val="FFFFFF"/>
                 </a:solidFill>
@@ -12009,7 +10761,7 @@
                 <a:ea typeface="Arial"/>
                 <a:cs typeface="Arial"/>
               </a:rPr>
-              <a:t>5</a:t>
+              <a:t>10</a:t>
             </a:r>
           </a:p>
         </p:txBody>
@@ -12019,27 +10771,27 @@
           <p:cNvPr id="15" name="q-4">
             <a:extLst xmlns:a="http://schemas.openxmlformats.org/drawingml/2006/main">
               <a:ext uri="{FF2B5EF4-FFF2-40B4-BE49-F238E27FC236}">
-                <a16:creationId xmlns:a16="http://schemas.microsoft.com/office/drawing/2014/main" id="{91AB7C4C-73D4-4D2C-BFE2-94D01BCD522D}"/>
-              </a:ext>
-            </a:extLst>
-          </p:cNvPr>
-          <p:cNvSpPr>
-            <a:spLocks xmlns:a="http://schemas.openxmlformats.org/drawingml/2006/main" noGrp="1"/>
-          </p:cNvSpPr>
-          <p:nvPr/>
-        </p:nvSpPr>
-        <p:spPr>
-          <a:xfrm xmlns:a="http://schemas.openxmlformats.org/drawingml/2006/main">
-            <a:off x="6858000" y="1066800"/>
-            <a:ext cx="4762500" cy="571500"/>
+                <a16:creationId xmlns:a16="http://schemas.microsoft.com/office/drawing/2014/main" id="{C16B1467-B1CB-42B2-A033-4D22F835D20D}"/>
+              </a:ext>
+            </a:extLst>
+          </p:cNvPr>
+          <p:cNvSpPr>
+            <a:spLocks xmlns:a="http://schemas.openxmlformats.org/drawingml/2006/main" noGrp="1"/>
+          </p:cNvSpPr>
+          <p:nvPr/>
+        </p:nvSpPr>
+        <p:spPr>
+          <a:xfrm xmlns:a="http://schemas.openxmlformats.org/drawingml/2006/main">
+            <a:off x="1371600" y="3505200"/>
+            <a:ext cx="9982200" cy="590550"/>
           </a:xfrm>
           <a:prstGeom xmlns:a="http://schemas.openxmlformats.org/drawingml/2006/main" prst="roundRect">
             <a:avLst>
-              <a:gd name="adj" fmla="val 13333"/>
+              <a:gd name="adj" fmla="val 12903"/>
             </a:avLst>
           </a:prstGeom>
           <a:solidFill xmlns:a="http://schemas.openxmlformats.org/drawingml/2006/main">
-            <a:srgbClr val="F8E9EA"/>
+            <a:srgbClr val="FAF0DD"/>
           </a:solidFill>
           <a:ln xmlns:a="http://schemas.openxmlformats.org/drawingml/2006/main" w="9525">
             <a:solidFill>
@@ -12053,14 +10805,14 @@
           <a:lstStyle xmlns:a="http://schemas.openxmlformats.org/drawingml/2006/main"/>
           <a:p xmlns:a="http://schemas.openxmlformats.org/drawingml/2006/main">
             <a:pPr algn="l">
-              <a:defRPr sz="1425" b="1">
+              <a:defRPr sz="1800" b="1">
                 <a:solidFill>
                   <a:srgbClr val="263746"/>
                 </a:solidFill>
               </a:defRPr>
             </a:pPr>
             <a:r>
-              <a:rPr sz="1425" b="1">
+              <a:rPr sz="1800" b="1">
                 <a:solidFill>
                   <a:srgbClr val="263746"/>
                 </a:solidFill>
@@ -12068,377 +10820,29 @@
                 <a:ea typeface="Microsoft YaHei"/>
                 <a:cs typeface="Microsoft YaHei"/>
               </a:rPr>
-              <a:t>七字段披露是否完整？</a:t>
-            </a:r>
-          </a:p>
-        </p:txBody>
-      </p:sp>
-      <p:sp>
-        <p:nvSpPr>
-          <p:cNvPr id="16" name="n-5">
-            <a:extLst xmlns:a="http://schemas.openxmlformats.org/drawingml/2006/main">
-              <a:ext uri="{FF2B5EF4-FFF2-40B4-BE49-F238E27FC236}">
-                <a16:creationId xmlns:a16="http://schemas.microsoft.com/office/drawing/2014/main" id="{189598BE-6DC1-49DD-A1A6-728CE0AA7839}"/>
-              </a:ext>
-            </a:extLst>
-          </p:cNvPr>
-          <p:cNvSpPr>
-            <a:spLocks xmlns:a="http://schemas.openxmlformats.org/drawingml/2006/main" noGrp="1"/>
-          </p:cNvSpPr>
-          <p:nvPr/>
-        </p:nvSpPr>
-        <p:spPr>
-          <a:xfrm xmlns:a="http://schemas.openxmlformats.org/drawingml/2006/main">
-            <a:off x="6305550" y="1924050"/>
-            <a:ext cx="419100" cy="419100"/>
-          </a:xfrm>
-          <a:prstGeom xmlns:a="http://schemas.openxmlformats.org/drawingml/2006/main" prst="roundRect">
-            <a:avLst>
-              <a:gd name="adj" fmla="val 18182"/>
-            </a:avLst>
-          </a:prstGeom>
-          <a:solidFill xmlns:a="http://schemas.openxmlformats.org/drawingml/2006/main">
-            <a:srgbClr val="C8161E"/>
-          </a:solidFill>
-          <a:ln xmlns:a="http://schemas.openxmlformats.org/drawingml/2006/main" w="0">
-            <a:noFill/>
-            <a:prstDash val="solid"/>
-          </a:ln>
-        </p:spPr>
-        <p:txBody>
-          <a:bodyPr xmlns:a="http://schemas.openxmlformats.org/drawingml/2006/main" lIns="76200" tIns="38100" rIns="76200" bIns="38100" anchor="ctr"/>
-          <a:lstStyle xmlns:a="http://schemas.openxmlformats.org/drawingml/2006/main"/>
-          <a:p xmlns:a="http://schemas.openxmlformats.org/drawingml/2006/main">
-            <a:pPr algn="ctr">
-              <a:defRPr sz="1350" b="1">
-                <a:solidFill>
-                  <a:srgbClr val="FFFFFF"/>
-                </a:solidFill>
-              </a:defRPr>
-            </a:pPr>
-            <a:r>
-              <a:rPr sz="1350" b="1">
-                <a:solidFill>
-                  <a:srgbClr val="FFFFFF"/>
-                </a:solidFill>
-                <a:latin typeface="Arial"/>
-                <a:ea typeface="Arial"/>
-                <a:cs typeface="Arial"/>
-              </a:rPr>
-              <a:t>6</a:t>
-            </a:r>
-          </a:p>
-        </p:txBody>
-      </p:sp>
-      <p:sp>
-        <p:nvSpPr>
-          <p:cNvPr id="17" name="q-5">
-            <a:extLst xmlns:a="http://schemas.openxmlformats.org/drawingml/2006/main">
-              <a:ext uri="{FF2B5EF4-FFF2-40B4-BE49-F238E27FC236}">
-                <a16:creationId xmlns:a16="http://schemas.microsoft.com/office/drawing/2014/main" id="{54D7F7C6-8434-4A72-BB72-BB7C30B66D69}"/>
-              </a:ext>
-            </a:extLst>
-          </p:cNvPr>
-          <p:cNvSpPr>
-            <a:spLocks xmlns:a="http://schemas.openxmlformats.org/drawingml/2006/main" noGrp="1"/>
-          </p:cNvSpPr>
-          <p:nvPr/>
-        </p:nvSpPr>
-        <p:spPr>
-          <a:xfrm xmlns:a="http://schemas.openxmlformats.org/drawingml/2006/main">
-            <a:off x="6858000" y="1847850"/>
-            <a:ext cx="4762500" cy="571500"/>
-          </a:xfrm>
-          <a:prstGeom xmlns:a="http://schemas.openxmlformats.org/drawingml/2006/main" prst="roundRect">
-            <a:avLst>
-              <a:gd name="adj" fmla="val 13333"/>
-            </a:avLst>
-          </a:prstGeom>
-          <a:solidFill xmlns:a="http://schemas.openxmlformats.org/drawingml/2006/main">
-            <a:srgbClr val="F8E9EA"/>
-          </a:solidFill>
-          <a:ln xmlns:a="http://schemas.openxmlformats.org/drawingml/2006/main" w="9525">
-            <a:solidFill>
-              <a:srgbClr val="D6DDE2"/>
-            </a:solidFill>
-            <a:prstDash val="solid"/>
-          </a:ln>
-        </p:spPr>
-        <p:txBody>
-          <a:bodyPr xmlns:a="http://schemas.openxmlformats.org/drawingml/2006/main" lIns="76200" tIns="38100" rIns="76200" bIns="38100" anchor="ctr"/>
-          <a:lstStyle xmlns:a="http://schemas.openxmlformats.org/drawingml/2006/main"/>
-          <a:p xmlns:a="http://schemas.openxmlformats.org/drawingml/2006/main">
-            <a:pPr algn="l">
-              <a:defRPr sz="1425" b="1">
-                <a:solidFill>
-                  <a:srgbClr val="263746"/>
-                </a:solidFill>
-              </a:defRPr>
-            </a:pPr>
-            <a:r>
-              <a:rPr sz="1425" b="1">
-                <a:solidFill>
-                  <a:srgbClr val="263746"/>
-                </a:solidFill>
-                <a:latin typeface="Microsoft YaHei"/>
-                <a:ea typeface="Microsoft YaHei"/>
-                <a:cs typeface="Microsoft YaHei"/>
-              </a:rPr>
-              <a:t>stable 是否满足独立证据？</a:t>
-            </a:r>
-          </a:p>
-        </p:txBody>
-      </p:sp>
-      <p:sp>
-        <p:nvSpPr>
-          <p:cNvPr id="18" name="n-6">
-            <a:extLst xmlns:a="http://schemas.openxmlformats.org/drawingml/2006/main">
-              <a:ext uri="{FF2B5EF4-FFF2-40B4-BE49-F238E27FC236}">
-                <a16:creationId xmlns:a16="http://schemas.microsoft.com/office/drawing/2014/main" id="{E0F6D197-CC6E-498B-BE98-A32302766727}"/>
-              </a:ext>
-            </a:extLst>
-          </p:cNvPr>
-          <p:cNvSpPr>
-            <a:spLocks xmlns:a="http://schemas.openxmlformats.org/drawingml/2006/main" noGrp="1"/>
-          </p:cNvSpPr>
-          <p:nvPr/>
-        </p:nvSpPr>
-        <p:spPr>
-          <a:xfrm xmlns:a="http://schemas.openxmlformats.org/drawingml/2006/main">
-            <a:off x="6305550" y="2705100"/>
-            <a:ext cx="419100" cy="419100"/>
-          </a:xfrm>
-          <a:prstGeom xmlns:a="http://schemas.openxmlformats.org/drawingml/2006/main" prst="roundRect">
-            <a:avLst>
-              <a:gd name="adj" fmla="val 18182"/>
-            </a:avLst>
-          </a:prstGeom>
-          <a:solidFill xmlns:a="http://schemas.openxmlformats.org/drawingml/2006/main">
-            <a:srgbClr val="18354E"/>
-          </a:solidFill>
-          <a:ln xmlns:a="http://schemas.openxmlformats.org/drawingml/2006/main" w="0">
-            <a:noFill/>
-            <a:prstDash val="solid"/>
-          </a:ln>
-        </p:spPr>
-        <p:txBody>
-          <a:bodyPr xmlns:a="http://schemas.openxmlformats.org/drawingml/2006/main" lIns="76200" tIns="38100" rIns="76200" bIns="38100" anchor="ctr"/>
-          <a:lstStyle xmlns:a="http://schemas.openxmlformats.org/drawingml/2006/main"/>
-          <a:p xmlns:a="http://schemas.openxmlformats.org/drawingml/2006/main">
-            <a:pPr algn="ctr">
-              <a:defRPr sz="1350" b="1">
-                <a:solidFill>
-                  <a:srgbClr val="FFFFFF"/>
-                </a:solidFill>
-              </a:defRPr>
-            </a:pPr>
-            <a:r>
-              <a:rPr sz="1350" b="1">
-                <a:solidFill>
-                  <a:srgbClr val="FFFFFF"/>
-                </a:solidFill>
-                <a:latin typeface="Arial"/>
-                <a:ea typeface="Arial"/>
-                <a:cs typeface="Arial"/>
-              </a:rPr>
-              <a:t>7</a:t>
-            </a:r>
-          </a:p>
-        </p:txBody>
-      </p:sp>
-      <p:sp>
-        <p:nvSpPr>
-          <p:cNvPr id="19" name="q-6">
-            <a:extLst xmlns:a="http://schemas.openxmlformats.org/drawingml/2006/main">
-              <a:ext uri="{FF2B5EF4-FFF2-40B4-BE49-F238E27FC236}">
-                <a16:creationId xmlns:a16="http://schemas.microsoft.com/office/drawing/2014/main" id="{C00C25DA-EF55-4F05-9151-0D51AEE5DA03}"/>
-              </a:ext>
-            </a:extLst>
-          </p:cNvPr>
-          <p:cNvSpPr>
-            <a:spLocks xmlns:a="http://schemas.openxmlformats.org/drawingml/2006/main" noGrp="1"/>
-          </p:cNvSpPr>
-          <p:nvPr/>
-        </p:nvSpPr>
-        <p:spPr>
-          <a:xfrm xmlns:a="http://schemas.openxmlformats.org/drawingml/2006/main">
-            <a:off x="6858000" y="2628900"/>
-            <a:ext cx="4762500" cy="571500"/>
-          </a:xfrm>
-          <a:prstGeom xmlns:a="http://schemas.openxmlformats.org/drawingml/2006/main" prst="roundRect">
-            <a:avLst>
-              <a:gd name="adj" fmla="val 13333"/>
-            </a:avLst>
-          </a:prstGeom>
-          <a:solidFill xmlns:a="http://schemas.openxmlformats.org/drawingml/2006/main">
-            <a:srgbClr val="F3F6F7"/>
-          </a:solidFill>
-          <a:ln xmlns:a="http://schemas.openxmlformats.org/drawingml/2006/main" w="9525">
-            <a:solidFill>
-              <a:srgbClr val="D6DDE2"/>
-            </a:solidFill>
-            <a:prstDash val="solid"/>
-          </a:ln>
-        </p:spPr>
-        <p:txBody>
-          <a:bodyPr xmlns:a="http://schemas.openxmlformats.org/drawingml/2006/main" lIns="76200" tIns="38100" rIns="76200" bIns="38100" anchor="ctr"/>
-          <a:lstStyle xmlns:a="http://schemas.openxmlformats.org/drawingml/2006/main"/>
-          <a:p xmlns:a="http://schemas.openxmlformats.org/drawingml/2006/main">
-            <a:pPr algn="l">
-              <a:defRPr sz="1425" b="1">
-                <a:solidFill>
-                  <a:srgbClr val="263746"/>
-                </a:solidFill>
-              </a:defRPr>
-            </a:pPr>
-            <a:r>
-              <a:rPr sz="1425" b="1">
-                <a:solidFill>
-                  <a:srgbClr val="263746"/>
-                </a:solidFill>
-                <a:latin typeface="Microsoft YaHei"/>
-                <a:ea typeface="Microsoft YaHei"/>
-                <a:cs typeface="Microsoft YaHei"/>
-              </a:rPr>
-              <a:t>引用是否回原文核验？</a:t>
-            </a:r>
-          </a:p>
-        </p:txBody>
-      </p:sp>
-      <p:sp>
-        <p:nvSpPr>
-          <p:cNvPr id="20" name="n-7">
-            <a:extLst xmlns:a="http://schemas.openxmlformats.org/drawingml/2006/main">
-              <a:ext uri="{FF2B5EF4-FFF2-40B4-BE49-F238E27FC236}">
-                <a16:creationId xmlns:a16="http://schemas.microsoft.com/office/drawing/2014/main" id="{BD9E3ECB-73A8-4266-919E-8092BF9C2E1C}"/>
-              </a:ext>
-            </a:extLst>
-          </p:cNvPr>
-          <p:cNvSpPr>
-            <a:spLocks xmlns:a="http://schemas.openxmlformats.org/drawingml/2006/main" noGrp="1"/>
-          </p:cNvSpPr>
-          <p:nvPr/>
-        </p:nvSpPr>
-        <p:spPr>
-          <a:xfrm xmlns:a="http://schemas.openxmlformats.org/drawingml/2006/main">
-            <a:off x="6305550" y="3486150"/>
-            <a:ext cx="419100" cy="419100"/>
-          </a:xfrm>
-          <a:prstGeom xmlns:a="http://schemas.openxmlformats.org/drawingml/2006/main" prst="roundRect">
-            <a:avLst>
-              <a:gd name="adj" fmla="val 18182"/>
-            </a:avLst>
-          </a:prstGeom>
-          <a:solidFill xmlns:a="http://schemas.openxmlformats.org/drawingml/2006/main">
-            <a:srgbClr val="18354E"/>
-          </a:solidFill>
-          <a:ln xmlns:a="http://schemas.openxmlformats.org/drawingml/2006/main" w="0">
-            <a:noFill/>
-            <a:prstDash val="solid"/>
-          </a:ln>
-        </p:spPr>
-        <p:txBody>
-          <a:bodyPr xmlns:a="http://schemas.openxmlformats.org/drawingml/2006/main" lIns="76200" tIns="38100" rIns="76200" bIns="38100" anchor="ctr"/>
-          <a:lstStyle xmlns:a="http://schemas.openxmlformats.org/drawingml/2006/main"/>
-          <a:p xmlns:a="http://schemas.openxmlformats.org/drawingml/2006/main">
-            <a:pPr algn="ctr">
-              <a:defRPr sz="1350" b="1">
-                <a:solidFill>
-                  <a:srgbClr val="FFFFFF"/>
-                </a:solidFill>
-              </a:defRPr>
-            </a:pPr>
-            <a:r>
-              <a:rPr sz="1350" b="1">
-                <a:solidFill>
-                  <a:srgbClr val="FFFFFF"/>
-                </a:solidFill>
-                <a:latin typeface="Arial"/>
-                <a:ea typeface="Arial"/>
-                <a:cs typeface="Arial"/>
-              </a:rPr>
-              <a:t>8</a:t>
-            </a:r>
-          </a:p>
-        </p:txBody>
-      </p:sp>
-      <p:sp>
-        <p:nvSpPr>
-          <p:cNvPr id="21" name="q-7">
-            <a:extLst xmlns:a="http://schemas.openxmlformats.org/drawingml/2006/main">
-              <a:ext uri="{FF2B5EF4-FFF2-40B4-BE49-F238E27FC236}">
-                <a16:creationId xmlns:a16="http://schemas.microsoft.com/office/drawing/2014/main" id="{C7E9A86B-D9A2-4A1B-A203-643DFA01F849}"/>
-              </a:ext>
-            </a:extLst>
-          </p:cNvPr>
-          <p:cNvSpPr>
-            <a:spLocks xmlns:a="http://schemas.openxmlformats.org/drawingml/2006/main" noGrp="1"/>
-          </p:cNvSpPr>
-          <p:nvPr/>
-        </p:nvSpPr>
-        <p:spPr>
-          <a:xfrm xmlns:a="http://schemas.openxmlformats.org/drawingml/2006/main">
-            <a:off x="6858000" y="3409950"/>
-            <a:ext cx="4762500" cy="571500"/>
-          </a:xfrm>
-          <a:prstGeom xmlns:a="http://schemas.openxmlformats.org/drawingml/2006/main" prst="roundRect">
-            <a:avLst>
-              <a:gd name="adj" fmla="val 13333"/>
-            </a:avLst>
-          </a:prstGeom>
-          <a:solidFill xmlns:a="http://schemas.openxmlformats.org/drawingml/2006/main">
-            <a:srgbClr val="F3F6F7"/>
-          </a:solidFill>
-          <a:ln xmlns:a="http://schemas.openxmlformats.org/drawingml/2006/main" w="9525">
-            <a:solidFill>
-              <a:srgbClr val="D6DDE2"/>
-            </a:solidFill>
-            <a:prstDash val="solid"/>
-          </a:ln>
-        </p:spPr>
-        <p:txBody>
-          <a:bodyPr xmlns:a="http://schemas.openxmlformats.org/drawingml/2006/main" lIns="76200" tIns="38100" rIns="76200" bIns="38100" anchor="ctr"/>
-          <a:lstStyle xmlns:a="http://schemas.openxmlformats.org/drawingml/2006/main"/>
-          <a:p xmlns:a="http://schemas.openxmlformats.org/drawingml/2006/main">
-            <a:pPr algn="l">
-              <a:defRPr sz="1425" b="1">
-                <a:solidFill>
-                  <a:srgbClr val="263746"/>
-                </a:solidFill>
-              </a:defRPr>
-            </a:pPr>
-            <a:r>
-              <a:rPr sz="1425" b="1">
-                <a:solidFill>
-                  <a:srgbClr val="263746"/>
-                </a:solidFill>
-                <a:latin typeface="Microsoft YaHei"/>
-                <a:ea typeface="Microsoft YaHei"/>
-                <a:cs typeface="Microsoft YaHei"/>
-              </a:rPr>
-              <a:t>有效性威胁是否具体？</a:t>
-            </a:r>
-          </a:p>
-        </p:txBody>
-      </p:sp>
-      <p:sp>
-        <p:nvSpPr>
-          <p:cNvPr id="22" name="author">
-            <a:extLst xmlns:a="http://schemas.openxmlformats.org/drawingml/2006/main">
-              <a:ext uri="{FF2B5EF4-FFF2-40B4-BE49-F238E27FC236}">
-                <a16:creationId xmlns:a16="http://schemas.microsoft.com/office/drawing/2014/main" id="{FA97CB2E-6B40-4EA7-BE05-33770E56EA9C}"/>
-              </a:ext>
-            </a:extLst>
-          </p:cNvPr>
-          <p:cNvSpPr>
-            <a:spLocks xmlns:a="http://schemas.openxmlformats.org/drawingml/2006/main" noGrp="1"/>
-          </p:cNvSpPr>
-          <p:nvPr/>
-        </p:nvSpPr>
-        <p:spPr>
-          <a:xfrm xmlns:a="http://schemas.openxmlformats.org/drawingml/2006/main">
-            <a:off x="857250" y="4476750"/>
-            <a:ext cx="2476500" cy="457200"/>
+              <a:t>展示 / 复现抽查 / 课程复盘</a:t>
+            </a:r>
+          </a:p>
+        </p:txBody>
+      </p:sp>
+      <p:sp>
+        <p:nvSpPr>
+          <p:cNvPr id="16" name="author">
+            <a:extLst xmlns:a="http://schemas.openxmlformats.org/drawingml/2006/main">
+              <a:ext uri="{FF2B5EF4-FFF2-40B4-BE49-F238E27FC236}">
+                <a16:creationId xmlns:a16="http://schemas.microsoft.com/office/drawing/2014/main" id="{1E122F27-E5EF-4CDB-8EF1-B01E2BEB3186}"/>
+              </a:ext>
+            </a:extLst>
+          </p:cNvPr>
+          <p:cNvSpPr>
+            <a:spLocks xmlns:a="http://schemas.openxmlformats.org/drawingml/2006/main" noGrp="1"/>
+          </p:cNvSpPr>
+          <p:nvPr/>
+        </p:nvSpPr>
+        <p:spPr>
+          <a:xfrm xmlns:a="http://schemas.openxmlformats.org/drawingml/2006/main">
+            <a:off x="762000" y="4324350"/>
+            <a:ext cx="4286250" cy="514350"/>
           </a:xfrm>
           <a:prstGeom xmlns:a="http://schemas.openxmlformats.org/drawingml/2006/main" prst="rect">
             <a:avLst/>
@@ -12454,14 +10858,14 @@
           <a:lstStyle xmlns:a="http://schemas.openxmlformats.org/drawingml/2006/main"/>
           <a:p xmlns:a="http://schemas.openxmlformats.org/drawingml/2006/main">
             <a:pPr algn="ctr">
-              <a:defRPr sz="1650" b="1">
+              <a:defRPr sz="1800" b="1">
                 <a:solidFill>
                   <a:srgbClr val="18354E"/>
                 </a:solidFill>
               </a:defRPr>
             </a:pPr>
             <a:r>
-              <a:rPr sz="1650" b="1">
+              <a:rPr sz="1800" b="1">
                 <a:solidFill>
                   <a:srgbClr val="18354E"/>
                 </a:solidFill>
@@ -12469,28 +10873,28 @@
                 <a:ea typeface="Microsoft YaHei"/>
                 <a:cs typeface="Microsoft YaHei"/>
               </a:rPr>
-              <a:t>作者记录反馈处理</a:t>
-            </a:r>
-          </a:p>
-        </p:txBody>
-      </p:sp>
-      <p:sp>
-        <p:nvSpPr>
-          <p:cNvPr id="23" name="state-0">
-            <a:extLst xmlns:a="http://schemas.openxmlformats.org/drawingml/2006/main">
-              <a:ext uri="{FF2B5EF4-FFF2-40B4-BE49-F238E27FC236}">
-                <a16:creationId xmlns:a16="http://schemas.microsoft.com/office/drawing/2014/main" id="{C32491CB-8CB1-4438-891D-D01C9DCCEF3F}"/>
-              </a:ext>
-            </a:extLst>
-          </p:cNvPr>
-          <p:cNvSpPr>
-            <a:spLocks xmlns:a="http://schemas.openxmlformats.org/drawingml/2006/main" noGrp="1"/>
-          </p:cNvSpPr>
-          <p:nvPr/>
-        </p:nvSpPr>
-        <p:spPr>
-          <a:xfrm xmlns:a="http://schemas.openxmlformats.org/drawingml/2006/main">
-            <a:off x="3638550" y="4438650"/>
+              <a:t>同伴只选 1 项追问；作者记录</a:t>
+            </a:r>
+          </a:p>
+        </p:txBody>
+      </p:sp>
+      <p:sp>
+        <p:nvSpPr>
+          <p:cNvPr id="17" name="state-0">
+            <a:extLst xmlns:a="http://schemas.openxmlformats.org/drawingml/2006/main">
+              <a:ext uri="{FF2B5EF4-FFF2-40B4-BE49-F238E27FC236}">
+                <a16:creationId xmlns:a16="http://schemas.microsoft.com/office/drawing/2014/main" id="{C2254928-2B22-40B3-A311-6AEB1FA101A4}"/>
+              </a:ext>
+            </a:extLst>
+          </p:cNvPr>
+          <p:cNvSpPr>
+            <a:spLocks xmlns:a="http://schemas.openxmlformats.org/drawingml/2006/main" noGrp="1"/>
+          </p:cNvSpPr>
+          <p:nvPr/>
+        </p:nvSpPr>
+        <p:spPr>
+          <a:xfrm xmlns:a="http://schemas.openxmlformats.org/drawingml/2006/main">
+            <a:off x="5257800" y="4324350"/>
             <a:ext cx="1866900" cy="514350"/>
           </a:xfrm>
           <a:prstGeom xmlns:a="http://schemas.openxmlformats.org/drawingml/2006/main" prst="roundRect">
@@ -12511,14 +10915,14 @@
           <a:lstStyle xmlns:a="http://schemas.openxmlformats.org/drawingml/2006/main"/>
           <a:p xmlns:a="http://schemas.openxmlformats.org/drawingml/2006/main">
             <a:pPr algn="ctr">
-              <a:defRPr sz="1500" b="1">
+              <a:defRPr sz="1800" b="1">
                 <a:solidFill>
                   <a:srgbClr val="28745A"/>
                 </a:solidFill>
               </a:defRPr>
             </a:pPr>
             <a:r>
-              <a:rPr sz="1500" b="1">
+              <a:rPr sz="1800" b="1">
                 <a:solidFill>
                   <a:srgbClr val="28745A"/>
                 </a:solidFill>
@@ -12533,21 +10937,21 @@
       </p:sp>
       <p:sp>
         <p:nvSpPr>
-          <p:cNvPr id="24" name="state-1">
-            <a:extLst xmlns:a="http://schemas.openxmlformats.org/drawingml/2006/main">
-              <a:ext uri="{FF2B5EF4-FFF2-40B4-BE49-F238E27FC236}">
-                <a16:creationId xmlns:a16="http://schemas.microsoft.com/office/drawing/2014/main" id="{3E1C5D0F-1CA6-4A41-A175-288A96D814A5}"/>
-              </a:ext>
-            </a:extLst>
-          </p:cNvPr>
-          <p:cNvSpPr>
-            <a:spLocks xmlns:a="http://schemas.openxmlformats.org/drawingml/2006/main" noGrp="1"/>
-          </p:cNvSpPr>
-          <p:nvPr/>
-        </p:nvSpPr>
-        <p:spPr>
-          <a:xfrm xmlns:a="http://schemas.openxmlformats.org/drawingml/2006/main">
-            <a:off x="5772150" y="4438650"/>
+          <p:cNvPr id="18" name="state-1">
+            <a:extLst xmlns:a="http://schemas.openxmlformats.org/drawingml/2006/main">
+              <a:ext uri="{FF2B5EF4-FFF2-40B4-BE49-F238E27FC236}">
+                <a16:creationId xmlns:a16="http://schemas.microsoft.com/office/drawing/2014/main" id="{03A61F72-251D-4541-8853-ACEFA9123683}"/>
+              </a:ext>
+            </a:extLst>
+          </p:cNvPr>
+          <p:cNvSpPr>
+            <a:spLocks xmlns:a="http://schemas.openxmlformats.org/drawingml/2006/main" noGrp="1"/>
+          </p:cNvSpPr>
+          <p:nvPr/>
+        </p:nvSpPr>
+        <p:spPr>
+          <a:xfrm xmlns:a="http://schemas.openxmlformats.org/drawingml/2006/main">
+            <a:off x="7334250" y="4324350"/>
             <a:ext cx="1866900" cy="514350"/>
           </a:xfrm>
           <a:prstGeom xmlns:a="http://schemas.openxmlformats.org/drawingml/2006/main" prst="roundRect">
@@ -12568,14 +10972,14 @@
           <a:lstStyle xmlns:a="http://schemas.openxmlformats.org/drawingml/2006/main"/>
           <a:p xmlns:a="http://schemas.openxmlformats.org/drawingml/2006/main">
             <a:pPr algn="ctr">
-              <a:defRPr sz="1500" b="1">
+              <a:defRPr sz="1800" b="1">
                 <a:solidFill>
                   <a:srgbClr val="C8161E"/>
                 </a:solidFill>
               </a:defRPr>
             </a:pPr>
             <a:r>
-              <a:rPr sz="1500" b="1">
+              <a:rPr sz="1800" b="1">
                 <a:solidFill>
                   <a:srgbClr val="C8161E"/>
                 </a:solidFill>
@@ -12590,21 +10994,21 @@
       </p:sp>
       <p:sp>
         <p:nvSpPr>
-          <p:cNvPr id="25" name="state-2">
-            <a:extLst xmlns:a="http://schemas.openxmlformats.org/drawingml/2006/main">
-              <a:ext uri="{FF2B5EF4-FFF2-40B4-BE49-F238E27FC236}">
-                <a16:creationId xmlns:a16="http://schemas.microsoft.com/office/drawing/2014/main" id="{CB212F8F-44EA-4055-A1F1-DCCAFEE5B12D}"/>
-              </a:ext>
-            </a:extLst>
-          </p:cNvPr>
-          <p:cNvSpPr>
-            <a:spLocks xmlns:a="http://schemas.openxmlformats.org/drawingml/2006/main" noGrp="1"/>
-          </p:cNvSpPr>
-          <p:nvPr/>
-        </p:nvSpPr>
-        <p:spPr>
-          <a:xfrm xmlns:a="http://schemas.openxmlformats.org/drawingml/2006/main">
-            <a:off x="7905750" y="4438650"/>
+          <p:cNvPr id="19" name="state-2">
+            <a:extLst xmlns:a="http://schemas.openxmlformats.org/drawingml/2006/main">
+              <a:ext uri="{FF2B5EF4-FFF2-40B4-BE49-F238E27FC236}">
+                <a16:creationId xmlns:a16="http://schemas.microsoft.com/office/drawing/2014/main" id="{32E41F74-2416-456A-8669-085BF102BEF5}"/>
+              </a:ext>
+            </a:extLst>
+          </p:cNvPr>
+          <p:cNvSpPr>
+            <a:spLocks xmlns:a="http://schemas.openxmlformats.org/drawingml/2006/main" noGrp="1"/>
+          </p:cNvSpPr>
+          <p:nvPr/>
+        </p:nvSpPr>
+        <p:spPr>
+          <a:xfrm xmlns:a="http://schemas.openxmlformats.org/drawingml/2006/main">
+            <a:off x="9410700" y="4324350"/>
             <a:ext cx="1866900" cy="514350"/>
           </a:xfrm>
           <a:prstGeom xmlns:a="http://schemas.openxmlformats.org/drawingml/2006/main" prst="roundRect">
@@ -12625,14 +11029,14 @@
           <a:lstStyle xmlns:a="http://schemas.openxmlformats.org/drawingml/2006/main"/>
           <a:p xmlns:a="http://schemas.openxmlformats.org/drawingml/2006/main">
             <a:pPr algn="ctr">
-              <a:defRPr sz="1500" b="1">
+              <a:defRPr sz="1800" b="1">
                 <a:solidFill>
                   <a:srgbClr val="A86C12"/>
                 </a:solidFill>
               </a:defRPr>
             </a:pPr>
             <a:r>
-              <a:rPr sz="1500" b="1">
+              <a:rPr sz="1800" b="1">
                 <a:solidFill>
                   <a:srgbClr val="A86C12"/>
                 </a:solidFill>
@@ -12647,10 +11051,10 @@
       </p:sp>
       <p:sp>
         <p:nvSpPr>
-          <p:cNvPr id="26" name="bottom">
-            <a:extLst xmlns:a="http://schemas.openxmlformats.org/drawingml/2006/main">
-              <a:ext uri="{FF2B5EF4-FFF2-40B4-BE49-F238E27FC236}">
-                <a16:creationId xmlns:a16="http://schemas.microsoft.com/office/drawing/2014/main" id="{4F357DEE-BCAF-48B9-AA6B-5ADFE25107BE}"/>
+          <p:cNvPr id="20" name="bottom">
+            <a:extLst xmlns:a="http://schemas.openxmlformats.org/drawingml/2006/main">
+              <a:ext uri="{FF2B5EF4-FFF2-40B4-BE49-F238E27FC236}">
+                <a16:creationId xmlns:a16="http://schemas.microsoft.com/office/drawing/2014/main" id="{32D6F04B-CA44-47CD-89B7-D800ABD281E2}"/>
               </a:ext>
             </a:extLst>
           </p:cNvPr>
@@ -12797,7 +11201,7 @@
           <p:cNvPr id="6" name="arr-0">
             <a:extLst xmlns:a="http://schemas.openxmlformats.org/drawingml/2006/main">
               <a:ext uri="{FF2B5EF4-FFF2-40B4-BE49-F238E27FC236}">
-                <a16:creationId xmlns:a16="http://schemas.microsoft.com/office/drawing/2014/main" id="{530272C4-5A94-4965-9E4C-9F5543E41EB3}"/>
+                <a16:creationId xmlns:a16="http://schemas.microsoft.com/office/drawing/2014/main" id="{9D536436-3B39-4D32-8468-0B6E0AC98C58}"/>
               </a:ext>
             </a:extLst>
           </p:cNvPr>
@@ -12828,7 +11232,7 @@
           <p:cNvPr id="7" name="h-0">
             <a:extLst xmlns:a="http://schemas.openxmlformats.org/drawingml/2006/main">
               <a:ext uri="{FF2B5EF4-FFF2-40B4-BE49-F238E27FC236}">
-                <a16:creationId xmlns:a16="http://schemas.microsoft.com/office/drawing/2014/main" id="{8A20A5B3-E4FE-43AF-A94C-9CD25185D584}"/>
+                <a16:creationId xmlns:a16="http://schemas.microsoft.com/office/drawing/2014/main" id="{141CB865-BFFC-4C89-BD32-DFC6A16F1B2A}"/>
               </a:ext>
             </a:extLst>
           </p:cNvPr>
@@ -12883,7 +11287,7 @@
           <p:cNvPr id="8" name="d-0">
             <a:extLst xmlns:a="http://schemas.openxmlformats.org/drawingml/2006/main">
               <a:ext uri="{FF2B5EF4-FFF2-40B4-BE49-F238E27FC236}">
-                <a16:creationId xmlns:a16="http://schemas.microsoft.com/office/drawing/2014/main" id="{D1A9EEB0-3897-4D92-BAE3-9221CC52F03F}"/>
+                <a16:creationId xmlns:a16="http://schemas.microsoft.com/office/drawing/2014/main" id="{B42A075A-6992-4F97-A56B-1F6DE09CC1ED}"/>
               </a:ext>
             </a:extLst>
           </p:cNvPr>
@@ -12970,7 +11374,7 @@
           <p:cNvPr id="9" name="arr-1">
             <a:extLst xmlns:a="http://schemas.openxmlformats.org/drawingml/2006/main">
               <a:ext uri="{FF2B5EF4-FFF2-40B4-BE49-F238E27FC236}">
-                <a16:creationId xmlns:a16="http://schemas.microsoft.com/office/drawing/2014/main" id="{2A6230D5-3EB7-4332-B795-B0B307329BEA}"/>
+                <a16:creationId xmlns:a16="http://schemas.microsoft.com/office/drawing/2014/main" id="{3FB4CA30-4AF7-4019-A5A5-8D72C0C348DB}"/>
               </a:ext>
             </a:extLst>
           </p:cNvPr>
@@ -13001,7 +11405,7 @@
           <p:cNvPr id="10" name="h-1">
             <a:extLst xmlns:a="http://schemas.openxmlformats.org/drawingml/2006/main">
               <a:ext uri="{FF2B5EF4-FFF2-40B4-BE49-F238E27FC236}">
-                <a16:creationId xmlns:a16="http://schemas.microsoft.com/office/drawing/2014/main" id="{06020D62-41B3-4C80-BB78-2D5538EC2B40}"/>
+                <a16:creationId xmlns:a16="http://schemas.microsoft.com/office/drawing/2014/main" id="{9D964898-0ED9-4AB4-8BDF-09CBE8C6E4B8}"/>
               </a:ext>
             </a:extLst>
           </p:cNvPr>
@@ -13056,7 +11460,7 @@
           <p:cNvPr id="11" name="d-1">
             <a:extLst xmlns:a="http://schemas.openxmlformats.org/drawingml/2006/main">
               <a:ext uri="{FF2B5EF4-FFF2-40B4-BE49-F238E27FC236}">
-                <a16:creationId xmlns:a16="http://schemas.microsoft.com/office/drawing/2014/main" id="{16A88AEC-C688-481B-8127-33B586646048}"/>
+                <a16:creationId xmlns:a16="http://schemas.microsoft.com/office/drawing/2014/main" id="{67D55EF5-F8EC-4801-B32B-05413A3994AD}"/>
               </a:ext>
             </a:extLst>
           </p:cNvPr>
@@ -13143,7 +11547,7 @@
           <p:cNvPr id="12" name="h-2">
             <a:extLst xmlns:a="http://schemas.openxmlformats.org/drawingml/2006/main">
               <a:ext uri="{FF2B5EF4-FFF2-40B4-BE49-F238E27FC236}">
-                <a16:creationId xmlns:a16="http://schemas.microsoft.com/office/drawing/2014/main" id="{CA62B718-1325-4DE3-9E64-CC61FA959CE4}"/>
+                <a16:creationId xmlns:a16="http://schemas.microsoft.com/office/drawing/2014/main" id="{84B8675B-B03D-423E-BD06-D083897638E4}"/>
               </a:ext>
             </a:extLst>
           </p:cNvPr>
@@ -13198,7 +11602,7 @@
           <p:cNvPr id="13" name="d-2">
             <a:extLst xmlns:a="http://schemas.openxmlformats.org/drawingml/2006/main">
               <a:ext uri="{FF2B5EF4-FFF2-40B4-BE49-F238E27FC236}">
-                <a16:creationId xmlns:a16="http://schemas.microsoft.com/office/drawing/2014/main" id="{5318EBBD-52B8-4986-B038-5FE321F5D7F4}"/>
+                <a16:creationId xmlns:a16="http://schemas.microsoft.com/office/drawing/2014/main" id="{B3918B03-2A74-4DE9-A43B-EEFBA6E7E9E7}"/>
               </a:ext>
             </a:extLst>
           </p:cNvPr>
@@ -13285,7 +11689,7 @@
           <p:cNvPr id="14" name="exit-h">
             <a:extLst xmlns:a="http://schemas.openxmlformats.org/drawingml/2006/main">
               <a:ext uri="{FF2B5EF4-FFF2-40B4-BE49-F238E27FC236}">
-                <a16:creationId xmlns:a16="http://schemas.microsoft.com/office/drawing/2014/main" id="{6FA980DF-176D-4778-AEA3-D357C454CEA1}"/>
+                <a16:creationId xmlns:a16="http://schemas.microsoft.com/office/drawing/2014/main" id="{4AFF952A-C9DD-4E9E-B949-6F424411B1C8}"/>
               </a:ext>
             </a:extLst>
           </p:cNvPr>
@@ -13338,7 +11742,7 @@
           <p:cNvPr id="15" name="e-0">
             <a:extLst xmlns:a="http://schemas.openxmlformats.org/drawingml/2006/main">
               <a:ext uri="{FF2B5EF4-FFF2-40B4-BE49-F238E27FC236}">
-                <a16:creationId xmlns:a16="http://schemas.microsoft.com/office/drawing/2014/main" id="{A6C9D9A4-8215-4621-A2EE-E9925F21FF76}"/>
+                <a16:creationId xmlns:a16="http://schemas.microsoft.com/office/drawing/2014/main" id="{8B30E685-704A-43DC-9B5E-6040838663B3}"/>
               </a:ext>
             </a:extLst>
           </p:cNvPr>
@@ -13395,7 +11799,7 @@
           <p:cNvPr id="16" name="e-1">
             <a:extLst xmlns:a="http://schemas.openxmlformats.org/drawingml/2006/main">
               <a:ext uri="{FF2B5EF4-FFF2-40B4-BE49-F238E27FC236}">
-                <a16:creationId xmlns:a16="http://schemas.microsoft.com/office/drawing/2014/main" id="{2AF19BB9-FF7E-4933-9F9C-CAA1FAF1AF85}"/>
+                <a16:creationId xmlns:a16="http://schemas.microsoft.com/office/drawing/2014/main" id="{FFEA7080-7736-438E-A04A-E6A985802E4E}"/>
               </a:ext>
             </a:extLst>
           </p:cNvPr>
@@ -13452,7 +11856,7 @@
           <p:cNvPr id="17" name="e-2">
             <a:extLst xmlns:a="http://schemas.openxmlformats.org/drawingml/2006/main">
               <a:ext uri="{FF2B5EF4-FFF2-40B4-BE49-F238E27FC236}">
-                <a16:creationId xmlns:a16="http://schemas.microsoft.com/office/drawing/2014/main" id="{D3AB9375-F476-4CD3-A933-7A560BA86DCC}"/>
+                <a16:creationId xmlns:a16="http://schemas.microsoft.com/office/drawing/2014/main" id="{1C20C441-9F67-48B4-88BA-16E85BDF47B2}"/>
               </a:ext>
             </a:extLst>
           </p:cNvPr>
@@ -13509,7 +11913,7 @@
           <p:cNvPr id="18" name="e-3">
             <a:extLst xmlns:a="http://schemas.openxmlformats.org/drawingml/2006/main">
               <a:ext uri="{FF2B5EF4-FFF2-40B4-BE49-F238E27FC236}">
-                <a16:creationId xmlns:a16="http://schemas.microsoft.com/office/drawing/2014/main" id="{9292B9DF-77D4-4E70-959E-0A3965D9A07B}"/>
+                <a16:creationId xmlns:a16="http://schemas.microsoft.com/office/drawing/2014/main" id="{80058654-7119-43A0-B51A-1B1ABDC63944}"/>
               </a:ext>
             </a:extLst>
           </p:cNvPr>
@@ -13566,7 +11970,7 @@
           <p:cNvPr id="19" name="e-4">
             <a:extLst xmlns:a="http://schemas.openxmlformats.org/drawingml/2006/main">
               <a:ext uri="{FF2B5EF4-FFF2-40B4-BE49-F238E27FC236}">
-                <a16:creationId xmlns:a16="http://schemas.microsoft.com/office/drawing/2014/main" id="{73AD9692-5EF7-4EC1-BF38-07657E806F6A}"/>
+                <a16:creationId xmlns:a16="http://schemas.microsoft.com/office/drawing/2014/main" id="{97DAD56A-C3F3-47CA-9766-1954CBA66747}"/>
               </a:ext>
             </a:extLst>
           </p:cNvPr>
@@ -13623,7 +12027,7 @@
           <p:cNvPr id="20" name="e-5">
             <a:extLst xmlns:a="http://schemas.openxmlformats.org/drawingml/2006/main">
               <a:ext uri="{FF2B5EF4-FFF2-40B4-BE49-F238E27FC236}">
-                <a16:creationId xmlns:a16="http://schemas.microsoft.com/office/drawing/2014/main" id="{F9CF2F44-67AF-41EC-B390-92F878DA348F}"/>
+                <a16:creationId xmlns:a16="http://schemas.microsoft.com/office/drawing/2014/main" id="{DBC646DE-BB98-43FB-9658-671FAE679166}"/>
               </a:ext>
             </a:extLst>
           </p:cNvPr>
@@ -13774,7 +12178,7 @@
           <p:cNvPr id="6" name="tag-0">
             <a:extLst xmlns:a="http://schemas.openxmlformats.org/drawingml/2006/main">
               <a:ext uri="{FF2B5EF4-FFF2-40B4-BE49-F238E27FC236}">
-                <a16:creationId xmlns:a16="http://schemas.microsoft.com/office/drawing/2014/main" id="{F1D136C3-F421-4DC8-B397-30C34F521783}"/>
+                <a16:creationId xmlns:a16="http://schemas.microsoft.com/office/drawing/2014/main" id="{42C8ACC5-AE1D-4288-8A41-2C0516B0CCE4}"/>
               </a:ext>
             </a:extLst>
           </p:cNvPr>
@@ -13831,7 +12235,7 @@
           <p:cNvPr id="7" name="h-0">
             <a:extLst xmlns:a="http://schemas.openxmlformats.org/drawingml/2006/main">
               <a:ext uri="{FF2B5EF4-FFF2-40B4-BE49-F238E27FC236}">
-                <a16:creationId xmlns:a16="http://schemas.microsoft.com/office/drawing/2014/main" id="{65FD66D8-608B-4D97-B50D-2C45BDFFF609}"/>
+                <a16:creationId xmlns:a16="http://schemas.microsoft.com/office/drawing/2014/main" id="{97153672-678E-4314-85F7-80EE289E3A67}"/>
               </a:ext>
             </a:extLst>
           </p:cNvPr>
@@ -13886,7 +12290,7 @@
           <p:cNvPr id="8" name="d-0">
             <a:extLst xmlns:a="http://schemas.openxmlformats.org/drawingml/2006/main">
               <a:ext uri="{FF2B5EF4-FFF2-40B4-BE49-F238E27FC236}">
-                <a16:creationId xmlns:a16="http://schemas.microsoft.com/office/drawing/2014/main" id="{D04BAA1F-9CC1-4275-B55A-1B7BD83B2533}"/>
+                <a16:creationId xmlns:a16="http://schemas.microsoft.com/office/drawing/2014/main" id="{BA071DED-D309-485A-AAE0-0CCE0C08457E}"/>
               </a:ext>
             </a:extLst>
           </p:cNvPr>
@@ -13945,7 +12349,7 @@
           <p:cNvPr id="9" name="tag-1">
             <a:extLst xmlns:a="http://schemas.openxmlformats.org/drawingml/2006/main">
               <a:ext uri="{FF2B5EF4-FFF2-40B4-BE49-F238E27FC236}">
-                <a16:creationId xmlns:a16="http://schemas.microsoft.com/office/drawing/2014/main" id="{8A9EAF4C-BEEF-4F6C-AA57-8489B304068A}"/>
+                <a16:creationId xmlns:a16="http://schemas.microsoft.com/office/drawing/2014/main" id="{ECE6AE6A-7737-493C-A6F3-5AD10F97E372}"/>
               </a:ext>
             </a:extLst>
           </p:cNvPr>
@@ -14002,7 +12406,7 @@
           <p:cNvPr id="10" name="h-1">
             <a:extLst xmlns:a="http://schemas.openxmlformats.org/drawingml/2006/main">
               <a:ext uri="{FF2B5EF4-FFF2-40B4-BE49-F238E27FC236}">
-                <a16:creationId xmlns:a16="http://schemas.microsoft.com/office/drawing/2014/main" id="{8317316B-1CCE-43E1-BE85-BE9E01A5B026}"/>
+                <a16:creationId xmlns:a16="http://schemas.microsoft.com/office/drawing/2014/main" id="{AABAD58A-9372-499B-8B73-C18896EDFDE8}"/>
               </a:ext>
             </a:extLst>
           </p:cNvPr>
@@ -14057,7 +12461,7 @@
           <p:cNvPr id="11" name="d-1">
             <a:extLst xmlns:a="http://schemas.openxmlformats.org/drawingml/2006/main">
               <a:ext uri="{FF2B5EF4-FFF2-40B4-BE49-F238E27FC236}">
-                <a16:creationId xmlns:a16="http://schemas.microsoft.com/office/drawing/2014/main" id="{99085142-241E-4569-8E14-443ED09C1764}"/>
+                <a16:creationId xmlns:a16="http://schemas.microsoft.com/office/drawing/2014/main" id="{22F4BD3C-BF9C-4A1C-8939-7E92D34E973A}"/>
               </a:ext>
             </a:extLst>
           </p:cNvPr>
@@ -14116,7 +12520,7 @@
           <p:cNvPr id="12" name="tag-2">
             <a:extLst xmlns:a="http://schemas.openxmlformats.org/drawingml/2006/main">
               <a:ext uri="{FF2B5EF4-FFF2-40B4-BE49-F238E27FC236}">
-                <a16:creationId xmlns:a16="http://schemas.microsoft.com/office/drawing/2014/main" id="{D25EC778-F578-4369-8455-0C330850D76D}"/>
+                <a16:creationId xmlns:a16="http://schemas.microsoft.com/office/drawing/2014/main" id="{D07EB9E6-27F6-4809-81DC-23C07F60175C}"/>
               </a:ext>
             </a:extLst>
           </p:cNvPr>
@@ -14173,7 +12577,7 @@
           <p:cNvPr id="13" name="h-2">
             <a:extLst xmlns:a="http://schemas.openxmlformats.org/drawingml/2006/main">
               <a:ext uri="{FF2B5EF4-FFF2-40B4-BE49-F238E27FC236}">
-                <a16:creationId xmlns:a16="http://schemas.microsoft.com/office/drawing/2014/main" id="{BD6EF079-C4D1-40E3-AD7F-53A3CEBDCEA1}"/>
+                <a16:creationId xmlns:a16="http://schemas.microsoft.com/office/drawing/2014/main" id="{36E32D5F-7BA2-4E11-AA10-D4BCC9FE655C}"/>
               </a:ext>
             </a:extLst>
           </p:cNvPr>
@@ -14228,7 +12632,7 @@
           <p:cNvPr id="14" name="d-2">
             <a:extLst xmlns:a="http://schemas.openxmlformats.org/drawingml/2006/main">
               <a:ext uri="{FF2B5EF4-FFF2-40B4-BE49-F238E27FC236}">
-                <a16:creationId xmlns:a16="http://schemas.microsoft.com/office/drawing/2014/main" id="{38D6F0A9-94C6-4C63-BAF1-E76A0D406291}"/>
+                <a16:creationId xmlns:a16="http://schemas.microsoft.com/office/drawing/2014/main" id="{3B6BC9D9-76CD-4FE3-8C77-06F7D2613826}"/>
               </a:ext>
             </a:extLst>
           </p:cNvPr>
@@ -14287,7 +12691,7 @@
           <p:cNvPr id="15" name="process">
             <a:extLst xmlns:a="http://schemas.openxmlformats.org/drawingml/2006/main">
               <a:ext uri="{FF2B5EF4-FFF2-40B4-BE49-F238E27FC236}">
-                <a16:creationId xmlns:a16="http://schemas.microsoft.com/office/drawing/2014/main" id="{2CDD7212-AE69-46E7-B78A-FF5E324A21F5}"/>
+                <a16:creationId xmlns:a16="http://schemas.microsoft.com/office/drawing/2014/main" id="{41E5BB0B-A16B-49A1-995F-0F4B532B228E}"/>
               </a:ext>
             </a:extLst>
           </p:cNvPr>
@@ -14344,7 +12748,7 @@
           <p:cNvPr id="16" name="close">
             <a:extLst xmlns:a="http://schemas.openxmlformats.org/drawingml/2006/main">
               <a:ext uri="{FF2B5EF4-FFF2-40B4-BE49-F238E27FC236}">
-                <a16:creationId xmlns:a16="http://schemas.microsoft.com/office/drawing/2014/main" id="{7C744396-9C79-437E-B59C-BB10ABA30801}"/>
+                <a16:creationId xmlns:a16="http://schemas.microsoft.com/office/drawing/2014/main" id="{A6F6FC05-56FB-40D4-A115-5AC07F8D45B6}"/>
               </a:ext>
             </a:extLst>
           </p:cNvPr>
@@ -14491,7 +12895,7 @@
           <p:cNvPr id="6" name="left-head">
             <a:extLst xmlns:a="http://schemas.openxmlformats.org/drawingml/2006/main">
               <a:ext uri="{FF2B5EF4-FFF2-40B4-BE49-F238E27FC236}">
-                <a16:creationId xmlns:a16="http://schemas.microsoft.com/office/drawing/2014/main" id="{02E87148-4442-4939-AE01-237B9A82557A}"/>
+                <a16:creationId xmlns:a16="http://schemas.microsoft.com/office/drawing/2014/main" id="{09F443BD-68E6-422B-B9CD-0A77E81A958E}"/>
               </a:ext>
             </a:extLst>
           </p:cNvPr>
@@ -14544,7 +12948,7 @@
           <p:cNvPr id="7" name="left-0">
             <a:extLst xmlns:a="http://schemas.openxmlformats.org/drawingml/2006/main">
               <a:ext uri="{FF2B5EF4-FFF2-40B4-BE49-F238E27FC236}">
-                <a16:creationId xmlns:a16="http://schemas.microsoft.com/office/drawing/2014/main" id="{31BA6FF7-4793-4E8F-A0F4-B905ABF5FC6F}"/>
+                <a16:creationId xmlns:a16="http://schemas.microsoft.com/office/drawing/2014/main" id="{045F7A94-1F10-4896-AABE-429FF5BABC58}"/>
               </a:ext>
             </a:extLst>
           </p:cNvPr>
@@ -14601,7 +13005,7 @@
           <p:cNvPr id="8" name="left-1">
             <a:extLst xmlns:a="http://schemas.openxmlformats.org/drawingml/2006/main">
               <a:ext uri="{FF2B5EF4-FFF2-40B4-BE49-F238E27FC236}">
-                <a16:creationId xmlns:a16="http://schemas.microsoft.com/office/drawing/2014/main" id="{E7598B30-CD22-4EB6-A20F-2AF58F74089D}"/>
+                <a16:creationId xmlns:a16="http://schemas.microsoft.com/office/drawing/2014/main" id="{4CA61F8A-DB04-446C-B7F9-99C13AF4803B}"/>
               </a:ext>
             </a:extLst>
           </p:cNvPr>
@@ -14658,7 +13062,7 @@
           <p:cNvPr id="9" name="left-2">
             <a:extLst xmlns:a="http://schemas.openxmlformats.org/drawingml/2006/main">
               <a:ext uri="{FF2B5EF4-FFF2-40B4-BE49-F238E27FC236}">
-                <a16:creationId xmlns:a16="http://schemas.microsoft.com/office/drawing/2014/main" id="{978F45C5-690A-44AA-90DD-ADE61450FB60}"/>
+                <a16:creationId xmlns:a16="http://schemas.microsoft.com/office/drawing/2014/main" id="{C9C29780-E93E-4D5F-925A-9C036222B037}"/>
               </a:ext>
             </a:extLst>
           </p:cNvPr>
@@ -14715,7 +13119,7 @@
           <p:cNvPr id="10" name="left-3">
             <a:extLst xmlns:a="http://schemas.openxmlformats.org/drawingml/2006/main">
               <a:ext uri="{FF2B5EF4-FFF2-40B4-BE49-F238E27FC236}">
-                <a16:creationId xmlns:a16="http://schemas.microsoft.com/office/drawing/2014/main" id="{EA8FFD70-9545-4CA7-84C2-069696C7FA76}"/>
+                <a16:creationId xmlns:a16="http://schemas.microsoft.com/office/drawing/2014/main" id="{55AA45AE-B477-41C4-8C61-62496D4CE092}"/>
               </a:ext>
             </a:extLst>
           </p:cNvPr>
@@ -14772,7 +13176,7 @@
           <p:cNvPr id="11" name="neq">
             <a:extLst xmlns:a="http://schemas.openxmlformats.org/drawingml/2006/main">
               <a:ext uri="{FF2B5EF4-FFF2-40B4-BE49-F238E27FC236}">
-                <a16:creationId xmlns:a16="http://schemas.microsoft.com/office/drawing/2014/main" id="{463188F1-D391-457E-8FC3-1DC358A06475}"/>
+                <a16:creationId xmlns:a16="http://schemas.microsoft.com/office/drawing/2014/main" id="{6525A981-7764-42F7-8373-102D1A5A02EE}"/>
               </a:ext>
             </a:extLst>
           </p:cNvPr>
@@ -14825,7 +13229,7 @@
           <p:cNvPr id="12" name="right-head">
             <a:extLst xmlns:a="http://schemas.openxmlformats.org/drawingml/2006/main">
               <a:ext uri="{FF2B5EF4-FFF2-40B4-BE49-F238E27FC236}">
-                <a16:creationId xmlns:a16="http://schemas.microsoft.com/office/drawing/2014/main" id="{393D0820-5A5C-4650-9270-1C1F7DF9F868}"/>
+                <a16:creationId xmlns:a16="http://schemas.microsoft.com/office/drawing/2014/main" id="{54A9D91B-8D24-45B7-BAAF-A2CFB181A3F9}"/>
               </a:ext>
             </a:extLst>
           </p:cNvPr>
@@ -14878,7 +13282,7 @@
           <p:cNvPr id="13" name="right-0">
             <a:extLst xmlns:a="http://schemas.openxmlformats.org/drawingml/2006/main">
               <a:ext uri="{FF2B5EF4-FFF2-40B4-BE49-F238E27FC236}">
-                <a16:creationId xmlns:a16="http://schemas.microsoft.com/office/drawing/2014/main" id="{BB352C3D-3096-4EDF-83BE-C6DFB1BEBAF2}"/>
+                <a16:creationId xmlns:a16="http://schemas.microsoft.com/office/drawing/2014/main" id="{9EFF9BD3-5F43-48D4-87AF-D52CF26C5EF7}"/>
               </a:ext>
             </a:extLst>
           </p:cNvPr>
@@ -14935,7 +13339,7 @@
           <p:cNvPr id="14" name="right-1">
             <a:extLst xmlns:a="http://schemas.openxmlformats.org/drawingml/2006/main">
               <a:ext uri="{FF2B5EF4-FFF2-40B4-BE49-F238E27FC236}">
-                <a16:creationId xmlns:a16="http://schemas.microsoft.com/office/drawing/2014/main" id="{CB2B5299-F00C-460E-9E14-AD0443A33F82}"/>
+                <a16:creationId xmlns:a16="http://schemas.microsoft.com/office/drawing/2014/main" id="{13BB6E25-EFEF-49EF-9D2B-7DB4D4CE6AEC}"/>
               </a:ext>
             </a:extLst>
           </p:cNvPr>
@@ -14992,7 +13396,7 @@
           <p:cNvPr id="15" name="right-2">
             <a:extLst xmlns:a="http://schemas.openxmlformats.org/drawingml/2006/main">
               <a:ext uri="{FF2B5EF4-FFF2-40B4-BE49-F238E27FC236}">
-                <a16:creationId xmlns:a16="http://schemas.microsoft.com/office/drawing/2014/main" id="{82A22C70-5EE0-45A4-990C-9AA2A8AFEB2B}"/>
+                <a16:creationId xmlns:a16="http://schemas.microsoft.com/office/drawing/2014/main" id="{102B7A87-068B-4912-B65C-4143087C4FF3}"/>
               </a:ext>
             </a:extLst>
           </p:cNvPr>
@@ -15049,7 +13453,7 @@
           <p:cNvPr id="16" name="right-3">
             <a:extLst xmlns:a="http://schemas.openxmlformats.org/drawingml/2006/main">
               <a:ext uri="{FF2B5EF4-FFF2-40B4-BE49-F238E27FC236}">
-                <a16:creationId xmlns:a16="http://schemas.microsoft.com/office/drawing/2014/main" id="{96D71579-1179-4C04-875C-05D2AD3E8B48}"/>
+                <a16:creationId xmlns:a16="http://schemas.microsoft.com/office/drawing/2014/main" id="{D9FD0370-04A4-4D5B-A351-35FC4A8459DD}"/>
               </a:ext>
             </a:extLst>
           </p:cNvPr>
@@ -15106,7 +13510,7 @@
           <p:cNvPr id="17" name="out">
             <a:extLst xmlns:a="http://schemas.openxmlformats.org/drawingml/2006/main">
               <a:ext uri="{FF2B5EF4-FFF2-40B4-BE49-F238E27FC236}">
-                <a16:creationId xmlns:a16="http://schemas.microsoft.com/office/drawing/2014/main" id="{5CE66FA5-5A14-4C4C-8074-FBBF5F2B9C2D}"/>
+                <a16:creationId xmlns:a16="http://schemas.microsoft.com/office/drawing/2014/main" id="{32349A9C-1AD6-4BF2-BD12-77DF7A10453C}"/>
               </a:ext>
             </a:extLst>
           </p:cNvPr>
@@ -15257,7 +13661,7 @@
           <p:cNvPr id="6" name="ln-0">
             <a:extLst xmlns:a="http://schemas.openxmlformats.org/drawingml/2006/main">
               <a:ext uri="{FF2B5EF4-FFF2-40B4-BE49-F238E27FC236}">
-                <a16:creationId xmlns:a16="http://schemas.microsoft.com/office/drawing/2014/main" id="{388F4484-B770-4E33-AEF5-BF469FCEA422}"/>
+                <a16:creationId xmlns:a16="http://schemas.microsoft.com/office/drawing/2014/main" id="{93DF5BD7-E533-4886-9C18-EE9E0AB92690}"/>
               </a:ext>
             </a:extLst>
           </p:cNvPr>
@@ -15288,7 +13692,7 @@
           <p:cNvPr id="7" name="n-0">
             <a:extLst xmlns:a="http://schemas.openxmlformats.org/drawingml/2006/main">
               <a:ext uri="{FF2B5EF4-FFF2-40B4-BE49-F238E27FC236}">
-                <a16:creationId xmlns:a16="http://schemas.microsoft.com/office/drawing/2014/main" id="{17ECF85D-DDB5-469D-A549-42CBFD8D08DE}"/>
+                <a16:creationId xmlns:a16="http://schemas.microsoft.com/office/drawing/2014/main" id="{43689930-F69A-4A61-85F4-2DACC8645AE1}"/>
               </a:ext>
             </a:extLst>
           </p:cNvPr>
@@ -15345,7 +13749,7 @@
           <p:cNvPr id="8" name="step-0">
             <a:extLst xmlns:a="http://schemas.openxmlformats.org/drawingml/2006/main">
               <a:ext uri="{FF2B5EF4-FFF2-40B4-BE49-F238E27FC236}">
-                <a16:creationId xmlns:a16="http://schemas.microsoft.com/office/drawing/2014/main" id="{236EFEDE-2B89-4458-BEEC-76BD620D0123}"/>
+                <a16:creationId xmlns:a16="http://schemas.microsoft.com/office/drawing/2014/main" id="{36CBD818-F066-47C5-83F2-B48E41759DBC}"/>
               </a:ext>
             </a:extLst>
           </p:cNvPr>
@@ -15400,7 +13804,7 @@
           <p:cNvPr id="9" name="ln-1">
             <a:extLst xmlns:a="http://schemas.openxmlformats.org/drawingml/2006/main">
               <a:ext uri="{FF2B5EF4-FFF2-40B4-BE49-F238E27FC236}">
-                <a16:creationId xmlns:a16="http://schemas.microsoft.com/office/drawing/2014/main" id="{F5AAC4B2-C518-445B-BAD6-75B0975F0616}"/>
+                <a16:creationId xmlns:a16="http://schemas.microsoft.com/office/drawing/2014/main" id="{D5EA0EAB-57B7-4148-9315-370B5F43A717}"/>
               </a:ext>
             </a:extLst>
           </p:cNvPr>
@@ -15431,7 +13835,7 @@
           <p:cNvPr id="10" name="n-1">
             <a:extLst xmlns:a="http://schemas.openxmlformats.org/drawingml/2006/main">
               <a:ext uri="{FF2B5EF4-FFF2-40B4-BE49-F238E27FC236}">
-                <a16:creationId xmlns:a16="http://schemas.microsoft.com/office/drawing/2014/main" id="{0A0FAF43-06B4-4EFB-951F-33315C804992}"/>
+                <a16:creationId xmlns:a16="http://schemas.microsoft.com/office/drawing/2014/main" id="{697982EC-1F01-4982-B511-C8701CE7C4C8}"/>
               </a:ext>
             </a:extLst>
           </p:cNvPr>
@@ -15488,7 +13892,7 @@
           <p:cNvPr id="11" name="step-1">
             <a:extLst xmlns:a="http://schemas.openxmlformats.org/drawingml/2006/main">
               <a:ext uri="{FF2B5EF4-FFF2-40B4-BE49-F238E27FC236}">
-                <a16:creationId xmlns:a16="http://schemas.microsoft.com/office/drawing/2014/main" id="{E1C15664-0D62-4A9B-8E22-F6643D72AF4F}"/>
+                <a16:creationId xmlns:a16="http://schemas.microsoft.com/office/drawing/2014/main" id="{A158C71C-35B6-4A3C-B451-6A72BC1E1401}"/>
               </a:ext>
             </a:extLst>
           </p:cNvPr>
@@ -15543,7 +13947,7 @@
           <p:cNvPr id="12" name="ln-2">
             <a:extLst xmlns:a="http://schemas.openxmlformats.org/drawingml/2006/main">
               <a:ext uri="{FF2B5EF4-FFF2-40B4-BE49-F238E27FC236}">
-                <a16:creationId xmlns:a16="http://schemas.microsoft.com/office/drawing/2014/main" id="{E4EECB3F-3B93-4193-B856-39A8730AD4B9}"/>
+                <a16:creationId xmlns:a16="http://schemas.microsoft.com/office/drawing/2014/main" id="{4D06B7CE-F8F3-47AF-9CF4-8C4BC38587C1}"/>
               </a:ext>
             </a:extLst>
           </p:cNvPr>
@@ -15574,7 +13978,7 @@
           <p:cNvPr id="13" name="n-2">
             <a:extLst xmlns:a="http://schemas.openxmlformats.org/drawingml/2006/main">
               <a:ext uri="{FF2B5EF4-FFF2-40B4-BE49-F238E27FC236}">
-                <a16:creationId xmlns:a16="http://schemas.microsoft.com/office/drawing/2014/main" id="{CA18C5C0-EEB5-4763-9D75-815BC7161F0E}"/>
+                <a16:creationId xmlns:a16="http://schemas.microsoft.com/office/drawing/2014/main" id="{F4D0377E-FA9B-4800-A1E4-8EAC67349BA0}"/>
               </a:ext>
             </a:extLst>
           </p:cNvPr>
@@ -15631,7 +14035,7 @@
           <p:cNvPr id="14" name="step-2">
             <a:extLst xmlns:a="http://schemas.openxmlformats.org/drawingml/2006/main">
               <a:ext uri="{FF2B5EF4-FFF2-40B4-BE49-F238E27FC236}">
-                <a16:creationId xmlns:a16="http://schemas.microsoft.com/office/drawing/2014/main" id="{FCA00907-3475-4159-9F2C-DB9559A69A21}"/>
+                <a16:creationId xmlns:a16="http://schemas.microsoft.com/office/drawing/2014/main" id="{265582E8-0838-41B0-86C4-0F1A5C7E9D94}"/>
               </a:ext>
             </a:extLst>
           </p:cNvPr>
@@ -15686,7 +14090,7 @@
           <p:cNvPr id="15" name="ln-3">
             <a:extLst xmlns:a="http://schemas.openxmlformats.org/drawingml/2006/main">
               <a:ext uri="{FF2B5EF4-FFF2-40B4-BE49-F238E27FC236}">
-                <a16:creationId xmlns:a16="http://schemas.microsoft.com/office/drawing/2014/main" id="{2CA571DC-AE7E-4DBF-84BE-03331861CE47}"/>
+                <a16:creationId xmlns:a16="http://schemas.microsoft.com/office/drawing/2014/main" id="{BD3DB139-83DF-4EA9-8D57-26F0678B10C2}"/>
               </a:ext>
             </a:extLst>
           </p:cNvPr>
@@ -15717,7 +14121,7 @@
           <p:cNvPr id="16" name="n-3">
             <a:extLst xmlns:a="http://schemas.openxmlformats.org/drawingml/2006/main">
               <a:ext uri="{FF2B5EF4-FFF2-40B4-BE49-F238E27FC236}">
-                <a16:creationId xmlns:a16="http://schemas.microsoft.com/office/drawing/2014/main" id="{AF2FCB19-C543-46A0-AFFB-31AC36C58FF9}"/>
+                <a16:creationId xmlns:a16="http://schemas.microsoft.com/office/drawing/2014/main" id="{411E1637-CD30-4DDB-9D76-A94E0CA032A2}"/>
               </a:ext>
             </a:extLst>
           </p:cNvPr>
@@ -15774,7 +14178,7 @@
           <p:cNvPr id="17" name="step-3">
             <a:extLst xmlns:a="http://schemas.openxmlformats.org/drawingml/2006/main">
               <a:ext uri="{FF2B5EF4-FFF2-40B4-BE49-F238E27FC236}">
-                <a16:creationId xmlns:a16="http://schemas.microsoft.com/office/drawing/2014/main" id="{B1B71BF6-8D37-4C87-AA40-7E69314B2817}"/>
+                <a16:creationId xmlns:a16="http://schemas.microsoft.com/office/drawing/2014/main" id="{C63F20EE-1366-47D7-AE31-40A0E45547C0}"/>
               </a:ext>
             </a:extLst>
           </p:cNvPr>
@@ -15829,7 +14233,7 @@
           <p:cNvPr id="18" name="n-4">
             <a:extLst xmlns:a="http://schemas.openxmlformats.org/drawingml/2006/main">
               <a:ext uri="{FF2B5EF4-FFF2-40B4-BE49-F238E27FC236}">
-                <a16:creationId xmlns:a16="http://schemas.microsoft.com/office/drawing/2014/main" id="{63EBABFB-81E3-4589-AA5A-8C855811044D}"/>
+                <a16:creationId xmlns:a16="http://schemas.microsoft.com/office/drawing/2014/main" id="{B140DCFB-829B-4726-9EBC-18477C895FB0}"/>
               </a:ext>
             </a:extLst>
           </p:cNvPr>
@@ -15886,7 +14290,7 @@
           <p:cNvPr id="19" name="step-4">
             <a:extLst xmlns:a="http://schemas.openxmlformats.org/drawingml/2006/main">
               <a:ext uri="{FF2B5EF4-FFF2-40B4-BE49-F238E27FC236}">
-                <a16:creationId xmlns:a16="http://schemas.microsoft.com/office/drawing/2014/main" id="{F5154D52-5AE8-487A-9DD8-82FEE3430D04}"/>
+                <a16:creationId xmlns:a16="http://schemas.microsoft.com/office/drawing/2014/main" id="{BE23BC0E-C6E7-42BD-B5B5-9C209564007B}"/>
               </a:ext>
             </a:extLst>
           </p:cNvPr>
@@ -15941,7 +14345,7 @@
           <p:cNvPr id="20" name="out-title">
             <a:extLst xmlns:a="http://schemas.openxmlformats.org/drawingml/2006/main">
               <a:ext uri="{FF2B5EF4-FFF2-40B4-BE49-F238E27FC236}">
-                <a16:creationId xmlns:a16="http://schemas.microsoft.com/office/drawing/2014/main" id="{DA79F312-1C13-4D03-A5A7-53739FEC89E0}"/>
+                <a16:creationId xmlns:a16="http://schemas.microsoft.com/office/drawing/2014/main" id="{13B3873E-A41E-4BCA-B305-794381C484BF}"/>
               </a:ext>
             </a:extLst>
           </p:cNvPr>
@@ -15994,7 +14398,7 @@
           <p:cNvPr id="21" name="oh-0">
             <a:extLst xmlns:a="http://schemas.openxmlformats.org/drawingml/2006/main">
               <a:ext uri="{FF2B5EF4-FFF2-40B4-BE49-F238E27FC236}">
-                <a16:creationId xmlns:a16="http://schemas.microsoft.com/office/drawing/2014/main" id="{B8198711-F8BC-4018-85F6-7733835E1F7D}"/>
+                <a16:creationId xmlns:a16="http://schemas.microsoft.com/office/drawing/2014/main" id="{56393D57-22AA-4B12-97F3-BCAC32EF3E64}"/>
               </a:ext>
             </a:extLst>
           </p:cNvPr>
@@ -16049,7 +14453,7 @@
           <p:cNvPr id="22" name="od-0">
             <a:extLst xmlns:a="http://schemas.openxmlformats.org/drawingml/2006/main">
               <a:ext uri="{FF2B5EF4-FFF2-40B4-BE49-F238E27FC236}">
-                <a16:creationId xmlns:a16="http://schemas.microsoft.com/office/drawing/2014/main" id="{13C4A071-EA7D-433A-9F02-C9DA39802F3C}"/>
+                <a16:creationId xmlns:a16="http://schemas.microsoft.com/office/drawing/2014/main" id="{860FA27A-FB3A-4319-AC8F-E32D3B3E7C3E}"/>
               </a:ext>
             </a:extLst>
           </p:cNvPr>
@@ -16104,7 +14508,7 @@
           <p:cNvPr id="23" name="oh-1">
             <a:extLst xmlns:a="http://schemas.openxmlformats.org/drawingml/2006/main">
               <a:ext uri="{FF2B5EF4-FFF2-40B4-BE49-F238E27FC236}">
-                <a16:creationId xmlns:a16="http://schemas.microsoft.com/office/drawing/2014/main" id="{340E02DF-8529-456A-9F53-5624C8511C9B}"/>
+                <a16:creationId xmlns:a16="http://schemas.microsoft.com/office/drawing/2014/main" id="{237ED0D7-1B54-4C84-8825-EB8FD25EBF39}"/>
               </a:ext>
             </a:extLst>
           </p:cNvPr>
@@ -16159,7 +14563,7 @@
           <p:cNvPr id="24" name="od-1">
             <a:extLst xmlns:a="http://schemas.openxmlformats.org/drawingml/2006/main">
               <a:ext uri="{FF2B5EF4-FFF2-40B4-BE49-F238E27FC236}">
-                <a16:creationId xmlns:a16="http://schemas.microsoft.com/office/drawing/2014/main" id="{14DAD08B-7D82-48A5-A376-34AD924D61DF}"/>
+                <a16:creationId xmlns:a16="http://schemas.microsoft.com/office/drawing/2014/main" id="{1D430D40-D006-4F68-B24D-DA2B726D6042}"/>
               </a:ext>
             </a:extLst>
           </p:cNvPr>
@@ -16214,7 +14618,7 @@
           <p:cNvPr id="25" name="oh-2">
             <a:extLst xmlns:a="http://schemas.openxmlformats.org/drawingml/2006/main">
               <a:ext uri="{FF2B5EF4-FFF2-40B4-BE49-F238E27FC236}">
-                <a16:creationId xmlns:a16="http://schemas.microsoft.com/office/drawing/2014/main" id="{2E8109CF-BEF9-4133-9869-ABD7C59D9039}"/>
+                <a16:creationId xmlns:a16="http://schemas.microsoft.com/office/drawing/2014/main" id="{42E29B28-67C9-47EA-8B9B-C04EC091BA87}"/>
               </a:ext>
             </a:extLst>
           </p:cNvPr>
@@ -16269,7 +14673,7 @@
           <p:cNvPr id="26" name="od-2">
             <a:extLst xmlns:a="http://schemas.openxmlformats.org/drawingml/2006/main">
               <a:ext uri="{FF2B5EF4-FFF2-40B4-BE49-F238E27FC236}">
-                <a16:creationId xmlns:a16="http://schemas.microsoft.com/office/drawing/2014/main" id="{B82BBDCC-6020-4994-AB5C-B2D57AB352B5}"/>
+                <a16:creationId xmlns:a16="http://schemas.microsoft.com/office/drawing/2014/main" id="{BD70AFAC-AFB9-4BBA-B445-A04C75892EBF}"/>
               </a:ext>
             </a:extLst>
           </p:cNvPr>
@@ -16324,7 +14728,7 @@
           <p:cNvPr id="27" name="oh-3">
             <a:extLst xmlns:a="http://schemas.openxmlformats.org/drawingml/2006/main">
               <a:ext uri="{FF2B5EF4-FFF2-40B4-BE49-F238E27FC236}">
-                <a16:creationId xmlns:a16="http://schemas.microsoft.com/office/drawing/2014/main" id="{F0A4F873-17A7-4152-85D5-148A1062C0AA}"/>
+                <a16:creationId xmlns:a16="http://schemas.microsoft.com/office/drawing/2014/main" id="{6021FF60-5B9B-436D-B723-503E382040B2}"/>
               </a:ext>
             </a:extLst>
           </p:cNvPr>
@@ -16379,7 +14783,7 @@
           <p:cNvPr id="28" name="od-3">
             <a:extLst xmlns:a="http://schemas.openxmlformats.org/drawingml/2006/main">
               <a:ext uri="{FF2B5EF4-FFF2-40B4-BE49-F238E27FC236}">
-                <a16:creationId xmlns:a16="http://schemas.microsoft.com/office/drawing/2014/main" id="{3547A1DB-0983-476A-ACC4-3C6BF70340D7}"/>
+                <a16:creationId xmlns:a16="http://schemas.microsoft.com/office/drawing/2014/main" id="{3279A343-522B-4AE3-8453-66FC792A27EE}"/>
               </a:ext>
             </a:extLst>
           </p:cNvPr>
@@ -16434,7 +14838,7 @@
           <p:cNvPr id="29" name="bottom">
             <a:extLst xmlns:a="http://schemas.openxmlformats.org/drawingml/2006/main">
               <a:ext uri="{FF2B5EF4-FFF2-40B4-BE49-F238E27FC236}">
-                <a16:creationId xmlns:a16="http://schemas.microsoft.com/office/drawing/2014/main" id="{7CA77847-E0C2-4FB8-98EE-699283D4B907}"/>
+                <a16:creationId xmlns:a16="http://schemas.microsoft.com/office/drawing/2014/main" id="{34C8C8CC-B5D7-41B7-8DFB-B2EF133C82D9}"/>
               </a:ext>
             </a:extLst>
           </p:cNvPr>
@@ -16581,23 +14985,23 @@
           <p:cNvPr id="6" name="teaching-label">
             <a:extLst xmlns:a="http://schemas.openxmlformats.org/drawingml/2006/main">
               <a:ext uri="{FF2B5EF4-FFF2-40B4-BE49-F238E27FC236}">
-                <a16:creationId xmlns:a16="http://schemas.microsoft.com/office/drawing/2014/main" id="{223B3B56-04F9-4F0C-A83E-68E4413F30E7}"/>
-              </a:ext>
-            </a:extLst>
-          </p:cNvPr>
-          <p:cNvSpPr>
-            <a:spLocks xmlns:a="http://schemas.openxmlformats.org/drawingml/2006/main" noGrp="1"/>
-          </p:cNvSpPr>
-          <p:nvPr/>
-        </p:nvSpPr>
-        <p:spPr>
-          <a:xfrm xmlns:a="http://schemas.openxmlformats.org/drawingml/2006/main">
-            <a:off x="8334375" y="838200"/>
-            <a:ext cx="3105150" cy="323850"/>
+                <a16:creationId xmlns:a16="http://schemas.microsoft.com/office/drawing/2014/main" id="{3AA26163-14DB-4902-BB9D-5353365607BF}"/>
+              </a:ext>
+            </a:extLst>
+          </p:cNvPr>
+          <p:cNvSpPr>
+            <a:spLocks xmlns:a="http://schemas.openxmlformats.org/drawingml/2006/main" noGrp="1"/>
+          </p:cNvSpPr>
+          <p:nvPr/>
+        </p:nvSpPr>
+        <p:spPr>
+          <a:xfrm xmlns:a="http://schemas.openxmlformats.org/drawingml/2006/main">
+            <a:off x="7524750" y="800100"/>
+            <a:ext cx="3943350" cy="419100"/>
           </a:xfrm>
           <a:prstGeom xmlns:a="http://schemas.openxmlformats.org/drawingml/2006/main" prst="roundRect">
             <a:avLst>
-              <a:gd name="adj" fmla="val 23529"/>
+              <a:gd name="adj" fmla="val 18182"/>
             </a:avLst>
           </a:prstGeom>
           <a:solidFill xmlns:a="http://schemas.openxmlformats.org/drawingml/2006/main">
@@ -16613,14 +15017,14 @@
           <a:lstStyle xmlns:a="http://schemas.openxmlformats.org/drawingml/2006/main"/>
           <a:p xmlns:a="http://schemas.openxmlformats.org/drawingml/2006/main">
             <a:pPr algn="ctr">
-              <a:defRPr sz="1350" b="1">
+              <a:defRPr sz="1800" b="1">
                 <a:solidFill>
                   <a:srgbClr val="C8161E"/>
                 </a:solidFill>
               </a:defRPr>
             </a:pPr>
             <a:r>
-              <a:rPr sz="1350" b="1">
+              <a:rPr sz="1800" b="1">
                 <a:solidFill>
                   <a:srgbClr val="C8161E"/>
                 </a:solidFill>
@@ -16628,7 +15032,7 @@
                 <a:ea typeface="Microsoft YaHei"/>
                 <a:cs typeface="Microsoft YaHei"/>
               </a:rPr>
-              <a:t>虚构教学示例 · 仅演示追踪动作</a:t>
+              <a:t>虚构教学示例｜非真实实验</a:t>
             </a:r>
           </a:p>
         </p:txBody>
@@ -16638,7 +15042,7 @@
           <p:cNvPr id="7" name="arrow-0">
             <a:extLst xmlns:a="http://schemas.openxmlformats.org/drawingml/2006/main">
               <a:ext uri="{FF2B5EF4-FFF2-40B4-BE49-F238E27FC236}">
-                <a16:creationId xmlns:a16="http://schemas.microsoft.com/office/drawing/2014/main" id="{FA3D76CA-393D-469B-ABF7-E6ECC5A45EA8}"/>
+                <a16:creationId xmlns:a16="http://schemas.microsoft.com/office/drawing/2014/main" id="{1D4EE972-3971-4B0F-A7DD-5661EAE86923}"/>
               </a:ext>
             </a:extLst>
           </p:cNvPr>
@@ -16669,7 +15073,7 @@
           <p:cNvPr id="8" name="num-0">
             <a:extLst xmlns:a="http://schemas.openxmlformats.org/drawingml/2006/main">
               <a:ext uri="{FF2B5EF4-FFF2-40B4-BE49-F238E27FC236}">
-                <a16:creationId xmlns:a16="http://schemas.microsoft.com/office/drawing/2014/main" id="{A73F729A-B89A-42CD-B1DB-2E30DD7BCCFD}"/>
+                <a16:creationId xmlns:a16="http://schemas.microsoft.com/office/drawing/2014/main" id="{77378979-6D8C-4A29-A2F6-A8F2B870C107}"/>
               </a:ext>
             </a:extLst>
           </p:cNvPr>
@@ -16726,7 +15130,7 @@
           <p:cNvPr id="9" name="head-0">
             <a:extLst xmlns:a="http://schemas.openxmlformats.org/drawingml/2006/main">
               <a:ext uri="{FF2B5EF4-FFF2-40B4-BE49-F238E27FC236}">
-                <a16:creationId xmlns:a16="http://schemas.microsoft.com/office/drawing/2014/main" id="{0457150E-A9E7-432A-A50C-C45947F78D72}"/>
+                <a16:creationId xmlns:a16="http://schemas.microsoft.com/office/drawing/2014/main" id="{7D94B3C1-4264-4F65-931A-4A2361A287D9}"/>
               </a:ext>
             </a:extLst>
           </p:cNvPr>
@@ -16781,7 +15185,7 @@
           <p:cNvPr id="10" name="body-0">
             <a:extLst xmlns:a="http://schemas.openxmlformats.org/drawingml/2006/main">
               <a:ext uri="{FF2B5EF4-FFF2-40B4-BE49-F238E27FC236}">
-                <a16:creationId xmlns:a16="http://schemas.microsoft.com/office/drawing/2014/main" id="{29300C03-558C-4587-A17A-F6E4F87DC397}"/>
+                <a16:creationId xmlns:a16="http://schemas.microsoft.com/office/drawing/2014/main" id="{878E4524-75A7-4E57-96DC-56D657692784}"/>
               </a:ext>
             </a:extLst>
           </p:cNvPr>
@@ -16844,7 +15248,7 @@
           <p:cNvPr id="11" name="arrow-1">
             <a:extLst xmlns:a="http://schemas.openxmlformats.org/drawingml/2006/main">
               <a:ext uri="{FF2B5EF4-FFF2-40B4-BE49-F238E27FC236}">
-                <a16:creationId xmlns:a16="http://schemas.microsoft.com/office/drawing/2014/main" id="{596E6EF0-DF6A-425F-A5EF-686CA96C1FC5}"/>
+                <a16:creationId xmlns:a16="http://schemas.microsoft.com/office/drawing/2014/main" id="{A93713F3-CFAF-481A-A0D5-C71B10FDFFFF}"/>
               </a:ext>
             </a:extLst>
           </p:cNvPr>
@@ -16875,7 +15279,7 @@
           <p:cNvPr id="12" name="num-1">
             <a:extLst xmlns:a="http://schemas.openxmlformats.org/drawingml/2006/main">
               <a:ext uri="{FF2B5EF4-FFF2-40B4-BE49-F238E27FC236}">
-                <a16:creationId xmlns:a16="http://schemas.microsoft.com/office/drawing/2014/main" id="{B5F4BD63-7DAD-41E4-8265-4AC92CE12A5C}"/>
+                <a16:creationId xmlns:a16="http://schemas.microsoft.com/office/drawing/2014/main" id="{6B49F1C7-B8BE-45B7-BA60-47ACC8FCA075}"/>
               </a:ext>
             </a:extLst>
           </p:cNvPr>
@@ -16932,7 +15336,7 @@
           <p:cNvPr id="13" name="head-1">
             <a:extLst xmlns:a="http://schemas.openxmlformats.org/drawingml/2006/main">
               <a:ext uri="{FF2B5EF4-FFF2-40B4-BE49-F238E27FC236}">
-                <a16:creationId xmlns:a16="http://schemas.microsoft.com/office/drawing/2014/main" id="{C6A6010C-E079-4715-98EC-DB53F0BAB286}"/>
+                <a16:creationId xmlns:a16="http://schemas.microsoft.com/office/drawing/2014/main" id="{37AB5037-0BA9-45A5-9827-00DA3888367B}"/>
               </a:ext>
             </a:extLst>
           </p:cNvPr>
@@ -16987,7 +15391,7 @@
           <p:cNvPr id="14" name="body-1">
             <a:extLst xmlns:a="http://schemas.openxmlformats.org/drawingml/2006/main">
               <a:ext uri="{FF2B5EF4-FFF2-40B4-BE49-F238E27FC236}">
-                <a16:creationId xmlns:a16="http://schemas.microsoft.com/office/drawing/2014/main" id="{A330D389-8C18-400E-BCFA-8C9951C515EF}"/>
+                <a16:creationId xmlns:a16="http://schemas.microsoft.com/office/drawing/2014/main" id="{ECD1C7E4-EEE0-4508-B57F-453D7942AD49}"/>
               </a:ext>
             </a:extLst>
           </p:cNvPr>
@@ -17074,7 +15478,7 @@
           <p:cNvPr id="15" name="arrow-2">
             <a:extLst xmlns:a="http://schemas.openxmlformats.org/drawingml/2006/main">
               <a:ext uri="{FF2B5EF4-FFF2-40B4-BE49-F238E27FC236}">
-                <a16:creationId xmlns:a16="http://schemas.microsoft.com/office/drawing/2014/main" id="{BFD176F7-3385-4F12-A39F-800275FA8320}"/>
+                <a16:creationId xmlns:a16="http://schemas.microsoft.com/office/drawing/2014/main" id="{30DD9AB0-392F-4CD2-BCE0-7EA163970838}"/>
               </a:ext>
             </a:extLst>
           </p:cNvPr>
@@ -17105,7 +15509,7 @@
           <p:cNvPr id="16" name="num-2">
             <a:extLst xmlns:a="http://schemas.openxmlformats.org/drawingml/2006/main">
               <a:ext uri="{FF2B5EF4-FFF2-40B4-BE49-F238E27FC236}">
-                <a16:creationId xmlns:a16="http://schemas.microsoft.com/office/drawing/2014/main" id="{40FE87E1-5868-4AB6-8EDB-83809C001437}"/>
+                <a16:creationId xmlns:a16="http://schemas.microsoft.com/office/drawing/2014/main" id="{5D7704A6-1442-4D53-BEBE-AF6B31833028}"/>
               </a:ext>
             </a:extLst>
           </p:cNvPr>
@@ -17162,7 +15566,7 @@
           <p:cNvPr id="17" name="head-2">
             <a:extLst xmlns:a="http://schemas.openxmlformats.org/drawingml/2006/main">
               <a:ext uri="{FF2B5EF4-FFF2-40B4-BE49-F238E27FC236}">
-                <a16:creationId xmlns:a16="http://schemas.microsoft.com/office/drawing/2014/main" id="{344ED4C9-089E-47FB-A0F0-973FA042793F}"/>
+                <a16:creationId xmlns:a16="http://schemas.microsoft.com/office/drawing/2014/main" id="{ED2D2B1A-E56D-487F-A9F5-189D017014F9}"/>
               </a:ext>
             </a:extLst>
           </p:cNvPr>
@@ -17217,7 +15621,7 @@
           <p:cNvPr id="18" name="body-2">
             <a:extLst xmlns:a="http://schemas.openxmlformats.org/drawingml/2006/main">
               <a:ext uri="{FF2B5EF4-FFF2-40B4-BE49-F238E27FC236}">
-                <a16:creationId xmlns:a16="http://schemas.microsoft.com/office/drawing/2014/main" id="{786E95DA-E4D9-4300-A1CF-F53D7BE82802}"/>
+                <a16:creationId xmlns:a16="http://schemas.microsoft.com/office/drawing/2014/main" id="{FCCA96A4-9837-43AE-AE7C-14391C1057CA}"/>
               </a:ext>
             </a:extLst>
           </p:cNvPr>
@@ -17304,7 +15708,7 @@
           <p:cNvPr id="19" name="num-3">
             <a:extLst xmlns:a="http://schemas.openxmlformats.org/drawingml/2006/main">
               <a:ext uri="{FF2B5EF4-FFF2-40B4-BE49-F238E27FC236}">
-                <a16:creationId xmlns:a16="http://schemas.microsoft.com/office/drawing/2014/main" id="{892E6E16-5D01-42AA-83DA-D954938C4447}"/>
+                <a16:creationId xmlns:a16="http://schemas.microsoft.com/office/drawing/2014/main" id="{5ED212D0-E969-4BBF-B306-2BD44DE66484}"/>
               </a:ext>
             </a:extLst>
           </p:cNvPr>
@@ -17361,7 +15765,7 @@
           <p:cNvPr id="20" name="head-3">
             <a:extLst xmlns:a="http://schemas.openxmlformats.org/drawingml/2006/main">
               <a:ext uri="{FF2B5EF4-FFF2-40B4-BE49-F238E27FC236}">
-                <a16:creationId xmlns:a16="http://schemas.microsoft.com/office/drawing/2014/main" id="{6E29E31F-9A6E-47DE-9003-7906049FC9FE}"/>
+                <a16:creationId xmlns:a16="http://schemas.microsoft.com/office/drawing/2014/main" id="{4B4D4A4F-1564-4A8E-BF21-38C98D1C4A85}"/>
               </a:ext>
             </a:extLst>
           </p:cNvPr>
@@ -17416,7 +15820,7 @@
           <p:cNvPr id="21" name="body-3">
             <a:extLst xmlns:a="http://schemas.openxmlformats.org/drawingml/2006/main">
               <a:ext uri="{FF2B5EF4-FFF2-40B4-BE49-F238E27FC236}">
-                <a16:creationId xmlns:a16="http://schemas.microsoft.com/office/drawing/2014/main" id="{0B79B696-720B-4321-8BF8-ADE2CF4DD360}"/>
+                <a16:creationId xmlns:a16="http://schemas.microsoft.com/office/drawing/2014/main" id="{5EA04E69-7DCC-41AF-AE2E-5F8724841E5B}"/>
               </a:ext>
             </a:extLst>
           </p:cNvPr>
@@ -17503,7 +15907,7 @@
           <p:cNvPr id="22" name="claim">
             <a:extLst xmlns:a="http://schemas.openxmlformats.org/drawingml/2006/main">
               <a:ext uri="{FF2B5EF4-FFF2-40B4-BE49-F238E27FC236}">
-                <a16:creationId xmlns:a16="http://schemas.microsoft.com/office/drawing/2014/main" id="{2C5D30B7-A23A-4021-95CE-21101CB1D928}"/>
+                <a16:creationId xmlns:a16="http://schemas.microsoft.com/office/drawing/2014/main" id="{299741F3-55AB-4B27-9089-F671F82D7015}"/>
               </a:ext>
             </a:extLst>
           </p:cNvPr>
@@ -17560,7 +15964,7 @@
           <p:cNvPr id="23" name="source">
             <a:extLst xmlns:a="http://schemas.openxmlformats.org/drawingml/2006/main">
               <a:ext uri="{FF2B5EF4-FFF2-40B4-BE49-F238E27FC236}">
-                <a16:creationId xmlns:a16="http://schemas.microsoft.com/office/drawing/2014/main" id="{DA788E86-898D-45DB-A0E0-CF88822CB702}"/>
+                <a16:creationId xmlns:a16="http://schemas.microsoft.com/office/drawing/2014/main" id="{47EC305C-6BC1-4B82-9210-AFFFE1C62A53}"/>
               </a:ext>
             </a:extLst>
           </p:cNvPr>
@@ -17707,7 +16111,7 @@
           <p:cNvPr id="6" name="imrad-h0">
             <a:extLst xmlns:a="http://schemas.openxmlformats.org/drawingml/2006/main">
               <a:ext uri="{FF2B5EF4-FFF2-40B4-BE49-F238E27FC236}">
-                <a16:creationId xmlns:a16="http://schemas.microsoft.com/office/drawing/2014/main" id="{F4420005-27B9-4469-A4D3-C4C50334235C}"/>
+                <a16:creationId xmlns:a16="http://schemas.microsoft.com/office/drawing/2014/main" id="{E2640AC5-FBE3-458F-B380-41DD404B937C}"/>
               </a:ext>
             </a:extLst>
           </p:cNvPr>
@@ -17762,7 +16166,7 @@
           <p:cNvPr id="7" name="imrad-h1">
             <a:extLst xmlns:a="http://schemas.openxmlformats.org/drawingml/2006/main">
               <a:ext uri="{FF2B5EF4-FFF2-40B4-BE49-F238E27FC236}">
-                <a16:creationId xmlns:a16="http://schemas.microsoft.com/office/drawing/2014/main" id="{486F4E22-00BE-411C-A617-69F59B68A648}"/>
+                <a16:creationId xmlns:a16="http://schemas.microsoft.com/office/drawing/2014/main" id="{8CF00AFF-E92F-4D72-8340-E1115D4EDEC6}"/>
               </a:ext>
             </a:extLst>
           </p:cNvPr>
@@ -17817,7 +16221,7 @@
           <p:cNvPr id="8" name="imrad-h2">
             <a:extLst xmlns:a="http://schemas.openxmlformats.org/drawingml/2006/main">
               <a:ext uri="{FF2B5EF4-FFF2-40B4-BE49-F238E27FC236}">
-                <a16:creationId xmlns:a16="http://schemas.microsoft.com/office/drawing/2014/main" id="{81A947B3-46B0-45CF-8089-78B2FB9D722F}"/>
+                <a16:creationId xmlns:a16="http://schemas.microsoft.com/office/drawing/2014/main" id="{B6C5CFF6-9354-400E-9F51-DA9029FBCE18}"/>
               </a:ext>
             </a:extLst>
           </p:cNvPr>
@@ -17872,7 +16276,7 @@
           <p:cNvPr id="9" name="imrad-r0c0">
             <a:extLst xmlns:a="http://schemas.openxmlformats.org/drawingml/2006/main">
               <a:ext uri="{FF2B5EF4-FFF2-40B4-BE49-F238E27FC236}">
-                <a16:creationId xmlns:a16="http://schemas.microsoft.com/office/drawing/2014/main" id="{40BD8BC6-A803-424B-8C3C-C4BEB73AC901}"/>
+                <a16:creationId xmlns:a16="http://schemas.microsoft.com/office/drawing/2014/main" id="{BF68B48D-1443-4495-83FC-032BF20F3C6E}"/>
               </a:ext>
             </a:extLst>
           </p:cNvPr>
@@ -17933,7 +16337,7 @@
           <p:cNvPr id="10" name="imrad-r0c1">
             <a:extLst xmlns:a="http://schemas.openxmlformats.org/drawingml/2006/main">
               <a:ext uri="{FF2B5EF4-FFF2-40B4-BE49-F238E27FC236}">
-                <a16:creationId xmlns:a16="http://schemas.microsoft.com/office/drawing/2014/main" id="{E18A1660-4A04-4E89-8AC8-C128D7455344}"/>
+                <a16:creationId xmlns:a16="http://schemas.microsoft.com/office/drawing/2014/main" id="{C8FF562F-B8A3-479B-BA88-2A0C819F37DB}"/>
               </a:ext>
             </a:extLst>
           </p:cNvPr>
@@ -17994,7 +16398,7 @@
           <p:cNvPr id="11" name="imrad-r0c2">
             <a:extLst xmlns:a="http://schemas.openxmlformats.org/drawingml/2006/main">
               <a:ext uri="{FF2B5EF4-FFF2-40B4-BE49-F238E27FC236}">
-                <a16:creationId xmlns:a16="http://schemas.microsoft.com/office/drawing/2014/main" id="{B758561B-4627-466D-83AB-4CCD53F3E257}"/>
+                <a16:creationId xmlns:a16="http://schemas.microsoft.com/office/drawing/2014/main" id="{31C2B84A-C30F-41FB-A716-C58FF810BCF3}"/>
               </a:ext>
             </a:extLst>
           </p:cNvPr>
@@ -18055,7 +16459,7 @@
           <p:cNvPr id="12" name="imrad-r1c0">
             <a:extLst xmlns:a="http://schemas.openxmlformats.org/drawingml/2006/main">
               <a:ext uri="{FF2B5EF4-FFF2-40B4-BE49-F238E27FC236}">
-                <a16:creationId xmlns:a16="http://schemas.microsoft.com/office/drawing/2014/main" id="{BE565E9E-43D6-41D6-A0C7-3BCF2C1C2CCF}"/>
+                <a16:creationId xmlns:a16="http://schemas.microsoft.com/office/drawing/2014/main" id="{BF0B0388-DCD4-4B39-9DDF-3A06399EBBB7}"/>
               </a:ext>
             </a:extLst>
           </p:cNvPr>
@@ -18116,7 +16520,7 @@
           <p:cNvPr id="13" name="imrad-r1c1">
             <a:extLst xmlns:a="http://schemas.openxmlformats.org/drawingml/2006/main">
               <a:ext uri="{FF2B5EF4-FFF2-40B4-BE49-F238E27FC236}">
-                <a16:creationId xmlns:a16="http://schemas.microsoft.com/office/drawing/2014/main" id="{6AE28F21-2747-43F6-8594-DC070F038607}"/>
+                <a16:creationId xmlns:a16="http://schemas.microsoft.com/office/drawing/2014/main" id="{75923699-C608-4AB2-8D7C-69FD1FAFCB1D}"/>
               </a:ext>
             </a:extLst>
           </p:cNvPr>
@@ -18177,7 +16581,7 @@
           <p:cNvPr id="14" name="imrad-r1c2">
             <a:extLst xmlns:a="http://schemas.openxmlformats.org/drawingml/2006/main">
               <a:ext uri="{FF2B5EF4-FFF2-40B4-BE49-F238E27FC236}">
-                <a16:creationId xmlns:a16="http://schemas.microsoft.com/office/drawing/2014/main" id="{B02437F5-574B-41E9-A150-E03EEDE344E1}"/>
+                <a16:creationId xmlns:a16="http://schemas.microsoft.com/office/drawing/2014/main" id="{FCEFBC0E-3079-45C2-BC61-25758936387C}"/>
               </a:ext>
             </a:extLst>
           </p:cNvPr>
@@ -18238,7 +16642,7 @@
           <p:cNvPr id="15" name="imrad-r2c0">
             <a:extLst xmlns:a="http://schemas.openxmlformats.org/drawingml/2006/main">
               <a:ext uri="{FF2B5EF4-FFF2-40B4-BE49-F238E27FC236}">
-                <a16:creationId xmlns:a16="http://schemas.microsoft.com/office/drawing/2014/main" id="{F98DB8D0-DCC3-4808-843D-4A42B4F156AD}"/>
+                <a16:creationId xmlns:a16="http://schemas.microsoft.com/office/drawing/2014/main" id="{24069112-E271-4513-B204-C995C2591F29}"/>
               </a:ext>
             </a:extLst>
           </p:cNvPr>
@@ -18299,7 +16703,7 @@
           <p:cNvPr id="16" name="imrad-r2c1">
             <a:extLst xmlns:a="http://schemas.openxmlformats.org/drawingml/2006/main">
               <a:ext uri="{FF2B5EF4-FFF2-40B4-BE49-F238E27FC236}">
-                <a16:creationId xmlns:a16="http://schemas.microsoft.com/office/drawing/2014/main" id="{0D1BB0AA-A727-41AD-87F8-30A28CF17DBD}"/>
+                <a16:creationId xmlns:a16="http://schemas.microsoft.com/office/drawing/2014/main" id="{B23D1164-1844-4B0E-827A-4F9FABF88AFE}"/>
               </a:ext>
             </a:extLst>
           </p:cNvPr>
@@ -18360,7 +16764,7 @@
           <p:cNvPr id="17" name="imrad-r2c2">
             <a:extLst xmlns:a="http://schemas.openxmlformats.org/drawingml/2006/main">
               <a:ext uri="{FF2B5EF4-FFF2-40B4-BE49-F238E27FC236}">
-                <a16:creationId xmlns:a16="http://schemas.microsoft.com/office/drawing/2014/main" id="{9789FDA4-F8D3-4DB6-ABD9-648A401C7D5C}"/>
+                <a16:creationId xmlns:a16="http://schemas.microsoft.com/office/drawing/2014/main" id="{88B14605-02C8-4744-97B6-2ADE79B4DCEA}"/>
               </a:ext>
             </a:extLst>
           </p:cNvPr>
@@ -18421,7 +16825,7 @@
           <p:cNvPr id="18" name="imrad-r3c0">
             <a:extLst xmlns:a="http://schemas.openxmlformats.org/drawingml/2006/main">
               <a:ext uri="{FF2B5EF4-FFF2-40B4-BE49-F238E27FC236}">
-                <a16:creationId xmlns:a16="http://schemas.microsoft.com/office/drawing/2014/main" id="{5E3EEC2C-1409-488A-B3C6-67448F54DABE}"/>
+                <a16:creationId xmlns:a16="http://schemas.microsoft.com/office/drawing/2014/main" id="{D46C435D-12A9-4596-B736-ECF72D9708A5}"/>
               </a:ext>
             </a:extLst>
           </p:cNvPr>
@@ -18482,7 +16886,7 @@
           <p:cNvPr id="19" name="imrad-r3c1">
             <a:extLst xmlns:a="http://schemas.openxmlformats.org/drawingml/2006/main">
               <a:ext uri="{FF2B5EF4-FFF2-40B4-BE49-F238E27FC236}">
-                <a16:creationId xmlns:a16="http://schemas.microsoft.com/office/drawing/2014/main" id="{E1DF3219-5AA2-4199-A936-94CCF56AB67E}"/>
+                <a16:creationId xmlns:a16="http://schemas.microsoft.com/office/drawing/2014/main" id="{2D0D567B-171D-4FB3-B489-0B0CC47F755E}"/>
               </a:ext>
             </a:extLst>
           </p:cNvPr>
@@ -18543,7 +16947,7 @@
           <p:cNvPr id="20" name="imrad-r3c2">
             <a:extLst xmlns:a="http://schemas.openxmlformats.org/drawingml/2006/main">
               <a:ext uri="{FF2B5EF4-FFF2-40B4-BE49-F238E27FC236}">
-                <a16:creationId xmlns:a16="http://schemas.microsoft.com/office/drawing/2014/main" id="{0FD4FCC2-B7F8-43B1-B6A7-7BB4344C25FA}"/>
+                <a16:creationId xmlns:a16="http://schemas.microsoft.com/office/drawing/2014/main" id="{FDA69E1B-4234-45B2-AF17-11C319AE6DFC}"/>
               </a:ext>
             </a:extLst>
           </p:cNvPr>
@@ -18604,7 +17008,7 @@
           <p:cNvPr id="21" name="imrad-r4c0">
             <a:extLst xmlns:a="http://schemas.openxmlformats.org/drawingml/2006/main">
               <a:ext uri="{FF2B5EF4-FFF2-40B4-BE49-F238E27FC236}">
-                <a16:creationId xmlns:a16="http://schemas.microsoft.com/office/drawing/2014/main" id="{AD38A606-BFD3-4399-A949-FA86FA7BF59B}"/>
+                <a16:creationId xmlns:a16="http://schemas.microsoft.com/office/drawing/2014/main" id="{A07BC46D-52CC-4C56-9A05-437551B87BA9}"/>
               </a:ext>
             </a:extLst>
           </p:cNvPr>
@@ -18665,7 +17069,7 @@
           <p:cNvPr id="22" name="imrad-r4c1">
             <a:extLst xmlns:a="http://schemas.openxmlformats.org/drawingml/2006/main">
               <a:ext uri="{FF2B5EF4-FFF2-40B4-BE49-F238E27FC236}">
-                <a16:creationId xmlns:a16="http://schemas.microsoft.com/office/drawing/2014/main" id="{677FCE73-11A8-47FB-9F3E-0F719F4AE520}"/>
+                <a16:creationId xmlns:a16="http://schemas.microsoft.com/office/drawing/2014/main" id="{1DBF7FC7-DE5B-41F0-9937-8E9E3E798B41}"/>
               </a:ext>
             </a:extLst>
           </p:cNvPr>
@@ -18726,7 +17130,7 @@
           <p:cNvPr id="23" name="imrad-r4c2">
             <a:extLst xmlns:a="http://schemas.openxmlformats.org/drawingml/2006/main">
               <a:ext uri="{FF2B5EF4-FFF2-40B4-BE49-F238E27FC236}">
-                <a16:creationId xmlns:a16="http://schemas.microsoft.com/office/drawing/2014/main" id="{472F5DD0-7BEC-4238-9A61-F253631FADD5}"/>
+                <a16:creationId xmlns:a16="http://schemas.microsoft.com/office/drawing/2014/main" id="{7D55B9F2-079A-4B29-9518-EF7A6F44E8A9}"/>
               </a:ext>
             </a:extLst>
           </p:cNvPr>
@@ -18787,7 +17191,7 @@
           <p:cNvPr id="24" name="bottom">
             <a:extLst xmlns:a="http://schemas.openxmlformats.org/drawingml/2006/main">
               <a:ext uri="{FF2B5EF4-FFF2-40B4-BE49-F238E27FC236}">
-                <a16:creationId xmlns:a16="http://schemas.microsoft.com/office/drawing/2014/main" id="{4AFDC88E-CE2A-473F-90F1-4059F7E59403}"/>
+                <a16:creationId xmlns:a16="http://schemas.microsoft.com/office/drawing/2014/main" id="{ECDA5F62-9810-4DE5-9127-7A1F30BA7EC9}"/>
               </a:ext>
             </a:extLst>
           </p:cNvPr>
@@ -18938,7 +17342,7 @@
           <p:cNvPr id="6" name="rule">
             <a:extLst xmlns:a="http://schemas.openxmlformats.org/drawingml/2006/main">
               <a:ext uri="{FF2B5EF4-FFF2-40B4-BE49-F238E27FC236}">
-                <a16:creationId xmlns:a16="http://schemas.microsoft.com/office/drawing/2014/main" id="{26A49F32-2F60-4D12-88F6-84AE49175C96}"/>
+                <a16:creationId xmlns:a16="http://schemas.microsoft.com/office/drawing/2014/main" id="{9227234A-6D2C-4530-B912-12AA4C6A9B58}"/>
               </a:ext>
             </a:extLst>
           </p:cNvPr>
@@ -18995,7 +17399,7 @@
           <p:cNvPr id="7" name="bad-h">
             <a:extLst xmlns:a="http://schemas.openxmlformats.org/drawingml/2006/main">
               <a:ext uri="{FF2B5EF4-FFF2-40B4-BE49-F238E27FC236}">
-                <a16:creationId xmlns:a16="http://schemas.microsoft.com/office/drawing/2014/main" id="{6E3AB91E-1269-49EF-A7FB-DCF1B21F5375}"/>
+                <a16:creationId xmlns:a16="http://schemas.microsoft.com/office/drawing/2014/main" id="{770F0D94-E4A8-4CEE-B855-0116CBDF4300}"/>
               </a:ext>
             </a:extLst>
           </p:cNvPr>
@@ -19050,7 +17454,7 @@
           <p:cNvPr id="8" name="bad">
             <a:extLst xmlns:a="http://schemas.openxmlformats.org/drawingml/2006/main">
               <a:ext uri="{FF2B5EF4-FFF2-40B4-BE49-F238E27FC236}">
-                <a16:creationId xmlns:a16="http://schemas.microsoft.com/office/drawing/2014/main" id="{EF80D22A-D4F3-4090-AF7B-42DD1786F658}"/>
+                <a16:creationId xmlns:a16="http://schemas.microsoft.com/office/drawing/2014/main" id="{8C32D7A9-CA16-4D65-A7F1-D4CBFA2F4E9D}"/>
               </a:ext>
             </a:extLst>
           </p:cNvPr>
@@ -19137,7 +17541,7 @@
           <p:cNvPr id="9" name="good-h">
             <a:extLst xmlns:a="http://schemas.openxmlformats.org/drawingml/2006/main">
               <a:ext uri="{FF2B5EF4-FFF2-40B4-BE49-F238E27FC236}">
-                <a16:creationId xmlns:a16="http://schemas.microsoft.com/office/drawing/2014/main" id="{C9A44B9A-B80D-4A55-A15C-E07D3B0FFC3E}"/>
+                <a16:creationId xmlns:a16="http://schemas.microsoft.com/office/drawing/2014/main" id="{3A784906-1FE3-4AD6-BE1A-406E74F800CA}"/>
               </a:ext>
             </a:extLst>
           </p:cNvPr>
@@ -19192,7 +17596,7 @@
           <p:cNvPr id="10" name="good">
             <a:extLst xmlns:a="http://schemas.openxmlformats.org/drawingml/2006/main">
               <a:ext uri="{FF2B5EF4-FFF2-40B4-BE49-F238E27FC236}">
-                <a16:creationId xmlns:a16="http://schemas.microsoft.com/office/drawing/2014/main" id="{0A065C3B-4ECB-4529-A09E-9015871D973E}"/>
+                <a16:creationId xmlns:a16="http://schemas.microsoft.com/office/drawing/2014/main" id="{11E8DFDB-9D81-46AF-AC2A-EFE64CA24808}"/>
               </a:ext>
             </a:extLst>
           </p:cNvPr>
@@ -19279,7 +17683,7 @@
           <p:cNvPr id="11" name="flow">
             <a:extLst xmlns:a="http://schemas.openxmlformats.org/drawingml/2006/main">
               <a:ext uri="{FF2B5EF4-FFF2-40B4-BE49-F238E27FC236}">
-                <a16:creationId xmlns:a16="http://schemas.microsoft.com/office/drawing/2014/main" id="{46DFF56A-670C-41ED-958E-AC38DB2E8B44}"/>
+                <a16:creationId xmlns:a16="http://schemas.microsoft.com/office/drawing/2014/main" id="{146D84BD-5669-4E07-913B-7417CDC30DBC}"/>
               </a:ext>
             </a:extLst>
           </p:cNvPr>
@@ -19310,7 +17714,7 @@
           <p:cNvPr id="12" name="known">
             <a:extLst xmlns:a="http://schemas.openxmlformats.org/drawingml/2006/main">
               <a:ext uri="{FF2B5EF4-FFF2-40B4-BE49-F238E27FC236}">
-                <a16:creationId xmlns:a16="http://schemas.microsoft.com/office/drawing/2014/main" id="{064A2EE9-B089-4170-AD5F-D527903B9EAE}"/>
+                <a16:creationId xmlns:a16="http://schemas.microsoft.com/office/drawing/2014/main" id="{A927D17A-5E2B-4530-9C82-02E12173D5EE}"/>
               </a:ext>
             </a:extLst>
           </p:cNvPr>
@@ -19367,7 +17771,7 @@
           <p:cNvPr id="13" name="new">
             <a:extLst xmlns:a="http://schemas.openxmlformats.org/drawingml/2006/main">
               <a:ext uri="{FF2B5EF4-FFF2-40B4-BE49-F238E27FC236}">
-                <a16:creationId xmlns:a16="http://schemas.microsoft.com/office/drawing/2014/main" id="{AA8E99C3-D80C-406A-93C2-C509F21F9E07}"/>
+                <a16:creationId xmlns:a16="http://schemas.microsoft.com/office/drawing/2014/main" id="{7DE31E31-2F02-42A2-9AEE-FAE3DA212C71}"/>
               </a:ext>
             </a:extLst>
           </p:cNvPr>
@@ -19424,7 +17828,7 @@
           <p:cNvPr id="14" name="bottom">
             <a:extLst xmlns:a="http://schemas.openxmlformats.org/drawingml/2006/main">
               <a:ext uri="{FF2B5EF4-FFF2-40B4-BE49-F238E27FC236}">
-                <a16:creationId xmlns:a16="http://schemas.microsoft.com/office/drawing/2014/main" id="{D53BBF1B-816A-4C09-A054-361FCCA90E6B}"/>
+                <a16:creationId xmlns:a16="http://schemas.microsoft.com/office/drawing/2014/main" id="{A279DA8A-92C6-4244-B90C-DE1B4B937C40}"/>
               </a:ext>
             </a:extLst>
           </p:cNvPr>
@@ -19571,23 +17975,23 @@
           <p:cNvPr id="6" name="teaching-label">
             <a:extLst xmlns:a="http://schemas.openxmlformats.org/drawingml/2006/main">
               <a:ext uri="{FF2B5EF4-FFF2-40B4-BE49-F238E27FC236}">
-                <a16:creationId xmlns:a16="http://schemas.microsoft.com/office/drawing/2014/main" id="{2F6707E9-4C45-4FCA-8A2C-B036D2FD62BE}"/>
-              </a:ext>
-            </a:extLst>
-          </p:cNvPr>
-          <p:cNvSpPr>
-            <a:spLocks xmlns:a="http://schemas.openxmlformats.org/drawingml/2006/main" noGrp="1"/>
-          </p:cNvSpPr>
-          <p:nvPr/>
-        </p:nvSpPr>
-        <p:spPr>
-          <a:xfrm xmlns:a="http://schemas.openxmlformats.org/drawingml/2006/main">
-            <a:off x="8334375" y="838200"/>
-            <a:ext cx="3105150" cy="323850"/>
+                <a16:creationId xmlns:a16="http://schemas.microsoft.com/office/drawing/2014/main" id="{8AD4824C-2639-48BD-8F33-0D5DC7EFD2CC}"/>
+              </a:ext>
+            </a:extLst>
+          </p:cNvPr>
+          <p:cNvSpPr>
+            <a:spLocks xmlns:a="http://schemas.openxmlformats.org/drawingml/2006/main" noGrp="1"/>
+          </p:cNvSpPr>
+          <p:nvPr/>
+        </p:nvSpPr>
+        <p:spPr>
+          <a:xfrm xmlns:a="http://schemas.openxmlformats.org/drawingml/2006/main">
+            <a:off x="7524750" y="800100"/>
+            <a:ext cx="3943350" cy="419100"/>
           </a:xfrm>
           <a:prstGeom xmlns:a="http://schemas.openxmlformats.org/drawingml/2006/main" prst="roundRect">
             <a:avLst>
-              <a:gd name="adj" fmla="val 23529"/>
+              <a:gd name="adj" fmla="val 18182"/>
             </a:avLst>
           </a:prstGeom>
           <a:solidFill xmlns:a="http://schemas.openxmlformats.org/drawingml/2006/main">
@@ -19603,14 +18007,14 @@
           <a:lstStyle xmlns:a="http://schemas.openxmlformats.org/drawingml/2006/main"/>
           <a:p xmlns:a="http://schemas.openxmlformats.org/drawingml/2006/main">
             <a:pPr algn="ctr">
-              <a:defRPr sz="1350" b="1">
+              <a:defRPr sz="1800" b="1">
                 <a:solidFill>
                   <a:srgbClr val="C8161E"/>
                 </a:solidFill>
               </a:defRPr>
             </a:pPr>
             <a:r>
-              <a:rPr sz="1350" b="1">
+              <a:rPr sz="1800" b="1">
                 <a:solidFill>
                   <a:srgbClr val="C8161E"/>
                 </a:solidFill>
@@ -19618,7 +18022,7 @@
                 <a:ea typeface="Microsoft YaHei"/>
                 <a:cs typeface="Microsoft YaHei"/>
               </a:rPr>
-              <a:t>虚构教学示例 · 仅演示追踪动作</a:t>
+              <a:t>虚构教学示例｜非真实实验</a:t>
             </a:r>
           </a:p>
         </p:txBody>
@@ -19628,7 +18032,7 @@
           <p:cNvPr id="7" name="id-0">
             <a:extLst xmlns:a="http://schemas.openxmlformats.org/drawingml/2006/main">
               <a:ext uri="{FF2B5EF4-FFF2-40B4-BE49-F238E27FC236}">
-                <a16:creationId xmlns:a16="http://schemas.microsoft.com/office/drawing/2014/main" id="{2014C6F6-05A0-4707-9181-C92CF3B56259}"/>
+                <a16:creationId xmlns:a16="http://schemas.microsoft.com/office/drawing/2014/main" id="{E75F8F48-9F52-4A77-8F00-1F5F45207270}"/>
               </a:ext>
             </a:extLst>
           </p:cNvPr>
@@ -19685,7 +18089,7 @@
           <p:cNvPr id="8" name="state-0">
             <a:extLst xmlns:a="http://schemas.openxmlformats.org/drawingml/2006/main">
               <a:ext uri="{FF2B5EF4-FFF2-40B4-BE49-F238E27FC236}">
-                <a16:creationId xmlns:a16="http://schemas.microsoft.com/office/drawing/2014/main" id="{3CD0738A-7CB3-46DB-BD16-C67001DE9D7C}"/>
+                <a16:creationId xmlns:a16="http://schemas.microsoft.com/office/drawing/2014/main" id="{74BCA276-D009-4356-AA3D-D8063A7065B8}"/>
               </a:ext>
             </a:extLst>
           </p:cNvPr>
@@ -19742,7 +18146,7 @@
           <p:cNvPr id="9" name="text-0">
             <a:extLst xmlns:a="http://schemas.openxmlformats.org/drawingml/2006/main">
               <a:ext uri="{FF2B5EF4-FFF2-40B4-BE49-F238E27FC236}">
-                <a16:creationId xmlns:a16="http://schemas.microsoft.com/office/drawing/2014/main" id="{16559460-E021-45F7-B12A-7332839031B8}"/>
+                <a16:creationId xmlns:a16="http://schemas.microsoft.com/office/drawing/2014/main" id="{6B53D05A-0937-4634-A3D9-D10C40E18BB8}"/>
               </a:ext>
             </a:extLst>
           </p:cNvPr>
@@ -19805,7 +18209,7 @@
           <p:cNvPr id="10" name="id-1">
             <a:extLst xmlns:a="http://schemas.openxmlformats.org/drawingml/2006/main">
               <a:ext uri="{FF2B5EF4-FFF2-40B4-BE49-F238E27FC236}">
-                <a16:creationId xmlns:a16="http://schemas.microsoft.com/office/drawing/2014/main" id="{2DA310EA-3436-4B05-A02C-8865FF8642CD}"/>
+                <a16:creationId xmlns:a16="http://schemas.microsoft.com/office/drawing/2014/main" id="{38FBEDCA-5235-4897-AD47-235AB899A222}"/>
               </a:ext>
             </a:extLst>
           </p:cNvPr>
@@ -19862,7 +18266,7 @@
           <p:cNvPr id="11" name="state-1">
             <a:extLst xmlns:a="http://schemas.openxmlformats.org/drawingml/2006/main">
               <a:ext uri="{FF2B5EF4-FFF2-40B4-BE49-F238E27FC236}">
-                <a16:creationId xmlns:a16="http://schemas.microsoft.com/office/drawing/2014/main" id="{E754DCD4-C620-4371-8C0A-C15DEF5A0496}"/>
+                <a16:creationId xmlns:a16="http://schemas.microsoft.com/office/drawing/2014/main" id="{EE4E3507-371E-472A-8D2C-38AAE943CC05}"/>
               </a:ext>
             </a:extLst>
           </p:cNvPr>
@@ -19919,7 +18323,7 @@
           <p:cNvPr id="12" name="text-1">
             <a:extLst xmlns:a="http://schemas.openxmlformats.org/drawingml/2006/main">
               <a:ext uri="{FF2B5EF4-FFF2-40B4-BE49-F238E27FC236}">
-                <a16:creationId xmlns:a16="http://schemas.microsoft.com/office/drawing/2014/main" id="{CAB32103-FB8F-4C82-891A-601CB958AF4E}"/>
+                <a16:creationId xmlns:a16="http://schemas.microsoft.com/office/drawing/2014/main" id="{2EBA8F23-B9B2-4D11-9D05-C672A834193B}"/>
               </a:ext>
             </a:extLst>
           </p:cNvPr>
@@ -19982,7 +18386,7 @@
           <p:cNvPr id="13" name="id-2">
             <a:extLst xmlns:a="http://schemas.openxmlformats.org/drawingml/2006/main">
               <a:ext uri="{FF2B5EF4-FFF2-40B4-BE49-F238E27FC236}">
-                <a16:creationId xmlns:a16="http://schemas.microsoft.com/office/drawing/2014/main" id="{6A0C9F95-ABC1-435F-93E7-D6DC7762AC97}"/>
+                <a16:creationId xmlns:a16="http://schemas.microsoft.com/office/drawing/2014/main" id="{70105EE0-22FB-4DFF-B680-85BCD0954830}"/>
               </a:ext>
             </a:extLst>
           </p:cNvPr>
@@ -20039,7 +18443,7 @@
           <p:cNvPr id="14" name="state-2">
             <a:extLst xmlns:a="http://schemas.openxmlformats.org/drawingml/2006/main">
               <a:ext uri="{FF2B5EF4-FFF2-40B4-BE49-F238E27FC236}">
-                <a16:creationId xmlns:a16="http://schemas.microsoft.com/office/drawing/2014/main" id="{A6FBA901-3A0D-41F6-9B87-16F0D218C053}"/>
+                <a16:creationId xmlns:a16="http://schemas.microsoft.com/office/drawing/2014/main" id="{C20CEF64-13FF-4392-9444-D1962D9BA955}"/>
               </a:ext>
             </a:extLst>
           </p:cNvPr>
@@ -20096,7 +18500,7 @@
           <p:cNvPr id="15" name="text-2">
             <a:extLst xmlns:a="http://schemas.openxmlformats.org/drawingml/2006/main">
               <a:ext uri="{FF2B5EF4-FFF2-40B4-BE49-F238E27FC236}">
-                <a16:creationId xmlns:a16="http://schemas.microsoft.com/office/drawing/2014/main" id="{3C70B36B-D250-4DBD-8BF7-378324092BF7}"/>
+                <a16:creationId xmlns:a16="http://schemas.microsoft.com/office/drawing/2014/main" id="{1CBBB4AA-63F4-4AE3-8E18-ED1EC0B53FA5}"/>
               </a:ext>
             </a:extLst>
           </p:cNvPr>
@@ -20159,7 +18563,7 @@
           <p:cNvPr id="16" name="bottom">
             <a:extLst xmlns:a="http://schemas.openxmlformats.org/drawingml/2006/main">
               <a:ext uri="{FF2B5EF4-FFF2-40B4-BE49-F238E27FC236}">
-                <a16:creationId xmlns:a16="http://schemas.microsoft.com/office/drawing/2014/main" id="{8D89324B-F74F-4008-BE76-3CD7C459E9F3}"/>
+                <a16:creationId xmlns:a16="http://schemas.microsoft.com/office/drawing/2014/main" id="{5C860FDF-51A7-4A4C-8F5A-3F66E196CFEE}"/>
               </a:ext>
             </a:extLst>
           </p:cNvPr>
@@ -20306,23 +18710,23 @@
           <p:cNvPr id="6" name="teaching-label">
             <a:extLst xmlns:a="http://schemas.openxmlformats.org/drawingml/2006/main">
               <a:ext uri="{FF2B5EF4-FFF2-40B4-BE49-F238E27FC236}">
-                <a16:creationId xmlns:a16="http://schemas.microsoft.com/office/drawing/2014/main" id="{960D2525-7230-49D7-A8BA-BFA28A6920A0}"/>
-              </a:ext>
-            </a:extLst>
-          </p:cNvPr>
-          <p:cNvSpPr>
-            <a:spLocks xmlns:a="http://schemas.openxmlformats.org/drawingml/2006/main" noGrp="1"/>
-          </p:cNvSpPr>
-          <p:nvPr/>
-        </p:nvSpPr>
-        <p:spPr>
-          <a:xfrm xmlns:a="http://schemas.openxmlformats.org/drawingml/2006/main">
-            <a:off x="8334375" y="838200"/>
-            <a:ext cx="3105150" cy="323850"/>
+                <a16:creationId xmlns:a16="http://schemas.microsoft.com/office/drawing/2014/main" id="{0A7448C3-627B-48B0-9010-CF185CC54437}"/>
+              </a:ext>
+            </a:extLst>
+          </p:cNvPr>
+          <p:cNvSpPr>
+            <a:spLocks xmlns:a="http://schemas.openxmlformats.org/drawingml/2006/main" noGrp="1"/>
+          </p:cNvSpPr>
+          <p:nvPr/>
+        </p:nvSpPr>
+        <p:spPr>
+          <a:xfrm xmlns:a="http://schemas.openxmlformats.org/drawingml/2006/main">
+            <a:off x="7524750" y="800100"/>
+            <a:ext cx="3943350" cy="419100"/>
           </a:xfrm>
           <a:prstGeom xmlns:a="http://schemas.openxmlformats.org/drawingml/2006/main" prst="roundRect">
             <a:avLst>
-              <a:gd name="adj" fmla="val 23529"/>
+              <a:gd name="adj" fmla="val 18182"/>
             </a:avLst>
           </a:prstGeom>
           <a:solidFill xmlns:a="http://schemas.openxmlformats.org/drawingml/2006/main">
@@ -20338,14 +18742,14 @@
           <a:lstStyle xmlns:a="http://schemas.openxmlformats.org/drawingml/2006/main"/>
           <a:p xmlns:a="http://schemas.openxmlformats.org/drawingml/2006/main">
             <a:pPr algn="ctr">
-              <a:defRPr sz="1350" b="1">
+              <a:defRPr sz="1800" b="1">
                 <a:solidFill>
                   <a:srgbClr val="C8161E"/>
                 </a:solidFill>
               </a:defRPr>
             </a:pPr>
             <a:r>
-              <a:rPr sz="1350" b="1">
+              <a:rPr sz="1800" b="1">
                 <a:solidFill>
                   <a:srgbClr val="C8161E"/>
                 </a:solidFill>
@@ -20353,7 +18757,7 @@
                 <a:ea typeface="Microsoft YaHei"/>
                 <a:cs typeface="Microsoft YaHei"/>
               </a:rPr>
-              <a:t>虚构教学示例 · 仅演示追踪动作</a:t>
+              <a:t>虚构教学示例｜非真实实验</a:t>
             </a:r>
           </a:p>
         </p:txBody>
@@ -20363,7 +18767,7 @@
           <p:cNvPr id="7" name="trace-h0">
             <a:extLst xmlns:a="http://schemas.openxmlformats.org/drawingml/2006/main">
               <a:ext uri="{FF2B5EF4-FFF2-40B4-BE49-F238E27FC236}">
-                <a16:creationId xmlns:a16="http://schemas.microsoft.com/office/drawing/2014/main" id="{572A3038-CC43-437A-B8D4-6779322CDBEF}"/>
+                <a16:creationId xmlns:a16="http://schemas.microsoft.com/office/drawing/2014/main" id="{1C971EC0-CD2C-480B-8CEB-5BFC175F4B89}"/>
               </a:ext>
             </a:extLst>
           </p:cNvPr>
@@ -20418,7 +18822,7 @@
           <p:cNvPr id="8" name="trace-h1">
             <a:extLst xmlns:a="http://schemas.openxmlformats.org/drawingml/2006/main">
               <a:ext uri="{FF2B5EF4-FFF2-40B4-BE49-F238E27FC236}">
-                <a16:creationId xmlns:a16="http://schemas.microsoft.com/office/drawing/2014/main" id="{C3C46B04-2108-477B-96B3-5EE54F32B968}"/>
+                <a16:creationId xmlns:a16="http://schemas.microsoft.com/office/drawing/2014/main" id="{D8899945-B216-497F-973B-9E784A953C21}"/>
               </a:ext>
             </a:extLst>
           </p:cNvPr>
@@ -20473,7 +18877,7 @@
           <p:cNvPr id="9" name="trace-h2">
             <a:extLst xmlns:a="http://schemas.openxmlformats.org/drawingml/2006/main">
               <a:ext uri="{FF2B5EF4-FFF2-40B4-BE49-F238E27FC236}">
-                <a16:creationId xmlns:a16="http://schemas.microsoft.com/office/drawing/2014/main" id="{2D8479DE-3E37-4C0A-8920-30995C4F9C98}"/>
+                <a16:creationId xmlns:a16="http://schemas.microsoft.com/office/drawing/2014/main" id="{EBA70216-CDB0-4008-9713-A163C31041BD}"/>
               </a:ext>
             </a:extLst>
           </p:cNvPr>
@@ -20528,7 +18932,7 @@
           <p:cNvPr id="10" name="trace-h3">
             <a:extLst xmlns:a="http://schemas.openxmlformats.org/drawingml/2006/main">
               <a:ext uri="{FF2B5EF4-FFF2-40B4-BE49-F238E27FC236}">
-                <a16:creationId xmlns:a16="http://schemas.microsoft.com/office/drawing/2014/main" id="{6156C3CD-53F6-469F-930C-1D6EFD3DDC7D}"/>
+                <a16:creationId xmlns:a16="http://schemas.microsoft.com/office/drawing/2014/main" id="{A1738BA9-BC5D-43BC-818C-51CC70BBEA8A}"/>
               </a:ext>
             </a:extLst>
           </p:cNvPr>
@@ -20583,7 +18987,7 @@
           <p:cNvPr id="11" name="trace-h4">
             <a:extLst xmlns:a="http://schemas.openxmlformats.org/drawingml/2006/main">
               <a:ext uri="{FF2B5EF4-FFF2-40B4-BE49-F238E27FC236}">
-                <a16:creationId xmlns:a16="http://schemas.microsoft.com/office/drawing/2014/main" id="{BB0D9F12-5254-4EF1-898F-CE6F50BD44AF}"/>
+                <a16:creationId xmlns:a16="http://schemas.microsoft.com/office/drawing/2014/main" id="{CEB26613-E490-4D38-B93C-398BA5CF8050}"/>
               </a:ext>
             </a:extLst>
           </p:cNvPr>
@@ -20638,7 +19042,7 @@
           <p:cNvPr id="12" name="trace-h5">
             <a:extLst xmlns:a="http://schemas.openxmlformats.org/drawingml/2006/main">
               <a:ext uri="{FF2B5EF4-FFF2-40B4-BE49-F238E27FC236}">
-                <a16:creationId xmlns:a16="http://schemas.microsoft.com/office/drawing/2014/main" id="{808035CA-EF2F-46CE-90F2-A4BF868BC7A4}"/>
+                <a16:creationId xmlns:a16="http://schemas.microsoft.com/office/drawing/2014/main" id="{2C657B56-3E02-4919-A111-FBB619D62E57}"/>
               </a:ext>
             </a:extLst>
           </p:cNvPr>
@@ -20693,7 +19097,7 @@
           <p:cNvPr id="13" name="trace-r0c0">
             <a:extLst xmlns:a="http://schemas.openxmlformats.org/drawingml/2006/main">
               <a:ext uri="{FF2B5EF4-FFF2-40B4-BE49-F238E27FC236}">
-                <a16:creationId xmlns:a16="http://schemas.microsoft.com/office/drawing/2014/main" id="{934350C5-EA57-448F-A0D7-B0018AEE3366}"/>
+                <a16:creationId xmlns:a16="http://schemas.microsoft.com/office/drawing/2014/main" id="{AF21E651-FE7D-49F5-9B6D-C9FACF4CE27A}"/>
               </a:ext>
             </a:extLst>
           </p:cNvPr>
@@ -20754,7 +19158,7 @@
           <p:cNvPr id="14" name="trace-r0c1">
             <a:extLst xmlns:a="http://schemas.openxmlformats.org/drawingml/2006/main">
               <a:ext uri="{FF2B5EF4-FFF2-40B4-BE49-F238E27FC236}">
-                <a16:creationId xmlns:a16="http://schemas.microsoft.com/office/drawing/2014/main" id="{96F1CFE8-8536-4A50-BA4E-A9A58FB5008C}"/>
+                <a16:creationId xmlns:a16="http://schemas.microsoft.com/office/drawing/2014/main" id="{C9BD4281-C9E1-4B42-9A40-211DD534487D}"/>
               </a:ext>
             </a:extLst>
           </p:cNvPr>
@@ -20815,7 +19219,7 @@
           <p:cNvPr id="15" name="trace-r0c2">
             <a:extLst xmlns:a="http://schemas.openxmlformats.org/drawingml/2006/main">
               <a:ext uri="{FF2B5EF4-FFF2-40B4-BE49-F238E27FC236}">
-                <a16:creationId xmlns:a16="http://schemas.microsoft.com/office/drawing/2014/main" id="{FF1FD6BD-CF49-4E69-B9A6-7F0FD43CF921}"/>
+                <a16:creationId xmlns:a16="http://schemas.microsoft.com/office/drawing/2014/main" id="{0F2EB05C-A016-48C3-82A5-D4265A39A222}"/>
               </a:ext>
             </a:extLst>
           </p:cNvPr>
@@ -20876,7 +19280,7 @@
           <p:cNvPr id="16" name="trace-r0c3">
             <a:extLst xmlns:a="http://schemas.openxmlformats.org/drawingml/2006/main">
               <a:ext uri="{FF2B5EF4-FFF2-40B4-BE49-F238E27FC236}">
-                <a16:creationId xmlns:a16="http://schemas.microsoft.com/office/drawing/2014/main" id="{8FA6184B-10FC-4D60-AC9C-A49ADDB0E413}"/>
+                <a16:creationId xmlns:a16="http://schemas.microsoft.com/office/drawing/2014/main" id="{A8279339-493E-4DB5-825E-3FBB61B635BD}"/>
               </a:ext>
             </a:extLst>
           </p:cNvPr>
@@ -20937,7 +19341,7 @@
           <p:cNvPr id="17" name="trace-r0c4">
             <a:extLst xmlns:a="http://schemas.openxmlformats.org/drawingml/2006/main">
               <a:ext uri="{FF2B5EF4-FFF2-40B4-BE49-F238E27FC236}">
-                <a16:creationId xmlns:a16="http://schemas.microsoft.com/office/drawing/2014/main" id="{E60EDB89-3BBE-45E4-B594-049F22BCB202}"/>
+                <a16:creationId xmlns:a16="http://schemas.microsoft.com/office/drawing/2014/main" id="{706D17B8-5A68-4D7D-AD04-D0ADD933AA87}"/>
               </a:ext>
             </a:extLst>
           </p:cNvPr>
@@ -20998,7 +19402,7 @@
           <p:cNvPr id="18" name="trace-r0c5">
             <a:extLst xmlns:a="http://schemas.openxmlformats.org/drawingml/2006/main">
               <a:ext uri="{FF2B5EF4-FFF2-40B4-BE49-F238E27FC236}">
-                <a16:creationId xmlns:a16="http://schemas.microsoft.com/office/drawing/2014/main" id="{DB4B6E72-8863-4D56-9FD3-BBA89D81970F}"/>
+                <a16:creationId xmlns:a16="http://schemas.microsoft.com/office/drawing/2014/main" id="{F7FAA275-3FF9-4BB5-B929-81B2D52467B6}"/>
               </a:ext>
             </a:extLst>
           </p:cNvPr>
@@ -21059,7 +19463,7 @@
           <p:cNvPr id="19" name="trace-r1c0">
             <a:extLst xmlns:a="http://schemas.openxmlformats.org/drawingml/2006/main">
               <a:ext uri="{FF2B5EF4-FFF2-40B4-BE49-F238E27FC236}">
-                <a16:creationId xmlns:a16="http://schemas.microsoft.com/office/drawing/2014/main" id="{9ADA8241-24E0-4193-AC85-7F7F02EF8A6B}"/>
+                <a16:creationId xmlns:a16="http://schemas.microsoft.com/office/drawing/2014/main" id="{7BA11E71-13BC-4413-BF03-7E6D1E98DF9C}"/>
               </a:ext>
             </a:extLst>
           </p:cNvPr>
@@ -21120,7 +19524,7 @@
           <p:cNvPr id="20" name="trace-r1c1">
             <a:extLst xmlns:a="http://schemas.openxmlformats.org/drawingml/2006/main">
               <a:ext uri="{FF2B5EF4-FFF2-40B4-BE49-F238E27FC236}">
-                <a16:creationId xmlns:a16="http://schemas.microsoft.com/office/drawing/2014/main" id="{3BC3852A-B543-4229-A0D3-C641B4AB4812}"/>
+                <a16:creationId xmlns:a16="http://schemas.microsoft.com/office/drawing/2014/main" id="{26D13157-B4B3-41F4-9607-34A0F8D2E298}"/>
               </a:ext>
             </a:extLst>
           </p:cNvPr>
@@ -21181,7 +19585,7 @@
           <p:cNvPr id="21" name="trace-r1c2">
             <a:extLst xmlns:a="http://schemas.openxmlformats.org/drawingml/2006/main">
               <a:ext uri="{FF2B5EF4-FFF2-40B4-BE49-F238E27FC236}">
-                <a16:creationId xmlns:a16="http://schemas.microsoft.com/office/drawing/2014/main" id="{AABE067E-E973-40EB-B7BB-9F7F9A796BFD}"/>
+                <a16:creationId xmlns:a16="http://schemas.microsoft.com/office/drawing/2014/main" id="{5BEB6135-55DA-4C10-9873-4515169F64E3}"/>
               </a:ext>
             </a:extLst>
           </p:cNvPr>
@@ -21242,7 +19646,7 @@
           <p:cNvPr id="22" name="trace-r1c3">
             <a:extLst xmlns:a="http://schemas.openxmlformats.org/drawingml/2006/main">
               <a:ext uri="{FF2B5EF4-FFF2-40B4-BE49-F238E27FC236}">
-                <a16:creationId xmlns:a16="http://schemas.microsoft.com/office/drawing/2014/main" id="{6986FAA5-FFC7-4407-8767-60059EFA2806}"/>
+                <a16:creationId xmlns:a16="http://schemas.microsoft.com/office/drawing/2014/main" id="{DCCDDB10-FAD7-48CD-B666-ADBD3E73A893}"/>
               </a:ext>
             </a:extLst>
           </p:cNvPr>
@@ -21303,7 +19707,7 @@
           <p:cNvPr id="23" name="trace-r1c4">
             <a:extLst xmlns:a="http://schemas.openxmlformats.org/drawingml/2006/main">
               <a:ext uri="{FF2B5EF4-FFF2-40B4-BE49-F238E27FC236}">
-                <a16:creationId xmlns:a16="http://schemas.microsoft.com/office/drawing/2014/main" id="{C36C7615-8280-4DF5-9A54-AC790D8AFF76}"/>
+                <a16:creationId xmlns:a16="http://schemas.microsoft.com/office/drawing/2014/main" id="{AD69C550-39FB-48A2-BCAE-2E53F7953E4E}"/>
               </a:ext>
             </a:extLst>
           </p:cNvPr>
@@ -21364,7 +19768,7 @@
           <p:cNvPr id="24" name="trace-r1c5">
             <a:extLst xmlns:a="http://schemas.openxmlformats.org/drawingml/2006/main">
               <a:ext uri="{FF2B5EF4-FFF2-40B4-BE49-F238E27FC236}">
-                <a16:creationId xmlns:a16="http://schemas.microsoft.com/office/drawing/2014/main" id="{E5A30397-63FB-4049-A387-55BEDE544543}"/>
+                <a16:creationId xmlns:a16="http://schemas.microsoft.com/office/drawing/2014/main" id="{09EC6740-0D28-4000-9C3D-BFB7D009557E}"/>
               </a:ext>
             </a:extLst>
           </p:cNvPr>
@@ -21425,7 +19829,7 @@
           <p:cNvPr id="25" name="trace-r2c0">
             <a:extLst xmlns:a="http://schemas.openxmlformats.org/drawingml/2006/main">
               <a:ext uri="{FF2B5EF4-FFF2-40B4-BE49-F238E27FC236}">
-                <a16:creationId xmlns:a16="http://schemas.microsoft.com/office/drawing/2014/main" id="{F338FEBA-3373-4DAA-BFE5-26C89F273EF6}"/>
+                <a16:creationId xmlns:a16="http://schemas.microsoft.com/office/drawing/2014/main" id="{550F647B-B2E6-4D21-8D6C-4EEA116AB096}"/>
               </a:ext>
             </a:extLst>
           </p:cNvPr>
@@ -21486,7 +19890,7 @@
           <p:cNvPr id="26" name="trace-r2c1">
             <a:extLst xmlns:a="http://schemas.openxmlformats.org/drawingml/2006/main">
               <a:ext uri="{FF2B5EF4-FFF2-40B4-BE49-F238E27FC236}">
-                <a16:creationId xmlns:a16="http://schemas.microsoft.com/office/drawing/2014/main" id="{6A7CF47C-CA5C-4663-B85C-9F3047D76659}"/>
+                <a16:creationId xmlns:a16="http://schemas.microsoft.com/office/drawing/2014/main" id="{59300615-12FF-49F9-B50F-42260F491E02}"/>
               </a:ext>
             </a:extLst>
           </p:cNvPr>
@@ -21547,7 +19951,7 @@
           <p:cNvPr id="27" name="trace-r2c2">
             <a:extLst xmlns:a="http://schemas.openxmlformats.org/drawingml/2006/main">
               <a:ext uri="{FF2B5EF4-FFF2-40B4-BE49-F238E27FC236}">
-                <a16:creationId xmlns:a16="http://schemas.microsoft.com/office/drawing/2014/main" id="{9A1B0DA3-C2E9-4B00-94DA-C03B1EC02E7E}"/>
+                <a16:creationId xmlns:a16="http://schemas.microsoft.com/office/drawing/2014/main" id="{F226DF35-E862-4859-9663-34A868D3360E}"/>
               </a:ext>
             </a:extLst>
           </p:cNvPr>
@@ -21608,7 +20012,7 @@
           <p:cNvPr id="28" name="trace-r2c3">
             <a:extLst xmlns:a="http://schemas.openxmlformats.org/drawingml/2006/main">
               <a:ext uri="{FF2B5EF4-FFF2-40B4-BE49-F238E27FC236}">
-                <a16:creationId xmlns:a16="http://schemas.microsoft.com/office/drawing/2014/main" id="{DBE2872B-8C34-4FB8-AE6E-969F12392677}"/>
+                <a16:creationId xmlns:a16="http://schemas.microsoft.com/office/drawing/2014/main" id="{976B9826-C3B1-4708-BC87-318DFE538E29}"/>
               </a:ext>
             </a:extLst>
           </p:cNvPr>
@@ -21669,7 +20073,7 @@
           <p:cNvPr id="29" name="trace-r2c4">
             <a:extLst xmlns:a="http://schemas.openxmlformats.org/drawingml/2006/main">
               <a:ext uri="{FF2B5EF4-FFF2-40B4-BE49-F238E27FC236}">
-                <a16:creationId xmlns:a16="http://schemas.microsoft.com/office/drawing/2014/main" id="{1844406D-48D0-45F6-B0EA-51979F121276}"/>
+                <a16:creationId xmlns:a16="http://schemas.microsoft.com/office/drawing/2014/main" id="{5FA72D1F-815D-4FB3-A3FD-1CD3FC7F878F}"/>
               </a:ext>
             </a:extLst>
           </p:cNvPr>
@@ -21730,7 +20134,7 @@
           <p:cNvPr id="30" name="trace-r2c5">
             <a:extLst xmlns:a="http://schemas.openxmlformats.org/drawingml/2006/main">
               <a:ext uri="{FF2B5EF4-FFF2-40B4-BE49-F238E27FC236}">
-                <a16:creationId xmlns:a16="http://schemas.microsoft.com/office/drawing/2014/main" id="{D3D16E22-F7AD-444A-A65E-DF7856D09302}"/>
+                <a16:creationId xmlns:a16="http://schemas.microsoft.com/office/drawing/2014/main" id="{9B4CC901-D999-47B0-A21C-8DAB55002783}"/>
               </a:ext>
             </a:extLst>
           </p:cNvPr>
@@ -21791,7 +20195,7 @@
           <p:cNvPr id="31" name="rule">
             <a:extLst xmlns:a="http://schemas.openxmlformats.org/drawingml/2006/main">
               <a:ext uri="{FF2B5EF4-FFF2-40B4-BE49-F238E27FC236}">
-                <a16:creationId xmlns:a16="http://schemas.microsoft.com/office/drawing/2014/main" id="{D2A70418-3DF1-43A6-AA8C-A51FAA1DA952}"/>
+                <a16:creationId xmlns:a16="http://schemas.microsoft.com/office/drawing/2014/main" id="{39D4112E-E0F3-40E8-8537-18E17946771A}"/>
               </a:ext>
             </a:extLst>
           </p:cNvPr>
@@ -21939,10 +20343,67 @@
       </p:sp>
       <p:sp>
         <p:nvSpPr>
-          <p:cNvPr id="6" name="redline">
-            <a:extLst xmlns:a="http://schemas.openxmlformats.org/drawingml/2006/main">
-              <a:ext uri="{FF2B5EF4-FFF2-40B4-BE49-F238E27FC236}">
-                <a16:creationId xmlns:a16="http://schemas.microsoft.com/office/drawing/2014/main" id="{1E0ACB20-530D-4412-86BC-0B0EB52A3DE7}"/>
+          <p:cNvPr id="6" name="p09-teaching-label">
+            <a:extLst xmlns:a="http://schemas.openxmlformats.org/drawingml/2006/main">
+              <a:ext uri="{FF2B5EF4-FFF2-40B4-BE49-F238E27FC236}">
+                <a16:creationId xmlns:a16="http://schemas.microsoft.com/office/drawing/2014/main" id="{0A88CAEB-826E-49C2-9EBE-C8734177B77B}"/>
+              </a:ext>
+            </a:extLst>
+          </p:cNvPr>
+          <p:cNvSpPr>
+            <a:spLocks xmlns:a="http://schemas.openxmlformats.org/drawingml/2006/main" noGrp="1"/>
+          </p:cNvSpPr>
+          <p:nvPr/>
+        </p:nvSpPr>
+        <p:spPr>
+          <a:xfrm xmlns:a="http://schemas.openxmlformats.org/drawingml/2006/main">
+            <a:off x="7524750" y="800100"/>
+            <a:ext cx="3943350" cy="419100"/>
+          </a:xfrm>
+          <a:prstGeom xmlns:a="http://schemas.openxmlformats.org/drawingml/2006/main" prst="roundRect">
+            <a:avLst>
+              <a:gd name="adj" fmla="val 18182"/>
+            </a:avLst>
+          </a:prstGeom>
+          <a:solidFill xmlns:a="http://schemas.openxmlformats.org/drawingml/2006/main">
+            <a:srgbClr val="F8E9EA"/>
+          </a:solidFill>
+          <a:ln xmlns:a="http://schemas.openxmlformats.org/drawingml/2006/main" w="0">
+            <a:noFill/>
+            <a:prstDash val="solid"/>
+          </a:ln>
+        </p:spPr>
+        <p:txBody>
+          <a:bodyPr xmlns:a="http://schemas.openxmlformats.org/drawingml/2006/main" lIns="76200" tIns="38100" rIns="76200" bIns="38100" anchor="ctr"/>
+          <a:lstStyle xmlns:a="http://schemas.openxmlformats.org/drawingml/2006/main"/>
+          <a:p xmlns:a="http://schemas.openxmlformats.org/drawingml/2006/main">
+            <a:pPr algn="ctr">
+              <a:defRPr sz="1800" b="1">
+                <a:solidFill>
+                  <a:srgbClr val="C8161E"/>
+                </a:solidFill>
+              </a:defRPr>
+            </a:pPr>
+            <a:r>
+              <a:rPr sz="1800" b="1">
+                <a:solidFill>
+                  <a:srgbClr val="C8161E"/>
+                </a:solidFill>
+                <a:latin typeface="Microsoft YaHei"/>
+                <a:ea typeface="Microsoft YaHei"/>
+                <a:cs typeface="Microsoft YaHei"/>
+              </a:rPr>
+              <a:t>虚构教学示例｜非真实实验</a:t>
+            </a:r>
+          </a:p>
+        </p:txBody>
+      </p:sp>
+      <p:sp>
+        <p:nvSpPr>
+          <p:cNvPr id="7" name="redline">
+            <a:extLst xmlns:a="http://schemas.openxmlformats.org/drawingml/2006/main">
+              <a:ext uri="{FF2B5EF4-FFF2-40B4-BE49-F238E27FC236}">
+                <a16:creationId xmlns:a16="http://schemas.microsoft.com/office/drawing/2014/main" id="{93DB1BA3-8EFB-4368-8D5E-66B3DDD810DC}"/>
               </a:ext>
             </a:extLst>
           </p:cNvPr>
@@ -21996,10 +20457,10 @@
       </p:sp>
       <p:sp>
         <p:nvSpPr>
-          <p:cNvPr id="7" name="i-0">
-            <a:extLst xmlns:a="http://schemas.openxmlformats.org/drawingml/2006/main">
-              <a:ext uri="{FF2B5EF4-FFF2-40B4-BE49-F238E27FC236}">
-                <a16:creationId xmlns:a16="http://schemas.microsoft.com/office/drawing/2014/main" id="{E7128B17-6515-40DD-9AD7-86E9889C1C82}"/>
+          <p:cNvPr id="8" name="i-0">
+            <a:extLst xmlns:a="http://schemas.openxmlformats.org/drawingml/2006/main">
+              <a:ext uri="{FF2B5EF4-FFF2-40B4-BE49-F238E27FC236}">
+                <a16:creationId xmlns:a16="http://schemas.microsoft.com/office/drawing/2014/main" id="{DCF06595-BF00-4C25-B1BE-C10952590692}"/>
               </a:ext>
             </a:extLst>
           </p:cNvPr>
@@ -22053,10 +20514,10 @@
       </p:sp>
       <p:sp>
         <p:nvSpPr>
-          <p:cNvPr id="8" name="h-0">
-            <a:extLst xmlns:a="http://schemas.openxmlformats.org/drawingml/2006/main">
-              <a:ext uri="{FF2B5EF4-FFF2-40B4-BE49-F238E27FC236}">
-                <a16:creationId xmlns:a16="http://schemas.microsoft.com/office/drawing/2014/main" id="{ED8BE071-08D1-425F-BC19-91A8CF62A9B5}"/>
+          <p:cNvPr id="9" name="h-0">
+            <a:extLst xmlns:a="http://schemas.openxmlformats.org/drawingml/2006/main">
+              <a:ext uri="{FF2B5EF4-FFF2-40B4-BE49-F238E27FC236}">
+                <a16:creationId xmlns:a16="http://schemas.microsoft.com/office/drawing/2014/main" id="{3096EF05-EB11-4374-822D-BC5B848F03ED}"/>
               </a:ext>
             </a:extLst>
           </p:cNvPr>
@@ -22108,10 +20569,10 @@
       </p:sp>
       <p:sp>
         <p:nvSpPr>
-          <p:cNvPr id="9" name="d-0">
-            <a:extLst xmlns:a="http://schemas.openxmlformats.org/drawingml/2006/main">
-              <a:ext uri="{FF2B5EF4-FFF2-40B4-BE49-F238E27FC236}">
-                <a16:creationId xmlns:a16="http://schemas.microsoft.com/office/drawing/2014/main" id="{975A74B6-CD8A-4ADE-B840-1595485E27B2}"/>
+          <p:cNvPr id="10" name="d-0">
+            <a:extLst xmlns:a="http://schemas.openxmlformats.org/drawingml/2006/main">
+              <a:ext uri="{FF2B5EF4-FFF2-40B4-BE49-F238E27FC236}">
+                <a16:creationId xmlns:a16="http://schemas.microsoft.com/office/drawing/2014/main" id="{C9355D2D-B792-4BAF-B180-9675056B93D5}"/>
               </a:ext>
             </a:extLst>
           </p:cNvPr>
@@ -22167,10 +20628,10 @@
       </p:sp>
       <p:sp>
         <p:nvSpPr>
-          <p:cNvPr id="10" name="i-1">
-            <a:extLst xmlns:a="http://schemas.openxmlformats.org/drawingml/2006/main">
-              <a:ext uri="{FF2B5EF4-FFF2-40B4-BE49-F238E27FC236}">
-                <a16:creationId xmlns:a16="http://schemas.microsoft.com/office/drawing/2014/main" id="{11D47490-C7EE-424C-BD61-709967805F6D}"/>
+          <p:cNvPr id="11" name="i-1">
+            <a:extLst xmlns:a="http://schemas.openxmlformats.org/drawingml/2006/main">
+              <a:ext uri="{FF2B5EF4-FFF2-40B4-BE49-F238E27FC236}">
+                <a16:creationId xmlns:a16="http://schemas.microsoft.com/office/drawing/2014/main" id="{2F1AF589-8DCB-445E-8E1B-EC482568930C}"/>
               </a:ext>
             </a:extLst>
           </p:cNvPr>
@@ -22224,10 +20685,10 @@
       </p:sp>
       <p:sp>
         <p:nvSpPr>
-          <p:cNvPr id="11" name="h-1">
-            <a:extLst xmlns:a="http://schemas.openxmlformats.org/drawingml/2006/main">
-              <a:ext uri="{FF2B5EF4-FFF2-40B4-BE49-F238E27FC236}">
-                <a16:creationId xmlns:a16="http://schemas.microsoft.com/office/drawing/2014/main" id="{924BC02B-5910-4D2F-A5A2-FE862111646F}"/>
+          <p:cNvPr id="12" name="h-1">
+            <a:extLst xmlns:a="http://schemas.openxmlformats.org/drawingml/2006/main">
+              <a:ext uri="{FF2B5EF4-FFF2-40B4-BE49-F238E27FC236}">
+                <a16:creationId xmlns:a16="http://schemas.microsoft.com/office/drawing/2014/main" id="{9D84F686-92C4-4D9D-9D57-93C3311AE153}"/>
               </a:ext>
             </a:extLst>
           </p:cNvPr>
@@ -22279,10 +20740,10 @@
       </p:sp>
       <p:sp>
         <p:nvSpPr>
-          <p:cNvPr id="12" name="d-1">
-            <a:extLst xmlns:a="http://schemas.openxmlformats.org/drawingml/2006/main">
-              <a:ext uri="{FF2B5EF4-FFF2-40B4-BE49-F238E27FC236}">
-                <a16:creationId xmlns:a16="http://schemas.microsoft.com/office/drawing/2014/main" id="{BC9B65BD-E388-4936-9A5C-62D6713EA59A}"/>
+          <p:cNvPr id="13" name="d-1">
+            <a:extLst xmlns:a="http://schemas.openxmlformats.org/drawingml/2006/main">
+              <a:ext uri="{FF2B5EF4-FFF2-40B4-BE49-F238E27FC236}">
+                <a16:creationId xmlns:a16="http://schemas.microsoft.com/office/drawing/2014/main" id="{154C8CBB-1DB3-47FC-89C7-B9A50606B45B}"/>
               </a:ext>
             </a:extLst>
           </p:cNvPr>
@@ -22338,10 +20799,10 @@
       </p:sp>
       <p:sp>
         <p:nvSpPr>
-          <p:cNvPr id="13" name="i-2">
-            <a:extLst xmlns:a="http://schemas.openxmlformats.org/drawingml/2006/main">
-              <a:ext uri="{FF2B5EF4-FFF2-40B4-BE49-F238E27FC236}">
-                <a16:creationId xmlns:a16="http://schemas.microsoft.com/office/drawing/2014/main" id="{B7E92DEE-3F84-481D-AEC4-70554C823800}"/>
+          <p:cNvPr id="14" name="i-2">
+            <a:extLst xmlns:a="http://schemas.openxmlformats.org/drawingml/2006/main">
+              <a:ext uri="{FF2B5EF4-FFF2-40B4-BE49-F238E27FC236}">
+                <a16:creationId xmlns:a16="http://schemas.microsoft.com/office/drawing/2014/main" id="{1FA3B4D3-FEDB-473E-A1BB-8EBBB181BD09}"/>
               </a:ext>
             </a:extLst>
           </p:cNvPr>
@@ -22395,10 +20856,10 @@
       </p:sp>
       <p:sp>
         <p:nvSpPr>
-          <p:cNvPr id="14" name="h-2">
-            <a:extLst xmlns:a="http://schemas.openxmlformats.org/drawingml/2006/main">
-              <a:ext uri="{FF2B5EF4-FFF2-40B4-BE49-F238E27FC236}">
-                <a16:creationId xmlns:a16="http://schemas.microsoft.com/office/drawing/2014/main" id="{265F2B17-7A37-4A84-9C60-410874F84BED}"/>
+          <p:cNvPr id="15" name="h-2">
+            <a:extLst xmlns:a="http://schemas.openxmlformats.org/drawingml/2006/main">
+              <a:ext uri="{FF2B5EF4-FFF2-40B4-BE49-F238E27FC236}">
+                <a16:creationId xmlns:a16="http://schemas.microsoft.com/office/drawing/2014/main" id="{F45B8A59-0EC3-49DD-85CE-70CAAC0C274A}"/>
               </a:ext>
             </a:extLst>
           </p:cNvPr>
@@ -22450,10 +20911,10 @@
       </p:sp>
       <p:sp>
         <p:nvSpPr>
-          <p:cNvPr id="15" name="d-2">
-            <a:extLst xmlns:a="http://schemas.openxmlformats.org/drawingml/2006/main">
-              <a:ext uri="{FF2B5EF4-FFF2-40B4-BE49-F238E27FC236}">
-                <a16:creationId xmlns:a16="http://schemas.microsoft.com/office/drawing/2014/main" id="{2F4E2FEC-3519-4827-944D-30F667D3E1C6}"/>
+          <p:cNvPr id="16" name="d-2">
+            <a:extLst xmlns:a="http://schemas.openxmlformats.org/drawingml/2006/main">
+              <a:ext uri="{FF2B5EF4-FFF2-40B4-BE49-F238E27FC236}">
+                <a16:creationId xmlns:a16="http://schemas.microsoft.com/office/drawing/2014/main" id="{24D54B46-5BE4-4797-A077-EB2ABCA1C47F}"/>
               </a:ext>
             </a:extLst>
           </p:cNvPr>
@@ -22509,10 +20970,10 @@
       </p:sp>
       <p:sp>
         <p:nvSpPr>
-          <p:cNvPr id="16" name="i-3">
-            <a:extLst xmlns:a="http://schemas.openxmlformats.org/drawingml/2006/main">
-              <a:ext uri="{FF2B5EF4-FFF2-40B4-BE49-F238E27FC236}">
-                <a16:creationId xmlns:a16="http://schemas.microsoft.com/office/drawing/2014/main" id="{7417B01A-B0DC-418D-B8DF-5576309C9CAE}"/>
+          <p:cNvPr id="17" name="i-3">
+            <a:extLst xmlns:a="http://schemas.openxmlformats.org/drawingml/2006/main">
+              <a:ext uri="{FF2B5EF4-FFF2-40B4-BE49-F238E27FC236}">
+                <a16:creationId xmlns:a16="http://schemas.microsoft.com/office/drawing/2014/main" id="{59C2FF54-32D1-4572-8F37-4466EC3BACBE}"/>
               </a:ext>
             </a:extLst>
           </p:cNvPr>
@@ -22566,10 +21027,10 @@
       </p:sp>
       <p:sp>
         <p:nvSpPr>
-          <p:cNvPr id="17" name="h-3">
-            <a:extLst xmlns:a="http://schemas.openxmlformats.org/drawingml/2006/main">
-              <a:ext uri="{FF2B5EF4-FFF2-40B4-BE49-F238E27FC236}">
-                <a16:creationId xmlns:a16="http://schemas.microsoft.com/office/drawing/2014/main" id="{04B783A6-38FB-4662-BF01-67FCD1BC86CC}"/>
+          <p:cNvPr id="18" name="h-3">
+            <a:extLst xmlns:a="http://schemas.openxmlformats.org/drawingml/2006/main">
+              <a:ext uri="{FF2B5EF4-FFF2-40B4-BE49-F238E27FC236}">
+                <a16:creationId xmlns:a16="http://schemas.microsoft.com/office/drawing/2014/main" id="{EC19A0FF-9474-4B5D-8437-C7A7DE431116}"/>
               </a:ext>
             </a:extLst>
           </p:cNvPr>
@@ -22621,10 +21082,10 @@
       </p:sp>
       <p:sp>
         <p:nvSpPr>
-          <p:cNvPr id="18" name="d-3">
-            <a:extLst xmlns:a="http://schemas.openxmlformats.org/drawingml/2006/main">
-              <a:ext uri="{FF2B5EF4-FFF2-40B4-BE49-F238E27FC236}">
-                <a16:creationId xmlns:a16="http://schemas.microsoft.com/office/drawing/2014/main" id="{F4967F41-3BCC-4C9A-8F4C-F17433A2307D}"/>
+          <p:cNvPr id="19" name="d-3">
+            <a:extLst xmlns:a="http://schemas.openxmlformats.org/drawingml/2006/main">
+              <a:ext uri="{FF2B5EF4-FFF2-40B4-BE49-F238E27FC236}">
+                <a16:creationId xmlns:a16="http://schemas.microsoft.com/office/drawing/2014/main" id="{9884DAA7-9233-4DDC-8885-5384023962F9}"/>
               </a:ext>
             </a:extLst>
           </p:cNvPr>
@@ -22680,10 +21141,10 @@
       </p:sp>
       <p:sp>
         <p:nvSpPr>
-          <p:cNvPr id="19" name="case-h">
-            <a:extLst xmlns:a="http://schemas.openxmlformats.org/drawingml/2006/main">
-              <a:ext uri="{FF2B5EF4-FFF2-40B4-BE49-F238E27FC236}">
-                <a16:creationId xmlns:a16="http://schemas.microsoft.com/office/drawing/2014/main" id="{FD944335-B9B2-45B4-ABCE-5BCD653F3790}"/>
+          <p:cNvPr id="20" name="case-h">
+            <a:extLst xmlns:a="http://schemas.openxmlformats.org/drawingml/2006/main">
+              <a:ext uri="{FF2B5EF4-FFF2-40B4-BE49-F238E27FC236}">
+                <a16:creationId xmlns:a16="http://schemas.microsoft.com/office/drawing/2014/main" id="{EBA4AF53-59FA-459C-888E-B90BC7DA3D71}"/>
               </a:ext>
             </a:extLst>
           </p:cNvPr>
@@ -22735,10 +21196,10 @@
       </p:sp>
       <p:sp>
         <p:nvSpPr>
-          <p:cNvPr id="20" name="case">
-            <a:extLst xmlns:a="http://schemas.openxmlformats.org/drawingml/2006/main">
-              <a:ext uri="{FF2B5EF4-FFF2-40B4-BE49-F238E27FC236}">
-                <a16:creationId xmlns:a16="http://schemas.microsoft.com/office/drawing/2014/main" id="{4AD6070F-9E70-4BD5-985A-09DD842E28A2}"/>
+          <p:cNvPr id="21" name="case">
+            <a:extLst xmlns:a="http://schemas.openxmlformats.org/drawingml/2006/main">
+              <a:ext uri="{FF2B5EF4-FFF2-40B4-BE49-F238E27FC236}">
+                <a16:creationId xmlns:a16="http://schemas.microsoft.com/office/drawing/2014/main" id="{2ECAD5A1-52F4-40BC-8C18-0ABE532CF1AA}"/>
               </a:ext>
             </a:extLst>
           </p:cNvPr>
@@ -22851,22 +21312,22 @@
       </p:sp>
       <p:sp>
         <p:nvSpPr>
-          <p:cNvPr id="21" name="bottom">
-            <a:extLst xmlns:a="http://schemas.openxmlformats.org/drawingml/2006/main">
-              <a:ext uri="{FF2B5EF4-FFF2-40B4-BE49-F238E27FC236}">
-                <a16:creationId xmlns:a16="http://schemas.microsoft.com/office/drawing/2014/main" id="{6D22B4B4-1FDB-4992-BD3F-CC878574A463}"/>
-              </a:ext>
-            </a:extLst>
-          </p:cNvPr>
-          <p:cNvSpPr>
-            <a:spLocks xmlns:a="http://schemas.openxmlformats.org/drawingml/2006/main" noGrp="1"/>
-          </p:cNvSpPr>
-          <p:nvPr/>
-        </p:nvSpPr>
-        <p:spPr>
-          <a:xfrm xmlns:a="http://schemas.openxmlformats.org/drawingml/2006/main">
-            <a:off x="7486650" y="4495800"/>
-            <a:ext cx="4076700" cy="514350"/>
+          <p:cNvPr id="22" name="bottom">
+            <a:extLst xmlns:a="http://schemas.openxmlformats.org/drawingml/2006/main">
+              <a:ext uri="{FF2B5EF4-FFF2-40B4-BE49-F238E27FC236}">
+                <a16:creationId xmlns:a16="http://schemas.microsoft.com/office/drawing/2014/main" id="{89B59F04-AEE9-4047-889A-3ACB9898BAE3}"/>
+              </a:ext>
+            </a:extLst>
+          </p:cNvPr>
+          <p:cNvSpPr>
+            <a:spLocks xmlns:a="http://schemas.openxmlformats.org/drawingml/2006/main" noGrp="1"/>
+          </p:cNvSpPr>
+          <p:nvPr/>
+        </p:nvSpPr>
+        <p:spPr>
+          <a:xfrm xmlns:a="http://schemas.openxmlformats.org/drawingml/2006/main">
+            <a:off x="7391400" y="4495800"/>
+            <a:ext cx="4286250" cy="514350"/>
           </a:xfrm>
           <a:prstGeom xmlns:a="http://schemas.openxmlformats.org/drawingml/2006/main" prst="rect">
             <a:avLst/>
@@ -22882,14 +21343,14 @@
           <a:lstStyle xmlns:a="http://schemas.openxmlformats.org/drawingml/2006/main"/>
           <a:p xmlns:a="http://schemas.openxmlformats.org/drawingml/2006/main">
             <a:pPr algn="ctr">
-              <a:defRPr sz="1725" b="1">
+              <a:defRPr sz="1575" b="1">
                 <a:solidFill>
                   <a:srgbClr val="C8161E"/>
                 </a:solidFill>
               </a:defRPr>
             </a:pPr>
             <a:r>
-              <a:rPr sz="1725" b="1">
+              <a:rPr sz="1575" b="1">
                 <a:solidFill>
                   <a:srgbClr val="C8161E"/>
                 </a:solidFill>
@@ -22898,6 +21359,63 @@
                 <a:cs typeface="Microsoft YaHei"/>
               </a:rPr>
               <a:t>隐藏失败会同时破坏可信度与边界判断。</a:t>
+            </a:r>
+          </a:p>
+        </p:txBody>
+      </p:sp>
+      <p:sp>
+        <p:nvSpPr>
+          <p:cNvPr id="23" name="p09-teaching-label-front">
+            <a:extLst xmlns:a="http://schemas.openxmlformats.org/drawingml/2006/main">
+              <a:ext uri="{FF2B5EF4-FFF2-40B4-BE49-F238E27FC236}">
+                <a16:creationId xmlns:a16="http://schemas.microsoft.com/office/drawing/2014/main" id="{C8CBDEDB-87FC-4E9E-A1E4-65CDA1102536}"/>
+              </a:ext>
+            </a:extLst>
+          </p:cNvPr>
+          <p:cNvSpPr>
+            <a:spLocks xmlns:a="http://schemas.openxmlformats.org/drawingml/2006/main" noGrp="1"/>
+          </p:cNvSpPr>
+          <p:nvPr/>
+        </p:nvSpPr>
+        <p:spPr>
+          <a:xfrm xmlns:a="http://schemas.openxmlformats.org/drawingml/2006/main">
+            <a:off x="7524750" y="800100"/>
+            <a:ext cx="3943350" cy="419100"/>
+          </a:xfrm>
+          <a:prstGeom xmlns:a="http://schemas.openxmlformats.org/drawingml/2006/main" prst="roundRect">
+            <a:avLst>
+              <a:gd name="adj" fmla="val 18182"/>
+            </a:avLst>
+          </a:prstGeom>
+          <a:solidFill xmlns:a="http://schemas.openxmlformats.org/drawingml/2006/main">
+            <a:srgbClr val="F8E9EA"/>
+          </a:solidFill>
+          <a:ln xmlns:a="http://schemas.openxmlformats.org/drawingml/2006/main" w="0">
+            <a:noFill/>
+            <a:prstDash val="solid"/>
+          </a:ln>
+        </p:spPr>
+        <p:txBody>
+          <a:bodyPr xmlns:a="http://schemas.openxmlformats.org/drawingml/2006/main" lIns="76200" tIns="38100" rIns="76200" bIns="38100" anchor="ctr"/>
+          <a:lstStyle xmlns:a="http://schemas.openxmlformats.org/drawingml/2006/main"/>
+          <a:p xmlns:a="http://schemas.openxmlformats.org/drawingml/2006/main">
+            <a:pPr algn="ctr">
+              <a:defRPr sz="1800" b="1">
+                <a:solidFill>
+                  <a:srgbClr val="C8161E"/>
+                </a:solidFill>
+              </a:defRPr>
+            </a:pPr>
+            <a:r>
+              <a:rPr sz="1800" b="1">
+                <a:solidFill>
+                  <a:srgbClr val="C8161E"/>
+                </a:solidFill>
+                <a:latin typeface="Microsoft YaHei"/>
+                <a:ea typeface="Microsoft YaHei"/>
+                <a:cs typeface="Microsoft YaHei"/>
+              </a:rPr>
+              <a:t>虚构教学示例｜非真实实验</a:t>
             </a:r>
           </a:p>
         </p:txBody>
